--- a/bloque3_setup/csbc26_b3_setup.pptx
+++ b/bloque3_setup/csbc26_b3_setup.pptx
@@ -6,16 +6,16 @@
   </p:sldMasterIdLst>
   <p:sldIdLst>
     <p:sldId id="256" r:id="rId7"/>
-    <p:sldId id="257" r:id="rId8"/>
-    <p:sldId id="258" r:id="rId9"/>
-    <p:sldId id="259" r:id="rId10"/>
-    <p:sldId id="260" r:id="rId11"/>
-    <p:sldId id="261" r:id="rId12"/>
-    <p:sldId id="262" r:id="rId13"/>
-    <p:sldId id="263" r:id="rId14"/>
-    <p:sldId id="264" r:id="rId15"/>
-    <p:sldId id="265" r:id="rId16"/>
-    <p:sldId id="266" r:id="rId17"/>
+    <p:sldId id="257" r:id="rId9"/>
+    <p:sldId id="258" r:id="rId10"/>
+    <p:sldId id="259" r:id="rId11"/>
+    <p:sldId id="260" r:id="rId12"/>
+    <p:sldId id="261" r:id="rId13"/>
+    <p:sldId id="262" r:id="rId14"/>
+    <p:sldId id="263" r:id="rId15"/>
+    <p:sldId id="264" r:id="rId16"/>
+    <p:sldId id="265" r:id="rId17"/>
+    <p:sldId id="266" r:id="rId18"/>
   </p:sldIdLst>
   <p:sldSz cx="12188952" cy="6858000" type="screen4x3"/>
   <p:notesSz cx="6858000" cy="9144000"/>
@@ -115,6 +115,1126 @@
     </a:lvl9pPr>
   </p:defaultTextStyle>
 </p:presentation>
+</file>
+
+<file path=ppt/notesMasters/notesMaster1.xml><?xml version="1.0" encoding="utf-8"?>
+<p:notesMaster xmlns:a="http://schemas.openxmlformats.org/drawingml/2006/main" xmlns:p="http://schemas.openxmlformats.org/presentationml/2006/main" xmlns:r="http://schemas.openxmlformats.org/officeDocument/2006/relationships">
+  <p:cSld>
+    <p:bg>
+      <p:bgRef idx="1001">
+        <a:schemeClr val="bg1"/>
+      </p:bgRef>
+    </p:bg>
+    <p:spTree>
+      <p:nvGrpSpPr>
+        <p:cNvPr id="1" name=""/>
+        <p:cNvGrpSpPr/>
+        <p:nvPr/>
+      </p:nvGrpSpPr>
+      <p:grpSpPr>
+        <a:xfrm>
+          <a:off x="0" y="0"/>
+          <a:ext cx="0" cy="0"/>
+          <a:chOff x="0" y="0"/>
+          <a:chExt cx="0" cy="0"/>
+        </a:xfrm>
+      </p:grpSpPr>
+      <p:sp>
+        <p:nvSpPr>
+          <p:cNvPr id="2" name="Header Placeholder 1"/>
+          <p:cNvSpPr>
+            <a:spLocks noGrp="1"/>
+          </p:cNvSpPr>
+          <p:nvPr>
+            <p:ph type="hdr" sz="quarter"/>
+          </p:nvPr>
+        </p:nvSpPr>
+        <p:spPr>
+          <a:xfrm>
+            <a:off x="0" y="0"/>
+            <a:ext cx="2971800" cy="457200"/>
+          </a:xfrm>
+          <a:prstGeom prst="rect">
+            <a:avLst/>
+          </a:prstGeom>
+        </p:spPr>
+        <p:txBody>
+          <a:bodyPr vert="horz" lIns="91440" tIns="45720" rIns="91440" bIns="45720" rtlCol="0"/>
+          <a:lstStyle>
+            <a:lvl1pPr algn="l">
+              <a:defRPr sz="1200"/>
+            </a:lvl1pPr>
+          </a:lstStyle>
+          <a:p>
+            <a:endParaRPr lang="en-US"/>
+          </a:p>
+        </p:txBody>
+      </p:sp>
+      <p:sp>
+        <p:nvSpPr>
+          <p:cNvPr id="3" name="Date Placeholder 2"/>
+          <p:cNvSpPr>
+            <a:spLocks noGrp="1"/>
+          </p:cNvSpPr>
+          <p:nvPr>
+            <p:ph type="dt" idx="1"/>
+          </p:nvPr>
+        </p:nvSpPr>
+        <p:spPr>
+          <a:xfrm>
+            <a:off x="3884613" y="0"/>
+            <a:ext cx="2971800" cy="457200"/>
+          </a:xfrm>
+          <a:prstGeom prst="rect">
+            <a:avLst/>
+          </a:prstGeom>
+        </p:spPr>
+        <p:txBody>
+          <a:bodyPr vert="horz" lIns="91440" tIns="45720" rIns="91440" bIns="45720" rtlCol="0"/>
+          <a:lstStyle>
+            <a:lvl1pPr algn="r">
+              <a:defRPr sz="1200"/>
+            </a:lvl1pPr>
+          </a:lstStyle>
+          <a:p>
+            <a:fld id="{0F89C1C7-3DCD-1040-A9CF-14679D8B5DDD}" type="datetimeFigureOut">
+              <a:rPr lang="en-US" smtClean="0"/>
+              <a:t>10/17/16</a:t>
+            </a:fld>
+            <a:endParaRPr lang="en-US"/>
+          </a:p>
+        </p:txBody>
+      </p:sp>
+      <p:sp>
+        <p:nvSpPr>
+          <p:cNvPr id="4" name="Slide Image Placeholder 3"/>
+          <p:cNvSpPr>
+            <a:spLocks noGrp="1" noRot="1" noChangeAspect="1"/>
+          </p:cNvSpPr>
+          <p:nvPr>
+            <p:ph type="sldImg" idx="2"/>
+          </p:nvPr>
+        </p:nvSpPr>
+        <p:spPr>
+          <a:xfrm>
+            <a:off x="1143000" y="685800"/>
+            <a:ext cx="4572000" cy="3429000"/>
+          </a:xfrm>
+          <a:prstGeom prst="rect">
+            <a:avLst/>
+          </a:prstGeom>
+          <a:noFill/>
+          <a:ln w="12700">
+            <a:solidFill>
+              <a:prstClr val="black"/>
+            </a:solidFill>
+          </a:ln>
+        </p:spPr>
+        <p:txBody>
+          <a:bodyPr vert="horz" lIns="91440" tIns="45720" rIns="91440" bIns="45720" rtlCol="0" anchor="ctr"/>
+          <a:lstStyle/>
+          <a:p>
+            <a:endParaRPr lang="en-US"/>
+          </a:p>
+        </p:txBody>
+      </p:sp>
+      <p:sp>
+        <p:nvSpPr>
+          <p:cNvPr id="5" name="Notes Placeholder 4"/>
+          <p:cNvSpPr>
+            <a:spLocks noGrp="1"/>
+          </p:cNvSpPr>
+          <p:nvPr>
+            <p:ph type="body" sz="quarter" idx="3"/>
+          </p:nvPr>
+        </p:nvSpPr>
+        <p:spPr>
+          <a:xfrm>
+            <a:off x="685800" y="4343400"/>
+            <a:ext cx="5486400" cy="4114800"/>
+          </a:xfrm>
+          <a:prstGeom prst="rect">
+            <a:avLst/>
+          </a:prstGeom>
+        </p:spPr>
+        <p:txBody>
+          <a:bodyPr vert="horz" lIns="91440" tIns="45720" rIns="91440" bIns="45720" rtlCol="0"/>
+          <a:lstStyle/>
+          <a:p>
+            <a:pPr lvl="0"/>
+            <a:r>
+              <a:rPr lang="en-US" smtClean="0"/>
+              <a:t>Click to edit Master text styles</a:t>
+            </a:r>
+          </a:p>
+          <a:p>
+            <a:pPr lvl="1"/>
+            <a:r>
+              <a:rPr lang="en-US" smtClean="0"/>
+              <a:t>Second level</a:t>
+            </a:r>
+          </a:p>
+          <a:p>
+            <a:pPr lvl="2"/>
+            <a:r>
+              <a:rPr lang="en-US" smtClean="0"/>
+              <a:t>Third level</a:t>
+            </a:r>
+          </a:p>
+          <a:p>
+            <a:pPr lvl="3"/>
+            <a:r>
+              <a:rPr lang="en-US" smtClean="0"/>
+              <a:t>Fourth level</a:t>
+            </a:r>
+          </a:p>
+          <a:p>
+            <a:pPr lvl="4"/>
+            <a:r>
+              <a:rPr lang="en-US" smtClean="0"/>
+              <a:t>Fifth level</a:t>
+            </a:r>
+            <a:endParaRPr lang="en-US"/>
+          </a:p>
+        </p:txBody>
+      </p:sp>
+      <p:sp>
+        <p:nvSpPr>
+          <p:cNvPr id="6" name="Footer Placeholder 5"/>
+          <p:cNvSpPr>
+            <a:spLocks noGrp="1"/>
+          </p:cNvSpPr>
+          <p:nvPr>
+            <p:ph type="ftr" sz="quarter" idx="4"/>
+          </p:nvPr>
+        </p:nvSpPr>
+        <p:spPr>
+          <a:xfrm>
+            <a:off x="0" y="8685213"/>
+            <a:ext cx="2971800" cy="457200"/>
+          </a:xfrm>
+          <a:prstGeom prst="rect">
+            <a:avLst/>
+          </a:prstGeom>
+        </p:spPr>
+        <p:txBody>
+          <a:bodyPr vert="horz" lIns="91440" tIns="45720" rIns="91440" bIns="45720" rtlCol="0" anchor="b"/>
+          <a:lstStyle>
+            <a:lvl1pPr algn="l">
+              <a:defRPr sz="1200"/>
+            </a:lvl1pPr>
+          </a:lstStyle>
+          <a:p>
+            <a:endParaRPr lang="en-US"/>
+          </a:p>
+        </p:txBody>
+      </p:sp>
+      <p:sp>
+        <p:nvSpPr>
+          <p:cNvPr id="7" name="Slide Number Placeholder 6"/>
+          <p:cNvSpPr>
+            <a:spLocks noGrp="1"/>
+          </p:cNvSpPr>
+          <p:nvPr>
+            <p:ph type="sldNum" sz="quarter" idx="5"/>
+          </p:nvPr>
+        </p:nvSpPr>
+        <p:spPr>
+          <a:xfrm>
+            <a:off x="3884613" y="8685213"/>
+            <a:ext cx="2971800" cy="457200"/>
+          </a:xfrm>
+          <a:prstGeom prst="rect">
+            <a:avLst/>
+          </a:prstGeom>
+        </p:spPr>
+        <p:txBody>
+          <a:bodyPr vert="horz" lIns="91440" tIns="45720" rIns="91440" bIns="45720" rtlCol="0" anchor="b"/>
+          <a:lstStyle>
+            <a:lvl1pPr algn="r">
+              <a:defRPr sz="1200"/>
+            </a:lvl1pPr>
+          </a:lstStyle>
+          <a:p>
+            <a:fld id="{BB5E49A5-4136-284D-997B-48E1D791AD67}" type="slidenum">
+              <a:rPr lang="en-US" smtClean="0"/>
+              <a:t>‹#›</a:t>
+            </a:fld>
+            <a:endParaRPr lang="en-US"/>
+          </a:p>
+        </p:txBody>
+      </p:sp>
+    </p:spTree>
+    <p:extLst>
+      <p:ext uri="{BB962C8B-B14F-4D97-AF65-F5344CB8AC3E}">
+        <p14:creationId xmlns:p14="http://schemas.microsoft.com/office/powerpoint/2010/main" val="2623252185"/>
+      </p:ext>
+    </p:extLst>
+  </p:cSld>
+  <p:clrMap bg1="lt1" tx1="dk1" bg2="lt2" tx2="dk2" accent1="accent1" accent2="accent2" accent3="accent3" accent4="accent4" accent5="accent5" accent6="accent6" hlink="hlink" folHlink="folHlink"/>
+  <p:notesStyle>
+    <a:lvl1pPr marL="0" algn="l" defTabSz="457200" rtl="0" eaLnBrk="1" latinLnBrk="0" hangingPunct="1">
+      <a:defRPr sz="1200" kern="1200">
+        <a:solidFill>
+          <a:schemeClr val="tx1"/>
+        </a:solidFill>
+        <a:latin typeface="+mn-lt"/>
+        <a:ea typeface="+mn-ea"/>
+        <a:cs typeface="+mn-cs"/>
+      </a:defRPr>
+    </a:lvl1pPr>
+    <a:lvl2pPr marL="457200" algn="l" defTabSz="457200" rtl="0" eaLnBrk="1" latinLnBrk="0" hangingPunct="1">
+      <a:defRPr sz="1200" kern="1200">
+        <a:solidFill>
+          <a:schemeClr val="tx1"/>
+        </a:solidFill>
+        <a:latin typeface="+mn-lt"/>
+        <a:ea typeface="+mn-ea"/>
+        <a:cs typeface="+mn-cs"/>
+      </a:defRPr>
+    </a:lvl2pPr>
+    <a:lvl3pPr marL="914400" algn="l" defTabSz="457200" rtl="0" eaLnBrk="1" latinLnBrk="0" hangingPunct="1">
+      <a:defRPr sz="1200" kern="1200">
+        <a:solidFill>
+          <a:schemeClr val="tx1"/>
+        </a:solidFill>
+        <a:latin typeface="+mn-lt"/>
+        <a:ea typeface="+mn-ea"/>
+        <a:cs typeface="+mn-cs"/>
+      </a:defRPr>
+    </a:lvl3pPr>
+    <a:lvl4pPr marL="1371600" algn="l" defTabSz="457200" rtl="0" eaLnBrk="1" latinLnBrk="0" hangingPunct="1">
+      <a:defRPr sz="1200" kern="1200">
+        <a:solidFill>
+          <a:schemeClr val="tx1"/>
+        </a:solidFill>
+        <a:latin typeface="+mn-lt"/>
+        <a:ea typeface="+mn-ea"/>
+        <a:cs typeface="+mn-cs"/>
+      </a:defRPr>
+    </a:lvl4pPr>
+    <a:lvl5pPr marL="1828800" algn="l" defTabSz="457200" rtl="0" eaLnBrk="1" latinLnBrk="0" hangingPunct="1">
+      <a:defRPr sz="1200" kern="1200">
+        <a:solidFill>
+          <a:schemeClr val="tx1"/>
+        </a:solidFill>
+        <a:latin typeface="+mn-lt"/>
+        <a:ea typeface="+mn-ea"/>
+        <a:cs typeface="+mn-cs"/>
+      </a:defRPr>
+    </a:lvl5pPr>
+    <a:lvl6pPr marL="2286000" algn="l" defTabSz="457200" rtl="0" eaLnBrk="1" latinLnBrk="0" hangingPunct="1">
+      <a:defRPr sz="1200" kern="1200">
+        <a:solidFill>
+          <a:schemeClr val="tx1"/>
+        </a:solidFill>
+        <a:latin typeface="+mn-lt"/>
+        <a:ea typeface="+mn-ea"/>
+        <a:cs typeface="+mn-cs"/>
+      </a:defRPr>
+    </a:lvl6pPr>
+    <a:lvl7pPr marL="2743200" algn="l" defTabSz="457200" rtl="0" eaLnBrk="1" latinLnBrk="0" hangingPunct="1">
+      <a:defRPr sz="1200" kern="1200">
+        <a:solidFill>
+          <a:schemeClr val="tx1"/>
+        </a:solidFill>
+        <a:latin typeface="+mn-lt"/>
+        <a:ea typeface="+mn-ea"/>
+        <a:cs typeface="+mn-cs"/>
+      </a:defRPr>
+    </a:lvl7pPr>
+    <a:lvl8pPr marL="3200400" algn="l" defTabSz="457200" rtl="0" eaLnBrk="1" latinLnBrk="0" hangingPunct="1">
+      <a:defRPr sz="1200" kern="1200">
+        <a:solidFill>
+          <a:schemeClr val="tx1"/>
+        </a:solidFill>
+        <a:latin typeface="+mn-lt"/>
+        <a:ea typeface="+mn-ea"/>
+        <a:cs typeface="+mn-cs"/>
+      </a:defRPr>
+    </a:lvl8pPr>
+    <a:lvl9pPr marL="3657600" algn="l" defTabSz="457200" rtl="0" eaLnBrk="1" latinLnBrk="0" hangingPunct="1">
+      <a:defRPr sz="1200" kern="1200">
+        <a:solidFill>
+          <a:schemeClr val="tx1"/>
+        </a:solidFill>
+        <a:latin typeface="+mn-lt"/>
+        <a:ea typeface="+mn-ea"/>
+        <a:cs typeface="+mn-cs"/>
+      </a:defRPr>
+    </a:lvl9pPr>
+  </p:notesStyle>
+</p:notesMaster>
+</file>
+
+<file path=ppt/notesSlides/notesSlide1.xml><?xml version="1.0" encoding="utf-8"?>
+<p:notes xmlns:a="http://schemas.openxmlformats.org/drawingml/2006/main" xmlns:p="http://schemas.openxmlformats.org/presentationml/2006/main" xmlns:r="http://schemas.openxmlformats.org/officeDocument/2006/relationships">
+  <p:cSld>
+    <p:spTree>
+      <p:nvGrpSpPr>
+        <p:cNvPr id="1" name=""/>
+        <p:cNvGrpSpPr/>
+        <p:nvPr/>
+      </p:nvGrpSpPr>
+      <p:grpSpPr>
+        <a:xfrm>
+          <a:off x="0" y="0"/>
+          <a:ext cx="0" cy="0"/>
+          <a:chOff x="0" y="0"/>
+          <a:chExt cx="0" cy="0"/>
+        </a:xfrm>
+      </p:grpSpPr>
+      <p:sp>
+        <p:nvSpPr>
+          <p:cNvPr id="2" name="Slide Image Placeholder 1"/>
+          <p:cNvSpPr>
+            <a:spLocks noGrp="1"/>
+          </p:cNvSpPr>
+          <p:nvPr>
+            <p:ph type="sldImg" idx="2"/>
+          </p:nvPr>
+        </p:nvSpPr>
+        <p:spPr/>
+      </p:sp>
+      <p:sp>
+        <p:nvSpPr>
+          <p:cNvPr id="3" name="Notes Placeholder 2"/>
+          <p:cNvSpPr>
+            <a:spLocks noGrp="1"/>
+          </p:cNvSpPr>
+          <p:nvPr>
+            <p:ph type="body" idx="3" sz="quarter"/>
+          </p:nvPr>
+        </p:nvSpPr>
+        <p:spPr/>
+        <p:txBody>
+          <a:bodyPr/>
+          <a:lstStyle/>
+          <a:p>
+            <a:r>
+              <a:t>Bienvenidos al bloque de setup. En los próximos 45 minutos vamos a montar el entorno completo de análisis forense delante de vuestros ojos, sin atajos ni pasos ocultos. La pregunta que quiero que os hagáis es: ¿cuánto tardaríais vosotros solos en replicar este laboratorio desde cero? Con uv, Ollama y Jupyter, la respuesta es diez minutos, y os lo voy a demostrar en vivo. Empecemos por el entorno.</a:t>
+            </a:r>
+          </a:p>
+        </p:txBody>
+      </p:sp>
+      <p:sp>
+        <p:nvSpPr>
+          <p:cNvPr id="4" name="Slide Number Placeholder 3"/>
+          <p:cNvSpPr>
+            <a:spLocks noGrp="1"/>
+          </p:cNvSpPr>
+          <p:nvPr>
+            <p:ph type="sldNum" idx="5" sz="quarter"/>
+          </p:nvPr>
+        </p:nvSpPr>
+        <p:spPr/>
+      </p:sp>
+    </p:spTree>
+  </p:cSld>
+  <p:clrMapOvr>
+    <a:masterClrMapping/>
+  </p:clrMapOvr>
+</p:notes>
+</file>
+
+<file path=ppt/notesSlides/notesSlide10.xml><?xml version="1.0" encoding="utf-8"?>
+<p:notes xmlns:a="http://schemas.openxmlformats.org/drawingml/2006/main" xmlns:p="http://schemas.openxmlformats.org/presentationml/2006/main" xmlns:r="http://schemas.openxmlformats.org/officeDocument/2006/relationships">
+  <p:cSld>
+    <p:spTree>
+      <p:nvGrpSpPr>
+        <p:cNvPr id="1" name=""/>
+        <p:cNvGrpSpPr/>
+        <p:nvPr/>
+      </p:nvGrpSpPr>
+      <p:grpSpPr>
+        <a:xfrm>
+          <a:off x="0" y="0"/>
+          <a:ext cx="0" cy="0"/>
+          <a:chOff x="0" y="0"/>
+          <a:chExt cx="0" cy="0"/>
+        </a:xfrm>
+      </p:grpSpPr>
+      <p:sp>
+        <p:nvSpPr>
+          <p:cNvPr id="2" name="Slide Image Placeholder 1"/>
+          <p:cNvSpPr>
+            <a:spLocks noGrp="1"/>
+          </p:cNvSpPr>
+          <p:nvPr>
+            <p:ph type="sldImg" idx="2"/>
+          </p:nvPr>
+        </p:nvSpPr>
+        <p:spPr/>
+      </p:sp>
+      <p:sp>
+        <p:nvSpPr>
+          <p:cNvPr id="3" name="Notes Placeholder 2"/>
+          <p:cNvSpPr>
+            <a:spLocks noGrp="1"/>
+          </p:cNvSpPr>
+          <p:nvPr>
+            <p:ph type="body" idx="3" sz="quarter"/>
+          </p:nvPr>
+        </p:nvSpPr>
+        <p:spPr/>
+        <p:txBody>
+          <a:bodyPr/>
+          <a:lstStyle/>
+          <a:p>
+            <a:r>
+              <a:t>Ahora sí, manos a la obra. Vamos a abrir el notebook 00_reconocimiento y recorrer las cinco secciones en directo: carga con auto-detección, distribución de usuarios y posts donde vais a ver la power-law que es casi una firma de estos foros, el grafo de co-participación para detectar brokers, los embeddings sobre la muestra de 100 usuarios ejecutándose de verdad ante vosotros, y por último UMAP con clustering interactivo en Plotly. Si algo falla en vivo, lo comentamos y seguimos — esto es un laboratorio, no un vídeo editado.</a:t>
+            </a:r>
+          </a:p>
+        </p:txBody>
+      </p:sp>
+      <p:sp>
+        <p:nvSpPr>
+          <p:cNvPr id="4" name="Slide Number Placeholder 3"/>
+          <p:cNvSpPr>
+            <a:spLocks noGrp="1"/>
+          </p:cNvSpPr>
+          <p:nvPr>
+            <p:ph type="sldNum" idx="5" sz="quarter"/>
+          </p:nvPr>
+        </p:nvSpPr>
+        <p:spPr/>
+      </p:sp>
+    </p:spTree>
+  </p:cSld>
+  <p:clrMapOvr>
+    <a:masterClrMapping/>
+  </p:clrMapOvr>
+</p:notes>
+</file>
+
+<file path=ppt/notesSlides/notesSlide11.xml><?xml version="1.0" encoding="utf-8"?>
+<p:notes xmlns:a="http://schemas.openxmlformats.org/drawingml/2006/main" xmlns:p="http://schemas.openxmlformats.org/presentationml/2006/main" xmlns:r="http://schemas.openxmlformats.org/officeDocument/2006/relationships">
+  <p:cSld>
+    <p:spTree>
+      <p:nvGrpSpPr>
+        <p:cNvPr id="1" name=""/>
+        <p:cNvGrpSpPr/>
+        <p:nvPr/>
+      </p:nvGrpSpPr>
+      <p:grpSpPr>
+        <a:xfrm>
+          <a:off x="0" y="0"/>
+          <a:ext cx="0" cy="0"/>
+          <a:chOff x="0" y="0"/>
+          <a:chExt cx="0" cy="0"/>
+        </a:xfrm>
+      </p:grpSpPr>
+      <p:sp>
+        <p:nvSpPr>
+          <p:cNvPr id="2" name="Slide Image Placeholder 1"/>
+          <p:cNvSpPr>
+            <a:spLocks noGrp="1"/>
+          </p:cNvSpPr>
+          <p:nvPr>
+            <p:ph type="sldImg" idx="2"/>
+          </p:nvPr>
+        </p:nvSpPr>
+        <p:spPr/>
+      </p:sp>
+      <p:sp>
+        <p:nvSpPr>
+          <p:cNvPr id="3" name="Notes Placeholder 2"/>
+          <p:cNvSpPr>
+            <a:spLocks noGrp="1"/>
+          </p:cNvSpPr>
+          <p:nvPr>
+            <p:ph type="body" idx="3" sz="quarter"/>
+          </p:nvPr>
+        </p:nvSpPr>
+        <p:spPr/>
+        <p:txBody>
+          <a:bodyPr/>
+          <a:lstStyle/>
+          <a:p>
+            <a:r>
+              <a:t>Cerramos con las preguntas que seguro os están rondando la cabeza, y las respondo sin vender humo. No usamos APIs de embeddings en la nube porque estamos tratando datos de personas reales, y eso no es negociable, por comodidad que dé. Sin GPU podéis trabajar, pero con muestras pequeñas como la de hoy. Y sí, técnicamente podríais correr esto en Colab, pero no con los datos reales del curso — esos se comparten por un canal separado, nunca van en el repositorio.</a:t>
+            </a:r>
+          </a:p>
+        </p:txBody>
+      </p:sp>
+      <p:sp>
+        <p:nvSpPr>
+          <p:cNvPr id="4" name="Slide Number Placeholder 3"/>
+          <p:cNvSpPr>
+            <a:spLocks noGrp="1"/>
+          </p:cNvSpPr>
+          <p:nvPr>
+            <p:ph type="sldNum" idx="5" sz="quarter"/>
+          </p:nvPr>
+        </p:nvSpPr>
+        <p:spPr/>
+      </p:sp>
+    </p:spTree>
+  </p:cSld>
+  <p:clrMapOvr>
+    <a:masterClrMapping/>
+  </p:clrMapOvr>
+</p:notes>
+</file>
+
+<file path=ppt/notesSlides/notesSlide2.xml><?xml version="1.0" encoding="utf-8"?>
+<p:notes xmlns:a="http://schemas.openxmlformats.org/drawingml/2006/main" xmlns:p="http://schemas.openxmlformats.org/presentationml/2006/main" xmlns:r="http://schemas.openxmlformats.org/officeDocument/2006/relationships">
+  <p:cSld>
+    <p:spTree>
+      <p:nvGrpSpPr>
+        <p:cNvPr id="1" name=""/>
+        <p:cNvGrpSpPr/>
+        <p:nvPr/>
+      </p:nvGrpSpPr>
+      <p:grpSpPr>
+        <a:xfrm>
+          <a:off x="0" y="0"/>
+          <a:ext cx="0" cy="0"/>
+          <a:chOff x="0" y="0"/>
+          <a:chExt cx="0" cy="0"/>
+        </a:xfrm>
+      </p:grpSpPr>
+      <p:sp>
+        <p:nvSpPr>
+          <p:cNvPr id="2" name="Slide Image Placeholder 1"/>
+          <p:cNvSpPr>
+            <a:spLocks noGrp="1"/>
+          </p:cNvSpPr>
+          <p:nvPr>
+            <p:ph type="sldImg" idx="2"/>
+          </p:nvPr>
+        </p:nvSpPr>
+        <p:spPr/>
+      </p:sp>
+      <p:sp>
+        <p:nvSpPr>
+          <p:cNvPr id="3" name="Notes Placeholder 2"/>
+          <p:cNvSpPr>
+            <a:spLocks noGrp="1"/>
+          </p:cNvSpPr>
+          <p:nvPr>
+            <p:ph type="body" idx="3" sz="quarter"/>
+          </p:nvPr>
+        </p:nvSpPr>
+        <p:spPr/>
+        <p:txBody>
+          <a:bodyPr/>
+          <a:lstStyle/>
+          <a:p>
+            <a:r>
+              <a:t>Primera sección: vamos a ver las piezas del entorno una por una, sin cajas negras. Nada de contenedores ni configuraciones ocultas — todo lo que uséis vosotros lo podéis inspeccionar y entender.</a:t>
+            </a:r>
+          </a:p>
+        </p:txBody>
+      </p:sp>
+      <p:sp>
+        <p:nvSpPr>
+          <p:cNvPr id="4" name="Slide Number Placeholder 3"/>
+          <p:cNvSpPr>
+            <a:spLocks noGrp="1"/>
+          </p:cNvSpPr>
+          <p:nvPr>
+            <p:ph type="sldNum" idx="5" sz="quarter"/>
+          </p:nvPr>
+        </p:nvSpPr>
+        <p:spPr/>
+      </p:sp>
+    </p:spTree>
+  </p:cSld>
+  <p:clrMapOvr>
+    <a:masterClrMapping/>
+  </p:clrMapOvr>
+</p:notes>
+</file>
+
+<file path=ppt/notesSlides/notesSlide3.xml><?xml version="1.0" encoding="utf-8"?>
+<p:notes xmlns:a="http://schemas.openxmlformats.org/drawingml/2006/main" xmlns:p="http://schemas.openxmlformats.org/presentationml/2006/main" xmlns:r="http://schemas.openxmlformats.org/officeDocument/2006/relationships">
+  <p:cSld>
+    <p:spTree>
+      <p:nvGrpSpPr>
+        <p:cNvPr id="1" name=""/>
+        <p:cNvGrpSpPr/>
+        <p:nvPr/>
+      </p:nvGrpSpPr>
+      <p:grpSpPr>
+        <a:xfrm>
+          <a:off x="0" y="0"/>
+          <a:ext cx="0" cy="0"/>
+          <a:chOff x="0" y="0"/>
+          <a:chExt cx="0" cy="0"/>
+        </a:xfrm>
+      </p:grpSpPr>
+      <p:sp>
+        <p:nvSpPr>
+          <p:cNvPr id="2" name="Slide Image Placeholder 1"/>
+          <p:cNvSpPr>
+            <a:spLocks noGrp="1"/>
+          </p:cNvSpPr>
+          <p:nvPr>
+            <p:ph type="sldImg" idx="2"/>
+          </p:nvPr>
+        </p:nvSpPr>
+        <p:spPr/>
+      </p:sp>
+      <p:sp>
+        <p:nvSpPr>
+          <p:cNvPr id="3" name="Notes Placeholder 2"/>
+          <p:cNvSpPr>
+            <a:spLocks noGrp="1"/>
+          </p:cNvSpPr>
+          <p:nvPr>
+            <p:ph type="body" idx="3" sz="quarter"/>
+          </p:nvPr>
+        </p:nvSpPr>
+        <p:spPr/>
+        <p:txBody>
+          <a:bodyPr/>
+          <a:lstStyle/>
+          <a:p>
+            <a:r>
+              <a:t>Muchos venís de pip y venv, y sabéis lo frágil que puede ser mezclar entornos. uv resuelve eso reemplazando tres herramientas por una sola, y lo hace rápido de verdad — no es marketing, es Rust por debajo. Quedaos con la idea de uv sync: un comando, todas las dependencias resueltas del pyproject.toml, sin activar nada a mano. Esto es lo que nos permite que cualquiera de vosotros tenga el mismo entorno que yo en su portátil.</a:t>
+            </a:r>
+          </a:p>
+        </p:txBody>
+      </p:sp>
+      <p:sp>
+        <p:nvSpPr>
+          <p:cNvPr id="4" name="Slide Number Placeholder 3"/>
+          <p:cNvSpPr>
+            <a:spLocks noGrp="1"/>
+          </p:cNvSpPr>
+          <p:nvPr>
+            <p:ph type="sldNum" idx="5" sz="quarter"/>
+          </p:nvPr>
+        </p:nvSpPr>
+        <p:spPr/>
+      </p:sp>
+    </p:spTree>
+  </p:cSld>
+  <p:clrMapOvr>
+    <a:masterClrMapping/>
+  </p:clrMapOvr>
+</p:notes>
+</file>
+
+<file path=ppt/notesSlides/notesSlide4.xml><?xml version="1.0" encoding="utf-8"?>
+<p:notes xmlns:a="http://schemas.openxmlformats.org/drawingml/2006/main" xmlns:p="http://schemas.openxmlformats.org/presentationml/2006/main" xmlns:r="http://schemas.openxmlformats.org/officeDocument/2006/relationships">
+  <p:cSld>
+    <p:spTree>
+      <p:nvGrpSpPr>
+        <p:cNvPr id="1" name=""/>
+        <p:cNvGrpSpPr/>
+        <p:nvPr/>
+      </p:nvGrpSpPr>
+      <p:grpSpPr>
+        <a:xfrm>
+          <a:off x="0" y="0"/>
+          <a:ext cx="0" cy="0"/>
+          <a:chOff x="0" y="0"/>
+          <a:chExt cx="0" cy="0"/>
+        </a:xfrm>
+      </p:grpSpPr>
+      <p:sp>
+        <p:nvSpPr>
+          <p:cNvPr id="2" name="Slide Image Placeholder 1"/>
+          <p:cNvSpPr>
+            <a:spLocks noGrp="1"/>
+          </p:cNvSpPr>
+          <p:nvPr>
+            <p:ph type="sldImg" idx="2"/>
+          </p:nvPr>
+        </p:nvSpPr>
+        <p:spPr/>
+      </p:sp>
+      <p:sp>
+        <p:nvSpPr>
+          <p:cNvPr id="3" name="Notes Placeholder 2"/>
+          <p:cNvSpPr>
+            <a:spLocks noGrp="1"/>
+          </p:cNvSpPr>
+          <p:nvPr>
+            <p:ph type="body" idx="3" sz="quarter"/>
+          </p:nvPr>
+        </p:nvSpPr>
+        <p:spPr/>
+        <p:txBody>
+          <a:bodyPr/>
+          <a:lstStyle/>
+          <a:p>
+            <a:r>
+              <a:t>Estos son los cuatro comandos, literalmente los únicos que necesitáis. Clonar, uv sync, descargar los modelos de Ollama y arrancar Jupyter. El paso que más tiempo consume no es la instalación de Python, es la descarga de los modelos — casi 9GB entre los dos. Por eso insisto: si vais a replicar esto en casa, descargad los modelos la noche anterior, no el día de la demo con la wifi del evento.</a:t>
+            </a:r>
+          </a:p>
+        </p:txBody>
+      </p:sp>
+      <p:sp>
+        <p:nvSpPr>
+          <p:cNvPr id="4" name="Slide Number Placeholder 3"/>
+          <p:cNvSpPr>
+            <a:spLocks noGrp="1"/>
+          </p:cNvSpPr>
+          <p:nvPr>
+            <p:ph type="sldNum" idx="5" sz="quarter"/>
+          </p:nvPr>
+        </p:nvSpPr>
+        <p:spPr/>
+      </p:sp>
+    </p:spTree>
+  </p:cSld>
+  <p:clrMapOvr>
+    <a:masterClrMapping/>
+  </p:clrMapOvr>
+</p:notes>
+</file>
+
+<file path=ppt/notesSlides/notesSlide5.xml><?xml version="1.0" encoding="utf-8"?>
+<p:notes xmlns:a="http://schemas.openxmlformats.org/drawingml/2006/main" xmlns:p="http://schemas.openxmlformats.org/presentationml/2006/main" xmlns:r="http://schemas.openxmlformats.org/officeDocument/2006/relationships">
+  <p:cSld>
+    <p:spTree>
+      <p:nvGrpSpPr>
+        <p:cNvPr id="1" name=""/>
+        <p:cNvGrpSpPr/>
+        <p:nvPr/>
+      </p:nvGrpSpPr>
+      <p:grpSpPr>
+        <a:xfrm>
+          <a:off x="0" y="0"/>
+          <a:ext cx="0" cy="0"/>
+          <a:chOff x="0" y="0"/>
+          <a:chExt cx="0" cy="0"/>
+        </a:xfrm>
+      </p:grpSpPr>
+      <p:sp>
+        <p:nvSpPr>
+          <p:cNvPr id="2" name="Slide Image Placeholder 1"/>
+          <p:cNvSpPr>
+            <a:spLocks noGrp="1"/>
+          </p:cNvSpPr>
+          <p:nvPr>
+            <p:ph type="sldImg" idx="2"/>
+          </p:nvPr>
+        </p:nvSpPr>
+        <p:spPr/>
+      </p:sp>
+      <p:sp>
+        <p:nvSpPr>
+          <p:cNvPr id="3" name="Notes Placeholder 2"/>
+          <p:cNvSpPr>
+            <a:spLocks noGrp="1"/>
+          </p:cNvSpPr>
+          <p:nvPr>
+            <p:ph type="body" idx="3" sz="quarter"/>
+          </p:nvPr>
+        </p:nvSpPr>
+        <p:spPr/>
+        <p:txBody>
+          <a:bodyPr/>
+          <a:lstStyle/>
+          <a:p>
+            <a:r>
+              <a:t>Aquí quiero tranquilizar a los que pensáis que necesitáis una máquina de gama alta para hacer forense de leaks. Con 8GB de RAM y cualquier CPU moderna ya podéis hacer todo el análisis con pandas y networkx. La columna de la derecha es solo si queréis meter embeddings y el LLM local — ahí sí conviene más RAM, pero incluso sin GPU funciona, solo que más lento. La demo de hoy la vamos a hacer con una muestra pequeña precisamente para que se vea fluida en cualquier portátil de esta sala.</a:t>
+            </a:r>
+          </a:p>
+        </p:txBody>
+      </p:sp>
+      <p:sp>
+        <p:nvSpPr>
+          <p:cNvPr id="4" name="Slide Number Placeholder 3"/>
+          <p:cNvSpPr>
+            <a:spLocks noGrp="1"/>
+          </p:cNvSpPr>
+          <p:nvPr>
+            <p:ph type="sldNum" idx="5" sz="quarter"/>
+          </p:nvPr>
+        </p:nvSpPr>
+        <p:spPr/>
+      </p:sp>
+    </p:spTree>
+  </p:cSld>
+  <p:clrMapOvr>
+    <a:masterClrMapping/>
+  </p:clrMapOvr>
+</p:notes>
+</file>
+
+<file path=ppt/notesSlides/notesSlide6.xml><?xml version="1.0" encoding="utf-8"?>
+<p:notes xmlns:a="http://schemas.openxmlformats.org/drawingml/2006/main" xmlns:p="http://schemas.openxmlformats.org/presentationml/2006/main" xmlns:r="http://schemas.openxmlformats.org/officeDocument/2006/relationships">
+  <p:cSld>
+    <p:spTree>
+      <p:nvGrpSpPr>
+        <p:cNvPr id="1" name=""/>
+        <p:cNvGrpSpPr/>
+        <p:nvPr/>
+      </p:nvGrpSpPr>
+      <p:grpSpPr>
+        <a:xfrm>
+          <a:off x="0" y="0"/>
+          <a:ext cx="0" cy="0"/>
+          <a:chOff x="0" y="0"/>
+          <a:chExt cx="0" cy="0"/>
+        </a:xfrm>
+      </p:grpSpPr>
+      <p:sp>
+        <p:nvSpPr>
+          <p:cNvPr id="2" name="Slide Image Placeholder 1"/>
+          <p:cNvSpPr>
+            <a:spLocks noGrp="1"/>
+          </p:cNvSpPr>
+          <p:nvPr>
+            <p:ph type="sldImg" idx="2"/>
+          </p:nvPr>
+        </p:nvSpPr>
+        <p:spPr/>
+      </p:sp>
+      <p:sp>
+        <p:nvSpPr>
+          <p:cNvPr id="3" name="Notes Placeholder 2"/>
+          <p:cNvSpPr>
+            <a:spLocks noGrp="1"/>
+          </p:cNvSpPr>
+          <p:nvPr>
+            <p:ph type="body" idx="3" sz="quarter"/>
+          </p:nvPr>
+        </p:nvSpPr>
+        <p:spPr/>
+        <p:txBody>
+          <a:bodyPr/>
+          <a:lstStyle/>
+          <a:p>
+            <a:r>
+              <a:t>Voy a ser honesto con vosotros sobre cómo funciona esta demo: los embeddings del dataset completo ya están calculados, porque generarlos en vivo llevaría horas y esto no es un vídeo de YouTube donde se corta la espera con magia de edición. Lo que sí vais a ver ejecutarse en vivo, delante vuestro, es el mismo código sobre una muestra de 100 usuarios. La idea no es impresionar con velocidad, es que veáis que el pipeline es real y que lo podéis reproducir vosotros mismos después.</a:t>
+            </a:r>
+          </a:p>
+        </p:txBody>
+      </p:sp>
+      <p:sp>
+        <p:nvSpPr>
+          <p:cNvPr id="4" name="Slide Number Placeholder 3"/>
+          <p:cNvSpPr>
+            <a:spLocks noGrp="1"/>
+          </p:cNvSpPr>
+          <p:nvPr>
+            <p:ph type="sldNum" idx="5" sz="quarter"/>
+          </p:nvPr>
+        </p:nvSpPr>
+        <p:spPr/>
+      </p:sp>
+    </p:spTree>
+  </p:cSld>
+  <p:clrMapOvr>
+    <a:masterClrMapping/>
+  </p:clrMapOvr>
+</p:notes>
+</file>
+
+<file path=ppt/notesSlides/notesSlide7.xml><?xml version="1.0" encoding="utf-8"?>
+<p:notes xmlns:a="http://schemas.openxmlformats.org/drawingml/2006/main" xmlns:p="http://schemas.openxmlformats.org/presentationml/2006/main" xmlns:r="http://schemas.openxmlformats.org/officeDocument/2006/relationships">
+  <p:cSld>
+    <p:spTree>
+      <p:nvGrpSpPr>
+        <p:cNvPr id="1" name=""/>
+        <p:cNvGrpSpPr/>
+        <p:nvPr/>
+      </p:nvGrpSpPr>
+      <p:grpSpPr>
+        <a:xfrm>
+          <a:off x="0" y="0"/>
+          <a:ext cx="0" cy="0"/>
+          <a:chOff x="0" y="0"/>
+          <a:chExt cx="0" cy="0"/>
+        </a:xfrm>
+      </p:grpSpPr>
+      <p:sp>
+        <p:nvSpPr>
+          <p:cNvPr id="2" name="Slide Image Placeholder 1"/>
+          <p:cNvSpPr>
+            <a:spLocks noGrp="1"/>
+          </p:cNvSpPr>
+          <p:nvPr>
+            <p:ph type="sldImg" idx="2"/>
+          </p:nvPr>
+        </p:nvSpPr>
+        <p:spPr/>
+      </p:sp>
+      <p:sp>
+        <p:nvSpPr>
+          <p:cNvPr id="3" name="Notes Placeholder 2"/>
+          <p:cNvSpPr>
+            <a:spLocks noGrp="1"/>
+          </p:cNvSpPr>
+          <p:nvPr>
+            <p:ph type="body" idx="3" sz="quarter"/>
+          </p:nvPr>
+        </p:nvSpPr>
+        <p:spPr/>
+        <p:txBody>
+          <a:bodyPr/>
+          <a:lstStyle/>
+          <a:p>
+            <a:r>
+              <a:t>Segunda parte: ya tenemos el entorno montado, ahora vamos a recorrer el pipeline entero, desde el dump SQL en crudo hasta la visualización final, celda por celda, sin saltarnos nada.</a:t>
+            </a:r>
+          </a:p>
+        </p:txBody>
+      </p:sp>
+      <p:sp>
+        <p:nvSpPr>
+          <p:cNvPr id="4" name="Slide Number Placeholder 3"/>
+          <p:cNvSpPr>
+            <a:spLocks noGrp="1"/>
+          </p:cNvSpPr>
+          <p:nvPr>
+            <p:ph type="sldNum" idx="5" sz="quarter"/>
+          </p:nvPr>
+        </p:nvSpPr>
+        <p:spPr/>
+      </p:sp>
+    </p:spTree>
+  </p:cSld>
+  <p:clrMapOvr>
+    <a:masterClrMapping/>
+  </p:clrMapOvr>
+</p:notes>
+</file>
+
+<file path=ppt/notesSlides/notesSlide8.xml><?xml version="1.0" encoding="utf-8"?>
+<p:notes xmlns:a="http://schemas.openxmlformats.org/drawingml/2006/main" xmlns:p="http://schemas.openxmlformats.org/presentationml/2006/main" xmlns:r="http://schemas.openxmlformats.org/officeDocument/2006/relationships">
+  <p:cSld>
+    <p:spTree>
+      <p:nvGrpSpPr>
+        <p:cNvPr id="1" name=""/>
+        <p:cNvGrpSpPr/>
+        <p:nvPr/>
+      </p:nvGrpSpPr>
+      <p:grpSpPr>
+        <a:xfrm>
+          <a:off x="0" y="0"/>
+          <a:ext cx="0" cy="0"/>
+          <a:chOff x="0" y="0"/>
+          <a:chExt cx="0" cy="0"/>
+        </a:xfrm>
+      </p:grpSpPr>
+      <p:sp>
+        <p:nvSpPr>
+          <p:cNvPr id="2" name="Slide Image Placeholder 1"/>
+          <p:cNvSpPr>
+            <a:spLocks noGrp="1"/>
+          </p:cNvSpPr>
+          <p:nvPr>
+            <p:ph type="sldImg" idx="2"/>
+          </p:nvPr>
+        </p:nvSpPr>
+        <p:spPr/>
+      </p:sp>
+      <p:sp>
+        <p:nvSpPr>
+          <p:cNvPr id="3" name="Notes Placeholder 2"/>
+          <p:cNvSpPr>
+            <a:spLocks noGrp="1"/>
+          </p:cNvSpPr>
+          <p:nvPr>
+            <p:ph type="body" idx="3" sz="quarter"/>
+          </p:nvPr>
+        </p:nvSpPr>
+        <p:spPr/>
+        <p:txBody>
+          <a:bodyPr/>
+          <a:lstStyle/>
+          <a:p>
+            <a:r>
+              <a:t>Estas cinco fases son el esqueleto de cualquier análisis forense que hagáis en este curso, no solo de la demo de hoy. Cargar con detección automática de versión y encoding, normalizar fechas y usuarios, analizar estadística y red de interacciones, generar embeddings, y por último visualizar. Fijaos que todo pasa en el mismo notebook — no saltamos entre herramientas ni exportamos a otro entorno. Ese es el punto: un solo lugar donde se ve todo el razonamiento.</a:t>
+            </a:r>
+          </a:p>
+        </p:txBody>
+      </p:sp>
+      <p:sp>
+        <p:nvSpPr>
+          <p:cNvPr id="4" name="Slide Number Placeholder 3"/>
+          <p:cNvSpPr>
+            <a:spLocks noGrp="1"/>
+          </p:cNvSpPr>
+          <p:nvPr>
+            <p:ph type="sldNum" idx="5" sz="quarter"/>
+          </p:nvPr>
+        </p:nvSpPr>
+        <p:spPr/>
+      </p:sp>
+    </p:spTree>
+  </p:cSld>
+  <p:clrMapOvr>
+    <a:masterClrMapping/>
+  </p:clrMapOvr>
+</p:notes>
+</file>
+
+<file path=ppt/notesSlides/notesSlide9.xml><?xml version="1.0" encoding="utf-8"?>
+<p:notes xmlns:a="http://schemas.openxmlformats.org/drawingml/2006/main" xmlns:p="http://schemas.openxmlformats.org/presentationml/2006/main" xmlns:r="http://schemas.openxmlformats.org/officeDocument/2006/relationships">
+  <p:cSld>
+    <p:spTree>
+      <p:nvGrpSpPr>
+        <p:cNvPr id="1" name=""/>
+        <p:cNvGrpSpPr/>
+        <p:nvPr/>
+      </p:nvGrpSpPr>
+      <p:grpSpPr>
+        <a:xfrm>
+          <a:off x="0" y="0"/>
+          <a:ext cx="0" cy="0"/>
+          <a:chOff x="0" y="0"/>
+          <a:chExt cx="0" cy="0"/>
+        </a:xfrm>
+      </p:grpSpPr>
+      <p:sp>
+        <p:nvSpPr>
+          <p:cNvPr id="2" name="Slide Image Placeholder 1"/>
+          <p:cNvSpPr>
+            <a:spLocks noGrp="1"/>
+          </p:cNvSpPr>
+          <p:nvPr>
+            <p:ph type="sldImg" idx="2"/>
+          </p:nvPr>
+        </p:nvSpPr>
+        <p:spPr/>
+      </p:sp>
+      <p:sp>
+        <p:nvSpPr>
+          <p:cNvPr id="3" name="Notes Placeholder 2"/>
+          <p:cNvSpPr>
+            <a:spLocks noGrp="1"/>
+          </p:cNvSpPr>
+          <p:nvPr>
+            <p:ph type="body" idx="3" sz="quarter"/>
+          </p:nvPr>
+        </p:nvSpPr>
+        <p:spPr/>
+        <p:txBody>
+          <a:bodyPr/>
+          <a:lstStyle/>
+          <a:p>
+            <a:r>
+              <a:t>¿Por qué elegimos este dataset y no el más grande del curso para la demo? Porque aquí el objetivo es que veáis el pipeline funcionar de principio a fin sin esperar precomputo, y para eso necesitamos algo pequeño, con schema limpio y sin las variantes problemáticas que sí vais a encontrar en casos reales. La estructura, eso sí, es idéntica a cualquier otro caso del curso — lo que aprendáis aquí se aplica igual al dataset grande.</a:t>
+            </a:r>
+          </a:p>
+        </p:txBody>
+      </p:sp>
+      <p:sp>
+        <p:nvSpPr>
+          <p:cNvPr id="4" name="Slide Number Placeholder 3"/>
+          <p:cNvSpPr>
+            <a:spLocks noGrp="1"/>
+          </p:cNvSpPr>
+          <p:nvPr>
+            <p:ph type="sldNum" idx="5" sz="quarter"/>
+          </p:nvPr>
+        </p:nvSpPr>
+        <p:spPr/>
+      </p:sp>
+    </p:spTree>
+  </p:cSld>
+  <p:clrMapOvr>
+    <a:masterClrMapping/>
+  </p:clrMapOvr>
+</p:notes>
 </file>
 
 <file path=ppt/slideLayouts/slideLayout1.xml><?xml version="1.0" encoding="utf-8"?>
@@ -5907,4 +7027,324 @@
   </a:objectDefaults>
   <a:extraClrSchemeLst/>
 </a:theme>
+</file>
+
+<file path=ppt/theme/theme2.xml><?xml version="1.0" encoding="utf-8"?>
+<a:theme xmlns:a="http://schemas.openxmlformats.org/drawingml/2006/main" name="Office Theme">
+  <a:themeElements>
+    <a:clrScheme name="Office">
+      <a:dk1>
+        <a:sysClr val="windowText" lastClr="000000"/>
+      </a:dk1>
+      <a:lt1>
+        <a:sysClr val="window" lastClr="FFFFFF"/>
+      </a:lt1>
+      <a:dk2>
+        <a:srgbClr val="1F497D"/>
+      </a:dk2>
+      <a:lt2>
+        <a:srgbClr val="EEECE1"/>
+      </a:lt2>
+      <a:accent1>
+        <a:srgbClr val="4F81BD"/>
+      </a:accent1>
+      <a:accent2>
+        <a:srgbClr val="C0504D"/>
+      </a:accent2>
+      <a:accent3>
+        <a:srgbClr val="9BBB59"/>
+      </a:accent3>
+      <a:accent4>
+        <a:srgbClr val="8064A2"/>
+      </a:accent4>
+      <a:accent5>
+        <a:srgbClr val="4BACC6"/>
+      </a:accent5>
+      <a:accent6>
+        <a:srgbClr val="F79646"/>
+      </a:accent6>
+      <a:hlink>
+        <a:srgbClr val="0000FF"/>
+      </a:hlink>
+      <a:folHlink>
+        <a:srgbClr val="800080"/>
+      </a:folHlink>
+    </a:clrScheme>
+    <a:fontScheme name="Office">
+      <a:majorFont>
+        <a:latin typeface="Calibri"/>
+        <a:ea typeface=""/>
+        <a:cs typeface=""/>
+        <a:font script="Jpan" typeface="ＭＳ Ｐゴシック"/>
+        <a:font script="Hang" typeface="맑은 고딕"/>
+        <a:font script="Hans" typeface="宋体"/>
+        <a:font script="Hant" typeface="新細明體"/>
+        <a:font script="Arab" typeface="Times New Roman"/>
+        <a:font script="Hebr" typeface="Times New Roman"/>
+        <a:font script="Thai" typeface="Angsana New"/>
+        <a:font script="Ethi" typeface="Nyala"/>
+        <a:font script="Beng" typeface="Vrinda"/>
+        <a:font script="Gujr" typeface="Shruti"/>
+        <a:font script="Khmr" typeface="MoolBoran"/>
+        <a:font script="Knda" typeface="Tunga"/>
+        <a:font script="Guru" typeface="Raavi"/>
+        <a:font script="Cans" typeface="Euphemia"/>
+        <a:font script="Cher" typeface="Plantagenet Cherokee"/>
+        <a:font script="Yiii" typeface="Microsoft Yi Baiti"/>
+        <a:font script="Tibt" typeface="Microsoft Himalaya"/>
+        <a:font script="Thaa" typeface="MV Boli"/>
+        <a:font script="Deva" typeface="Mangal"/>
+        <a:font script="Telu" typeface="Gautami"/>
+        <a:font script="Taml" typeface="Latha"/>
+        <a:font script="Syrc" typeface="Estrangelo Edessa"/>
+        <a:font script="Orya" typeface="Kalinga"/>
+        <a:font script="Mlym" typeface="Kartika"/>
+        <a:font script="Laoo" typeface="DokChampa"/>
+        <a:font script="Sinh" typeface="Iskoola Pota"/>
+        <a:font script="Mong" typeface="Mongolian Baiti"/>
+        <a:font script="Viet" typeface="Times New Roman"/>
+        <a:font script="Uigh" typeface="Microsoft Uighur"/>
+        <a:font script="Geor" typeface="Sylfaen"/>
+      </a:majorFont>
+      <a:minorFont>
+        <a:latin typeface="Calibri"/>
+        <a:ea typeface=""/>
+        <a:cs typeface=""/>
+        <a:font script="Jpan" typeface="ＭＳ Ｐゴシック"/>
+        <a:font script="Hang" typeface="맑은 고딕"/>
+        <a:font script="Hans" typeface="宋体"/>
+        <a:font script="Hant" typeface="新細明體"/>
+        <a:font script="Arab" typeface="Arial"/>
+        <a:font script="Hebr" typeface="Arial"/>
+        <a:font script="Thai" typeface="Cordia New"/>
+        <a:font script="Ethi" typeface="Nyala"/>
+        <a:font script="Beng" typeface="Vrinda"/>
+        <a:font script="Gujr" typeface="Shruti"/>
+        <a:font script="Khmr" typeface="DaunPenh"/>
+        <a:font script="Knda" typeface="Tunga"/>
+        <a:font script="Guru" typeface="Raavi"/>
+        <a:font script="Cans" typeface="Euphemia"/>
+        <a:font script="Cher" typeface="Plantagenet Cherokee"/>
+        <a:font script="Yiii" typeface="Microsoft Yi Baiti"/>
+        <a:font script="Tibt" typeface="Microsoft Himalaya"/>
+        <a:font script="Thaa" typeface="MV Boli"/>
+        <a:font script="Deva" typeface="Mangal"/>
+        <a:font script="Telu" typeface="Gautami"/>
+        <a:font script="Taml" typeface="Latha"/>
+        <a:font script="Syrc" typeface="Estrangelo Edessa"/>
+        <a:font script="Orya" typeface="Kalinga"/>
+        <a:font script="Mlym" typeface="Kartika"/>
+        <a:font script="Laoo" typeface="DokChampa"/>
+        <a:font script="Sinh" typeface="Iskoola Pota"/>
+        <a:font script="Mong" typeface="Mongolian Baiti"/>
+        <a:font script="Viet" typeface="Arial"/>
+        <a:font script="Uigh" typeface="Microsoft Uighur"/>
+        <a:font script="Geor" typeface="Sylfaen"/>
+      </a:minorFont>
+    </a:fontScheme>
+    <a:fmtScheme name="Office">
+      <a:fillStyleLst>
+        <a:solidFill>
+          <a:schemeClr val="phClr"/>
+        </a:solidFill>
+        <a:gradFill rotWithShape="1">
+          <a:gsLst>
+            <a:gs pos="0">
+              <a:schemeClr val="phClr">
+                <a:tint val="50000"/>
+                <a:satMod val="300000"/>
+              </a:schemeClr>
+            </a:gs>
+            <a:gs pos="35000">
+              <a:schemeClr val="phClr">
+                <a:tint val="37000"/>
+                <a:satMod val="300000"/>
+              </a:schemeClr>
+            </a:gs>
+            <a:gs pos="100000">
+              <a:schemeClr val="phClr">
+                <a:tint val="15000"/>
+                <a:satMod val="350000"/>
+              </a:schemeClr>
+            </a:gs>
+          </a:gsLst>
+          <a:lin ang="16200000" scaled="1"/>
+        </a:gradFill>
+        <a:gradFill rotWithShape="1">
+          <a:gsLst>
+            <a:gs pos="0">
+              <a:schemeClr val="phClr">
+                <a:tint val="100000"/>
+                <a:shade val="100000"/>
+                <a:satMod val="130000"/>
+              </a:schemeClr>
+            </a:gs>
+            <a:gs pos="100000">
+              <a:schemeClr val="phClr">
+                <a:tint val="50000"/>
+                <a:shade val="100000"/>
+                <a:satMod val="350000"/>
+              </a:schemeClr>
+            </a:gs>
+          </a:gsLst>
+          <a:lin ang="16200000" scaled="0"/>
+        </a:gradFill>
+      </a:fillStyleLst>
+      <a:lnStyleLst>
+        <a:ln w="9525" cap="flat" cmpd="sng" algn="ctr">
+          <a:solidFill>
+            <a:schemeClr val="phClr">
+              <a:shade val="95000"/>
+              <a:satMod val="105000"/>
+            </a:schemeClr>
+          </a:solidFill>
+          <a:prstDash val="solid"/>
+        </a:ln>
+        <a:ln w="25400" cap="flat" cmpd="sng" algn="ctr">
+          <a:solidFill>
+            <a:schemeClr val="phClr"/>
+          </a:solidFill>
+          <a:prstDash val="solid"/>
+        </a:ln>
+        <a:ln w="38100" cap="flat" cmpd="sng" algn="ctr">
+          <a:solidFill>
+            <a:schemeClr val="phClr"/>
+          </a:solidFill>
+          <a:prstDash val="solid"/>
+        </a:ln>
+      </a:lnStyleLst>
+      <a:effectStyleLst>
+        <a:effectStyle>
+          <a:effectLst>
+            <a:outerShdw blurRad="40000" dist="20000" dir="5400000" rotWithShape="0">
+              <a:srgbClr val="000000">
+                <a:alpha val="38000"/>
+              </a:srgbClr>
+            </a:outerShdw>
+          </a:effectLst>
+        </a:effectStyle>
+        <a:effectStyle>
+          <a:effectLst>
+            <a:outerShdw blurRad="40000" dist="23000" dir="5400000" rotWithShape="0">
+              <a:srgbClr val="000000">
+                <a:alpha val="35000"/>
+              </a:srgbClr>
+            </a:outerShdw>
+          </a:effectLst>
+        </a:effectStyle>
+        <a:effectStyle>
+          <a:effectLst>
+            <a:outerShdw blurRad="40000" dist="23000" dir="5400000" rotWithShape="0">
+              <a:srgbClr val="000000">
+                <a:alpha val="35000"/>
+              </a:srgbClr>
+            </a:outerShdw>
+          </a:effectLst>
+          <a:scene3d>
+            <a:camera prst="orthographicFront">
+              <a:rot lat="0" lon="0" rev="0"/>
+            </a:camera>
+            <a:lightRig rig="threePt" dir="t">
+              <a:rot lat="0" lon="0" rev="1200000"/>
+            </a:lightRig>
+          </a:scene3d>
+          <a:sp3d>
+            <a:bevelT w="63500" h="25400"/>
+          </a:sp3d>
+        </a:effectStyle>
+      </a:effectStyleLst>
+      <a:bgFillStyleLst>
+        <a:solidFill>
+          <a:schemeClr val="phClr"/>
+        </a:solidFill>
+        <a:gradFill rotWithShape="1">
+          <a:gsLst>
+            <a:gs pos="0">
+              <a:schemeClr val="phClr">
+                <a:tint val="40000"/>
+                <a:satMod val="350000"/>
+              </a:schemeClr>
+            </a:gs>
+            <a:gs pos="40000">
+              <a:schemeClr val="phClr">
+                <a:tint val="45000"/>
+                <a:shade val="99000"/>
+                <a:satMod val="350000"/>
+              </a:schemeClr>
+            </a:gs>
+            <a:gs pos="100000">
+              <a:schemeClr val="phClr">
+                <a:shade val="20000"/>
+                <a:satMod val="255000"/>
+              </a:schemeClr>
+            </a:gs>
+          </a:gsLst>
+          <a:path path="circle">
+            <a:fillToRect l="50000" t="-80000" r="50000" b="180000"/>
+          </a:path>
+        </a:gradFill>
+        <a:gradFill rotWithShape="1">
+          <a:gsLst>
+            <a:gs pos="0">
+              <a:schemeClr val="phClr">
+                <a:tint val="80000"/>
+                <a:satMod val="300000"/>
+              </a:schemeClr>
+            </a:gs>
+            <a:gs pos="100000">
+              <a:schemeClr val="phClr">
+                <a:shade val="30000"/>
+                <a:satMod val="200000"/>
+              </a:schemeClr>
+            </a:gs>
+          </a:gsLst>
+          <a:path path="circle">
+            <a:fillToRect l="50000" t="50000" r="50000" b="50000"/>
+          </a:path>
+        </a:gradFill>
+      </a:bgFillStyleLst>
+    </a:fmtScheme>
+  </a:themeElements>
+  <a:objectDefaults>
+    <a:spDef>
+      <a:spPr/>
+      <a:bodyPr/>
+      <a:lstStyle/>
+      <a:style>
+        <a:lnRef idx="1">
+          <a:schemeClr val="accent1"/>
+        </a:lnRef>
+        <a:fillRef idx="3">
+          <a:schemeClr val="accent1"/>
+        </a:fillRef>
+        <a:effectRef idx="2">
+          <a:schemeClr val="accent1"/>
+        </a:effectRef>
+        <a:fontRef idx="minor">
+          <a:schemeClr val="lt1"/>
+        </a:fontRef>
+      </a:style>
+    </a:spDef>
+    <a:lnDef>
+      <a:spPr/>
+      <a:bodyPr/>
+      <a:lstStyle/>
+      <a:style>
+        <a:lnRef idx="2">
+          <a:schemeClr val="accent1"/>
+        </a:lnRef>
+        <a:fillRef idx="0">
+          <a:schemeClr val="accent1"/>
+        </a:fillRef>
+        <a:effectRef idx="1">
+          <a:schemeClr val="accent1"/>
+        </a:effectRef>
+        <a:fontRef idx="minor">
+          <a:schemeClr val="tx1"/>
+        </a:fontRef>
+      </a:style>
+    </a:lnDef>
+  </a:objectDefaults>
+  <a:extraClrSchemeLst/>
+</a:theme>
 </file>
--- a/bloque3_setup/csbc26_b3_setup.pptx
+++ b/bloque3_setup/csbc26_b3_setup.pptx
@@ -5211,12 +5211,6 @@
           <a:lstStyle/>
           <a:p>
             <a:r>
-              <a:rPr sz="3400" b="1">
-                <a:solidFill>
-                  <a:srgbClr val="FFFFFF"/>
-                </a:solidFill>
-                <a:latin typeface="Calibri"/>
-              </a:rPr>
               <a:t>Setup y demo en vivo</a:t>
             </a:r>
           </a:p>
@@ -5226,7 +5220,7 @@
                 <a:solidFill>
                   <a:srgbClr val="D6DAE2"/>
                 </a:solidFill>
-                <a:latin typeface="Calibri"/>
+                <a:latin typeface="Arial"/>
               </a:rPr>
               <a:t>El entorno completo en 10 minutos — uv + Ollama + Jupyter</a:t>
             </a:r>
@@ -5237,7 +5231,7 @@
                 <a:solidFill>
                   <a:srgbClr val="9AA3B5"/>
                 </a:solidFill>
-                <a:latin typeface="Calibri"/>
+                <a:latin typeface="Arial"/>
               </a:rPr>
               <a:t>CSBC26 · Bloque 3 · 45 min</a:t>
             </a:r>
@@ -5277,34 +5271,31 @@
           <a:bodyPr wrap="square"/>
           <a:lstStyle/>
           <a:p>
+            <a:pPr algn="ctr"/>
             <a:r>
               <a:rPr sz="1300" b="1">
                 <a:solidFill>
-                  <a:srgbClr val="E32B3D"/>
+                  <a:srgbClr val="CD2D37"/>
                 </a:solidFill>
-                <a:latin typeface="Calibri"/>
+                <a:latin typeface="Arial"/>
               </a:rPr>
               <a:t>DEMO EN VIVO</a:t>
             </a:r>
           </a:p>
           <a:p>
-            <a:r>
-              <a:rPr sz="2600" b="1">
-                <a:solidFill>
-                  <a:srgbClr val="FFFFFF"/>
-                </a:solidFill>
-                <a:latin typeface="Calibri"/>
-              </a:rPr>
+            <a:pPr algn="ctr"/>
+            <a:r>
               <a:t>Demo en vivo — pipeline completo</a:t>
             </a:r>
           </a:p>
           <a:p>
+            <a:pPr algn="ctr"/>
             <a:r>
               <a:rPr sz="1400">
                 <a:solidFill>
                   <a:srgbClr val="9AA3B5"/>
                 </a:solidFill>
-                <a:latin typeface="Calibri"/>
+                <a:latin typeface="Arial"/>
               </a:rPr>
               <a:t>&lt;caso_demo&gt;/00_reconocimiento.ipynb</a:t>
             </a:r>
@@ -5338,7 +5329,7 @@
                 <a:solidFill>
                   <a:srgbClr val="D6DAE2"/>
                 </a:solidFill>
-                <a:latin typeface="Calibri"/>
+                <a:latin typeface="Arial"/>
               </a:rPr>
               <a:t>1.  Abrir el notebook 00_reconocimiento del caso de demo</a:t>
             </a:r>
@@ -5349,7 +5340,7 @@
                 <a:solidFill>
                   <a:srgbClr val="D6DAE2"/>
                 </a:solidFill>
-                <a:latin typeface="Calibri"/>
+                <a:latin typeface="Arial"/>
               </a:rPr>
               <a:t>2.  Sección 1: load_forum() → ver auto-detección de formato en los logs</a:t>
             </a:r>
@@ -5360,7 +5351,7 @@
                 <a:solidFill>
                   <a:srgbClr val="D6DAE2"/>
                 </a:solidFill>
-                <a:latin typeface="Calibri"/>
+                <a:latin typeface="Arial"/>
               </a:rPr>
               <a:t>3.  Sección 2: distribución de usuarios y posts — power-law visible</a:t>
             </a:r>
@@ -5371,7 +5362,7 @@
                 <a:solidFill>
                   <a:srgbClr val="D6DAE2"/>
                 </a:solidFill>
-                <a:latin typeface="Calibri"/>
+                <a:latin typeface="Arial"/>
               </a:rPr>
               <a:t>4.  Sección 3: grafo de co-participación — identificar brokers</a:t>
             </a:r>
@@ -5382,7 +5373,7 @@
                 <a:solidFill>
                   <a:srgbClr val="D6DAE2"/>
                 </a:solidFill>
-                <a:latin typeface="Calibri"/>
+                <a:latin typeface="Arial"/>
               </a:rPr>
               <a:t>5.  Sección 4: embeddings sobre muestra de 100 usuarios (ejecutar en vivo)</a:t>
             </a:r>
@@ -5393,7 +5384,7 @@
                 <a:solidFill>
                   <a:srgbClr val="D6DAE2"/>
                 </a:solidFill>
-                <a:latin typeface="Calibri"/>
+                <a:latin typeface="Arial"/>
               </a:rPr>
               <a:t>6.  Sección 5: UMAP + clustering — visualización interactiva Plotly</a:t>
             </a:r>
@@ -5434,12 +5425,6 @@
           <a:lstStyle/>
           <a:p>
             <a:r>
-              <a:rPr sz="2400" b="1">
-                <a:solidFill>
-                  <a:srgbClr val="1A1A2E"/>
-                </a:solidFill>
-                <a:latin typeface="Calibri"/>
-              </a:rPr>
               <a:t>Preguntas frecuentes y respuestas honestas</a:t>
             </a:r>
           </a:p>
@@ -5455,78 +5440,38 @@
             <p:ph type="body" idx="16" sz="quarter"/>
           </p:nvPr>
         </p:nvSpPr>
-        <p:spPr/>
+        <p:spPr>
+          <a:xfrm>
+            <a:off x="1073427" y="2077576"/>
+            <a:ext cx="10084904" cy="3507298"/>
+          </a:xfrm>
+        </p:spPr>
         <p:txBody>
           <a:bodyPr wrap="square"/>
           <a:lstStyle/>
           <a:p>
-            <a:pPr algn="l" marL="0" indent="-228600">
-              <a:buNone/>
-            </a:pPr>
-            <a:r>
-              <a:rPr sz="1900" b="0">
-                <a:solidFill>
-                  <a:srgbClr val="333844"/>
-                </a:solidFill>
-                <a:latin typeface="Calibri"/>
-              </a:rPr>
-              <a:t>▸  ¿Por qué no usar una API de embeddings en la nube? → Datos de personas reales: no negociable</a:t>
-            </a:r>
-          </a:p>
-          <a:p>
-            <a:pPr algn="l" marL="0" indent="-228600">
-              <a:buNone/>
-            </a:pPr>
-            <a:r>
-              <a:rPr sz="1900" b="0">
-                <a:solidFill>
-                  <a:srgbClr val="333844"/>
-                </a:solidFill>
-                <a:latin typeface="Calibri"/>
-              </a:rPr>
-              <a:t>▸  ¿Qué pasa si no tengo GPU? → CPU funciona, solo con muestras pequeñas en demo</a:t>
-            </a:r>
-          </a:p>
-          <a:p>
-            <a:pPr algn="l" marL="0" indent="-228600">
-              <a:buNone/>
-            </a:pPr>
-            <a:r>
-              <a:rPr sz="1900" b="0">
-                <a:solidFill>
-                  <a:srgbClr val="333844"/>
-                </a:solidFill>
-                <a:latin typeface="Calibri"/>
-              </a:rPr>
-              <a:t>▸  ¿Puedo correr esto en Colab? → Técnicamente sí, pero no con datos reales</a:t>
-            </a:r>
-          </a:p>
-          <a:p>
-            <a:pPr algn="l" marL="0" indent="-228600">
-              <a:buNone/>
-            </a:pPr>
-            <a:r>
-              <a:rPr sz="1900" b="0">
-                <a:solidFill>
-                  <a:srgbClr val="333844"/>
-                </a:solidFill>
-                <a:latin typeface="Calibri"/>
-              </a:rPr>
-              <a:t>▸  ¿Cuánto tiempo tarda el pipeline completo? → 1-2 días con GPU para el dataset grande</a:t>
-            </a:r>
-          </a:p>
-          <a:p>
-            <a:pPr algn="l" marL="0" indent="-228600">
-              <a:buNone/>
-            </a:pPr>
-            <a:r>
-              <a:rPr sz="1900" b="0">
-                <a:solidFill>
-                  <a:srgbClr val="333844"/>
-                </a:solidFill>
-                <a:latin typeface="Calibri"/>
-              </a:rPr>
-              <a:t>▸  ¿Dónde están los datos? → No en el repo. Se comparten por canal separado</a:t>
+            <a:r>
+              <a:t>¿Por qué no usar una API de embeddings en la nube? → Datos de personas reales: no negociable</a:t>
+            </a:r>
+          </a:p>
+          <a:p>
+            <a:r>
+              <a:t>¿Qué pasa si no tengo GPU? → CPU funciona, solo con muestras pequeñas en demo</a:t>
+            </a:r>
+          </a:p>
+          <a:p>
+            <a:r>
+              <a:t>¿Puedo correr esto en Colab? → Técnicamente sí, pero no con datos reales</a:t>
+            </a:r>
+          </a:p>
+          <a:p>
+            <a:r>
+              <a:t>¿Cuánto tiempo tarda el pipeline completo? → 1-2 días con GPU para el dataset grande</a:t>
+            </a:r>
+          </a:p>
+          <a:p>
+            <a:r>
+              <a:t>¿Dónde están los datos? → No en el repo. Se comparten por canal separado</a:t>
             </a:r>
           </a:p>
         </p:txBody>
@@ -5564,34 +5509,31 @@
           <a:bodyPr wrap="square"/>
           <a:lstStyle/>
           <a:p>
+            <a:pPr algn="ctr"/>
             <a:r>
               <a:rPr sz="1300" b="1">
                 <a:solidFill>
-                  <a:srgbClr val="E32B3D"/>
+                  <a:srgbClr val="CD2D37"/>
                 </a:solidFill>
-                <a:latin typeface="Calibri"/>
+                <a:latin typeface="Arial"/>
               </a:rPr>
               <a:t>SECCIÓN 1</a:t>
             </a:r>
           </a:p>
           <a:p>
-            <a:r>
-              <a:rPr sz="3000" b="1">
-                <a:solidFill>
-                  <a:srgbClr val="FFFFFF"/>
-                </a:solidFill>
-                <a:latin typeface="Calibri"/>
-              </a:rPr>
+            <a:pPr algn="ctr"/>
+            <a:r>
               <a:t>El entorno</a:t>
             </a:r>
           </a:p>
           <a:p>
+            <a:pPr algn="ctr"/>
             <a:r>
               <a:rPr sz="1600">
                 <a:solidFill>
                   <a:srgbClr val="D6DAE2"/>
                 </a:solidFill>
-                <a:latin typeface="Calibri"/>
+                <a:latin typeface="Arial"/>
               </a:rPr>
               <a:t>uv + Ollama + Jupyter — sin magia, sin Docker</a:t>
             </a:r>
@@ -5632,12 +5574,6 @@
           <a:lstStyle/>
           <a:p>
             <a:r>
-              <a:rPr sz="2400" b="1">
-                <a:solidFill>
-                  <a:srgbClr val="1A1A2E"/>
-                </a:solidFill>
-                <a:latin typeface="Calibri"/>
-              </a:rPr>
               <a:t>¿Por qué uv?</a:t>
             </a:r>
           </a:p>
@@ -5658,87 +5594,33 @@
           <a:bodyPr wrap="square"/>
           <a:lstStyle/>
           <a:p>
-            <a:pPr algn="l" marL="0" indent="-228600">
-              <a:buNone/>
-            </a:pPr>
-            <a:r>
-              <a:rPr sz="1900" b="0">
-                <a:solidFill>
-                  <a:srgbClr val="333844"/>
-                </a:solidFill>
-                <a:latin typeface="Calibri"/>
-              </a:rPr>
-              <a:t>▸  Reemplaza pip, venv y poetry en un solo comando</a:t>
-            </a:r>
-          </a:p>
-          <a:p>
-            <a:pPr algn="l" marL="0" indent="-228600">
-              <a:buNone/>
-            </a:pPr>
-            <a:r>
-              <a:rPr sz="1900" b="0">
-                <a:solidFill>
-                  <a:srgbClr val="333844"/>
-                </a:solidFill>
-                <a:latin typeface="Calibri"/>
-              </a:rPr>
-              <a:t>▸  uv sync instala todas las dependencias del pyproject.toml</a:t>
-            </a:r>
-          </a:p>
-          <a:p>
-            <a:pPr algn="l" marL="0" indent="-228600">
-              <a:buNone/>
-            </a:pPr>
-            <a:r>
-              <a:rPr sz="1900" b="0">
-                <a:solidFill>
-                  <a:srgbClr val="333844"/>
-                </a:solidFill>
-                <a:latin typeface="Calibri"/>
-              </a:rPr>
-              <a:t>▸  uv run jupyter notebook arranca Jupyter sin activar manualmente el entorno</a:t>
-            </a:r>
-          </a:p>
-          <a:p>
-            <a:pPr algn="l" marL="0" indent="-228600">
-              <a:buNone/>
-            </a:pPr>
-            <a:r>
-              <a:rPr sz="1900" b="0">
-                <a:solidFill>
-                  <a:srgbClr val="333844"/>
-                </a:solidFill>
-                <a:latin typeface="Calibri"/>
-              </a:rPr>
-              <a:t>▸  Reproducible en cualquier máquina con Python 3.10+ sin configuración extra</a:t>
-            </a:r>
-          </a:p>
-          <a:p>
-            <a:pPr algn="l" marL="0" indent="-228600">
-              <a:buNone/>
-            </a:pPr>
-            <a:r>
-              <a:rPr sz="1900" b="0">
-                <a:solidFill>
-                  <a:srgbClr val="333844"/>
-                </a:solidFill>
-                <a:latin typeface="Calibri"/>
-              </a:rPr>
-              <a:t>▸  Sin Conda, sin Docker, sin variables de entorno globales que conflicten</a:t>
-            </a:r>
-          </a:p>
-          <a:p>
-            <a:pPr algn="l" marL="0" indent="-228600">
-              <a:buNone/>
-            </a:pPr>
-            <a:r>
-              <a:rPr sz="1900" b="0">
-                <a:solidFill>
-                  <a:srgbClr val="333844"/>
-                </a:solidFill>
-                <a:latin typeface="Calibri"/>
-              </a:rPr>
-              <a:t>▸  Objetivo: cualquier asistente puede replicar el entorno en 10 minutos</a:t>
+            <a:r>
+              <a:t>Reemplaza pip, venv y poetry en un solo comando</a:t>
+            </a:r>
+          </a:p>
+          <a:p>
+            <a:r>
+              <a:t>uv sync instala todas las dependencias del pyproject.toml</a:t>
+            </a:r>
+          </a:p>
+          <a:p>
+            <a:r>
+              <a:t>uv run jupyter notebook arranca Jupyter sin activar manualmente el entorno</a:t>
+            </a:r>
+          </a:p>
+          <a:p>
+            <a:r>
+              <a:t>Reproducible en cualquier máquina con Python 3.10+ sin configuración extra</a:t>
+            </a:r>
+          </a:p>
+          <a:p>
+            <a:r>
+              <a:t>Sin Conda, sin Docker, sin variables de entorno globales que conflicten</a:t>
+            </a:r>
+          </a:p>
+          <a:p>
+            <a:r>
+              <a:t>Objetivo: cualquier asistente puede replicar el entorno en 10 minutos</a:t>
             </a:r>
           </a:p>
         </p:txBody>
@@ -5777,12 +5659,6 @@
           <a:lstStyle/>
           <a:p>
             <a:r>
-              <a:rPr sz="2400" b="1">
-                <a:solidFill>
-                  <a:srgbClr val="1A1A2E"/>
-                </a:solidFill>
-                <a:latin typeface="Calibri"/>
-              </a:rPr>
               <a:t>Setup completo — 4 comandos</a:t>
             </a:r>
           </a:p>
@@ -5813,7 +5689,7 @@
         </p:nvSpPr>
         <p:spPr>
           <a:xfrm>
-            <a:off x="1051560" y="1691640"/>
+            <a:off x="1051560" y="2194560"/>
             <a:ext cx="10058400" cy="502920"/>
           </a:xfrm>
           <a:prstGeom prst="rect">
@@ -5831,9 +5707,9 @@
             <a:r>
               <a:rPr sz="1600" b="0">
                 <a:solidFill>
-                  <a:srgbClr val="333844"/>
+                  <a:srgbClr val="465461"/>
                 </a:solidFill>
-                <a:latin typeface="Calibri"/>
+                <a:latin typeface="Arial"/>
               </a:rPr>
               <a:t>Desde cero hasta el notebook corriendo:</a:t>
             </a:r>
@@ -5848,8 +5724,8 @@
         </p:nvSpPr>
         <p:spPr>
           <a:xfrm>
-            <a:off x="1005840" y="2240280"/>
-            <a:ext cx="10149840" cy="3566160"/>
+            <a:off x="1005840" y="2743200"/>
+            <a:ext cx="10149840" cy="3063240"/>
           </a:xfrm>
           <a:prstGeom prst="rect">
             <a:avLst/>
@@ -5891,8 +5767,8 @@
         </p:nvSpPr>
         <p:spPr>
           <a:xfrm>
-            <a:off x="1188720" y="2377440"/>
-            <a:ext cx="9784080" cy="3291840"/>
+            <a:off x="1188720" y="2880360"/>
+            <a:ext cx="9784080" cy="2788920"/>
           </a:xfrm>
           <a:prstGeom prst="rect">
             <a:avLst/>
@@ -5953,7 +5829,7 @@
                 <a:solidFill>
                   <a:srgbClr val="707888"/>
                 </a:solidFill>
-                <a:latin typeface="Calibri"/>
+                <a:latin typeface="Arial"/>
               </a:rPr>
               <a:t>ℹ  Los modelos pesan ~9GB en total. Descargarlos la noche antes, no en vivo.</a:t>
             </a:r>
@@ -5994,12 +5870,6 @@
           <a:lstStyle/>
           <a:p>
             <a:r>
-              <a:rPr sz="2400" b="1">
-                <a:solidFill>
-                  <a:srgbClr val="1A1A2E"/>
-                </a:solidFill>
-                <a:latin typeface="Calibri"/>
-              </a:rPr>
               <a:t>Requisitos de hardware — no hace falta potencia</a:t>
             </a:r>
           </a:p>
@@ -6030,7 +5900,7 @@
         </p:nvSpPr>
         <p:spPr>
           <a:xfrm>
-            <a:off x="1051560" y="1691640"/>
+            <a:off x="1051560" y="2194560"/>
             <a:ext cx="4846320" cy="411480"/>
           </a:xfrm>
           <a:prstGeom prst="rect">
@@ -6048,9 +5918,9 @@
             <a:r>
               <a:rPr sz="1600" b="1">
                 <a:solidFill>
-                  <a:srgbClr val="E32B3D"/>
+                  <a:srgbClr val="CD2D37"/>
                 </a:solidFill>
-                <a:latin typeface="Calibri"/>
+                <a:latin typeface="Arial"/>
               </a:rPr>
               <a:t>Mínimo (análisis pandas/networkx)</a:t>
             </a:r>
@@ -6065,8 +5935,8 @@
         </p:nvSpPr>
         <p:spPr>
           <a:xfrm>
-            <a:off x="1051560" y="2148840"/>
-            <a:ext cx="4846320" cy="3840480"/>
+            <a:off x="1051560" y="2651760"/>
+            <a:ext cx="4846320" cy="3337560"/>
           </a:xfrm>
           <a:prstGeom prst="rect">
             <a:avLst/>
@@ -6082,9 +5952,9 @@
             <a:r>
               <a:rPr sz="1600">
                 <a:solidFill>
-                  <a:srgbClr val="333844"/>
+                  <a:srgbClr val="465461"/>
                 </a:solidFill>
-                <a:latin typeface="Calibri"/>
+                <a:latin typeface="Arial"/>
               </a:rPr>
               <a:t>▸  8GB RAM</a:t>
             </a:r>
@@ -6093,9 +5963,9 @@
             <a:r>
               <a:rPr sz="1600">
                 <a:solidFill>
-                  <a:srgbClr val="333844"/>
+                  <a:srgbClr val="465461"/>
                 </a:solidFill>
-                <a:latin typeface="Calibri"/>
+                <a:latin typeface="Arial"/>
               </a:rPr>
               <a:t>▸  Cualquier CPU moderna</a:t>
             </a:r>
@@ -6104,9 +5974,9 @@
             <a:r>
               <a:rPr sz="1600">
                 <a:solidFill>
-                  <a:srgbClr val="333844"/>
+                  <a:srgbClr val="465461"/>
                 </a:solidFill>
-                <a:latin typeface="Calibri"/>
+                <a:latin typeface="Arial"/>
               </a:rPr>
               <a:t>▸  10GB disco libre para datos y modelos</a:t>
             </a:r>
@@ -6115,9 +5985,9 @@
             <a:r>
               <a:rPr sz="1600">
                 <a:solidFill>
-                  <a:srgbClr val="333844"/>
+                  <a:srgbClr val="465461"/>
                 </a:solidFill>
-                <a:latin typeface="Calibri"/>
+                <a:latin typeface="Arial"/>
               </a:rPr>
               <a:t>▸  Python 3.10+</a:t>
             </a:r>
@@ -6126,9 +5996,9 @@
             <a:r>
               <a:rPr sz="1600">
                 <a:solidFill>
-                  <a:srgbClr val="333844"/>
+                  <a:srgbClr val="465461"/>
                 </a:solidFill>
-                <a:latin typeface="Calibri"/>
+                <a:latin typeface="Arial"/>
               </a:rPr>
               <a:t>▸  EDA, grafos, text mining: fluidos</a:t>
             </a:r>
@@ -6143,7 +6013,7 @@
         </p:nvSpPr>
         <p:spPr>
           <a:xfrm>
-            <a:off x="6217920" y="1691640"/>
+            <a:off x="6217920" y="2194560"/>
             <a:ext cx="4846320" cy="411480"/>
           </a:xfrm>
           <a:prstGeom prst="rect">
@@ -6161,9 +6031,9 @@
             <a:r>
               <a:rPr sz="1600" b="1">
                 <a:solidFill>
-                  <a:srgbClr val="E32B3D"/>
+                  <a:srgbClr val="CD2D37"/>
                 </a:solidFill>
-                <a:latin typeface="Calibri"/>
+                <a:latin typeface="Arial"/>
               </a:rPr>
               <a:t>Recomendado (embeddings + LLM)</a:t>
             </a:r>
@@ -6178,8 +6048,8 @@
         </p:nvSpPr>
         <p:spPr>
           <a:xfrm>
-            <a:off x="6217920" y="2148840"/>
-            <a:ext cx="4846320" cy="3840480"/>
+            <a:off x="6217920" y="2651760"/>
+            <a:ext cx="4846320" cy="3337560"/>
           </a:xfrm>
           <a:prstGeom prst="rect">
             <a:avLst/>
@@ -6195,9 +6065,9 @@
             <a:r>
               <a:rPr sz="1600">
                 <a:solidFill>
-                  <a:srgbClr val="333844"/>
+                  <a:srgbClr val="465461"/>
                 </a:solidFill>
-                <a:latin typeface="Calibri"/>
+                <a:latin typeface="Arial"/>
               </a:rPr>
               <a:t>▸  16GB RAM para qwen2.5:14b Q4</a:t>
             </a:r>
@@ -6206,9 +6076,9 @@
             <a:r>
               <a:rPr sz="1600">
                 <a:solidFill>
-                  <a:srgbClr val="333844"/>
+                  <a:srgbClr val="465461"/>
                 </a:solidFill>
-                <a:latin typeface="Calibri"/>
+                <a:latin typeface="Arial"/>
               </a:rPr>
               <a:t>▸  GPU opcional (acelera embeddings ×10)</a:t>
             </a:r>
@@ -6217,9 +6087,9 @@
             <a:r>
               <a:rPr sz="1600">
                 <a:solidFill>
-                  <a:srgbClr val="333844"/>
+                  <a:srgbClr val="465461"/>
                 </a:solidFill>
-                <a:latin typeface="Calibri"/>
+                <a:latin typeface="Arial"/>
               </a:rPr>
               <a:t>▸  25GB disco para todos los modelos</a:t>
             </a:r>
@@ -6228,9 +6098,9 @@
             <a:r>
               <a:rPr sz="1600">
                 <a:solidFill>
-                  <a:srgbClr val="333844"/>
+                  <a:srgbClr val="465461"/>
                 </a:solidFill>
-                <a:latin typeface="Calibri"/>
+                <a:latin typeface="Arial"/>
               </a:rPr>
               <a:t>▸  Embeddings en CPU: lentos pero funcionales</a:t>
             </a:r>
@@ -6239,9 +6109,9 @@
             <a:r>
               <a:rPr sz="1600">
                 <a:solidFill>
-                  <a:srgbClr val="333844"/>
+                  <a:srgbClr val="465461"/>
                 </a:solidFill>
-                <a:latin typeface="Calibri"/>
+                <a:latin typeface="Arial"/>
               </a:rPr>
               <a:t>▸  Demo con muestra pequeña: instantánea en cualquier hardware</a:t>
             </a:r>
@@ -6282,12 +6152,6 @@
           <a:lstStyle/>
           <a:p>
             <a:r>
-              <a:rPr sz="2400" b="1">
-                <a:solidFill>
-                  <a:srgbClr val="1A1A2E"/>
-                </a:solidFill>
-                <a:latin typeface="Calibri"/>
-              </a:rPr>
               <a:t>La estrategia de la demo en vivo</a:t>
             </a:r>
           </a:p>
@@ -6303,78 +6167,38 @@
             <p:ph type="body" idx="16" sz="quarter"/>
           </p:nvPr>
         </p:nvSpPr>
-        <p:spPr/>
+        <p:spPr>
+          <a:xfrm>
+            <a:off x="1073427" y="2077576"/>
+            <a:ext cx="10084904" cy="3507298"/>
+          </a:xfrm>
+        </p:spPr>
         <p:txBody>
           <a:bodyPr wrap="square"/>
           <a:lstStyle/>
           <a:p>
-            <a:pPr algn="l" marL="0" indent="-228600">
-              <a:buNone/>
-            </a:pPr>
-            <a:r>
-              <a:rPr sz="1900" b="0">
-                <a:solidFill>
-                  <a:srgbClr val="333844"/>
-                </a:solidFill>
-                <a:latin typeface="Calibri"/>
-              </a:rPr>
-              <a:t>▸  Los embeddings del dataset completo están precomputados — no esperamos en clase</a:t>
-            </a:r>
-          </a:p>
-          <a:p>
-            <a:pPr algn="l" marL="0" indent="-228600">
-              <a:buNone/>
-            </a:pPr>
-            <a:r>
-              <a:rPr sz="1900" b="0">
-                <a:solidFill>
-                  <a:srgbClr val="333844"/>
-                </a:solidFill>
-                <a:latin typeface="Calibri"/>
-              </a:rPr>
-              <a:t>▸  Mostramos el código que los generó y lo ejecutamos sobre una muestra de 100 usuarios</a:t>
-            </a:r>
-          </a:p>
-          <a:p>
-            <a:pPr algn="l" marL="0" indent="-228600">
-              <a:buNone/>
-            </a:pPr>
-            <a:r>
-              <a:rPr sz="1900" b="0">
-                <a:solidFill>
-                  <a:srgbClr val="333844"/>
-                </a:solidFill>
-                <a:latin typeface="Calibri"/>
-              </a:rPr>
-              <a:t>▸  Los modelos Ollama ya están descargados — mostramos el pull pero lo cortamos</a:t>
-            </a:r>
-          </a:p>
-          <a:p>
-            <a:pPr algn="l" marL="0" indent="-228600">
-              <a:buNone/>
-            </a:pPr>
-            <a:r>
-              <a:rPr sz="1900" b="0">
-                <a:solidFill>
-                  <a:srgbClr val="333844"/>
-                </a:solidFill>
-                <a:latin typeface="Calibri"/>
-              </a:rPr>
-              <a:t>▸  Esto es el mismo truco de los videotutoriales: el proceso es real, la espera es editada</a:t>
-            </a:r>
-          </a:p>
-          <a:p>
-            <a:pPr algn="l" marL="0" indent="-228600">
-              <a:buNone/>
-            </a:pPr>
-            <a:r>
-              <a:rPr sz="1900" b="0">
-                <a:solidFill>
-                  <a:srgbClr val="333844"/>
-                </a:solidFill>
-                <a:latin typeface="Calibri"/>
-              </a:rPr>
-              <a:t>▸  El objetivo no es la velocidad — es que el pipeline completo sea visible y reproducible</a:t>
+            <a:r>
+              <a:t>Los embeddings del dataset completo están precomputados — no esperamos en clase</a:t>
+            </a:r>
+          </a:p>
+          <a:p>
+            <a:r>
+              <a:t>Mostramos el código que los generó y lo ejecutamos sobre una muestra de 100 usuarios</a:t>
+            </a:r>
+          </a:p>
+          <a:p>
+            <a:r>
+              <a:t>Los modelos Ollama ya están descargados — mostramos el pull pero lo cortamos</a:t>
+            </a:r>
+          </a:p>
+          <a:p>
+            <a:r>
+              <a:t>Esto es el mismo truco de los videotutoriales: el proceso es real, la espera es editada</a:t>
+            </a:r>
+          </a:p>
+          <a:p>
+            <a:r>
+              <a:t>El objetivo no es la velocidad — es que el pipeline completo sea visible y reproducible</a:t>
             </a:r>
           </a:p>
         </p:txBody>
@@ -6412,34 +6236,31 @@
           <a:bodyPr wrap="square"/>
           <a:lstStyle/>
           <a:p>
+            <a:pPr algn="ctr"/>
             <a:r>
               <a:rPr sz="1300" b="1">
                 <a:solidFill>
-                  <a:srgbClr val="E32B3D"/>
+                  <a:srgbClr val="CD2D37"/>
                 </a:solidFill>
-                <a:latin typeface="Calibri"/>
+                <a:latin typeface="Arial"/>
               </a:rPr>
               <a:t>SECCIÓN 2</a:t>
             </a:r>
           </a:p>
           <a:p>
-            <a:r>
-              <a:rPr sz="3000" b="1">
-                <a:solidFill>
-                  <a:srgbClr val="FFFFFF"/>
-                </a:solidFill>
-                <a:latin typeface="Calibri"/>
-              </a:rPr>
+            <a:pPr algn="ctr"/>
+            <a:r>
               <a:t>El pipeline completo</a:t>
             </a:r>
           </a:p>
           <a:p>
+            <a:pPr algn="ctr"/>
             <a:r>
               <a:rPr sz="1600">
                 <a:solidFill>
                   <a:srgbClr val="D6DAE2"/>
                 </a:solidFill>
-                <a:latin typeface="Calibri"/>
+                <a:latin typeface="Arial"/>
               </a:rPr>
               <a:t>De dump SQL a visualización — celda por celda</a:t>
             </a:r>
@@ -6480,12 +6301,6 @@
           <a:lstStyle/>
           <a:p>
             <a:r>
-              <a:rPr sz="2400" b="1">
-                <a:solidFill>
-                  <a:srgbClr val="1A1A2E"/>
-                </a:solidFill>
-                <a:latin typeface="Calibri"/>
-              </a:rPr>
               <a:t>Las 5 fases del pipeline</a:t>
             </a:r>
           </a:p>
@@ -6506,87 +6321,33 @@
           <a:bodyPr wrap="square"/>
           <a:lstStyle/>
           <a:p>
-            <a:pPr algn="l" marL="0" indent="-228600">
-              <a:buNone/>
-            </a:pPr>
-            <a:r>
-              <a:rPr sz="1900" b="0">
-                <a:solidFill>
-                  <a:srgbClr val="333844"/>
-                </a:solidFill>
-                <a:latin typeface="Calibri"/>
-              </a:rPr>
-              <a:t>▸  1. Load: load_forum() con auto-detección de versión y encoding</a:t>
-            </a:r>
-          </a:p>
-          <a:p>
-            <a:pPr algn="l" marL="0" indent="-228600">
-              <a:buNone/>
-            </a:pPr>
-            <a:r>
-              <a:rPr sz="1900" b="0">
-                <a:solidFill>
-                  <a:srgbClr val="333844"/>
-                </a:solidFill>
-                <a:latin typeface="Calibri"/>
-              </a:rPr>
-              <a:t>▸  2. Normalize: limpieza de usuarios, deduplicación, normalización de fechas a UTC</a:t>
-            </a:r>
-          </a:p>
-          <a:p>
-            <a:pPr algn="l" marL="0" indent="-228600">
-              <a:buNone/>
-            </a:pPr>
-            <a:r>
-              <a:rPr sz="1900" b="0">
-                <a:solidFill>
-                  <a:srgbClr val="333844"/>
-                </a:solidFill>
-                <a:latin typeface="Calibri"/>
-              </a:rPr>
-              <a:t>▸  3. Analyze: estadística descriptiva, red de interacciones, análisis temporal</a:t>
-            </a:r>
-          </a:p>
-          <a:p>
-            <a:pPr algn="l" marL="0" indent="-228600">
-              <a:buNone/>
-            </a:pPr>
-            <a:r>
-              <a:rPr sz="1900" b="0">
-                <a:solidFill>
-                  <a:srgbClr val="333844"/>
-                </a:solidFill>
-                <a:latin typeface="Calibri"/>
-              </a:rPr>
-              <a:t>▸  4. Embed: generación de embeddings por usuario (precomputados o muestra en vivo)</a:t>
-            </a:r>
-          </a:p>
-          <a:p>
-            <a:pPr algn="l" marL="0" indent="-228600">
-              <a:buNone/>
-            </a:pPr>
-            <a:r>
-              <a:rPr sz="1900" b="0">
-                <a:solidFill>
-                  <a:srgbClr val="333844"/>
-                </a:solidFill>
-                <a:latin typeface="Calibri"/>
-              </a:rPr>
-              <a:t>▸  5. Visualize: grafos, heatmaps temporales, clusters UMAP con Plotly interactivo</a:t>
-            </a:r>
-          </a:p>
-          <a:p>
-            <a:pPr algn="l" marL="0" indent="-228600">
-              <a:buNone/>
-            </a:pPr>
-            <a:r>
-              <a:rPr sz="1900" b="0">
-                <a:solidFill>
-                  <a:srgbClr val="333844"/>
-                </a:solidFill>
-                <a:latin typeface="Calibri"/>
-              </a:rPr>
-              <a:t>▸  Todo desde un único notebook, celda por celda, sin cambiar de herramienta</a:t>
+            <a:r>
+              <a:t>1. Load: load_forum() con auto-detección de versión y encoding</a:t>
+            </a:r>
+          </a:p>
+          <a:p>
+            <a:r>
+              <a:t>2. Normalize: limpieza de usuarios, deduplicación, normalización de fechas a UTC</a:t>
+            </a:r>
+          </a:p>
+          <a:p>
+            <a:r>
+              <a:t>3. Analyze: estadística descriptiva, red de interacciones, análisis temporal</a:t>
+            </a:r>
+          </a:p>
+          <a:p>
+            <a:r>
+              <a:t>4. Embed: generación de embeddings por usuario (precomputados o muestra en vivo)</a:t>
+            </a:r>
+          </a:p>
+          <a:p>
+            <a:r>
+              <a:t>5. Visualize: grafos, heatmaps temporales, clusters UMAP con Plotly interactivo</a:t>
+            </a:r>
+          </a:p>
+          <a:p>
+            <a:r>
+              <a:t>Todo desde un único notebook, celda por celda, sin cambiar de herramienta</a:t>
             </a:r>
           </a:p>
         </p:txBody>
@@ -6625,12 +6386,6 @@
           <a:lstStyle/>
           <a:p>
             <a:r>
-              <a:rPr sz="2400" b="1">
-                <a:solidFill>
-                  <a:srgbClr val="1A1A2E"/>
-                </a:solidFill>
-                <a:latin typeface="Calibri"/>
-              </a:rPr>
               <a:t>El dataset de demo — criterios de elección</a:t>
             </a:r>
           </a:p>
@@ -6646,92 +6401,43 @@
             <p:ph type="body" idx="16" sz="quarter"/>
           </p:nvPr>
         </p:nvSpPr>
-        <p:spPr/>
+        <p:spPr>
+          <a:xfrm>
+            <a:off x="1073427" y="2077576"/>
+            <a:ext cx="10084904" cy="3507298"/>
+          </a:xfrm>
+        </p:spPr>
         <p:txBody>
           <a:bodyPr wrap="square"/>
           <a:lstStyle/>
           <a:p>
-            <a:pPr algn="l" marL="0" indent="-228600">
-              <a:buNone/>
-            </a:pPr>
-            <a:r>
-              <a:rPr sz="1900" b="0">
-                <a:solidFill>
-                  <a:srgbClr val="333844"/>
-                </a:solidFill>
-                <a:latin typeface="Calibri"/>
-              </a:rPr>
-              <a:t>▸  Pequeño y autocontenido — carga en segundos, sin problemas de RAM</a:t>
-            </a:r>
-          </a:p>
-          <a:p>
-            <a:pPr algn="l" marL="0" indent="-228600">
-              <a:buNone/>
-            </a:pPr>
-            <a:r>
-              <a:rPr sz="1900" b="0">
-                <a:solidFill>
-                  <a:srgbClr val="333844"/>
-                </a:solidFill>
-                <a:latin typeface="Calibri"/>
-              </a:rPr>
-              <a:t>▸  Schema limpio: parser estándar sin variantes problemáticas</a:t>
-            </a:r>
-          </a:p>
-          <a:p>
-            <a:pPr algn="l" marL="0" indent="-228600">
-              <a:buNone/>
-            </a:pPr>
-            <a:r>
-              <a:rPr sz="1900" b="0">
-                <a:solidFill>
-                  <a:srgbClr val="333844"/>
-                </a:solidFill>
-                <a:latin typeface="Calibri"/>
-              </a:rPr>
-              <a:t>▸  Suficientemente representativo: usuarios, posts, fechas, subforos</a:t>
-            </a:r>
-          </a:p>
-          <a:p>
-            <a:pPr algn="l" marL="0" indent="-228600">
-              <a:buNone/>
-            </a:pPr>
-            <a:r>
-              <a:rPr sz="1900" b="0">
-                <a:solidFill>
-                  <a:srgbClr val="333844"/>
-                </a:solidFill>
-                <a:latin typeface="Calibri"/>
-              </a:rPr>
-              <a:t>▸  No requiere descarga de datos pesados para seguir la demo en clase</a:t>
-            </a:r>
-          </a:p>
-          <a:p>
-            <a:pPr algn="l" marL="0" indent="-228600">
-              <a:buNone/>
-            </a:pPr>
-            <a:r>
-              <a:rPr sz="1900" b="0">
-                <a:solidFill>
-                  <a:srgbClr val="333844"/>
-                </a:solidFill>
-                <a:latin typeface="Calibri"/>
-              </a:rPr>
-              <a:t>▸  La estructura es idéntica a la de cualquier otro caso — el pipeline es generalizable</a:t>
-            </a:r>
-          </a:p>
-          <a:p>
-            <a:pPr algn="l" marL="0" indent="-228600">
-              <a:buNone/>
-            </a:pPr>
-            <a:r>
-              <a:rPr sz="1900" b="0">
-                <a:solidFill>
-                  <a:srgbClr val="333844"/>
-                </a:solidFill>
-                <a:latin typeface="Calibri"/>
-              </a:rPr>
-              <a:t>▸  Los resultados son visibles en tiempo real sin esperar precomputo</a:t>
+            <a:r>
+              <a:t>Pequeño y autocontenido — carga en segundos, sin problemas de RAM</a:t>
+            </a:r>
+          </a:p>
+          <a:p>
+            <a:r>
+              <a:t>Schema limpio: parser estándar sin variantes problemáticas</a:t>
+            </a:r>
+          </a:p>
+          <a:p>
+            <a:r>
+              <a:t>Suficientemente representativo: usuarios, posts, fechas, subforos</a:t>
+            </a:r>
+          </a:p>
+          <a:p>
+            <a:r>
+              <a:t>No requiere descarga de datos pesados para seguir la demo en clase</a:t>
+            </a:r>
+          </a:p>
+          <a:p>
+            <a:r>
+              <a:t>La estructura es idéntica a la de cualquier otro caso — el pipeline es generalizable</a:t>
+            </a:r>
+          </a:p>
+          <a:p>
+            <a:r>
+              <a:t>Los resultados son visibles en tiempo real sin esperar precomputo</a:t>
             </a:r>
           </a:p>
         </p:txBody>

--- a/bloque3_setup/csbc26_b3_setup.pptx
+++ b/bloque3_setup/csbc26_b3_setup.pptx
@@ -19,6 +19,8 @@
     <p:sldId id="264" r:id="rId19"/>
     <p:sldId id="265" r:id="rId20"/>
     <p:sldId id="266" r:id="rId21"/>
+    <p:sldId id="267" r:id="rId22"/>
+    <p:sldId id="268" r:id="rId23"/>
   </p:sldIdLst>
   <p:sldSz cx="12192000" cy="6858000"/>
   <p:notesSz cx="6858000" cy="9144000"/>
@@ -717,17 +719,17 @@
           </a:p>
           <a:p>
             <a:r>
-              <a:t>45 min: entorno completo en vivo, sin atajos</a:t>
-            </a:r>
-          </a:p>
-          <a:p>
-            <a:r>
-              <a:t>Pregunta: ¿cuánto tardaríais replicando esto solos?</a:t>
-            </a:r>
-          </a:p>
-          <a:p>
-            <a:r>
-              <a:t>→ uv + Ollama + Jupyter = 10 minutos, demo en vivo</a:t>
+              <a:t>45 min: no repasamos el ciclo de análisis, eso ya se vio</a:t>
+            </a:r>
+          </a:p>
+          <a:p>
+            <a:r>
+              <a:t>Objetivo: instalar el entorno y entender qué es cada pieza</a:t>
+            </a:r>
+          </a:p>
+          <a:p>
+            <a:r>
+              <a:t>→ uv, Ollama, librerías clave</a:t>
             </a:r>
           </a:p>
         </p:txBody>
@@ -797,27 +799,22 @@
           <a:lstStyle/>
           <a:p>
             <a:r>
-              <a:t>Manos a la obra — notebook 00_reconocimiento</a:t>
-            </a:r>
-          </a:p>
-          <a:p>
-            <a:r>
-              <a:t>5 secciones en directo: carga, power-law, grafo brokers</a:t>
-            </a:r>
-          </a:p>
-          <a:p>
-            <a:r>
-              <a:t>Embeddings ejecutándose de verdad (muestra 100)</a:t>
-            </a:r>
-          </a:p>
-          <a:p>
-            <a:r>
-              <a:t>→ UMAP + clustering Plotly</a:t>
-            </a:r>
-          </a:p>
-          <a:p>
-            <a:r>
-              <a:t>Si falla en vivo: comentamos y seguimos, es laboratorio</a:t>
+              <a:t>18 dependencias en total, esto es el grupo específico del curso</a:t>
+            </a:r>
+          </a:p>
+          <a:p>
+            <a:r>
+              <a:t>pandas/matplotlib/sklearn ya los conocen</a:t>
+            </a:r>
+          </a:p>
+          <a:p>
+            <a:r>
+              <a:t>→ cada una resuelve un problema puntual del pipeline</a:t>
+            </a:r>
+          </a:p>
+          <a:p>
+            <a:r>
+              <a:t>chromadb y umap-learn son las menos obvias, detenerse ahí</a:t>
             </a:r>
           </a:p>
         </p:txBody>
@@ -887,6 +884,176 @@
           <a:lstStyle/>
           <a:p>
             <a:r>
+              <a:t>Tranquilizar: no hace falta gama alta</a:t>
+            </a:r>
+          </a:p>
+          <a:p>
+            <a:r>
+              <a:t>8GB RAM + CPU moderna = suficiente para pandas/networkx</a:t>
+            </a:r>
+          </a:p>
+          <a:p>
+            <a:r>
+              <a:t>Derecha: solo si embeddings + LLM local</a:t>
+            </a:r>
+          </a:p>
+          <a:p>
+            <a:r>
+              <a:t>→ sin GPU funciona, más lento, sobre muestra es instantáneo</a:t>
+            </a:r>
+          </a:p>
+        </p:txBody>
+      </p:sp>
+      <p:sp>
+        <p:nvSpPr>
+          <p:cNvPr id="4" name="Slide Number Placeholder 3"/>
+          <p:cNvSpPr>
+            <a:spLocks noGrp="1"/>
+          </p:cNvSpPr>
+          <p:nvPr>
+            <p:ph type="sldNum" idx="5" sz="quarter"/>
+          </p:nvPr>
+        </p:nvSpPr>
+        <p:spPr/>
+      </p:sp>
+    </p:spTree>
+  </p:cSld>
+  <p:clrMapOvr>
+    <a:masterClrMapping/>
+  </p:clrMapOvr>
+</p:notes>
+</file>
+
+<file path=ppt/notesSlides/notesSlide12.xml><?xml version="1.0" encoding="utf-8"?>
+<p:notes xmlns:a="http://schemas.openxmlformats.org/drawingml/2006/main" xmlns:p="http://schemas.openxmlformats.org/presentationml/2006/main" xmlns:r="http://schemas.openxmlformats.org/officeDocument/2006/relationships">
+  <p:cSld>
+    <p:spTree>
+      <p:nvGrpSpPr>
+        <p:cNvPr id="1" name=""/>
+        <p:cNvGrpSpPr/>
+        <p:nvPr/>
+      </p:nvGrpSpPr>
+      <p:grpSpPr>
+        <a:xfrm>
+          <a:off x="0" y="0"/>
+          <a:ext cx="0" cy="0"/>
+          <a:chOff x="0" y="0"/>
+          <a:chExt cx="0" cy="0"/>
+        </a:xfrm>
+      </p:grpSpPr>
+      <p:sp>
+        <p:nvSpPr>
+          <p:cNvPr id="2" name="Slide Image Placeholder 1"/>
+          <p:cNvSpPr>
+            <a:spLocks noGrp="1"/>
+          </p:cNvSpPr>
+          <p:nvPr>
+            <p:ph type="sldImg" idx="2"/>
+          </p:nvPr>
+        </p:nvSpPr>
+        <p:spPr/>
+      </p:sp>
+      <p:sp>
+        <p:nvSpPr>
+          <p:cNvPr id="3" name="Notes Placeholder 2"/>
+          <p:cNvSpPr>
+            <a:spLocks noGrp="1"/>
+          </p:cNvSpPr>
+          <p:nvPr>
+            <p:ph type="body" idx="3" sz="quarter"/>
+          </p:nvPr>
+        </p:nvSpPr>
+        <p:spPr/>
+        <p:txBody>
+          <a:bodyPr/>
+          <a:lstStyle/>
+          <a:p>
+            <a:r>
+              <a:t>No analiza datos reales — datos sintéticos mínimos, corre en segundos</a:t>
+            </a:r>
+          </a:p>
+          <a:p>
+            <a:r>
+              <a:t>Si algo falla: Ollama no está corriendo o falta un modelo</a:t>
+            </a:r>
+          </a:p>
+          <a:p>
+            <a:r>
+              <a:t>→ resolverlo aquí, no en el primer caso práctico</a:t>
+            </a:r>
+          </a:p>
+          <a:p>
+            <a:r>
+              <a:t>Cada alumno confirma su propio entorno antes de seguir</a:t>
+            </a:r>
+          </a:p>
+        </p:txBody>
+      </p:sp>
+      <p:sp>
+        <p:nvSpPr>
+          <p:cNvPr id="4" name="Slide Number Placeholder 3"/>
+          <p:cNvSpPr>
+            <a:spLocks noGrp="1"/>
+          </p:cNvSpPr>
+          <p:nvPr>
+            <p:ph type="sldNum" idx="5" sz="quarter"/>
+          </p:nvPr>
+        </p:nvSpPr>
+        <p:spPr/>
+      </p:sp>
+    </p:spTree>
+  </p:cSld>
+  <p:clrMapOvr>
+    <a:masterClrMapping/>
+  </p:clrMapOvr>
+</p:notes>
+</file>
+
+<file path=ppt/notesSlides/notesSlide13.xml><?xml version="1.0" encoding="utf-8"?>
+<p:notes xmlns:a="http://schemas.openxmlformats.org/drawingml/2006/main" xmlns:p="http://schemas.openxmlformats.org/presentationml/2006/main" xmlns:r="http://schemas.openxmlformats.org/officeDocument/2006/relationships">
+  <p:cSld>
+    <p:spTree>
+      <p:nvGrpSpPr>
+        <p:cNvPr id="1" name=""/>
+        <p:cNvGrpSpPr/>
+        <p:nvPr/>
+      </p:nvGrpSpPr>
+      <p:grpSpPr>
+        <a:xfrm>
+          <a:off x="0" y="0"/>
+          <a:ext cx="0" cy="0"/>
+          <a:chOff x="0" y="0"/>
+          <a:chExt cx="0" cy="0"/>
+        </a:xfrm>
+      </p:grpSpPr>
+      <p:sp>
+        <p:nvSpPr>
+          <p:cNvPr id="2" name="Slide Image Placeholder 1"/>
+          <p:cNvSpPr>
+            <a:spLocks noGrp="1"/>
+          </p:cNvSpPr>
+          <p:nvPr>
+            <p:ph type="sldImg" idx="2"/>
+          </p:nvPr>
+        </p:nvSpPr>
+        <p:spPr/>
+      </p:sp>
+      <p:sp>
+        <p:nvSpPr>
+          <p:cNvPr id="3" name="Notes Placeholder 2"/>
+          <p:cNvSpPr>
+            <a:spLocks noGrp="1"/>
+          </p:cNvSpPr>
+          <p:nvPr>
+            <p:ph type="body" idx="3" sz="quarter"/>
+          </p:nvPr>
+        </p:nvSpPr>
+        <p:spPr/>
+        <p:txBody>
+          <a:bodyPr/>
+          <a:lstStyle/>
+          <a:p>
+            <a:r>
               <a:t>Cierre: preguntas frecuentes, respuestas sin vender humo</a:t>
             </a:r>
           </a:p>
@@ -907,7 +1074,7 @@
           </a:p>
           <a:p>
             <a:r>
-              <a:t>Datos: canal separado, nunca en el repo</a:t>
+              <a:t>Entorno listo → Bloque 4 (agentes) y Bloque 5 (casos prácticos)</a:t>
             </a:r>
           </a:p>
         </p:txBody>
@@ -977,7 +1144,7 @@
           <a:lstStyle/>
           <a:p>
             <a:r>
-              <a:t>Piezas del entorno, una por una</a:t>
+              <a:t>Primera pieza: uv</a:t>
             </a:r>
           </a:p>
           <a:p>
@@ -1077,7 +1244,7 @@
           </a:p>
           <a:p>
             <a:r>
-              <a:t>Mismo entorno en cualquier portátil</a:t>
+              <a:t>Esta parte es corta a propósito — funciona a la primera</a:t>
             </a:r>
           </a:p>
         </p:txBody>
@@ -1147,22 +1314,17 @@
           <a:lstStyle/>
           <a:p>
             <a:r>
-              <a:t>4 comandos, literalmente los únicos</a:t>
-            </a:r>
-          </a:p>
-          <a:p>
-            <a:r>
-              <a:t>Clonar → uv sync → pull modelos → Jupyter</a:t>
-            </a:r>
-          </a:p>
-          <a:p>
-            <a:r>
-              <a:t>Cuello de botella: descarga modelos (~9GB), no Python</a:t>
-            </a:r>
-          </a:p>
-          <a:p>
-            <a:r>
-              <a:t>→ descargar la noche antes, no en vivo</a:t>
+              <a:t>3 comandos, literalmente los únicos</a:t>
+            </a:r>
+          </a:p>
+          <a:p>
+            <a:r>
+              <a:t>Clonar → uv sync → Jupyter</a:t>
+            </a:r>
+          </a:p>
+          <a:p>
+            <a:r>
+              <a:t>Sin git: ZIP desde GitHub, copiar data/ y results/ aparte</a:t>
             </a:r>
           </a:p>
         </p:txBody>
@@ -1232,27 +1394,12 @@
           <a:lstStyle/>
           <a:p>
             <a:r>
-              <a:t>Tranquilizar: no hace falta gama alta</a:t>
-            </a:r>
-          </a:p>
-          <a:p>
-            <a:r>
-              <a:t>8GB RAM + CPU moderna = suficiente para pandas/networkx</a:t>
-            </a:r>
-          </a:p>
-          <a:p>
-            <a:r>
-              <a:t>Derecha: solo si embeddings + LLM local</a:t>
-            </a:r>
-          </a:p>
-          <a:p>
-            <a:r>
-              <a:t>→ sin GPU funciona, más lento</a:t>
-            </a:r>
-          </a:p>
-          <a:p>
-            <a:r>
-              <a:t>Demo con muestra pequeña, fluida en cualquier portátil</a:t>
+              <a:t>Segunda pieza: Ollama</a:t>
+            </a:r>
+          </a:p>
+          <a:p>
+            <a:r>
+              <a:t>Qué es, para qué sirve, por qué es obligatorio con estos datos</a:t>
             </a:r>
           </a:p>
         </p:txBody>
@@ -1322,22 +1469,22 @@
           <a:lstStyle/>
           <a:p>
             <a:r>
-              <a:t>Honestidad sobre la demo</a:t>
-            </a:r>
-          </a:p>
-          <a:p>
-            <a:r>
-              <a:t>Embeddings completos: precomputados (horas si no)</a:t>
-            </a:r>
-          </a:p>
-          <a:p>
-            <a:r>
-              <a:t>En vivo: mismo código sobre muestra 100 usuarios</a:t>
-            </a:r>
-          </a:p>
-          <a:p>
-            <a:r>
-              <a:t>→ objetivo no es velocidad, es pipeline real y reproducible</a:t>
+              <a:t>Ollama = LLM en local, sin mandar datos afuera</a:t>
+            </a:r>
+          </a:p>
+          <a:p>
+            <a:r>
+              <a:t>Servidor en localhost:11434, cliente Python normal</a:t>
+            </a:r>
+          </a:p>
+          <a:p>
+            <a:r>
+              <a:t>→ es lo que hace viable trabajar con leaks sensibles</a:t>
+            </a:r>
+          </a:p>
+          <a:p>
+            <a:r>
+              <a:t>No es un detalle técnico, es la premisa ética del curso</a:t>
             </a:r>
           </a:p>
         </p:txBody>
@@ -1407,22 +1554,22 @@
           <a:lstStyle/>
           <a:p>
             <a:r>
-              <a:t>Entorno ya montado</a:t>
-            </a:r>
-          </a:p>
-          <a:p>
-            <a:r>
-              <a:t>Ahora: pipeline entero</a:t>
-            </a:r>
-          </a:p>
-          <a:p>
-            <a:r>
-              <a:t>Dump SQL → visualización final</a:t>
-            </a:r>
-          </a:p>
-          <a:p>
-            <a:r>
-              <a:t>→ celda por celda, sin saltos</a:t>
+              <a:t>Dos modelos, dos propósitos, no se solapan</a:t>
+            </a:r>
+          </a:p>
+          <a:p>
+            <a:r>
+              <a:t>qwen3-embedding: vectores. qwen2.5:14b: texto→texto</a:t>
+            </a:r>
+          </a:p>
+          <a:p>
+            <a:r>
+              <a:t>→ ~9GB entre los dos, descargar la noche antes</a:t>
+            </a:r>
+          </a:p>
+          <a:p>
+            <a:r>
+              <a:t>ollama pull &lt;modelo&gt; — mostrar y cortar con Ctrl+C</a:t>
             </a:r>
           </a:p>
         </p:txBody>
@@ -1492,22 +1639,17 @@
           <a:lstStyle/>
           <a:p>
             <a:r>
-              <a:t>Esqueleto de cualquier análisis del curso, no solo hoy</a:t>
-            </a:r>
-          </a:p>
-          <a:p>
-            <a:r>
-              <a:t>Load → Normalize → Analyze → Embed → Visualize</a:t>
-            </a:r>
-          </a:p>
-          <a:p>
-            <a:r>
-              <a:t>→ todo en el mismo notebook, sin cambiar de herramienta</a:t>
-            </a:r>
-          </a:p>
-          <a:p>
-            <a:r>
-              <a:t>Un solo lugar, todo el razonamiento visible</a:t>
+              <a:t>Dos formas de usarlo: código (ollama-python) o terminal (llm CLI)</a:t>
+            </a:r>
+          </a:p>
+          <a:p>
+            <a:r>
+              <a:t>src/embeddings.py y src/utils.py son los puntos de entrada</a:t>
+            </a:r>
+          </a:p>
+          <a:p>
+            <a:r>
+              <a:t>→ llm CLI para tareas ad-hoc, ver ollama_llm_cli.md</a:t>
             </a:r>
           </a:p>
         </p:txBody>
@@ -1577,22 +1719,12 @@
           <a:lstStyle/>
           <a:p>
             <a:r>
-              <a:t>¿Por qué este dataset y no el grande?</a:t>
-            </a:r>
-          </a:p>
-          <a:p>
-            <a:r>
-              <a:t>Objetivo: pipeline completo, sin esperar precomputo</a:t>
-            </a:r>
-          </a:p>
-          <a:p>
-            <a:r>
-              <a:t>Pequeño, schema limpio, sin variantes problemáticas</a:t>
-            </a:r>
-          </a:p>
-          <a:p>
-            <a:r>
-              <a:t>→ estructura idéntica a casos reales del curso</a:t>
+              <a:t>Tercera pieza: las librerías</a:t>
+            </a:r>
+          </a:p>
+          <a:p>
+            <a:r>
+              <a:t>No todas — solo las que no son de uso general</a:t>
             </a:r>
           </a:p>
         </p:txBody>
@@ -5211,7 +5343,7 @@
           <a:lstStyle/>
           <a:p>
             <a:r>
-              <a:t>Setup y demo en vivo</a:t>
+              <a:t>Setup del entorno y herramientas</a:t>
             </a:r>
           </a:p>
           <a:p>
@@ -5222,7 +5354,7 @@
                 </a:solidFill>
                 <a:latin typeface="Arial"/>
               </a:rPr>
-              <a:t>El entorno completo en 10 minutos — uv + Ollama + Jupyter</a:t>
+              <a:t>uv + Ollama + el stack de análisis — instalado y entendido</a:t>
             </a:r>
           </a:p>
           <a:p>
@@ -5263,7 +5395,7 @@
             <a:spLocks noGrp="1"/>
           </p:cNvSpPr>
           <p:nvPr>
-            <p:ph type="body" idx="10" sz="quarter"/>
+            <p:ph type="body" idx="13" sz="quarter"/>
           </p:nvPr>
         </p:nvSpPr>
         <p:spPr/>
@@ -5271,122 +5403,64 @@
           <a:bodyPr wrap="square"/>
           <a:lstStyle/>
           <a:p>
-            <a:pPr algn="ctr"/>
-            <a:r>
-              <a:rPr sz="1300" b="1">
-                <a:solidFill>
-                  <a:srgbClr val="CD2D37"/>
-                </a:solidFill>
-                <a:latin typeface="Arial"/>
-              </a:rPr>
-              <a:t>DEMO EN VIVO</a:t>
-            </a:r>
-          </a:p>
-          <a:p>
-            <a:pPr algn="ctr"/>
-            <a:r>
-              <a:t>Demo en vivo — pipeline completo</a:t>
-            </a:r>
-          </a:p>
-          <a:p>
-            <a:pPr algn="ctr"/>
-            <a:r>
-              <a:rPr sz="1400">
-                <a:solidFill>
-                  <a:srgbClr val="9AA3B5"/>
-                </a:solidFill>
-                <a:latin typeface="Arial"/>
-              </a:rPr>
-              <a:t>&lt;caso_demo&gt;/00_reconocimiento.ipynb</a:t>
-            </a:r>
-          </a:p>
-        </p:txBody>
-      </p:sp>
-      <p:sp>
-        <p:nvSpPr>
-          <p:cNvPr id="3" name="TextBox 2"/>
-          <p:cNvSpPr txBox="1"/>
-          <p:nvPr/>
+            <a:r>
+              <a:t>Librerías clave del proyecto</a:t>
+            </a:r>
+          </a:p>
+        </p:txBody>
+      </p:sp>
+      <p:sp>
+        <p:nvSpPr>
+          <p:cNvPr id="3" name="Text Placeholder 2"/>
+          <p:cNvSpPr>
+            <a:spLocks noGrp="1"/>
+          </p:cNvSpPr>
+          <p:nvPr>
+            <p:ph type="body" idx="16" sz="quarter"/>
+          </p:nvPr>
         </p:nvSpPr>
         <p:spPr>
           <a:xfrm>
-            <a:off x="2505456" y="3657600"/>
-            <a:ext cx="7168896" cy="2560320"/>
+            <a:off x="1073427" y="2214736"/>
+            <a:ext cx="10084904" cy="3370138"/>
           </a:xfrm>
-          <a:prstGeom prst="rect">
-            <a:avLst/>
-          </a:prstGeom>
-          <a:noFill/>
         </p:spPr>
         <p:txBody>
-          <a:bodyPr wrap="square">
-            <a:spAutoFit/>
-          </a:bodyPr>
+          <a:bodyPr wrap="square"/>
           <a:lstStyle/>
           <a:p>
             <a:r>
-              <a:rPr sz="1600">
-                <a:solidFill>
-                  <a:srgbClr val="D6DAE2"/>
-                </a:solidFill>
-                <a:latin typeface="Arial"/>
-              </a:rPr>
-              <a:t>1.  Abrir el notebook 00_reconocimiento del caso de demo</a:t>
-            </a:r>
-          </a:p>
-          <a:p>
-            <a:r>
-              <a:rPr sz="1600">
-                <a:solidFill>
-                  <a:srgbClr val="D6DAE2"/>
-                </a:solidFill>
-                <a:latin typeface="Arial"/>
-              </a:rPr>
-              <a:t>2.  Sección 1: load_forum() → ver auto-detección de formato en los logs</a:t>
-            </a:r>
-          </a:p>
-          <a:p>
-            <a:r>
-              <a:rPr sz="1600">
-                <a:solidFill>
-                  <a:srgbClr val="D6DAE2"/>
-                </a:solidFill>
-                <a:latin typeface="Arial"/>
-              </a:rPr>
-              <a:t>3.  Sección 2: distribución de usuarios y posts — power-law visible</a:t>
-            </a:r>
-          </a:p>
-          <a:p>
-            <a:r>
-              <a:rPr sz="1600">
-                <a:solidFill>
-                  <a:srgbClr val="D6DAE2"/>
-                </a:solidFill>
-                <a:latin typeface="Arial"/>
-              </a:rPr>
-              <a:t>4.  Sección 3: grafo de co-participación — identificar brokers</a:t>
-            </a:r>
-          </a:p>
-          <a:p>
-            <a:r>
-              <a:rPr sz="1600">
-                <a:solidFill>
-                  <a:srgbClr val="D6DAE2"/>
-                </a:solidFill>
-                <a:latin typeface="Arial"/>
-              </a:rPr>
-              <a:t>5.  Sección 4: embeddings sobre muestra de 100 usuarios (ejecutar en vivo)</a:t>
-            </a:r>
-          </a:p>
-          <a:p>
-            <a:r>
-              <a:rPr sz="1600">
-                <a:solidFill>
-                  <a:srgbClr val="D6DAE2"/>
-                </a:solidFill>
-                <a:latin typeface="Arial"/>
-              </a:rPr>
-              <a:t>6.  Sección 5: UMAP + clustering — visualización interactiva Plotly</a:t>
+              <a:t>ollama — cliente Python del servidor Ollama</a:t>
+            </a:r>
+          </a:p>
+          <a:p>
+            <a:r>
+              <a:t>chromadb — base de datos vectorial local, búsqueda por similitud sin infraestructura</a:t>
+            </a:r>
+          </a:p>
+          <a:p>
+            <a:r>
+              <a:t>umap-learn — reduce embeddings de alta dimensión a 2D para visualizar clusters</a:t>
+            </a:r>
+          </a:p>
+          <a:p>
+            <a:r>
+              <a:t>hdbscan — clustering por densidad, sin fijar K de antemano</a:t>
+            </a:r>
+          </a:p>
+          <a:p>
+            <a:r>
+              <a:t>bertopic — topic modeling sobre embeddings, alternativa a LDA con vocabulario ruidoso</a:t>
+            </a:r>
+          </a:p>
+          <a:p>
+            <a:r>
+              <a:t>langdetect — detección de idioma para la decisión original vs. traducción</a:t>
+            </a:r>
+          </a:p>
+          <a:p>
+            <a:r>
+              <a:t>crewai — orquestación de agentes de IA sobre Ollama (Bloque 4)</a:t>
             </a:r>
           </a:p>
         </p:txBody>
@@ -5425,7 +5499,7 @@
           <a:lstStyle/>
           <a:p>
             <a:r>
-              <a:t>Preguntas frecuentes y respuestas honestas</a:t>
+              <a:t>Requisitos de hardware — no hace falta potencia</a:t>
             </a:r>
           </a:p>
         </p:txBody>
@@ -5439,11 +5513,525 @@
           <p:nvPr>
             <p:ph type="body" idx="16" sz="quarter"/>
           </p:nvPr>
+        </p:nvSpPr>
+        <p:spPr/>
+        <p:txBody>
+          <a:bodyPr/>
+          <a:lstStyle/>
+          <a:p/>
+        </p:txBody>
+      </p:sp>
+      <p:sp>
+        <p:nvSpPr>
+          <p:cNvPr id="4" name="TextBox 3"/>
+          <p:cNvSpPr txBox="1"/>
+          <p:nvPr/>
         </p:nvSpPr>
         <p:spPr>
           <a:xfrm>
-            <a:off x="1073427" y="2077576"/>
-            <a:ext cx="10084904" cy="3507298"/>
+            <a:off x="1051560" y="2331720"/>
+            <a:ext cx="4846320" cy="411480"/>
+          </a:xfrm>
+          <a:prstGeom prst="rect">
+            <a:avLst/>
+          </a:prstGeom>
+          <a:noFill/>
+        </p:spPr>
+        <p:txBody>
+          <a:bodyPr wrap="square">
+            <a:spAutoFit/>
+          </a:bodyPr>
+          <a:lstStyle/>
+          <a:p>
+            <a:pPr algn="l"/>
+            <a:r>
+              <a:rPr sz="1600" b="1">
+                <a:solidFill>
+                  <a:srgbClr val="CD2D37"/>
+                </a:solidFill>
+                <a:latin typeface="Arial"/>
+              </a:rPr>
+              <a:t>Mínimo (análisis pandas/networkx)</a:t>
+            </a:r>
+          </a:p>
+        </p:txBody>
+      </p:sp>
+      <p:sp>
+        <p:nvSpPr>
+          <p:cNvPr id="5" name="TextBox 4"/>
+          <p:cNvSpPr txBox="1"/>
+          <p:nvPr/>
+        </p:nvSpPr>
+        <p:spPr>
+          <a:xfrm>
+            <a:off x="1051560" y="2788920"/>
+            <a:ext cx="4846320" cy="3200400"/>
+          </a:xfrm>
+          <a:prstGeom prst="rect">
+            <a:avLst/>
+          </a:prstGeom>
+          <a:noFill/>
+        </p:spPr>
+        <p:txBody>
+          <a:bodyPr wrap="square">
+            <a:spAutoFit/>
+          </a:bodyPr>
+          <a:lstStyle/>
+          <a:p>
+            <a:r>
+              <a:rPr sz="1600">
+                <a:solidFill>
+                  <a:srgbClr val="CD2D37"/>
+                </a:solidFill>
+                <a:latin typeface="Arial"/>
+              </a:rPr>
+              <a:t>▸  </a:t>
+            </a:r>
+            <a:r>
+              <a:rPr sz="1600">
+                <a:solidFill>
+                  <a:srgbClr val="465461"/>
+                </a:solidFill>
+                <a:latin typeface="Arial"/>
+              </a:rPr>
+              <a:t>8GB RAM</a:t>
+            </a:r>
+          </a:p>
+          <a:p>
+            <a:r>
+              <a:rPr sz="1600">
+                <a:solidFill>
+                  <a:srgbClr val="CD2D37"/>
+                </a:solidFill>
+                <a:latin typeface="Arial"/>
+              </a:rPr>
+              <a:t>▸  </a:t>
+            </a:r>
+            <a:r>
+              <a:rPr sz="1600">
+                <a:solidFill>
+                  <a:srgbClr val="465461"/>
+                </a:solidFill>
+                <a:latin typeface="Arial"/>
+              </a:rPr>
+              <a:t>Cualquier CPU moderna</a:t>
+            </a:r>
+          </a:p>
+          <a:p>
+            <a:r>
+              <a:rPr sz="1600">
+                <a:solidFill>
+                  <a:srgbClr val="CD2D37"/>
+                </a:solidFill>
+                <a:latin typeface="Arial"/>
+              </a:rPr>
+              <a:t>▸  </a:t>
+            </a:r>
+            <a:r>
+              <a:rPr sz="1600">
+                <a:solidFill>
+                  <a:srgbClr val="465461"/>
+                </a:solidFill>
+                <a:latin typeface="Arial"/>
+              </a:rPr>
+              <a:t>10GB disco libre para datos y modelos</a:t>
+            </a:r>
+          </a:p>
+          <a:p>
+            <a:r>
+              <a:rPr sz="1600">
+                <a:solidFill>
+                  <a:srgbClr val="CD2D37"/>
+                </a:solidFill>
+                <a:latin typeface="Arial"/>
+              </a:rPr>
+              <a:t>▸  </a:t>
+            </a:r>
+            <a:r>
+              <a:rPr sz="1600">
+                <a:solidFill>
+                  <a:srgbClr val="465461"/>
+                </a:solidFill>
+                <a:latin typeface="Arial"/>
+              </a:rPr>
+              <a:t>Python 3.12+</a:t>
+            </a:r>
+          </a:p>
+          <a:p>
+            <a:r>
+              <a:rPr sz="1600">
+                <a:solidFill>
+                  <a:srgbClr val="CD2D37"/>
+                </a:solidFill>
+                <a:latin typeface="Arial"/>
+              </a:rPr>
+              <a:t>▸  </a:t>
+            </a:r>
+            <a:r>
+              <a:rPr sz="1600">
+                <a:solidFill>
+                  <a:srgbClr val="465461"/>
+                </a:solidFill>
+                <a:latin typeface="Arial"/>
+              </a:rPr>
+              <a:t>EDA, grafos, text mining: fluidos</a:t>
+            </a:r>
+          </a:p>
+        </p:txBody>
+      </p:sp>
+      <p:sp>
+        <p:nvSpPr>
+          <p:cNvPr id="6" name="TextBox 5"/>
+          <p:cNvSpPr txBox="1"/>
+          <p:nvPr/>
+        </p:nvSpPr>
+        <p:spPr>
+          <a:xfrm>
+            <a:off x="6217920" y="2331720"/>
+            <a:ext cx="4846320" cy="411480"/>
+          </a:xfrm>
+          <a:prstGeom prst="rect">
+            <a:avLst/>
+          </a:prstGeom>
+          <a:noFill/>
+        </p:spPr>
+        <p:txBody>
+          <a:bodyPr wrap="square">
+            <a:spAutoFit/>
+          </a:bodyPr>
+          <a:lstStyle/>
+          <a:p>
+            <a:pPr algn="l"/>
+            <a:r>
+              <a:rPr sz="1600" b="1">
+                <a:solidFill>
+                  <a:srgbClr val="CD2D37"/>
+                </a:solidFill>
+                <a:latin typeface="Arial"/>
+              </a:rPr>
+              <a:t>Recomendado (embeddings + LLM)</a:t>
+            </a:r>
+          </a:p>
+        </p:txBody>
+      </p:sp>
+      <p:sp>
+        <p:nvSpPr>
+          <p:cNvPr id="7" name="TextBox 6"/>
+          <p:cNvSpPr txBox="1"/>
+          <p:nvPr/>
+        </p:nvSpPr>
+        <p:spPr>
+          <a:xfrm>
+            <a:off x="6217920" y="2788920"/>
+            <a:ext cx="4846320" cy="3200400"/>
+          </a:xfrm>
+          <a:prstGeom prst="rect">
+            <a:avLst/>
+          </a:prstGeom>
+          <a:noFill/>
+        </p:spPr>
+        <p:txBody>
+          <a:bodyPr wrap="square">
+            <a:spAutoFit/>
+          </a:bodyPr>
+          <a:lstStyle/>
+          <a:p>
+            <a:r>
+              <a:rPr sz="1600">
+                <a:solidFill>
+                  <a:srgbClr val="CD2D37"/>
+                </a:solidFill>
+                <a:latin typeface="Arial"/>
+              </a:rPr>
+              <a:t>▸  </a:t>
+            </a:r>
+            <a:r>
+              <a:rPr sz="1600">
+                <a:solidFill>
+                  <a:srgbClr val="465461"/>
+                </a:solidFill>
+                <a:latin typeface="Arial"/>
+              </a:rPr>
+              <a:t>16GB RAM para qwen2.5:14b Q4</a:t>
+            </a:r>
+          </a:p>
+          <a:p>
+            <a:r>
+              <a:rPr sz="1600">
+                <a:solidFill>
+                  <a:srgbClr val="CD2D37"/>
+                </a:solidFill>
+                <a:latin typeface="Arial"/>
+              </a:rPr>
+              <a:t>▸  </a:t>
+            </a:r>
+            <a:r>
+              <a:rPr sz="1600">
+                <a:solidFill>
+                  <a:srgbClr val="465461"/>
+                </a:solidFill>
+                <a:latin typeface="Arial"/>
+              </a:rPr>
+              <a:t>GPU opcional (acelera embeddings ×10)</a:t>
+            </a:r>
+          </a:p>
+          <a:p>
+            <a:r>
+              <a:rPr sz="1600">
+                <a:solidFill>
+                  <a:srgbClr val="CD2D37"/>
+                </a:solidFill>
+                <a:latin typeface="Arial"/>
+              </a:rPr>
+              <a:t>▸  </a:t>
+            </a:r>
+            <a:r>
+              <a:rPr sz="1600">
+                <a:solidFill>
+                  <a:srgbClr val="465461"/>
+                </a:solidFill>
+                <a:latin typeface="Arial"/>
+              </a:rPr>
+              <a:t>25GB disco para todos los modelos</a:t>
+            </a:r>
+          </a:p>
+          <a:p>
+            <a:r>
+              <a:rPr sz="1600">
+                <a:solidFill>
+                  <a:srgbClr val="CD2D37"/>
+                </a:solidFill>
+                <a:latin typeface="Arial"/>
+              </a:rPr>
+              <a:t>▸  </a:t>
+            </a:r>
+            <a:r>
+              <a:rPr sz="1600">
+                <a:solidFill>
+                  <a:srgbClr val="465461"/>
+                </a:solidFill>
+                <a:latin typeface="Arial"/>
+              </a:rPr>
+              <a:t>Embeddings en CPU: lentos pero funcionales</a:t>
+            </a:r>
+          </a:p>
+          <a:p>
+            <a:r>
+              <a:rPr sz="1600">
+                <a:solidFill>
+                  <a:srgbClr val="CD2D37"/>
+                </a:solidFill>
+                <a:latin typeface="Arial"/>
+              </a:rPr>
+              <a:t>▸  </a:t>
+            </a:r>
+            <a:r>
+              <a:rPr sz="1600">
+                <a:solidFill>
+                  <a:srgbClr val="465461"/>
+                </a:solidFill>
+                <a:latin typeface="Arial"/>
+              </a:rPr>
+              <a:t>Sobre muestra pequeña: instantáneo en cualquier hardware</a:t>
+            </a:r>
+          </a:p>
+        </p:txBody>
+      </p:sp>
+    </p:spTree>
+  </p:cSld>
+  <p:clrMapOvr>
+    <a:masterClrMapping/>
+  </p:clrMapOvr>
+</p:sld>
+</file>
+
+<file path=ppt/slides/slide12.xml><?xml version="1.0" encoding="utf-8"?>
+<p:sld xmlns:a="http://schemas.openxmlformats.org/drawingml/2006/main" xmlns:p="http://schemas.openxmlformats.org/presentationml/2006/main" xmlns:r="http://schemas.openxmlformats.org/officeDocument/2006/relationships">
+  <p:cSld>
+    <p:spTree>
+      <p:nvGrpSpPr>
+        <p:cNvPr id="1" name=""/>
+        <p:cNvGrpSpPr/>
+        <p:nvPr/>
+      </p:nvGrpSpPr>
+      <p:grpSpPr/>
+      <p:sp>
+        <p:nvSpPr>
+          <p:cNvPr id="2" name="Text Placeholder 1"/>
+          <p:cNvSpPr>
+            <a:spLocks noGrp="1"/>
+          </p:cNvSpPr>
+          <p:nvPr>
+            <p:ph type="body" idx="10" sz="quarter"/>
+          </p:nvPr>
+        </p:nvSpPr>
+        <p:spPr/>
+        <p:txBody>
+          <a:bodyPr wrap="square"/>
+          <a:lstStyle/>
+          <a:p>
+            <a:pPr algn="ctr"/>
+            <a:r>
+              <a:rPr sz="1700" b="1">
+                <a:solidFill>
+                  <a:srgbClr val="CD2D37"/>
+                </a:solidFill>
+                <a:latin typeface="Arial"/>
+              </a:rPr>
+              <a:t>DEMO EN VIVO</a:t>
+            </a:r>
+          </a:p>
+          <a:p>
+            <a:pPr algn="ctr"/>
+            <a:r>
+              <a:t>Verificación — smoke-test del entorno</a:t>
+            </a:r>
+          </a:p>
+          <a:p>
+            <a:pPr algn="ctr"/>
+            <a:r>
+              <a:rPr sz="1400">
+                <a:solidFill>
+                  <a:srgbClr val="9AA3B5"/>
+                </a:solidFill>
+                <a:latin typeface="Arial"/>
+              </a:rPr>
+              <a:t>bloque3_setup/demo_ecosystem_setup.ipynb</a:t>
+            </a:r>
+          </a:p>
+        </p:txBody>
+      </p:sp>
+      <p:sp>
+        <p:nvSpPr>
+          <p:cNvPr id="3" name="TextBox 2"/>
+          <p:cNvSpPr txBox="1"/>
+          <p:nvPr/>
+        </p:nvSpPr>
+        <p:spPr>
+          <a:xfrm>
+            <a:off x="2505456" y="3657600"/>
+            <a:ext cx="7168896" cy="2560320"/>
+          </a:xfrm>
+          <a:prstGeom prst="rect">
+            <a:avLst/>
+          </a:prstGeom>
+          <a:noFill/>
+        </p:spPr>
+        <p:txBody>
+          <a:bodyPr wrap="square">
+            <a:spAutoFit/>
+          </a:bodyPr>
+          <a:lstStyle/>
+          <a:p>
+            <a:r>
+              <a:rPr sz="1600">
+                <a:solidFill>
+                  <a:srgbClr val="D6DAE2"/>
+                </a:solidFill>
+                <a:latin typeface="Arial"/>
+              </a:rPr>
+              <a:t>1.  Abrir demo_ecosystem_setup.ipynb</a:t>
+            </a:r>
+          </a:p>
+          <a:p>
+            <a:r>
+              <a:rPr sz="1600">
+                <a:solidFill>
+                  <a:srgbClr val="D6DAE2"/>
+                </a:solidFill>
+                <a:latin typeface="Arial"/>
+              </a:rPr>
+              <a:t>2.  1. Dependencias Python — confirmar import de cada librería</a:t>
+            </a:r>
+          </a:p>
+          <a:p>
+            <a:r>
+              <a:rPr sz="1600">
+                <a:solidFill>
+                  <a:srgbClr val="D6DAE2"/>
+                </a:solidFill>
+                <a:latin typeface="Arial"/>
+              </a:rPr>
+              <a:t>3.  2. Modelos Ollama — qwen3-embedding y qwen2.5:14b responden</a:t>
+            </a:r>
+          </a:p>
+          <a:p>
+            <a:r>
+              <a:rPr sz="1600">
+                <a:solidFill>
+                  <a:srgbClr val="D6DAE2"/>
+                </a:solidFill>
+                <a:latin typeface="Arial"/>
+              </a:rPr>
+              <a:t>4.  3. GPU — detectada si existe, CPU si no</a:t>
+            </a:r>
+          </a:p>
+          <a:p>
+            <a:r>
+              <a:rPr sz="1600">
+                <a:solidFill>
+                  <a:srgbClr val="D6DAE2"/>
+                </a:solidFill>
+                <a:latin typeface="Arial"/>
+              </a:rPr>
+              <a:t>5.  4. Smoke-test ChromaDB — guardar y consultar embeddings sintéticos</a:t>
+            </a:r>
+          </a:p>
+        </p:txBody>
+      </p:sp>
+    </p:spTree>
+  </p:cSld>
+  <p:clrMapOvr>
+    <a:masterClrMapping/>
+  </p:clrMapOvr>
+</p:sld>
+</file>
+
+<file path=ppt/slides/slide13.xml><?xml version="1.0" encoding="utf-8"?>
+<p:sld xmlns:a="http://schemas.openxmlformats.org/drawingml/2006/main" xmlns:p="http://schemas.openxmlformats.org/presentationml/2006/main" xmlns:r="http://schemas.openxmlformats.org/officeDocument/2006/relationships">
+  <p:cSld>
+    <p:spTree>
+      <p:nvGrpSpPr>
+        <p:cNvPr id="1" name=""/>
+        <p:cNvGrpSpPr/>
+        <p:nvPr/>
+      </p:nvGrpSpPr>
+      <p:grpSpPr/>
+      <p:sp>
+        <p:nvSpPr>
+          <p:cNvPr id="2" name="Text Placeholder 1"/>
+          <p:cNvSpPr>
+            <a:spLocks noGrp="1"/>
+          </p:cNvSpPr>
+          <p:nvPr>
+            <p:ph type="body" idx="13" sz="quarter"/>
+          </p:nvPr>
+        </p:nvSpPr>
+        <p:spPr/>
+        <p:txBody>
+          <a:bodyPr wrap="square"/>
+          <a:lstStyle/>
+          <a:p>
+            <a:r>
+              <a:t>Preguntas frecuentes y respuestas honestas</a:t>
+            </a:r>
+          </a:p>
+        </p:txBody>
+      </p:sp>
+      <p:sp>
+        <p:nvSpPr>
+          <p:cNvPr id="3" name="Text Placeholder 2"/>
+          <p:cNvSpPr>
+            <a:spLocks noGrp="1"/>
+          </p:cNvSpPr>
+          <p:nvPr>
+            <p:ph type="body" idx="16" sz="quarter"/>
+          </p:nvPr>
+        </p:nvSpPr>
+        <p:spPr>
+          <a:xfrm>
+            <a:off x="1073427" y="2214736"/>
+            <a:ext cx="10084904" cy="3370138"/>
           </a:xfrm>
         </p:spPr>
         <p:txBody>
@@ -5456,17 +6044,12 @@
           </a:p>
           <a:p>
             <a:r>
-              <a:t>¿Qué pasa si no tengo GPU? → CPU funciona, solo con muestras pequeñas en demo</a:t>
+              <a:t>¿Qué pasa si no tengo GPU? → CPU funciona para EDA y muestras pequeñas</a:t>
             </a:r>
           </a:p>
           <a:p>
             <a:r>
               <a:t>¿Puedo correr esto en Colab? → Técnicamente sí, pero no con datos reales</a:t>
-            </a:r>
-          </a:p>
-          <a:p>
-            <a:r>
-              <a:t>¿Cuánto tiempo tarda el pipeline completo? → 1-2 días con GPU para el dataset grande</a:t>
             </a:r>
           </a:p>
           <a:p>
@@ -5511,7 +6094,7 @@
           <a:p>
             <a:pPr algn="ctr"/>
             <a:r>
-              <a:rPr sz="1300" b="1">
+              <a:rPr sz="1700" b="1">
                 <a:solidFill>
                   <a:srgbClr val="CD2D37"/>
                 </a:solidFill>
@@ -5523,7 +6106,7 @@
           <a:p>
             <a:pPr algn="ctr"/>
             <a:r>
-              <a:t>El entorno</a:t>
+              <a:t>Gestión de dependencias con uv</a:t>
             </a:r>
           </a:p>
           <a:p>
@@ -5535,7 +6118,7 @@
                 </a:solidFill>
                 <a:latin typeface="Arial"/>
               </a:rPr>
-              <a:t>uv + Ollama + Jupyter — sin magia, sin Docker</a:t>
+              <a:t>Sin magia, sin Docker</a:t>
             </a:r>
           </a:p>
         </p:txBody>
@@ -5589,7 +6172,12 @@
             <p:ph type="body" idx="16" sz="quarter"/>
           </p:nvPr>
         </p:nvSpPr>
-        <p:spPr/>
+        <p:spPr>
+          <a:xfrm>
+            <a:off x="1073427" y="1711816"/>
+            <a:ext cx="10084904" cy="3873058"/>
+          </a:xfrm>
+        </p:spPr>
         <p:txBody>
           <a:bodyPr wrap="square"/>
           <a:lstStyle/>
@@ -5610,7 +6198,7 @@
           </a:p>
           <a:p>
             <a:r>
-              <a:t>Reproducible en cualquier máquina con Python 3.10+ sin configuración extra</a:t>
+              <a:t>Reproducible en cualquier máquina con Python 3.12+ sin configuración extra</a:t>
             </a:r>
           </a:p>
           <a:p>
@@ -5659,7 +6247,7 @@
           <a:lstStyle/>
           <a:p>
             <a:r>
-              <a:t>Setup completo — 4 comandos</a:t>
+              <a:t>Instalación paso a paso</a:t>
             </a:r>
           </a:p>
         </p:txBody>
@@ -5689,7 +6277,7 @@
         </p:nvSpPr>
         <p:spPr>
           <a:xfrm>
-            <a:off x="1051560" y="2194560"/>
+            <a:off x="1051560" y="1828800"/>
             <a:ext cx="10058400" cy="502920"/>
           </a:xfrm>
           <a:prstGeom prst="rect">
@@ -5724,8 +6312,8 @@
         </p:nvSpPr>
         <p:spPr>
           <a:xfrm>
-            <a:off x="1005840" y="2743200"/>
-            <a:ext cx="10149840" cy="3063240"/>
+            <a:off x="1005840" y="2377440"/>
+            <a:ext cx="10149840" cy="3429000"/>
           </a:xfrm>
           <a:prstGeom prst="rect">
             <a:avLst/>
@@ -5767,8 +6355,8 @@
         </p:nvSpPr>
         <p:spPr>
           <a:xfrm>
-            <a:off x="1188720" y="2880360"/>
-            <a:ext cx="9784080" cy="2788920"/>
+            <a:off x="1188720" y="2514600"/>
+            <a:ext cx="9784080" cy="3154680"/>
           </a:xfrm>
           <a:prstGeom prst="rect">
             <a:avLst/>
@@ -5792,10 +6380,7 @@
 git clone &lt;repo-url&gt; &amp;&amp; cd csbc26
 # 2. Instalar dependencias Python
 uv sync
-# 3. Descargar modelos Ollama (hacerlo antes de la clase)
-ollama pull qwen3-embedding
-ollama pull qwen2.5:14b
-# 4. Arrancar Jupyter
+# 3. Arrancar Jupyter dentro del entorno gestionado por uv
 uv run jupyter notebook</a:t>
             </a:r>
           </a:p>
@@ -5831,7 +6416,7 @@
                 </a:solidFill>
                 <a:latin typeface="Arial"/>
               </a:rPr>
-              <a:t>ℹ  Los modelos pesan ~9GB en total. Descargarlos la noche antes, no en vivo.</a:t>
+              <a:t>ℹ  Sin git (aulas con solo navegador): descargar el repo como ZIP desde GitHub.</a:t>
             </a:r>
           </a:p>
         </p:txBody>
@@ -5861,7 +6446,7 @@
             <a:spLocks noGrp="1"/>
           </p:cNvSpPr>
           <p:nvPr>
-            <p:ph type="body" idx="13" sz="quarter"/>
+            <p:ph type="body" idx="10" sz="quarter"/>
           </p:nvPr>
         </p:nvSpPr>
         <p:spPr/>
@@ -5869,251 +6454,33 @@
           <a:bodyPr wrap="square"/>
           <a:lstStyle/>
           <a:p>
-            <a:r>
-              <a:t>Requisitos de hardware — no hace falta potencia</a:t>
-            </a:r>
-          </a:p>
-        </p:txBody>
-      </p:sp>
-      <p:sp>
-        <p:nvSpPr>
-          <p:cNvPr id="3" name="Text Placeholder 2"/>
-          <p:cNvSpPr>
-            <a:spLocks noGrp="1"/>
-          </p:cNvSpPr>
-          <p:nvPr>
-            <p:ph type="body" idx="16" sz="quarter"/>
-          </p:nvPr>
-        </p:nvSpPr>
-        <p:spPr/>
-        <p:txBody>
-          <a:bodyPr/>
-          <a:lstStyle/>
-          <a:p/>
-        </p:txBody>
-      </p:sp>
-      <p:sp>
-        <p:nvSpPr>
-          <p:cNvPr id="4" name="TextBox 3"/>
-          <p:cNvSpPr txBox="1"/>
-          <p:nvPr/>
-        </p:nvSpPr>
-        <p:spPr>
-          <a:xfrm>
-            <a:off x="1051560" y="2194560"/>
-            <a:ext cx="4846320" cy="411480"/>
-          </a:xfrm>
-          <a:prstGeom prst="rect">
-            <a:avLst/>
-          </a:prstGeom>
-          <a:noFill/>
-        </p:spPr>
-        <p:txBody>
-          <a:bodyPr wrap="square">
-            <a:spAutoFit/>
-          </a:bodyPr>
-          <a:lstStyle/>
-          <a:p>
-            <a:pPr algn="l"/>
-            <a:r>
-              <a:rPr sz="1600" b="1">
+            <a:pPr algn="ctr"/>
+            <a:r>
+              <a:rPr sz="1700" b="1">
                 <a:solidFill>
                   <a:srgbClr val="CD2D37"/>
                 </a:solidFill>
                 <a:latin typeface="Arial"/>
               </a:rPr>
-              <a:t>Mínimo (análisis pandas/networkx)</a:t>
-            </a:r>
-          </a:p>
-        </p:txBody>
-      </p:sp>
-      <p:sp>
-        <p:nvSpPr>
-          <p:cNvPr id="5" name="TextBox 4"/>
-          <p:cNvSpPr txBox="1"/>
-          <p:nvPr/>
-        </p:nvSpPr>
-        <p:spPr>
-          <a:xfrm>
-            <a:off x="1051560" y="2651760"/>
-            <a:ext cx="4846320" cy="3337560"/>
-          </a:xfrm>
-          <a:prstGeom prst="rect">
-            <a:avLst/>
-          </a:prstGeom>
-          <a:noFill/>
-        </p:spPr>
-        <p:txBody>
-          <a:bodyPr wrap="square">
-            <a:spAutoFit/>
-          </a:bodyPr>
-          <a:lstStyle/>
-          <a:p>
+              <a:t>SECCIÓN 2</a:t>
+            </a:r>
+          </a:p>
+          <a:p>
+            <a:pPr algn="ctr"/>
+            <a:r>
+              <a:t>Ollama</a:t>
+            </a:r>
+          </a:p>
+          <a:p>
+            <a:pPr algn="ctr"/>
             <a:r>
               <a:rPr sz="1600">
                 <a:solidFill>
-                  <a:srgbClr val="465461"/>
+                  <a:srgbClr val="D6DAE2"/>
                 </a:solidFill>
                 <a:latin typeface="Arial"/>
               </a:rPr>
-              <a:t>▸  8GB RAM</a:t>
-            </a:r>
-          </a:p>
-          <a:p>
-            <a:r>
-              <a:rPr sz="1600">
-                <a:solidFill>
-                  <a:srgbClr val="465461"/>
-                </a:solidFill>
-                <a:latin typeface="Arial"/>
-              </a:rPr>
-              <a:t>▸  Cualquier CPU moderna</a:t>
-            </a:r>
-          </a:p>
-          <a:p>
-            <a:r>
-              <a:rPr sz="1600">
-                <a:solidFill>
-                  <a:srgbClr val="465461"/>
-                </a:solidFill>
-                <a:latin typeface="Arial"/>
-              </a:rPr>
-              <a:t>▸  10GB disco libre para datos y modelos</a:t>
-            </a:r>
-          </a:p>
-          <a:p>
-            <a:r>
-              <a:rPr sz="1600">
-                <a:solidFill>
-                  <a:srgbClr val="465461"/>
-                </a:solidFill>
-                <a:latin typeface="Arial"/>
-              </a:rPr>
-              <a:t>▸  Python 3.10+</a:t>
-            </a:r>
-          </a:p>
-          <a:p>
-            <a:r>
-              <a:rPr sz="1600">
-                <a:solidFill>
-                  <a:srgbClr val="465461"/>
-                </a:solidFill>
-                <a:latin typeface="Arial"/>
-              </a:rPr>
-              <a:t>▸  EDA, grafos, text mining: fluidos</a:t>
-            </a:r>
-          </a:p>
-        </p:txBody>
-      </p:sp>
-      <p:sp>
-        <p:nvSpPr>
-          <p:cNvPr id="6" name="TextBox 5"/>
-          <p:cNvSpPr txBox="1"/>
-          <p:nvPr/>
-        </p:nvSpPr>
-        <p:spPr>
-          <a:xfrm>
-            <a:off x="6217920" y="2194560"/>
-            <a:ext cx="4846320" cy="411480"/>
-          </a:xfrm>
-          <a:prstGeom prst="rect">
-            <a:avLst/>
-          </a:prstGeom>
-          <a:noFill/>
-        </p:spPr>
-        <p:txBody>
-          <a:bodyPr wrap="square">
-            <a:spAutoFit/>
-          </a:bodyPr>
-          <a:lstStyle/>
-          <a:p>
-            <a:pPr algn="l"/>
-            <a:r>
-              <a:rPr sz="1600" b="1">
-                <a:solidFill>
-                  <a:srgbClr val="CD2D37"/>
-                </a:solidFill>
-                <a:latin typeface="Arial"/>
-              </a:rPr>
-              <a:t>Recomendado (embeddings + LLM)</a:t>
-            </a:r>
-          </a:p>
-        </p:txBody>
-      </p:sp>
-      <p:sp>
-        <p:nvSpPr>
-          <p:cNvPr id="7" name="TextBox 6"/>
-          <p:cNvSpPr txBox="1"/>
-          <p:nvPr/>
-        </p:nvSpPr>
-        <p:spPr>
-          <a:xfrm>
-            <a:off x="6217920" y="2651760"/>
-            <a:ext cx="4846320" cy="3337560"/>
-          </a:xfrm>
-          <a:prstGeom prst="rect">
-            <a:avLst/>
-          </a:prstGeom>
-          <a:noFill/>
-        </p:spPr>
-        <p:txBody>
-          <a:bodyPr wrap="square">
-            <a:spAutoFit/>
-          </a:bodyPr>
-          <a:lstStyle/>
-          <a:p>
-            <a:r>
-              <a:rPr sz="1600">
-                <a:solidFill>
-                  <a:srgbClr val="465461"/>
-                </a:solidFill>
-                <a:latin typeface="Arial"/>
-              </a:rPr>
-              <a:t>▸  16GB RAM para qwen2.5:14b Q4</a:t>
-            </a:r>
-          </a:p>
-          <a:p>
-            <a:r>
-              <a:rPr sz="1600">
-                <a:solidFill>
-                  <a:srgbClr val="465461"/>
-                </a:solidFill>
-                <a:latin typeface="Arial"/>
-              </a:rPr>
-              <a:t>▸  GPU opcional (acelera embeddings ×10)</a:t>
-            </a:r>
-          </a:p>
-          <a:p>
-            <a:r>
-              <a:rPr sz="1600">
-                <a:solidFill>
-                  <a:srgbClr val="465461"/>
-                </a:solidFill>
-                <a:latin typeface="Arial"/>
-              </a:rPr>
-              <a:t>▸  25GB disco para todos los modelos</a:t>
-            </a:r>
-          </a:p>
-          <a:p>
-            <a:r>
-              <a:rPr sz="1600">
-                <a:solidFill>
-                  <a:srgbClr val="465461"/>
-                </a:solidFill>
-                <a:latin typeface="Arial"/>
-              </a:rPr>
-              <a:t>▸  Embeddings en CPU: lentos pero funcionales</a:t>
-            </a:r>
-          </a:p>
-          <a:p>
-            <a:r>
-              <a:rPr sz="1600">
-                <a:solidFill>
-                  <a:srgbClr val="465461"/>
-                </a:solidFill>
-                <a:latin typeface="Arial"/>
-              </a:rPr>
-              <a:t>▸  Demo con muestra pequeña: instantánea en cualquier hardware</a:t>
+              <a:t>El LLM que corre en tu máquina</a:t>
             </a:r>
           </a:p>
         </p:txBody>
@@ -6152,7 +6519,7 @@
           <a:lstStyle/>
           <a:p>
             <a:r>
-              <a:t>La estrategia de la demo en vivo</a:t>
+              <a:t>¿Qué es Ollama?</a:t>
             </a:r>
           </a:p>
         </p:txBody>
@@ -6169,8 +6536,8 @@
         </p:nvSpPr>
         <p:spPr>
           <a:xfrm>
-            <a:off x="1073427" y="2077576"/>
-            <a:ext cx="10084904" cy="3507298"/>
+            <a:off x="1073427" y="1711816"/>
+            <a:ext cx="10084904" cy="3873058"/>
           </a:xfrm>
         </p:spPr>
         <p:txBody>
@@ -6178,27 +6545,27 @@
           <a:lstStyle/>
           <a:p>
             <a:r>
-              <a:t>Los embeddings del dataset completo están precomputados — no esperamos en clase</a:t>
-            </a:r>
-          </a:p>
-          <a:p>
-            <a:r>
-              <a:t>Mostramos el código que los generó y lo ejecutamos sobre una muestra de 100 usuarios</a:t>
-            </a:r>
-          </a:p>
-          <a:p>
-            <a:r>
-              <a:t>Los modelos Ollama ya están descargados — mostramos el pull pero lo cortamos</a:t>
-            </a:r>
-          </a:p>
-          <a:p>
-            <a:r>
-              <a:t>Esto es el mismo truco de los videotutoriales: el proceso es real, la espera es editada</a:t>
-            </a:r>
-          </a:p>
-          <a:p>
-            <a:r>
-              <a:t>El objetivo no es la velocidad — es que el pipeline completo sea visible y reproducible</a:t>
+              <a:t>Runtime que corre LLMs directamente en tu máquina, sin API externa</a:t>
+            </a:r>
+          </a:p>
+          <a:p>
+            <a:r>
+              <a:t>Descarga el modelo cuantizado una vez, lo carga en memoria</a:t>
+            </a:r>
+          </a:p>
+          <a:p>
+            <a:r>
+              <a:t>Expone un servidor local en http://localhost:11434</a:t>
+            </a:r>
+          </a:p>
+          <a:p>
+            <a:r>
+              <a:t>Cualquier programa Python le hace peticiones, igual que a una API en la nube</a:t>
+            </a:r>
+          </a:p>
+          <a:p>
+            <a:r>
+              <a:t>Razón de ser del curso: un leak sensible no puede pasar por infraestructura de terceros</a:t>
             </a:r>
           </a:p>
         </p:txBody>
@@ -6228,7 +6595,7 @@
             <a:spLocks noGrp="1"/>
           </p:cNvSpPr>
           <p:nvPr>
-            <p:ph type="body" idx="10" sz="quarter"/>
+            <p:ph type="body" idx="13" sz="quarter"/>
           </p:nvPr>
         </p:nvSpPr>
         <p:spPr/>
@@ -6236,33 +6603,301 @@
           <a:bodyPr wrap="square"/>
           <a:lstStyle/>
           <a:p>
-            <a:pPr algn="ctr"/>
-            <a:r>
-              <a:rPr sz="1300" b="1">
+            <a:r>
+              <a:t>Los dos modelos que usamos</a:t>
+            </a:r>
+          </a:p>
+        </p:txBody>
+      </p:sp>
+      <p:sp>
+        <p:nvSpPr>
+          <p:cNvPr id="3" name="Text Placeholder 2"/>
+          <p:cNvSpPr>
+            <a:spLocks noGrp="1"/>
+          </p:cNvSpPr>
+          <p:nvPr>
+            <p:ph type="body" idx="16" sz="quarter"/>
+          </p:nvPr>
+        </p:nvSpPr>
+        <p:spPr/>
+        <p:txBody>
+          <a:bodyPr/>
+          <a:lstStyle/>
+          <a:p/>
+        </p:txBody>
+      </p:sp>
+      <p:sp>
+        <p:nvSpPr>
+          <p:cNvPr id="4" name="TextBox 3"/>
+          <p:cNvSpPr txBox="1"/>
+          <p:nvPr/>
+        </p:nvSpPr>
+        <p:spPr>
+          <a:xfrm>
+            <a:off x="1051560" y="1828800"/>
+            <a:ext cx="4846320" cy="411480"/>
+          </a:xfrm>
+          <a:prstGeom prst="rect">
+            <a:avLst/>
+          </a:prstGeom>
+          <a:noFill/>
+        </p:spPr>
+        <p:txBody>
+          <a:bodyPr wrap="square">
+            <a:spAutoFit/>
+          </a:bodyPr>
+          <a:lstStyle/>
+          <a:p>
+            <a:pPr algn="l"/>
+            <a:r>
+              <a:rPr sz="1600" b="1">
                 <a:solidFill>
                   <a:srgbClr val="CD2D37"/>
                 </a:solidFill>
                 <a:latin typeface="Arial"/>
               </a:rPr>
-              <a:t>SECCIÓN 2</a:t>
-            </a:r>
-          </a:p>
-          <a:p>
-            <a:pPr algn="ctr"/>
-            <a:r>
-              <a:t>El pipeline completo</a:t>
-            </a:r>
-          </a:p>
-          <a:p>
-            <a:pPr algn="ctr"/>
+              <a:t>qwen3-embedding</a:t>
+            </a:r>
+          </a:p>
+        </p:txBody>
+      </p:sp>
+      <p:sp>
+        <p:nvSpPr>
+          <p:cNvPr id="5" name="TextBox 4"/>
+          <p:cNvSpPr txBox="1"/>
+          <p:nvPr/>
+        </p:nvSpPr>
+        <p:spPr>
+          <a:xfrm>
+            <a:off x="1051560" y="2286000"/>
+            <a:ext cx="4846320" cy="3703320"/>
+          </a:xfrm>
+          <a:prstGeom prst="rect">
+            <a:avLst/>
+          </a:prstGeom>
+          <a:noFill/>
+        </p:spPr>
+        <p:txBody>
+          <a:bodyPr wrap="square">
+            <a:spAutoFit/>
+          </a:bodyPr>
+          <a:lstStyle/>
+          <a:p>
             <a:r>
               <a:rPr sz="1600">
                 <a:solidFill>
-                  <a:srgbClr val="D6DAE2"/>
+                  <a:srgbClr val="CD2D37"/>
                 </a:solidFill>
                 <a:latin typeface="Arial"/>
               </a:rPr>
-              <a:t>De dump SQL a visualización — celda por celda</a:t>
+              <a:t>▸  </a:t>
+            </a:r>
+            <a:r>
+              <a:rPr sz="1600">
+                <a:solidFill>
+                  <a:srgbClr val="465461"/>
+                </a:solidFill>
+                <a:latin typeface="Arial"/>
+              </a:rPr>
+              <a:t>Genera embeddings: texto → vector numérico</a:t>
+            </a:r>
+          </a:p>
+          <a:p>
+            <a:r>
+              <a:rPr sz="1600">
+                <a:solidFill>
+                  <a:srgbClr val="CD2D37"/>
+                </a:solidFill>
+                <a:latin typeface="Arial"/>
+              </a:rPr>
+              <a:t>▸  </a:t>
+            </a:r>
+            <a:r>
+              <a:rPr sz="1600">
+                <a:solidFill>
+                  <a:srgbClr val="465461"/>
+                </a:solidFill>
+                <a:latin typeface="Arial"/>
+              </a:rPr>
+              <a:t>Clustering de usuarios por comportamiento</a:t>
+            </a:r>
+          </a:p>
+          <a:p>
+            <a:r>
+              <a:rPr sz="1600">
+                <a:solidFill>
+                  <a:srgbClr val="CD2D37"/>
+                </a:solidFill>
+                <a:latin typeface="Arial"/>
+              </a:rPr>
+              <a:t>▸  </a:t>
+            </a:r>
+            <a:r>
+              <a:rPr sz="1600">
+                <a:solidFill>
+                  <a:srgbClr val="465461"/>
+                </a:solidFill>
+                <a:latin typeface="Arial"/>
+              </a:rPr>
+              <a:t>Estilometría computacional</a:t>
+            </a:r>
+          </a:p>
+          <a:p>
+            <a:r>
+              <a:rPr sz="1600">
+                <a:solidFill>
+                  <a:srgbClr val="CD2D37"/>
+                </a:solidFill>
+                <a:latin typeface="Arial"/>
+              </a:rPr>
+              <a:t>▸  </a:t>
+            </a:r>
+            <a:r>
+              <a:rPr sz="1600">
+                <a:solidFill>
+                  <a:srgbClr val="465461"/>
+                </a:solidFill>
+                <a:latin typeface="Arial"/>
+              </a:rPr>
+              <a:t>Correlación cross-foro semántica (Bloque 2)</a:t>
+            </a:r>
+          </a:p>
+        </p:txBody>
+      </p:sp>
+      <p:sp>
+        <p:nvSpPr>
+          <p:cNvPr id="6" name="TextBox 5"/>
+          <p:cNvSpPr txBox="1"/>
+          <p:nvPr/>
+        </p:nvSpPr>
+        <p:spPr>
+          <a:xfrm>
+            <a:off x="6217920" y="1828800"/>
+            <a:ext cx="4846320" cy="411480"/>
+          </a:xfrm>
+          <a:prstGeom prst="rect">
+            <a:avLst/>
+          </a:prstGeom>
+          <a:noFill/>
+        </p:spPr>
+        <p:txBody>
+          <a:bodyPr wrap="square">
+            <a:spAutoFit/>
+          </a:bodyPr>
+          <a:lstStyle/>
+          <a:p>
+            <a:pPr algn="l"/>
+            <a:r>
+              <a:rPr sz="1600" b="1">
+                <a:solidFill>
+                  <a:srgbClr val="CD2D37"/>
+                </a:solidFill>
+                <a:latin typeface="Arial"/>
+              </a:rPr>
+              <a:t>qwen2.5:14b</a:t>
+            </a:r>
+          </a:p>
+        </p:txBody>
+      </p:sp>
+      <p:sp>
+        <p:nvSpPr>
+          <p:cNvPr id="7" name="TextBox 6"/>
+          <p:cNvSpPr txBox="1"/>
+          <p:nvPr/>
+        </p:nvSpPr>
+        <p:spPr>
+          <a:xfrm>
+            <a:off x="6217920" y="2286000"/>
+            <a:ext cx="4846320" cy="3703320"/>
+          </a:xfrm>
+          <a:prstGeom prst="rect">
+            <a:avLst/>
+          </a:prstGeom>
+          <a:noFill/>
+        </p:spPr>
+        <p:txBody>
+          <a:bodyPr wrap="square">
+            <a:spAutoFit/>
+          </a:bodyPr>
+          <a:lstStyle/>
+          <a:p>
+            <a:r>
+              <a:rPr sz="1600">
+                <a:solidFill>
+                  <a:srgbClr val="CD2D37"/>
+                </a:solidFill>
+                <a:latin typeface="Arial"/>
+              </a:rPr>
+              <a:t>▸  </a:t>
+            </a:r>
+            <a:r>
+              <a:rPr sz="1600">
+                <a:solidFill>
+                  <a:srgbClr val="465461"/>
+                </a:solidFill>
+                <a:latin typeface="Arial"/>
+              </a:rPr>
+              <a:t>LLM generativo, no embeddings</a:t>
+            </a:r>
+          </a:p>
+          <a:p>
+            <a:r>
+              <a:rPr sz="1600">
+                <a:solidFill>
+                  <a:srgbClr val="CD2D37"/>
+                </a:solidFill>
+                <a:latin typeface="Arial"/>
+              </a:rPr>
+              <a:t>▸  </a:t>
+            </a:r>
+            <a:r>
+              <a:rPr sz="1600">
+                <a:solidFill>
+                  <a:srgbClr val="465461"/>
+                </a:solidFill>
+                <a:latin typeface="Arial"/>
+              </a:rPr>
+              <a:t>NER en dominio específico</a:t>
+            </a:r>
+          </a:p>
+          <a:p>
+            <a:r>
+              <a:rPr sz="1600">
+                <a:solidFill>
+                  <a:srgbClr val="CD2D37"/>
+                </a:solidFill>
+                <a:latin typeface="Arial"/>
+              </a:rPr>
+              <a:t>▸  </a:t>
+            </a:r>
+            <a:r>
+              <a:rPr sz="1600">
+                <a:solidFill>
+                  <a:srgbClr val="465461"/>
+                </a:solidFill>
+                <a:latin typeface="Arial"/>
+              </a:rPr>
+              <a:t>Clasificación de posts</a:t>
+            </a:r>
+          </a:p>
+          <a:p>
+            <a:r>
+              <a:rPr sz="1600">
+                <a:solidFill>
+                  <a:srgbClr val="CD2D37"/>
+                </a:solidFill>
+                <a:latin typeface="Arial"/>
+              </a:rPr>
+              <a:t>▸  </a:t>
+            </a:r>
+            <a:r>
+              <a:rPr sz="1600">
+                <a:solidFill>
+                  <a:srgbClr val="465461"/>
+                </a:solidFill>
+                <a:latin typeface="Arial"/>
+              </a:rPr>
+              <a:t>Perfilado de roles (Bloque 2 y casos prácticos)</a:t>
             </a:r>
           </a:p>
         </p:txBody>
@@ -6301,7 +6936,7 @@
           <a:lstStyle/>
           <a:p>
             <a:r>
-              <a:t>Las 5 fases del pipeline</a:t>
+              <a:t>Cómo se usa desde Python y desde terminal</a:t>
             </a:r>
           </a:p>
         </p:txBody>
@@ -6316,38 +6951,33 @@
             <p:ph type="body" idx="16" sz="quarter"/>
           </p:nvPr>
         </p:nvSpPr>
-        <p:spPr/>
+        <p:spPr>
+          <a:xfrm>
+            <a:off x="1073427" y="2214736"/>
+            <a:ext cx="10084904" cy="3370138"/>
+          </a:xfrm>
+        </p:spPr>
         <p:txBody>
           <a:bodyPr wrap="square"/>
           <a:lstStyle/>
           <a:p>
             <a:r>
-              <a:t>1. Load: load_forum() con auto-detección de versión y encoding</a:t>
-            </a:r>
-          </a:p>
-          <a:p>
-            <a:r>
-              <a:t>2. Normalize: limpieza de usuarios, deduplicación, normalización de fechas a UTC</a:t>
-            </a:r>
-          </a:p>
-          <a:p>
-            <a:r>
-              <a:t>3. Analyze: estadística descriptiva, red de interacciones, análisis temporal</a:t>
-            </a:r>
-          </a:p>
-          <a:p>
-            <a:r>
-              <a:t>4. Embed: generación de embeddings por usuario (precomputados o muestra en vivo)</a:t>
-            </a:r>
-          </a:p>
-          <a:p>
-            <a:r>
-              <a:t>5. Visualize: grafos, heatmaps temporales, clusters UMAP con Plotly interactivo</a:t>
-            </a:r>
-          </a:p>
-          <a:p>
-            <a:r>
-              <a:t>Todo desde un único notebook, celda por celda, sin cambiar de herramienta</a:t>
+              <a:t>Librería ollama (instalada por uv sync): cliente delgado sobre el servidor local</a:t>
+            </a:r>
+          </a:p>
+          <a:p>
+            <a:r>
+              <a:t>ollama.chat(model=..., messages=...) y ollama.embed(model=..., input=...)</a:t>
+            </a:r>
+          </a:p>
+          <a:p>
+            <a:r>
+              <a:t>Usado en src/embeddings.py y src/utils.py a lo largo de todo el curso</a:t>
+            </a:r>
+          </a:p>
+          <a:p>
+            <a:r>
+              <a:t>Para limpieza puntual sin código: CLI llm + plugin de Ollama, pipeable desde terminal</a:t>
             </a:r>
           </a:p>
         </p:txBody>
@@ -6377,7 +7007,7 @@
             <a:spLocks noGrp="1"/>
           </p:cNvSpPr>
           <p:nvPr>
-            <p:ph type="body" idx="13" sz="quarter"/>
+            <p:ph type="body" idx="10" sz="quarter"/>
           </p:nvPr>
         </p:nvSpPr>
         <p:spPr/>
@@ -6385,59 +7015,33 @@
           <a:bodyPr wrap="square"/>
           <a:lstStyle/>
           <a:p>
-            <a:r>
-              <a:t>El dataset de demo — criterios de elección</a:t>
-            </a:r>
-          </a:p>
-        </p:txBody>
-      </p:sp>
-      <p:sp>
-        <p:nvSpPr>
-          <p:cNvPr id="3" name="Text Placeholder 2"/>
-          <p:cNvSpPr>
-            <a:spLocks noGrp="1"/>
-          </p:cNvSpPr>
-          <p:nvPr>
-            <p:ph type="body" idx="16" sz="quarter"/>
-          </p:nvPr>
-        </p:nvSpPr>
-        <p:spPr>
-          <a:xfrm>
-            <a:off x="1073427" y="2077576"/>
-            <a:ext cx="10084904" cy="3507298"/>
-          </a:xfrm>
-        </p:spPr>
-        <p:txBody>
-          <a:bodyPr wrap="square"/>
-          <a:lstStyle/>
-          <a:p>
-            <a:r>
-              <a:t>Pequeño y autocontenido — carga en segundos, sin problemas de RAM</a:t>
-            </a:r>
-          </a:p>
-          <a:p>
-            <a:r>
-              <a:t>Schema limpio: parser estándar sin variantes problemáticas</a:t>
-            </a:r>
-          </a:p>
-          <a:p>
-            <a:r>
-              <a:t>Suficientemente representativo: usuarios, posts, fechas, subforos</a:t>
-            </a:r>
-          </a:p>
-          <a:p>
-            <a:r>
-              <a:t>No requiere descarga de datos pesados para seguir la demo en clase</a:t>
-            </a:r>
-          </a:p>
-          <a:p>
-            <a:r>
-              <a:t>La estructura es idéntica a la de cualquier otro caso — el pipeline es generalizable</a:t>
-            </a:r>
-          </a:p>
-          <a:p>
-            <a:r>
-              <a:t>Los resultados son visibles en tiempo real sin esperar precomputo</a:t>
+            <a:pPr algn="ctr"/>
+            <a:r>
+              <a:rPr sz="1700" b="1">
+                <a:solidFill>
+                  <a:srgbClr val="CD2D37"/>
+                </a:solidFill>
+                <a:latin typeface="Arial"/>
+              </a:rPr>
+              <a:t>SECCIÓN 3</a:t>
+            </a:r>
+          </a:p>
+          <a:p>
+            <a:pPr algn="ctr"/>
+            <a:r>
+              <a:t>El stack de análisis</a:t>
+            </a:r>
+          </a:p>
+          <a:p>
+            <a:pPr algn="ctr"/>
+            <a:r>
+              <a:rPr sz="1600">
+                <a:solidFill>
+                  <a:srgbClr val="D6DAE2"/>
+                </a:solidFill>
+                <a:latin typeface="Arial"/>
+              </a:rPr>
+              <a:t>Qué instala uv sync y para qué sirve cada pieza</a:t>
             </a:r>
           </a:p>
         </p:txBody>

--- a/bloque3_setup/csbc26_b3_setup.pptx
+++ b/bloque3_setup/csbc26_b3_setup.pptx
@@ -21,6 +21,16 @@
     <p:sldId id="266" r:id="rId21"/>
     <p:sldId id="267" r:id="rId22"/>
     <p:sldId id="268" r:id="rId23"/>
+    <p:sldId id="269" r:id="rId24"/>
+    <p:sldId id="270" r:id="rId25"/>
+    <p:sldId id="271" r:id="rId26"/>
+    <p:sldId id="272" r:id="rId27"/>
+    <p:sldId id="273" r:id="rId28"/>
+    <p:sldId id="274" r:id="rId29"/>
+    <p:sldId id="275" r:id="rId30"/>
+    <p:sldId id="276" r:id="rId31"/>
+    <p:sldId id="277" r:id="rId32"/>
+    <p:sldId id="278" r:id="rId33"/>
   </p:sldIdLst>
   <p:sldSz cx="12192000" cy="6858000"/>
   <p:notesSz cx="6858000" cy="9144000"/>
@@ -729,7 +739,7 @@
           </a:p>
           <a:p>
             <a:r>
-              <a:t>→ uv, Ollama, librerías clave</a:t>
+              <a:t>→ uv, Ollama, modelos, stack de librerías</a:t>
             </a:r>
           </a:p>
         </p:txBody>
@@ -799,22 +809,22 @@
           <a:lstStyle/>
           <a:p>
             <a:r>
-              <a:t>18 dependencias en total, esto es el grupo específico del curso</a:t>
-            </a:r>
-          </a:p>
-          <a:p>
-            <a:r>
-              <a:t>pandas/matplotlib/sklearn ya los conocen</a:t>
-            </a:r>
-          </a:p>
-          <a:p>
-            <a:r>
-              <a:t>→ cada una resuelve un problema puntual del pipeline</a:t>
-            </a:r>
-          </a:p>
-          <a:p>
-            <a:r>
-              <a:t>chromadb y umap-learn son las menos obvias, detenerse ahí</a:t>
+              <a:t>Dos modelos, dos propósitos, no se solapan</a:t>
+            </a:r>
+          </a:p>
+          <a:p>
+            <a:r>
+              <a:t>qwen3-embedding: vectores. qwen2.5:14b: texto→texto</a:t>
+            </a:r>
+          </a:p>
+          <a:p>
+            <a:r>
+              <a:t>→ ~9GB entre los dos, descargar la noche antes</a:t>
+            </a:r>
+          </a:p>
+          <a:p>
+            <a:r>
+              <a:t>ollama pull &lt;modelo&gt; — mostrar y cortar con Ctrl+C</a:t>
             </a:r>
           </a:p>
         </p:txBody>
@@ -884,22 +894,22 @@
           <a:lstStyle/>
           <a:p>
             <a:r>
-              <a:t>Tranquilizar: no hace falta gama alta</a:t>
-            </a:r>
-          </a:p>
-          <a:p>
-            <a:r>
-              <a:t>8GB RAM + CPU moderna = suficiente para pandas/networkx</a:t>
-            </a:r>
-          </a:p>
-          <a:p>
-            <a:r>
-              <a:t>Derecha: solo si embeddings + LLM local</a:t>
-            </a:r>
-          </a:p>
-          <a:p>
-            <a:r>
-              <a:t>→ sin GPU funciona, más lento, sobre muestra es instantáneo</a:t>
+              <a:t>Aclarar la confusión más común: Ollama en sí (servidor + CLI propia) no se instala con pip, se instala aparte (curl install.sh); el paquete 'ollama' de pip es solo el cliente Python que habla con ese servidor</a:t>
+            </a:r>
+          </a:p>
+          <a:p>
+            <a:r>
+              <a:t>Dos formas de usarlo: código (librería ollama) o terminal (CLI llm, paquete distinto)</a:t>
+            </a:r>
+          </a:p>
+          <a:p>
+            <a:r>
+              <a:t>src/embeddings.py y src/utils.py son los puntos de entrada en código</a:t>
+            </a:r>
+          </a:p>
+          <a:p>
+            <a:r>
+              <a:t>→ llm CLI para tareas ad-hoc, ver ollama_llm_cli.md</a:t>
             </a:r>
           </a:p>
         </p:txBody>
@@ -969,22 +979,12 @@
           <a:lstStyle/>
           <a:p>
             <a:r>
-              <a:t>No analiza datos reales — datos sintéticos mínimos, corre en segundos</a:t>
-            </a:r>
-          </a:p>
-          <a:p>
-            <a:r>
-              <a:t>Si algo falla: Ollama no está corriendo o falta un modelo</a:t>
-            </a:r>
-          </a:p>
-          <a:p>
-            <a:r>
-              <a:t>→ resolverlo aquí, no en el primer caso práctico</a:t>
-            </a:r>
-          </a:p>
-          <a:p>
-            <a:r>
-              <a:t>Cada alumno confirma su propio entorno antes de seguir</a:t>
+              <a:t>Tercera pieza, la más conceptual: qué es cada tipo de modelo</a:t>
+            </a:r>
+          </a:p>
+          <a:p>
+            <a:r>
+              <a:t>Esto les sirve para elegir modelos por su cuenta, no solo usar los del curso</a:t>
             </a:r>
           </a:p>
         </p:txBody>
@@ -1054,27 +1054,512 @@
           <a:lstStyle/>
           <a:p>
             <a:r>
-              <a:t>Cierre: preguntas frecuentes, respuestas sin vender humo</a:t>
-            </a:r>
-          </a:p>
-          <a:p>
-            <a:r>
-              <a:t>No API en la nube: datos de personas reales, no negociable</a:t>
-            </a:r>
-          </a:p>
-          <a:p>
-            <a:r>
-              <a:t>Sin GPU: sí, con muestras pequeñas</a:t>
-            </a:r>
-          </a:p>
-          <a:p>
-            <a:r>
-              <a:t>→ Colab técnicamente sí, con datos reales no</a:t>
-            </a:r>
-          </a:p>
-          <a:p>
-            <a:r>
-              <a:t>Entorno listo → Bloque 4 (agentes) y Bloque 5 (casos prácticos)</a:t>
+              <a:t>Embedding = huella numérica del significado, no el texto en sí</a:t>
+            </a:r>
+          </a:p>
+          <a:p>
+            <a:r>
+              <a:t>No entienden todavía cómo se calcula, y no hace falta</a:t>
+            </a:r>
+          </a:p>
+          <a:p>
+            <a:r>
+              <a:t>→ lo único importante: sirve para MEDIR parecido, no para escribir</a:t>
+            </a:r>
+          </a:p>
+        </p:txBody>
+      </p:sp>
+      <p:sp>
+        <p:nvSpPr>
+          <p:cNvPr id="4" name="Slide Number Placeholder 3"/>
+          <p:cNvSpPr>
+            <a:spLocks noGrp="1"/>
+          </p:cNvSpPr>
+          <p:nvPr>
+            <p:ph type="sldNum" idx="5" sz="quarter"/>
+          </p:nvPr>
+        </p:nvSpPr>
+        <p:spPr/>
+      </p:sp>
+    </p:spTree>
+  </p:cSld>
+  <p:clrMapOvr>
+    <a:masterClrMapping/>
+  </p:clrMapOvr>
+</p:notes>
+</file>
+
+<file path=ppt/notesSlides/notesSlide14.xml><?xml version="1.0" encoding="utf-8"?>
+<p:notes xmlns:a="http://schemas.openxmlformats.org/drawingml/2006/main" xmlns:p="http://schemas.openxmlformats.org/presentationml/2006/main" xmlns:r="http://schemas.openxmlformats.org/officeDocument/2006/relationships">
+  <p:cSld>
+    <p:spTree>
+      <p:nvGrpSpPr>
+        <p:cNvPr id="1" name=""/>
+        <p:cNvGrpSpPr/>
+        <p:nvPr/>
+      </p:nvGrpSpPr>
+      <p:grpSpPr>
+        <a:xfrm>
+          <a:off x="0" y="0"/>
+          <a:ext cx="0" cy="0"/>
+          <a:chOff x="0" y="0"/>
+          <a:chExt cx="0" cy="0"/>
+        </a:xfrm>
+      </p:grpSpPr>
+      <p:sp>
+        <p:nvSpPr>
+          <p:cNvPr id="2" name="Slide Image Placeholder 1"/>
+          <p:cNvSpPr>
+            <a:spLocks noGrp="1"/>
+          </p:cNvSpPr>
+          <p:nvPr>
+            <p:ph type="sldImg" idx="2"/>
+          </p:nvPr>
+        </p:nvSpPr>
+        <p:spPr/>
+      </p:sp>
+      <p:sp>
+        <p:nvSpPr>
+          <p:cNvPr id="3" name="Notes Placeholder 2"/>
+          <p:cNvSpPr>
+            <a:spLocks noGrp="1"/>
+          </p:cNvSpPr>
+          <p:nvPr>
+            <p:ph type="body" idx="3" sz="quarter"/>
+          </p:nvPr>
+        </p:nvSpPr>
+        <p:spPr/>
+        <p:txBody>
+          <a:bodyPr/>
+          <a:lstStyle/>
+          <a:p>
+            <a:r>
+              <a:t>Panel izquierdo: un ejemplo concreto, texto entra, vector sale</a:t>
+            </a:r>
+          </a:p>
+          <a:p>
+            <a:r>
+              <a:t>Panel derecho: por eso sirve para clustering — lo parecido queda junto</a:t>
+            </a:r>
+          </a:p>
+          <a:p>
+            <a:r>
+              <a:t>→ el post 'random' queda lejos de ambos grupos, ejemplo de outlier</a:t>
+            </a:r>
+          </a:p>
+        </p:txBody>
+      </p:sp>
+      <p:sp>
+        <p:nvSpPr>
+          <p:cNvPr id="4" name="Slide Number Placeholder 3"/>
+          <p:cNvSpPr>
+            <a:spLocks noGrp="1"/>
+          </p:cNvSpPr>
+          <p:nvPr>
+            <p:ph type="sldNum" idx="5" sz="quarter"/>
+          </p:nvPr>
+        </p:nvSpPr>
+        <p:spPr/>
+      </p:sp>
+    </p:spTree>
+  </p:cSld>
+  <p:clrMapOvr>
+    <a:masterClrMapping/>
+  </p:clrMapOvr>
+</p:notes>
+</file>
+
+<file path=ppt/notesSlides/notesSlide15.xml><?xml version="1.0" encoding="utf-8"?>
+<p:notes xmlns:a="http://schemas.openxmlformats.org/drawingml/2006/main" xmlns:p="http://schemas.openxmlformats.org/presentationml/2006/main" xmlns:r="http://schemas.openxmlformats.org/officeDocument/2006/relationships">
+  <p:cSld>
+    <p:spTree>
+      <p:nvGrpSpPr>
+        <p:cNvPr id="1" name=""/>
+        <p:cNvGrpSpPr/>
+        <p:nvPr/>
+      </p:nvGrpSpPr>
+      <p:grpSpPr>
+        <a:xfrm>
+          <a:off x="0" y="0"/>
+          <a:ext cx="0" cy="0"/>
+          <a:chOff x="0" y="0"/>
+          <a:chExt cx="0" cy="0"/>
+        </a:xfrm>
+      </p:grpSpPr>
+      <p:sp>
+        <p:nvSpPr>
+          <p:cNvPr id="2" name="Slide Image Placeholder 1"/>
+          <p:cNvSpPr>
+            <a:spLocks noGrp="1"/>
+          </p:cNvSpPr>
+          <p:nvPr>
+            <p:ph type="sldImg" idx="2"/>
+          </p:nvPr>
+        </p:nvSpPr>
+        <p:spPr/>
+      </p:sp>
+      <p:sp>
+        <p:nvSpPr>
+          <p:cNvPr id="3" name="Notes Placeholder 2"/>
+          <p:cNvSpPr>
+            <a:spLocks noGrp="1"/>
+          </p:cNvSpPr>
+          <p:nvPr>
+            <p:ph type="body" idx="3" sz="quarter"/>
+          </p:nvPr>
+        </p:nvSpPr>
+        <p:spPr/>
+        <p:txBody>
+          <a:bodyPr/>
+          <a:lstStyle/>
+          <a:p>
+            <a:r>
+              <a:t>Generativo = escribe. Embedding = mide. No son lo mismo ni intercambiables</a:t>
+            </a:r>
+          </a:p>
+          <a:p>
+            <a:r>
+              <a:t>qwen2.5:14b es generativo, qwen3-embedding no lo es</a:t>
+            </a:r>
+          </a:p>
+          <a:p>
+            <a:r>
+              <a:t>→ por eso el curso usa los dos, para tareas distintas</a:t>
+            </a:r>
+          </a:p>
+        </p:txBody>
+      </p:sp>
+      <p:sp>
+        <p:nvSpPr>
+          <p:cNvPr id="4" name="Slide Number Placeholder 3"/>
+          <p:cNvSpPr>
+            <a:spLocks noGrp="1"/>
+          </p:cNvSpPr>
+          <p:nvPr>
+            <p:ph type="sldNum" idx="5" sz="quarter"/>
+          </p:nvPr>
+        </p:nvSpPr>
+        <p:spPr/>
+      </p:sp>
+    </p:spTree>
+  </p:cSld>
+  <p:clrMapOvr>
+    <a:masterClrMapping/>
+  </p:clrMapOvr>
+</p:notes>
+</file>
+
+<file path=ppt/notesSlides/notesSlide16.xml><?xml version="1.0" encoding="utf-8"?>
+<p:notes xmlns:a="http://schemas.openxmlformats.org/drawingml/2006/main" xmlns:p="http://schemas.openxmlformats.org/presentationml/2006/main" xmlns:r="http://schemas.openxmlformats.org/officeDocument/2006/relationships">
+  <p:cSld>
+    <p:spTree>
+      <p:nvGrpSpPr>
+        <p:cNvPr id="1" name=""/>
+        <p:cNvGrpSpPr/>
+        <p:nvPr/>
+      </p:nvGrpSpPr>
+      <p:grpSpPr>
+        <a:xfrm>
+          <a:off x="0" y="0"/>
+          <a:ext cx="0" cy="0"/>
+          <a:chOff x="0" y="0"/>
+          <a:chExt cx="0" cy="0"/>
+        </a:xfrm>
+      </p:grpSpPr>
+      <p:sp>
+        <p:nvSpPr>
+          <p:cNvPr id="2" name="Slide Image Placeholder 1"/>
+          <p:cNvSpPr>
+            <a:spLocks noGrp="1"/>
+          </p:cNvSpPr>
+          <p:nvPr>
+            <p:ph type="sldImg" idx="2"/>
+          </p:nvPr>
+        </p:nvSpPr>
+        <p:spPr/>
+      </p:sp>
+      <p:sp>
+        <p:nvSpPr>
+          <p:cNvPr id="3" name="Notes Placeholder 2"/>
+          <p:cNvSpPr>
+            <a:spLocks noGrp="1"/>
+          </p:cNvSpPr>
+          <p:nvPr>
+            <p:ph type="body" idx="3" sz="quarter"/>
+          </p:nvPr>
+        </p:nvSpPr>
+        <p:spPr/>
+        <p:txBody>
+          <a:bodyPr/>
+          <a:lstStyle/>
+          <a:p>
+            <a:r>
+              <a:t>Mismo modelo, tres precisiones distintas, mira el tamaño</a:t>
+            </a:r>
+          </a:p>
+          <a:p>
+            <a:r>
+              <a:t>FP16: máxima precisión, 30GB. Q4: el que usamos, menos de 9GB</a:t>
+            </a:r>
+          </a:p>
+          <a:p>
+            <a:r>
+              <a:t>→ la pérdida de calidad es pequeña para lo que hacemos aquí</a:t>
+            </a:r>
+          </a:p>
+          <a:p>
+            <a:r>
+              <a:t>Por eso qwen2.5:14b Q4 cabe en un portátil normal</a:t>
+            </a:r>
+          </a:p>
+        </p:txBody>
+      </p:sp>
+      <p:sp>
+        <p:nvSpPr>
+          <p:cNvPr id="4" name="Slide Number Placeholder 3"/>
+          <p:cNvSpPr>
+            <a:spLocks noGrp="1"/>
+          </p:cNvSpPr>
+          <p:nvPr>
+            <p:ph type="sldNum" idx="5" sz="quarter"/>
+          </p:nvPr>
+        </p:nvSpPr>
+        <p:spPr/>
+      </p:sp>
+    </p:spTree>
+  </p:cSld>
+  <p:clrMapOvr>
+    <a:masterClrMapping/>
+  </p:clrMapOvr>
+</p:notes>
+</file>
+
+<file path=ppt/notesSlides/notesSlide17.xml><?xml version="1.0" encoding="utf-8"?>
+<p:notes xmlns:a="http://schemas.openxmlformats.org/drawingml/2006/main" xmlns:p="http://schemas.openxmlformats.org/presentationml/2006/main" xmlns:r="http://schemas.openxmlformats.org/officeDocument/2006/relationships">
+  <p:cSld>
+    <p:spTree>
+      <p:nvGrpSpPr>
+        <p:cNvPr id="1" name=""/>
+        <p:cNvGrpSpPr/>
+        <p:nvPr/>
+      </p:nvGrpSpPr>
+      <p:grpSpPr>
+        <a:xfrm>
+          <a:off x="0" y="0"/>
+          <a:ext cx="0" cy="0"/>
+          <a:chOff x="0" y="0"/>
+          <a:chExt cx="0" cy="0"/>
+        </a:xfrm>
+      </p:grpSpPr>
+      <p:sp>
+        <p:nvSpPr>
+          <p:cNvPr id="2" name="Slide Image Placeholder 1"/>
+          <p:cNvSpPr>
+            <a:spLocks noGrp="1"/>
+          </p:cNvSpPr>
+          <p:nvPr>
+            <p:ph type="sldImg" idx="2"/>
+          </p:nvPr>
+        </p:nvSpPr>
+        <p:spPr/>
+      </p:sp>
+      <p:sp>
+        <p:nvSpPr>
+          <p:cNvPr id="3" name="Notes Placeholder 2"/>
+          <p:cNvSpPr>
+            <a:spLocks noGrp="1"/>
+          </p:cNvSpPr>
+          <p:nvPr>
+            <p:ph type="body" idx="3" sz="quarter"/>
+          </p:nvPr>
+        </p:nvSpPr>
+        <p:spPr/>
+        <p:txBody>
+          <a:bodyPr/>
+          <a:lstStyle/>
+          <a:p>
+            <a:r>
+              <a:t>La decisión no es "el modelo más grande posible"</a:t>
+            </a:r>
+          </a:p>
+          <a:p>
+            <a:r>
+              <a:t>Es equilibrio: ¿tu hardware aguanta? ¿de verdad necesitas ese tamaño?</a:t>
+            </a:r>
+          </a:p>
+          <a:p>
+            <a:r>
+              <a:t>→ en el curso ya elegimos ese equilibrio por ustedes (qwen2.5:14b Q4)</a:t>
+            </a:r>
+          </a:p>
+          <a:p>
+            <a:r>
+              <a:t>Para sus propios proyectos, el criterio es el mismo</a:t>
+            </a:r>
+          </a:p>
+        </p:txBody>
+      </p:sp>
+      <p:sp>
+        <p:nvSpPr>
+          <p:cNvPr id="4" name="Slide Number Placeholder 3"/>
+          <p:cNvSpPr>
+            <a:spLocks noGrp="1"/>
+          </p:cNvSpPr>
+          <p:nvPr>
+            <p:ph type="sldNum" idx="5" sz="quarter"/>
+          </p:nvPr>
+        </p:nvSpPr>
+        <p:spPr/>
+      </p:sp>
+    </p:spTree>
+  </p:cSld>
+  <p:clrMapOvr>
+    <a:masterClrMapping/>
+  </p:clrMapOvr>
+</p:notes>
+</file>
+
+<file path=ppt/notesSlides/notesSlide18.xml><?xml version="1.0" encoding="utf-8"?>
+<p:notes xmlns:a="http://schemas.openxmlformats.org/drawingml/2006/main" xmlns:p="http://schemas.openxmlformats.org/presentationml/2006/main" xmlns:r="http://schemas.openxmlformats.org/officeDocument/2006/relationships">
+  <p:cSld>
+    <p:spTree>
+      <p:nvGrpSpPr>
+        <p:cNvPr id="1" name=""/>
+        <p:cNvGrpSpPr/>
+        <p:nvPr/>
+      </p:nvGrpSpPr>
+      <p:grpSpPr>
+        <a:xfrm>
+          <a:off x="0" y="0"/>
+          <a:ext cx="0" cy="0"/>
+          <a:chOff x="0" y="0"/>
+          <a:chExt cx="0" cy="0"/>
+        </a:xfrm>
+      </p:grpSpPr>
+      <p:sp>
+        <p:nvSpPr>
+          <p:cNvPr id="2" name="Slide Image Placeholder 1"/>
+          <p:cNvSpPr>
+            <a:spLocks noGrp="1"/>
+          </p:cNvSpPr>
+          <p:nvPr>
+            <p:ph type="sldImg" idx="2"/>
+          </p:nvPr>
+        </p:nvSpPr>
+        <p:spPr/>
+      </p:sp>
+      <p:sp>
+        <p:nvSpPr>
+          <p:cNvPr id="3" name="Notes Placeholder 2"/>
+          <p:cNvSpPr>
+            <a:spLocks noGrp="1"/>
+          </p:cNvSpPr>
+          <p:nvPr>
+            <p:ph type="body" idx="3" sz="quarter"/>
+          </p:nvPr>
+        </p:nvSpPr>
+        <p:spPr/>
+        <p:txBody>
+          <a:bodyPr/>
+          <a:lstStyle/>
+          <a:p>
+            <a:r>
+              <a:t>Hugging Face es el catálogo — miles de modelos, filtrar por formato GGUF</a:t>
+            </a:r>
+          </a:p>
+          <a:p>
+            <a:r>
+              <a:t>ollama pull hf.co/usuario/modelo trae el modelo directo, sin descargarlo a mano</a:t>
+            </a:r>
+          </a:p>
+          <a:p>
+            <a:r>
+              <a:t>→ AQUÍ puedo parar la presentación y navegar Hugging Face en vivo</a:t>
+            </a:r>
+          </a:p>
+          <a:p>
+            <a:r>
+              <a:t>Buscar un modelo que pida el aula y traerlo con este mismo comando</a:t>
+            </a:r>
+          </a:p>
+        </p:txBody>
+      </p:sp>
+      <p:sp>
+        <p:nvSpPr>
+          <p:cNvPr id="4" name="Slide Number Placeholder 3"/>
+          <p:cNvSpPr>
+            <a:spLocks noGrp="1"/>
+          </p:cNvSpPr>
+          <p:nvPr>
+            <p:ph type="sldNum" idx="5" sz="quarter"/>
+          </p:nvPr>
+        </p:nvSpPr>
+        <p:spPr/>
+      </p:sp>
+    </p:spTree>
+  </p:cSld>
+  <p:clrMapOvr>
+    <a:masterClrMapping/>
+  </p:clrMapOvr>
+</p:notes>
+</file>
+
+<file path=ppt/notesSlides/notesSlide19.xml><?xml version="1.0" encoding="utf-8"?>
+<p:notes xmlns:a="http://schemas.openxmlformats.org/drawingml/2006/main" xmlns:p="http://schemas.openxmlformats.org/presentationml/2006/main" xmlns:r="http://schemas.openxmlformats.org/officeDocument/2006/relationships">
+  <p:cSld>
+    <p:spTree>
+      <p:nvGrpSpPr>
+        <p:cNvPr id="1" name=""/>
+        <p:cNvGrpSpPr/>
+        <p:nvPr/>
+      </p:nvGrpSpPr>
+      <p:grpSpPr>
+        <a:xfrm>
+          <a:off x="0" y="0"/>
+          <a:ext cx="0" cy="0"/>
+          <a:chOff x="0" y="0"/>
+          <a:chExt cx="0" cy="0"/>
+        </a:xfrm>
+      </p:grpSpPr>
+      <p:sp>
+        <p:nvSpPr>
+          <p:cNvPr id="2" name="Slide Image Placeholder 1"/>
+          <p:cNvSpPr>
+            <a:spLocks noGrp="1"/>
+          </p:cNvSpPr>
+          <p:nvPr>
+            <p:ph type="sldImg" idx="2"/>
+          </p:nvPr>
+        </p:nvSpPr>
+        <p:spPr/>
+      </p:sp>
+      <p:sp>
+        <p:nvSpPr>
+          <p:cNvPr id="3" name="Notes Placeholder 2"/>
+          <p:cNvSpPr>
+            <a:spLocks noGrp="1"/>
+          </p:cNvSpPr>
+          <p:nvPr>
+            <p:ph type="body" idx="3" sz="quarter"/>
+          </p:nvPr>
+        </p:nvSpPr>
+        <p:spPr/>
+        <p:txBody>
+          <a:bodyPr/>
+          <a:lstStyle/>
+          <a:p>
+            <a:r>
+              <a:t>hf.co/&lt;repo&gt; funciona igual que el nombre de un modelo de la librería oficial</a:t>
+            </a:r>
+          </a:p>
+          <a:p>
+            <a:r>
+              <a:t>No hace falta descargar el .gguf a mano ni convertir nada</a:t>
+            </a:r>
+          </a:p>
+          <a:p>
+            <a:r>
+              <a:t>→ momento para parar y navegar Hugging Face en vivo si el aula lo pide</a:t>
             </a:r>
           </a:p>
         </p:txBody>
@@ -1184,6 +1669,331 @@
 </p:notes>
 </file>
 
+<file path=ppt/notesSlides/notesSlide20.xml><?xml version="1.0" encoding="utf-8"?>
+<p:notes xmlns:a="http://schemas.openxmlformats.org/drawingml/2006/main" xmlns:p="http://schemas.openxmlformats.org/presentationml/2006/main" xmlns:r="http://schemas.openxmlformats.org/officeDocument/2006/relationships">
+  <p:cSld>
+    <p:spTree>
+      <p:nvGrpSpPr>
+        <p:cNvPr id="1" name=""/>
+        <p:cNvGrpSpPr/>
+        <p:nvPr/>
+      </p:nvGrpSpPr>
+      <p:grpSpPr>
+        <a:xfrm>
+          <a:off x="0" y="0"/>
+          <a:ext cx="0" cy="0"/>
+          <a:chOff x="0" y="0"/>
+          <a:chExt cx="0" cy="0"/>
+        </a:xfrm>
+      </p:grpSpPr>
+      <p:sp>
+        <p:nvSpPr>
+          <p:cNvPr id="2" name="Slide Image Placeholder 1"/>
+          <p:cNvSpPr>
+            <a:spLocks noGrp="1"/>
+          </p:cNvSpPr>
+          <p:nvPr>
+            <p:ph type="sldImg" idx="2"/>
+          </p:nvPr>
+        </p:nvSpPr>
+        <p:spPr/>
+      </p:sp>
+      <p:sp>
+        <p:nvSpPr>
+          <p:cNvPr id="3" name="Notes Placeholder 2"/>
+          <p:cNvSpPr>
+            <a:spLocks noGrp="1"/>
+          </p:cNvSpPr>
+          <p:nvPr>
+            <p:ph type="body" idx="3" sz="quarter"/>
+          </p:nvPr>
+        </p:nvSpPr>
+        <p:spPr/>
+        <p:txBody>
+          <a:bodyPr/>
+          <a:lstStyle/>
+          <a:p>
+            <a:r>
+              <a:t>Cuarta pieza: las librerías</a:t>
+            </a:r>
+          </a:p>
+          <a:p>
+            <a:r>
+              <a:t>No todas — solo las que no son de uso general</a:t>
+            </a:r>
+          </a:p>
+        </p:txBody>
+      </p:sp>
+      <p:sp>
+        <p:nvSpPr>
+          <p:cNvPr id="4" name="Slide Number Placeholder 3"/>
+          <p:cNvSpPr>
+            <a:spLocks noGrp="1"/>
+          </p:cNvSpPr>
+          <p:nvPr>
+            <p:ph type="sldNum" idx="5" sz="quarter"/>
+          </p:nvPr>
+        </p:nvSpPr>
+        <p:spPr/>
+      </p:sp>
+    </p:spTree>
+  </p:cSld>
+  <p:clrMapOvr>
+    <a:masterClrMapping/>
+  </p:clrMapOvr>
+</p:notes>
+</file>
+
+<file path=ppt/notesSlides/notesSlide21.xml><?xml version="1.0" encoding="utf-8"?>
+<p:notes xmlns:a="http://schemas.openxmlformats.org/drawingml/2006/main" xmlns:p="http://schemas.openxmlformats.org/presentationml/2006/main" xmlns:r="http://schemas.openxmlformats.org/officeDocument/2006/relationships">
+  <p:cSld>
+    <p:spTree>
+      <p:nvGrpSpPr>
+        <p:cNvPr id="1" name=""/>
+        <p:cNvGrpSpPr/>
+        <p:nvPr/>
+      </p:nvGrpSpPr>
+      <p:grpSpPr>
+        <a:xfrm>
+          <a:off x="0" y="0"/>
+          <a:ext cx="0" cy="0"/>
+          <a:chOff x="0" y="0"/>
+          <a:chExt cx="0" cy="0"/>
+        </a:xfrm>
+      </p:grpSpPr>
+      <p:sp>
+        <p:nvSpPr>
+          <p:cNvPr id="2" name="Slide Image Placeholder 1"/>
+          <p:cNvSpPr>
+            <a:spLocks noGrp="1"/>
+          </p:cNvSpPr>
+          <p:nvPr>
+            <p:ph type="sldImg" idx="2"/>
+          </p:nvPr>
+        </p:nvSpPr>
+        <p:spPr/>
+      </p:sp>
+      <p:sp>
+        <p:nvSpPr>
+          <p:cNvPr id="3" name="Notes Placeholder 2"/>
+          <p:cNvSpPr>
+            <a:spLocks noGrp="1"/>
+          </p:cNvSpPr>
+          <p:nvPr>
+            <p:ph type="body" idx="3" sz="quarter"/>
+          </p:nvPr>
+        </p:nvSpPr>
+        <p:spPr/>
+        <p:txBody>
+          <a:bodyPr/>
+          <a:lstStyle/>
+          <a:p>
+            <a:r>
+              <a:t>pandas/matplotlib/sklearn ya los conocen, no están aquí</a:t>
+            </a:r>
+          </a:p>
+          <a:p>
+            <a:r>
+              <a:t>→ cada una resuelve un problema puntual del pipeline</a:t>
+            </a:r>
+          </a:p>
+          <a:p>
+            <a:r>
+              <a:t>umap-learn es la menos obvia, detenerse ahí</a:t>
+            </a:r>
+          </a:p>
+        </p:txBody>
+      </p:sp>
+      <p:sp>
+        <p:nvSpPr>
+          <p:cNvPr id="4" name="Slide Number Placeholder 3"/>
+          <p:cNvSpPr>
+            <a:spLocks noGrp="1"/>
+          </p:cNvSpPr>
+          <p:nvPr>
+            <p:ph type="sldNum" idx="5" sz="quarter"/>
+          </p:nvPr>
+        </p:nvSpPr>
+        <p:spPr/>
+      </p:sp>
+    </p:spTree>
+  </p:cSld>
+  <p:clrMapOvr>
+    <a:masterClrMapping/>
+  </p:clrMapOvr>
+</p:notes>
+</file>
+
+<file path=ppt/notesSlides/notesSlide22.xml><?xml version="1.0" encoding="utf-8"?>
+<p:notes xmlns:a="http://schemas.openxmlformats.org/drawingml/2006/main" xmlns:p="http://schemas.openxmlformats.org/presentationml/2006/main" xmlns:r="http://schemas.openxmlformats.org/officeDocument/2006/relationships">
+  <p:cSld>
+    <p:spTree>
+      <p:nvGrpSpPr>
+        <p:cNvPr id="1" name=""/>
+        <p:cNvGrpSpPr/>
+        <p:nvPr/>
+      </p:nvGrpSpPr>
+      <p:grpSpPr>
+        <a:xfrm>
+          <a:off x="0" y="0"/>
+          <a:ext cx="0" cy="0"/>
+          <a:chOff x="0" y="0"/>
+          <a:chExt cx="0" cy="0"/>
+        </a:xfrm>
+      </p:grpSpPr>
+      <p:sp>
+        <p:nvSpPr>
+          <p:cNvPr id="2" name="Slide Image Placeholder 1"/>
+          <p:cNvSpPr>
+            <a:spLocks noGrp="1"/>
+          </p:cNvSpPr>
+          <p:nvPr>
+            <p:ph type="sldImg" idx="2"/>
+          </p:nvPr>
+        </p:nvSpPr>
+        <p:spPr/>
+      </p:sp>
+      <p:sp>
+        <p:nvSpPr>
+          <p:cNvPr id="3" name="Notes Placeholder 2"/>
+          <p:cNvSpPr>
+            <a:spLocks noGrp="1"/>
+          </p:cNvSpPr>
+          <p:nvPr>
+            <p:ph type="body" idx="3" sz="quarter"/>
+          </p:nvPr>
+        </p:nvSpPr>
+        <p:spPr/>
+        <p:txBody>
+          <a:bodyPr/>
+          <a:lstStyle/>
+          <a:p>
+            <a:r>
+              <a:t>Tranquilizar: no hace falta gama alta</a:t>
+            </a:r>
+          </a:p>
+          <a:p>
+            <a:r>
+              <a:t>8GB RAM + CPU moderna = suficiente para pandas/networkx</a:t>
+            </a:r>
+          </a:p>
+          <a:p>
+            <a:r>
+              <a:t>Derecha: solo si embeddings + LLM local</a:t>
+            </a:r>
+          </a:p>
+          <a:p>
+            <a:r>
+              <a:t>→ sin GPU funciona, más lento, sobre muestra es instantáneo</a:t>
+            </a:r>
+          </a:p>
+        </p:txBody>
+      </p:sp>
+      <p:sp>
+        <p:nvSpPr>
+          <p:cNvPr id="4" name="Slide Number Placeholder 3"/>
+          <p:cNvSpPr>
+            <a:spLocks noGrp="1"/>
+          </p:cNvSpPr>
+          <p:nvPr>
+            <p:ph type="sldNum" idx="5" sz="quarter"/>
+          </p:nvPr>
+        </p:nvSpPr>
+        <p:spPr/>
+      </p:sp>
+    </p:spTree>
+  </p:cSld>
+  <p:clrMapOvr>
+    <a:masterClrMapping/>
+  </p:clrMapOvr>
+</p:notes>
+</file>
+
+<file path=ppt/notesSlides/notesSlide23.xml><?xml version="1.0" encoding="utf-8"?>
+<p:notes xmlns:a="http://schemas.openxmlformats.org/drawingml/2006/main" xmlns:p="http://schemas.openxmlformats.org/presentationml/2006/main" xmlns:r="http://schemas.openxmlformats.org/officeDocument/2006/relationships">
+  <p:cSld>
+    <p:spTree>
+      <p:nvGrpSpPr>
+        <p:cNvPr id="1" name=""/>
+        <p:cNvGrpSpPr/>
+        <p:nvPr/>
+      </p:nvGrpSpPr>
+      <p:grpSpPr>
+        <a:xfrm>
+          <a:off x="0" y="0"/>
+          <a:ext cx="0" cy="0"/>
+          <a:chOff x="0" y="0"/>
+          <a:chExt cx="0" cy="0"/>
+        </a:xfrm>
+      </p:grpSpPr>
+      <p:sp>
+        <p:nvSpPr>
+          <p:cNvPr id="2" name="Slide Image Placeholder 1"/>
+          <p:cNvSpPr>
+            <a:spLocks noGrp="1"/>
+          </p:cNvSpPr>
+          <p:nvPr>
+            <p:ph type="sldImg" idx="2"/>
+          </p:nvPr>
+        </p:nvSpPr>
+        <p:spPr/>
+      </p:sp>
+      <p:sp>
+        <p:nvSpPr>
+          <p:cNvPr id="3" name="Notes Placeholder 2"/>
+          <p:cNvSpPr>
+            <a:spLocks noGrp="1"/>
+          </p:cNvSpPr>
+          <p:nvPr>
+            <p:ph type="body" idx="3" sz="quarter"/>
+          </p:nvPr>
+        </p:nvSpPr>
+        <p:spPr/>
+        <p:txBody>
+          <a:bodyPr/>
+          <a:lstStyle/>
+          <a:p>
+            <a:r>
+              <a:t>Cierre: preguntas frecuentes, respuestas sin vender humo</a:t>
+            </a:r>
+          </a:p>
+          <a:p>
+            <a:r>
+              <a:t>No API en la nube: datos de personas reales, decídelo tú mismo con lo que sabes del curso</a:t>
+            </a:r>
+          </a:p>
+          <a:p>
+            <a:r>
+              <a:t>Sin GPU: sí, con muestras pequeñas</a:t>
+            </a:r>
+          </a:p>
+          <a:p>
+            <a:r>
+              <a:t>Entorno listo → Bloque 4 (agentes) y Bloque 5 (casos prácticos)</a:t>
+            </a:r>
+          </a:p>
+        </p:txBody>
+      </p:sp>
+      <p:sp>
+        <p:nvSpPr>
+          <p:cNvPr id="4" name="Slide Number Placeholder 3"/>
+          <p:cNvSpPr>
+            <a:spLocks noGrp="1"/>
+          </p:cNvSpPr>
+          <p:nvPr>
+            <p:ph type="sldNum" idx="5" sz="quarter"/>
+          </p:nvPr>
+        </p:nvSpPr>
+        <p:spPr/>
+      </p:sp>
+    </p:spTree>
+  </p:cSld>
+  <p:clrMapOvr>
+    <a:masterClrMapping/>
+  </p:clrMapOvr>
+</p:notes>
+</file>
+
 <file path=ppt/notesSlides/notesSlide3.xml><?xml version="1.0" encoding="utf-8"?>
 <p:notes xmlns:a="http://schemas.openxmlformats.org/drawingml/2006/main" xmlns:p="http://schemas.openxmlformats.org/presentationml/2006/main" xmlns:r="http://schemas.openxmlformats.org/officeDocument/2006/relationships">
   <p:cSld>
@@ -1239,12 +2049,12 @@
           </a:p>
           <a:p>
             <a:r>
-              <a:t>→ idea clave: uv sync, un comando, todo resuelto</a:t>
-            </a:r>
-          </a:p>
-          <a:p>
-            <a:r>
-              <a:t>Esta parte es corta a propósito — funciona a la primera</a:t>
+              <a:t>→ esta parte es corta a propósito, ya se explicó por qué usarlo</a:t>
+            </a:r>
+          </a:p>
+          <a:p>
+            <a:r>
+              <a:t>Más tiempo a los comandos concretos, que es lo que van a teclear</a:t>
             </a:r>
           </a:p>
         </p:txBody>
@@ -1314,17 +2124,22 @@
           <a:lstStyle/>
           <a:p>
             <a:r>
-              <a:t>3 comandos, literalmente los únicos</a:t>
-            </a:r>
-          </a:p>
-          <a:p>
-            <a:r>
-              <a:t>Clonar → uv sync → Jupyter</a:t>
-            </a:r>
-          </a:p>
-          <a:p>
-            <a:r>
-              <a:t>Sin git: ZIP desde GitHub, copiar data/ y results/ aparte</a:t>
+              <a:t>Estos son los comandos que de verdad van a teclear</a:t>
+            </a:r>
+          </a:p>
+          <a:p>
+            <a:r>
+              <a:t>uv sync y uv run cubren casi todo el curso</a:t>
+            </a:r>
+          </a:p>
+          <a:p>
+            <a:r>
+              <a:t>uv add solo si quieren instalar algo propio</a:t>
+            </a:r>
+          </a:p>
+          <a:p>
+            <a:r>
+              <a:t>→ tabla de referencia, no hace falta memorizarla ahora</a:t>
             </a:r>
           </a:p>
         </p:txBody>
@@ -1394,12 +2209,17 @@
           <a:lstStyle/>
           <a:p>
             <a:r>
-              <a:t>Segunda pieza: Ollama</a:t>
-            </a:r>
-          </a:p>
-          <a:p>
-            <a:r>
-              <a:t>Qué es, para qué sirve, por qué es obligatorio con estos datos</a:t>
+              <a:t>3 comandos, literalmente los únicos</a:t>
+            </a:r>
+          </a:p>
+          <a:p>
+            <a:r>
+              <a:t>Clonar → uv sync → Jupyter</a:t>
+            </a:r>
+          </a:p>
+          <a:p>
+            <a:r>
+              <a:t>Sin git: ZIP desde GitHub, copiar data/ y results/ aparte</a:t>
             </a:r>
           </a:p>
         </p:txBody>
@@ -1469,22 +2289,12 @@
           <a:lstStyle/>
           <a:p>
             <a:r>
-              <a:t>Ollama = LLM en local, sin mandar datos afuera</a:t>
-            </a:r>
-          </a:p>
-          <a:p>
-            <a:r>
-              <a:t>Servidor en localhost:11434, cliente Python normal</a:t>
-            </a:r>
-          </a:p>
-          <a:p>
-            <a:r>
-              <a:t>→ es lo que hace viable trabajar con leaks sensibles</a:t>
-            </a:r>
-          </a:p>
-          <a:p>
-            <a:r>
-              <a:t>No es un detalle técnico, es la premisa ética del curso</a:t>
+              <a:t>Segunda pieza: Ollama</a:t>
+            </a:r>
+          </a:p>
+          <a:p>
+            <a:r>
+              <a:t>Qué es, para qué sirve, por qué es obligatorio con estos datos</a:t>
             </a:r>
           </a:p>
         </p:txBody>
@@ -1554,22 +2364,22 @@
           <a:lstStyle/>
           <a:p>
             <a:r>
-              <a:t>Dos modelos, dos propósitos, no se solapan</a:t>
-            </a:r>
-          </a:p>
-          <a:p>
-            <a:r>
-              <a:t>qwen3-embedding: vectores. qwen2.5:14b: texto→texto</a:t>
-            </a:r>
-          </a:p>
-          <a:p>
-            <a:r>
-              <a:t>→ ~9GB entre los dos, descargar la noche antes</a:t>
-            </a:r>
-          </a:p>
-          <a:p>
-            <a:r>
-              <a:t>ollama pull &lt;modelo&gt; — mostrar y cortar con Ctrl+C</a:t>
+              <a:t>Ollama = LLM en local, sin mandar datos afuera</a:t>
+            </a:r>
+          </a:p>
+          <a:p>
+            <a:r>
+              <a:t>Servidor en localhost:11434, cliente Python normal</a:t>
+            </a:r>
+          </a:p>
+          <a:p>
+            <a:r>
+              <a:t>→ es lo que hace viable trabajar con leaks sensibles</a:t>
+            </a:r>
+          </a:p>
+          <a:p>
+            <a:r>
+              <a:t>No es un detalle técnico, es la premisa ética del curso</a:t>
             </a:r>
           </a:p>
         </p:txBody>
@@ -1639,17 +2449,17 @@
           <a:lstStyle/>
           <a:p>
             <a:r>
-              <a:t>Dos formas de usarlo: código (ollama-python) o terminal (llm CLI)</a:t>
-            </a:r>
-          </a:p>
-          <a:p>
-            <a:r>
-              <a:t>src/embeddings.py y src/utils.py son los puntos de entrada</a:t>
-            </a:r>
-          </a:p>
-          <a:p>
-            <a:r>
-              <a:t>→ llm CLI para tareas ad-hoc, ver ollama_llm_cli.md</a:t>
+              <a:t>Ollama no sale de la nada: usa llama.cpp por debajo en gran parte</a:t>
+            </a:r>
+          </a:p>
+          <a:p>
+            <a:r>
+              <a:t>llama.cpp es la alternativa "cruda": misma inferencia, sin la capa cómoda encima</a:t>
+            </a:r>
+          </a:p>
+          <a:p>
+            <a:r>
+              <a:t>→ que cada uno sepa que existe la opción y por qué elegimos la otra</a:t>
             </a:r>
           </a:p>
         </p:txBody>
@@ -1719,12 +2529,22 @@
           <a:lstStyle/>
           <a:p>
             <a:r>
-              <a:t>Tercera pieza: las librerías</a:t>
-            </a:r>
-          </a:p>
-          <a:p>
-            <a:r>
-              <a:t>No todas — solo las que no son de uso general</a:t>
+              <a:t>Tabla para que cada uno decida con su propio proyecto en mente</a:t>
+            </a:r>
+          </a:p>
+          <a:p>
+            <a:r>
+              <a:t>llama.cpp gana un poco en rendimiento puro y control fino</a:t>
+            </a:r>
+          </a:p>
+          <a:p>
+            <a:r>
+              <a:t>→ mi recomendación personal: Ollama. La comodidad vale la pena, la diferencia de eficiencia es mínima para lo que hacemos aquí</a:t>
+            </a:r>
+          </a:p>
+          <a:p>
+            <a:r>
+              <a:t>En este curso usamos Ollama por eso, pero el conocimiento de llama.cpp no sobra</a:t>
             </a:r>
           </a:p>
         </p:txBody>
@@ -5404,7 +6224,7 @@
           <a:lstStyle/>
           <a:p>
             <a:r>
-              <a:t>Librerías clave del proyecto</a:t>
+              <a:t>Nuestros dos modelos</a:t>
             </a:r>
           </a:p>
         </p:txBody>
@@ -5418,53 +6238,274 @@
           <p:nvPr>
             <p:ph type="body" idx="16" sz="quarter"/>
           </p:nvPr>
+        </p:nvSpPr>
+        <p:spPr/>
+        <p:txBody>
+          <a:bodyPr/>
+          <a:lstStyle/>
+          <a:p/>
+        </p:txBody>
+      </p:sp>
+      <p:sp>
+        <p:nvSpPr>
+          <p:cNvPr id="4" name="TextBox 3"/>
+          <p:cNvSpPr txBox="1"/>
+          <p:nvPr/>
         </p:nvSpPr>
         <p:spPr>
           <a:xfrm>
-            <a:off x="1073427" y="2214736"/>
-            <a:ext cx="10084904" cy="3370138"/>
+            <a:off x="1051560" y="1828800"/>
+            <a:ext cx="4846320" cy="411480"/>
           </a:xfrm>
+          <a:prstGeom prst="rect">
+            <a:avLst/>
+          </a:prstGeom>
+          <a:noFill/>
         </p:spPr>
         <p:txBody>
-          <a:bodyPr wrap="square"/>
+          <a:bodyPr wrap="square">
+            <a:spAutoFit/>
+          </a:bodyPr>
           <a:lstStyle/>
           <a:p>
-            <a:r>
-              <a:t>ollama — cliente Python del servidor Ollama</a:t>
-            </a:r>
-          </a:p>
-          <a:p>
-            <a:r>
-              <a:t>chromadb — base de datos vectorial local, búsqueda por similitud sin infraestructura</a:t>
-            </a:r>
-          </a:p>
-          <a:p>
-            <a:r>
-              <a:t>umap-learn — reduce embeddings de alta dimensión a 2D para visualizar clusters</a:t>
-            </a:r>
-          </a:p>
-          <a:p>
-            <a:r>
-              <a:t>hdbscan — clustering por densidad, sin fijar K de antemano</a:t>
-            </a:r>
-          </a:p>
-          <a:p>
-            <a:r>
-              <a:t>bertopic — topic modeling sobre embeddings, alternativa a LDA con vocabulario ruidoso</a:t>
-            </a:r>
-          </a:p>
-          <a:p>
-            <a:r>
-              <a:t>langdetect — detección de idioma para la decisión original vs. traducción</a:t>
-            </a:r>
-          </a:p>
-          <a:p>
-            <a:r>
-              <a:t>crewai — orquestación de agentes de IA sobre Ollama (Bloque 4)</a:t>
-            </a:r>
-          </a:p>
-        </p:txBody>
-      </p:sp>
+            <a:pPr algn="l"/>
+            <a:r>
+              <a:rPr sz="1600" b="1">
+                <a:solidFill>
+                  <a:srgbClr val="CD2D37"/>
+                </a:solidFill>
+                <a:latin typeface="Arial"/>
+              </a:rPr>
+              <a:t>qwen3-embedding</a:t>
+            </a:r>
+          </a:p>
+        </p:txBody>
+      </p:sp>
+      <p:sp>
+        <p:nvSpPr>
+          <p:cNvPr id="5" name="TextBox 4"/>
+          <p:cNvSpPr txBox="1"/>
+          <p:nvPr/>
+        </p:nvSpPr>
+        <p:spPr>
+          <a:xfrm>
+            <a:off x="1051560" y="2286000"/>
+            <a:ext cx="4846320" cy="3703320"/>
+          </a:xfrm>
+          <a:prstGeom prst="rect">
+            <a:avLst/>
+          </a:prstGeom>
+          <a:noFill/>
+        </p:spPr>
+        <p:txBody>
+          <a:bodyPr wrap="square">
+            <a:spAutoFit/>
+          </a:bodyPr>
+          <a:lstStyle/>
+          <a:p>
+            <a:r>
+              <a:rPr sz="1600">
+                <a:solidFill>
+                  <a:srgbClr val="CD2D37"/>
+                </a:solidFill>
+                <a:latin typeface="Arial"/>
+              </a:rPr>
+              <a:t>▸  </a:t>
+            </a:r>
+            <a:r>
+              <a:rPr sz="1600">
+                <a:solidFill>
+                  <a:srgbClr val="465461"/>
+                </a:solidFill>
+                <a:latin typeface="Arial"/>
+              </a:rPr>
+              <a:t>Texto → vector numérico</a:t>
+            </a:r>
+          </a:p>
+          <a:p>
+            <a:r>
+              <a:rPr sz="1600">
+                <a:solidFill>
+                  <a:srgbClr val="CD2D37"/>
+                </a:solidFill>
+                <a:latin typeface="Arial"/>
+              </a:rPr>
+              <a:t>▸  </a:t>
+            </a:r>
+            <a:r>
+              <a:rPr sz="1600">
+                <a:solidFill>
+                  <a:srgbClr val="465461"/>
+                </a:solidFill>
+                <a:latin typeface="Arial"/>
+              </a:rPr>
+              <a:t>Clustering y estilometría</a:t>
+            </a:r>
+          </a:p>
+          <a:p>
+            <a:r>
+              <a:rPr sz="1600">
+                <a:solidFill>
+                  <a:srgbClr val="CD2D37"/>
+                </a:solidFill>
+                <a:latin typeface="Arial"/>
+              </a:rPr>
+              <a:t>▸  </a:t>
+            </a:r>
+            <a:r>
+              <a:rPr sz="1600">
+                <a:solidFill>
+                  <a:srgbClr val="465461"/>
+                </a:solidFill>
+                <a:latin typeface="Arial"/>
+              </a:rPr>
+              <a:t>Correlación cross-foro (Bloque 2)</a:t>
+            </a:r>
+          </a:p>
+        </p:txBody>
+      </p:sp>
+      <p:sp>
+        <p:nvSpPr>
+          <p:cNvPr id="6" name="TextBox 5"/>
+          <p:cNvSpPr txBox="1"/>
+          <p:nvPr/>
+        </p:nvSpPr>
+        <p:spPr>
+          <a:xfrm>
+            <a:off x="6217920" y="1828800"/>
+            <a:ext cx="4846320" cy="411480"/>
+          </a:xfrm>
+          <a:prstGeom prst="rect">
+            <a:avLst/>
+          </a:prstGeom>
+          <a:noFill/>
+        </p:spPr>
+        <p:txBody>
+          <a:bodyPr wrap="square">
+            <a:spAutoFit/>
+          </a:bodyPr>
+          <a:lstStyle/>
+          <a:p>
+            <a:pPr algn="l"/>
+            <a:r>
+              <a:rPr sz="1600" b="1">
+                <a:solidFill>
+                  <a:srgbClr val="CD2D37"/>
+                </a:solidFill>
+                <a:latin typeface="Arial"/>
+              </a:rPr>
+              <a:t>qwen2.5:14b</a:t>
+            </a:r>
+          </a:p>
+        </p:txBody>
+      </p:sp>
+      <p:sp>
+        <p:nvSpPr>
+          <p:cNvPr id="7" name="TextBox 6"/>
+          <p:cNvSpPr txBox="1"/>
+          <p:nvPr/>
+        </p:nvSpPr>
+        <p:spPr>
+          <a:xfrm>
+            <a:off x="6217920" y="2286000"/>
+            <a:ext cx="4846320" cy="3703320"/>
+          </a:xfrm>
+          <a:prstGeom prst="rect">
+            <a:avLst/>
+          </a:prstGeom>
+          <a:noFill/>
+        </p:spPr>
+        <p:txBody>
+          <a:bodyPr wrap="square">
+            <a:spAutoFit/>
+          </a:bodyPr>
+          <a:lstStyle/>
+          <a:p>
+            <a:r>
+              <a:rPr sz="1600">
+                <a:solidFill>
+                  <a:srgbClr val="CD2D37"/>
+                </a:solidFill>
+                <a:latin typeface="Arial"/>
+              </a:rPr>
+              <a:t>▸  </a:t>
+            </a:r>
+            <a:r>
+              <a:rPr sz="1600">
+                <a:solidFill>
+                  <a:srgbClr val="465461"/>
+                </a:solidFill>
+                <a:latin typeface="Arial"/>
+              </a:rPr>
+              <a:t>LLM generativo, no embeddings</a:t>
+            </a:r>
+          </a:p>
+          <a:p>
+            <a:r>
+              <a:rPr sz="1600">
+                <a:solidFill>
+                  <a:srgbClr val="CD2D37"/>
+                </a:solidFill>
+                <a:latin typeface="Arial"/>
+              </a:rPr>
+              <a:t>▸  </a:t>
+            </a:r>
+            <a:r>
+              <a:rPr sz="1600">
+                <a:solidFill>
+                  <a:srgbClr val="465461"/>
+                </a:solidFill>
+                <a:latin typeface="Arial"/>
+              </a:rPr>
+              <a:t>NER y clasificación de posts</a:t>
+            </a:r>
+          </a:p>
+          <a:p>
+            <a:r>
+              <a:rPr sz="1600">
+                <a:solidFill>
+                  <a:srgbClr val="CD2D37"/>
+                </a:solidFill>
+                <a:latin typeface="Arial"/>
+              </a:rPr>
+              <a:t>▸  </a:t>
+            </a:r>
+            <a:r>
+              <a:rPr sz="1600">
+                <a:solidFill>
+                  <a:srgbClr val="465461"/>
+                </a:solidFill>
+                <a:latin typeface="Arial"/>
+              </a:rPr>
+              <a:t>Perfilado de roles (Bloque 2)</a:t>
+            </a:r>
+          </a:p>
+        </p:txBody>
+      </p:sp>
+      <p:pic>
+        <p:nvPicPr>
+          <p:cNvPr id="8" name="Picture 7" descr="two_models_diagram.png"/>
+          <p:cNvPicPr>
+            <a:picLocks noChangeAspect="1"/>
+          </p:cNvPicPr>
+          <p:nvPr/>
+        </p:nvPicPr>
+        <p:blipFill>
+          <a:blip r:embed="rId3"/>
+          <a:stretch>
+            <a:fillRect/>
+          </a:stretch>
+        </p:blipFill>
+        <p:spPr>
+          <a:xfrm>
+            <a:off x="1280160" y="3429000"/>
+            <a:ext cx="9601200" cy="2504661"/>
+          </a:xfrm>
+          <a:prstGeom prst="rect">
+            <a:avLst/>
+          </a:prstGeom>
+        </p:spPr>
+      </p:pic>
     </p:spTree>
   </p:cSld>
   <p:clrMapOvr>
@@ -5499,7 +6540,7 @@
           <a:lstStyle/>
           <a:p>
             <a:r>
-              <a:t>Requisitos de hardware — no hace falta potencia</a:t>
+              <a:t>Cómo se usa desde Python y desde terminal</a:t>
             </a:r>
           </a:p>
         </p:txBody>
@@ -5513,330 +6554,62 @@
           <p:nvPr>
             <p:ph type="body" idx="16" sz="quarter"/>
           </p:nvPr>
-        </p:nvSpPr>
-        <p:spPr/>
-        <p:txBody>
-          <a:bodyPr/>
-          <a:lstStyle/>
-          <a:p/>
-        </p:txBody>
-      </p:sp>
-      <p:sp>
-        <p:nvSpPr>
-          <p:cNvPr id="4" name="TextBox 3"/>
-          <p:cNvSpPr txBox="1"/>
-          <p:nvPr/>
         </p:nvSpPr>
         <p:spPr>
           <a:xfrm>
-            <a:off x="1051560" y="2331720"/>
-            <a:ext cx="4846320" cy="411480"/>
+            <a:off x="1073427" y="2214736"/>
+            <a:ext cx="10084904" cy="3370138"/>
+          </a:xfrm>
+        </p:spPr>
+        <p:txBody>
+          <a:bodyPr wrap="square"/>
+          <a:lstStyle/>
+          <a:p>
+            <a:r>
+              <a:t>Ollama NO es un paquete de Python — es una aplicación aparte (servidor + su propia CLI: ollama pull, ollama run...)</a:t>
+            </a:r>
+          </a:p>
+          <a:p>
+            <a:r>
+              <a:t>Librería ollama: SÍ es un paquete (pip/uv), el cliente que habla con ese servidor desde código — ollama.chat(...), ollama.embed(...)</a:t>
+            </a:r>
+          </a:p>
+          <a:p>
+            <a:r>
+              <a:t>Usado en src/embeddings.py y src/utils.py a lo largo de todo el curso</a:t>
+            </a:r>
+          </a:p>
+          <a:p>
+            <a:r>
+              <a:t>Para limpieza puntual sin código: CLI llm (paquete aparte) + su plugin de Ollama</a:t>
+            </a:r>
+          </a:p>
+        </p:txBody>
+      </p:sp>
+      <p:pic>
+        <p:nvPicPr>
+          <p:cNvPr id="4" name="Picture 3" descr="ollama_access_diagram.png"/>
+          <p:cNvPicPr>
+            <a:picLocks noChangeAspect="1"/>
+          </p:cNvPicPr>
+          <p:nvPr/>
+        </p:nvPicPr>
+        <p:blipFill>
+          <a:blip r:embed="rId3"/>
+          <a:stretch>
+            <a:fillRect/>
+          </a:stretch>
+        </p:blipFill>
+        <p:spPr>
+          <a:xfrm>
+            <a:off x="822960" y="4343400"/>
+            <a:ext cx="10515600" cy="1828800"/>
           </a:xfrm>
           <a:prstGeom prst="rect">
             <a:avLst/>
           </a:prstGeom>
-          <a:noFill/>
         </p:spPr>
-        <p:txBody>
-          <a:bodyPr wrap="square">
-            <a:spAutoFit/>
-          </a:bodyPr>
-          <a:lstStyle/>
-          <a:p>
-            <a:pPr algn="l"/>
-            <a:r>
-              <a:rPr sz="1600" b="1">
-                <a:solidFill>
-                  <a:srgbClr val="CD2D37"/>
-                </a:solidFill>
-                <a:latin typeface="Arial"/>
-              </a:rPr>
-              <a:t>Mínimo (análisis pandas/networkx)</a:t>
-            </a:r>
-          </a:p>
-        </p:txBody>
-      </p:sp>
-      <p:sp>
-        <p:nvSpPr>
-          <p:cNvPr id="5" name="TextBox 4"/>
-          <p:cNvSpPr txBox="1"/>
-          <p:nvPr/>
-        </p:nvSpPr>
-        <p:spPr>
-          <a:xfrm>
-            <a:off x="1051560" y="2788920"/>
-            <a:ext cx="4846320" cy="3200400"/>
-          </a:xfrm>
-          <a:prstGeom prst="rect">
-            <a:avLst/>
-          </a:prstGeom>
-          <a:noFill/>
-        </p:spPr>
-        <p:txBody>
-          <a:bodyPr wrap="square">
-            <a:spAutoFit/>
-          </a:bodyPr>
-          <a:lstStyle/>
-          <a:p>
-            <a:r>
-              <a:rPr sz="1600">
-                <a:solidFill>
-                  <a:srgbClr val="CD2D37"/>
-                </a:solidFill>
-                <a:latin typeface="Arial"/>
-              </a:rPr>
-              <a:t>▸  </a:t>
-            </a:r>
-            <a:r>
-              <a:rPr sz="1600">
-                <a:solidFill>
-                  <a:srgbClr val="465461"/>
-                </a:solidFill>
-                <a:latin typeface="Arial"/>
-              </a:rPr>
-              <a:t>8GB RAM</a:t>
-            </a:r>
-          </a:p>
-          <a:p>
-            <a:r>
-              <a:rPr sz="1600">
-                <a:solidFill>
-                  <a:srgbClr val="CD2D37"/>
-                </a:solidFill>
-                <a:latin typeface="Arial"/>
-              </a:rPr>
-              <a:t>▸  </a:t>
-            </a:r>
-            <a:r>
-              <a:rPr sz="1600">
-                <a:solidFill>
-                  <a:srgbClr val="465461"/>
-                </a:solidFill>
-                <a:latin typeface="Arial"/>
-              </a:rPr>
-              <a:t>Cualquier CPU moderna</a:t>
-            </a:r>
-          </a:p>
-          <a:p>
-            <a:r>
-              <a:rPr sz="1600">
-                <a:solidFill>
-                  <a:srgbClr val="CD2D37"/>
-                </a:solidFill>
-                <a:latin typeface="Arial"/>
-              </a:rPr>
-              <a:t>▸  </a:t>
-            </a:r>
-            <a:r>
-              <a:rPr sz="1600">
-                <a:solidFill>
-                  <a:srgbClr val="465461"/>
-                </a:solidFill>
-                <a:latin typeface="Arial"/>
-              </a:rPr>
-              <a:t>10GB disco libre para datos y modelos</a:t>
-            </a:r>
-          </a:p>
-          <a:p>
-            <a:r>
-              <a:rPr sz="1600">
-                <a:solidFill>
-                  <a:srgbClr val="CD2D37"/>
-                </a:solidFill>
-                <a:latin typeface="Arial"/>
-              </a:rPr>
-              <a:t>▸  </a:t>
-            </a:r>
-            <a:r>
-              <a:rPr sz="1600">
-                <a:solidFill>
-                  <a:srgbClr val="465461"/>
-                </a:solidFill>
-                <a:latin typeface="Arial"/>
-              </a:rPr>
-              <a:t>Python 3.12+</a:t>
-            </a:r>
-          </a:p>
-          <a:p>
-            <a:r>
-              <a:rPr sz="1600">
-                <a:solidFill>
-                  <a:srgbClr val="CD2D37"/>
-                </a:solidFill>
-                <a:latin typeface="Arial"/>
-              </a:rPr>
-              <a:t>▸  </a:t>
-            </a:r>
-            <a:r>
-              <a:rPr sz="1600">
-                <a:solidFill>
-                  <a:srgbClr val="465461"/>
-                </a:solidFill>
-                <a:latin typeface="Arial"/>
-              </a:rPr>
-              <a:t>EDA, grafos, text mining: fluidos</a:t>
-            </a:r>
-          </a:p>
-        </p:txBody>
-      </p:sp>
-      <p:sp>
-        <p:nvSpPr>
-          <p:cNvPr id="6" name="TextBox 5"/>
-          <p:cNvSpPr txBox="1"/>
-          <p:nvPr/>
-        </p:nvSpPr>
-        <p:spPr>
-          <a:xfrm>
-            <a:off x="6217920" y="2331720"/>
-            <a:ext cx="4846320" cy="411480"/>
-          </a:xfrm>
-          <a:prstGeom prst="rect">
-            <a:avLst/>
-          </a:prstGeom>
-          <a:noFill/>
-        </p:spPr>
-        <p:txBody>
-          <a:bodyPr wrap="square">
-            <a:spAutoFit/>
-          </a:bodyPr>
-          <a:lstStyle/>
-          <a:p>
-            <a:pPr algn="l"/>
-            <a:r>
-              <a:rPr sz="1600" b="1">
-                <a:solidFill>
-                  <a:srgbClr val="CD2D37"/>
-                </a:solidFill>
-                <a:latin typeface="Arial"/>
-              </a:rPr>
-              <a:t>Recomendado (embeddings + LLM)</a:t>
-            </a:r>
-          </a:p>
-        </p:txBody>
-      </p:sp>
-      <p:sp>
-        <p:nvSpPr>
-          <p:cNvPr id="7" name="TextBox 6"/>
-          <p:cNvSpPr txBox="1"/>
-          <p:nvPr/>
-        </p:nvSpPr>
-        <p:spPr>
-          <a:xfrm>
-            <a:off x="6217920" y="2788920"/>
-            <a:ext cx="4846320" cy="3200400"/>
-          </a:xfrm>
-          <a:prstGeom prst="rect">
-            <a:avLst/>
-          </a:prstGeom>
-          <a:noFill/>
-        </p:spPr>
-        <p:txBody>
-          <a:bodyPr wrap="square">
-            <a:spAutoFit/>
-          </a:bodyPr>
-          <a:lstStyle/>
-          <a:p>
-            <a:r>
-              <a:rPr sz="1600">
-                <a:solidFill>
-                  <a:srgbClr val="CD2D37"/>
-                </a:solidFill>
-                <a:latin typeface="Arial"/>
-              </a:rPr>
-              <a:t>▸  </a:t>
-            </a:r>
-            <a:r>
-              <a:rPr sz="1600">
-                <a:solidFill>
-                  <a:srgbClr val="465461"/>
-                </a:solidFill>
-                <a:latin typeface="Arial"/>
-              </a:rPr>
-              <a:t>16GB RAM para qwen2.5:14b Q4</a:t>
-            </a:r>
-          </a:p>
-          <a:p>
-            <a:r>
-              <a:rPr sz="1600">
-                <a:solidFill>
-                  <a:srgbClr val="CD2D37"/>
-                </a:solidFill>
-                <a:latin typeface="Arial"/>
-              </a:rPr>
-              <a:t>▸  </a:t>
-            </a:r>
-            <a:r>
-              <a:rPr sz="1600">
-                <a:solidFill>
-                  <a:srgbClr val="465461"/>
-                </a:solidFill>
-                <a:latin typeface="Arial"/>
-              </a:rPr>
-              <a:t>GPU opcional (acelera embeddings ×10)</a:t>
-            </a:r>
-          </a:p>
-          <a:p>
-            <a:r>
-              <a:rPr sz="1600">
-                <a:solidFill>
-                  <a:srgbClr val="CD2D37"/>
-                </a:solidFill>
-                <a:latin typeface="Arial"/>
-              </a:rPr>
-              <a:t>▸  </a:t>
-            </a:r>
-            <a:r>
-              <a:rPr sz="1600">
-                <a:solidFill>
-                  <a:srgbClr val="465461"/>
-                </a:solidFill>
-                <a:latin typeface="Arial"/>
-              </a:rPr>
-              <a:t>25GB disco para todos los modelos</a:t>
-            </a:r>
-          </a:p>
-          <a:p>
-            <a:r>
-              <a:rPr sz="1600">
-                <a:solidFill>
-                  <a:srgbClr val="CD2D37"/>
-                </a:solidFill>
-                <a:latin typeface="Arial"/>
-              </a:rPr>
-              <a:t>▸  </a:t>
-            </a:r>
-            <a:r>
-              <a:rPr sz="1600">
-                <a:solidFill>
-                  <a:srgbClr val="465461"/>
-                </a:solidFill>
-                <a:latin typeface="Arial"/>
-              </a:rPr>
-              <a:t>Embeddings en CPU: lentos pero funcionales</a:t>
-            </a:r>
-          </a:p>
-          <a:p>
-            <a:r>
-              <a:rPr sz="1600">
-                <a:solidFill>
-                  <a:srgbClr val="CD2D37"/>
-                </a:solidFill>
-                <a:latin typeface="Arial"/>
-              </a:rPr>
-              <a:t>▸  </a:t>
-            </a:r>
-            <a:r>
-              <a:rPr sz="1600">
-                <a:solidFill>
-                  <a:srgbClr val="465461"/>
-                </a:solidFill>
-                <a:latin typeface="Arial"/>
-              </a:rPr>
-              <a:t>Sobre muestra pequeña: instantáneo en cualquier hardware</a:t>
-            </a:r>
-          </a:p>
-        </p:txBody>
-      </p:sp>
+      </p:pic>
     </p:spTree>
   </p:cSld>
   <p:clrMapOvr>
@@ -5878,51 +6651,17 @@
                 </a:solidFill>
                 <a:latin typeface="Arial"/>
               </a:rPr>
-              <a:t>DEMO EN VIVO</a:t>
+              <a:t>SECCIÓN 3</a:t>
             </a:r>
           </a:p>
           <a:p>
             <a:pPr algn="ctr"/>
             <a:r>
-              <a:t>Verificación — smoke-test del entorno</a:t>
+              <a:t>Entendiendo los modelos</a:t>
             </a:r>
           </a:p>
           <a:p>
             <a:pPr algn="ctr"/>
-            <a:r>
-              <a:rPr sz="1400">
-                <a:solidFill>
-                  <a:srgbClr val="9AA3B5"/>
-                </a:solidFill>
-                <a:latin typeface="Arial"/>
-              </a:rPr>
-              <a:t>bloque3_setup/demo_ecosystem_setup.ipynb</a:t>
-            </a:r>
-          </a:p>
-        </p:txBody>
-      </p:sp>
-      <p:sp>
-        <p:nvSpPr>
-          <p:cNvPr id="3" name="TextBox 2"/>
-          <p:cNvSpPr txBox="1"/>
-          <p:nvPr/>
-        </p:nvSpPr>
-        <p:spPr>
-          <a:xfrm>
-            <a:off x="2505456" y="3657600"/>
-            <a:ext cx="7168896" cy="2560320"/>
-          </a:xfrm>
-          <a:prstGeom prst="rect">
-            <a:avLst/>
-          </a:prstGeom>
-          <a:noFill/>
-        </p:spPr>
-        <p:txBody>
-          <a:bodyPr wrap="square">
-            <a:spAutoFit/>
-          </a:bodyPr>
-          <a:lstStyle/>
-          <a:p>
             <a:r>
               <a:rPr sz="1600">
                 <a:solidFill>
@@ -5930,51 +6669,7 @@
                 </a:solidFill>
                 <a:latin typeface="Arial"/>
               </a:rPr>
-              <a:t>1.  Abrir demo_ecosystem_setup.ipynb</a:t>
-            </a:r>
-          </a:p>
-          <a:p>
-            <a:r>
-              <a:rPr sz="1600">
-                <a:solidFill>
-                  <a:srgbClr val="D6DAE2"/>
-                </a:solidFill>
-                <a:latin typeface="Arial"/>
-              </a:rPr>
-              <a:t>2.  1. Dependencias Python — confirmar import de cada librería</a:t>
-            </a:r>
-          </a:p>
-          <a:p>
-            <a:r>
-              <a:rPr sz="1600">
-                <a:solidFill>
-                  <a:srgbClr val="D6DAE2"/>
-                </a:solidFill>
-                <a:latin typeface="Arial"/>
-              </a:rPr>
-              <a:t>3.  2. Modelos Ollama — qwen3-embedding y qwen2.5:14b responden</a:t>
-            </a:r>
-          </a:p>
-          <a:p>
-            <a:r>
-              <a:rPr sz="1600">
-                <a:solidFill>
-                  <a:srgbClr val="D6DAE2"/>
-                </a:solidFill>
-                <a:latin typeface="Arial"/>
-              </a:rPr>
-              <a:t>4.  3. GPU — detectada si existe, CPU si no</a:t>
-            </a:r>
-          </a:p>
-          <a:p>
-            <a:r>
-              <a:rPr sz="1600">
-                <a:solidFill>
-                  <a:srgbClr val="D6DAE2"/>
-                </a:solidFill>
-                <a:latin typeface="Arial"/>
-              </a:rPr>
-              <a:t>5.  4. Smoke-test ChromaDB — guardar y consultar embeddings sintéticos</a:t>
+              <a:t>Embeddings, generativos y cuantización</a:t>
             </a:r>
           </a:p>
         </p:txBody>
@@ -6013,7 +6708,7 @@
           <a:lstStyle/>
           <a:p>
             <a:r>
-              <a:t>Preguntas frecuentes y respuestas honestas</a:t>
+              <a:t>¿Qué es un embedding?</a:t>
             </a:r>
           </a:p>
         </p:txBody>
@@ -6030,8 +6725,8 @@
         </p:nvSpPr>
         <p:spPr>
           <a:xfrm>
-            <a:off x="1073427" y="2214736"/>
-            <a:ext cx="10084904" cy="3370138"/>
+            <a:off x="1073427" y="1711816"/>
+            <a:ext cx="10084904" cy="3873058"/>
           </a:xfrm>
         </p:spPr>
         <p:txBody>
@@ -6039,22 +6734,17 @@
           <a:lstStyle/>
           <a:p>
             <a:r>
-              <a:t>¿Por qué no usar una API de embeddings en la nube? → Datos de personas reales: no negociable</a:t>
-            </a:r>
-          </a:p>
-          <a:p>
-            <a:r>
-              <a:t>¿Qué pasa si no tengo GPU? → CPU funciona para EDA y muestras pequeñas</a:t>
-            </a:r>
-          </a:p>
-          <a:p>
-            <a:r>
-              <a:t>¿Puedo correr esto en Colab? → Técnicamente sí, pero no con datos reales</a:t>
-            </a:r>
-          </a:p>
-          <a:p>
-            <a:r>
-              <a:t>¿Dónde están los datos? → No en el repo. Se comparten por canal separado</a:t>
+              <a:t>Convierte un texto en un vector de números que captura su significado</a:t>
+            </a:r>
+          </a:p>
+          <a:p>
+            <a:r>
+              <a:t>Textos parecidos → vectores cercanos en el espacio</a:t>
+            </a:r>
+          </a:p>
+          <a:p>
+            <a:r>
+              <a:t>No genera texto: solo lo representa para poder compararlo</a:t>
             </a:r>
           </a:p>
         </p:txBody>
@@ -6067,7 +6757,7 @@
 </p:sld>
 </file>
 
-<file path=ppt/slides/slide2.xml><?xml version="1.0" encoding="utf-8"?>
+<file path=ppt/slides/slide14.xml><?xml version="1.0" encoding="utf-8"?>
 <p:sld xmlns:a="http://schemas.openxmlformats.org/drawingml/2006/main" xmlns:p="http://schemas.openxmlformats.org/presentationml/2006/main" xmlns:r="http://schemas.openxmlformats.org/officeDocument/2006/relationships">
   <p:cSld>
     <p:spTree>
@@ -6084,7 +6774,7 @@
             <a:spLocks noGrp="1"/>
           </p:cNvSpPr>
           <p:nvPr>
-            <p:ph type="body" idx="10" sz="quarter"/>
+            <p:ph type="body" idx="13" sz="quarter"/>
           </p:nvPr>
         </p:nvSpPr>
         <p:spPr/>
@@ -6092,33 +6782,84 @@
           <a:bodyPr wrap="square"/>
           <a:lstStyle/>
           <a:p>
+            <a:r>
+              <a:t>De texto a vector, y vectores que se agrupan</a:t>
+            </a:r>
+          </a:p>
+        </p:txBody>
+      </p:sp>
+      <p:sp>
+        <p:nvSpPr>
+          <p:cNvPr id="3" name="Text Placeholder 2"/>
+          <p:cNvSpPr>
+            <a:spLocks noGrp="1"/>
+          </p:cNvSpPr>
+          <p:nvPr>
+            <p:ph type="body" idx="16" sz="quarter"/>
+          </p:nvPr>
+        </p:nvSpPr>
+        <p:spPr/>
+        <p:txBody>
+          <a:bodyPr/>
+          <a:lstStyle/>
+          <a:p/>
+        </p:txBody>
+      </p:sp>
+      <p:pic>
+        <p:nvPicPr>
+          <p:cNvPr id="4" name="Picture 3" descr="embedding_diagram.png"/>
+          <p:cNvPicPr>
+            <a:picLocks noChangeAspect="1"/>
+          </p:cNvPicPr>
+          <p:nvPr/>
+        </p:nvPicPr>
+        <p:blipFill>
+          <a:blip r:embed="rId2"/>
+          <a:stretch>
+            <a:fillRect/>
+          </a:stretch>
+        </p:blipFill>
+        <p:spPr>
+          <a:xfrm>
+            <a:off x="1348741" y="2240280"/>
+            <a:ext cx="9464037" cy="3291839"/>
+          </a:xfrm>
+          <a:prstGeom prst="rect">
+            <a:avLst/>
+          </a:prstGeom>
+        </p:spPr>
+      </p:pic>
+      <p:sp>
+        <p:nvSpPr>
+          <p:cNvPr id="5" name="TextBox 4"/>
+          <p:cNvSpPr txBox="1"/>
+          <p:nvPr/>
+        </p:nvSpPr>
+        <p:spPr>
+          <a:xfrm>
+            <a:off x="1051560" y="5623559"/>
+            <a:ext cx="10058400" cy="365760"/>
+          </a:xfrm>
+          <a:prstGeom prst="rect">
+            <a:avLst/>
+          </a:prstGeom>
+          <a:noFill/>
+        </p:spPr>
+        <p:txBody>
+          <a:bodyPr wrap="square">
+            <a:spAutoFit/>
+          </a:bodyPr>
+          <a:lstStyle/>
+          <a:p>
             <a:pPr algn="ctr"/>
             <a:r>
-              <a:rPr sz="1700" b="1">
+              <a:rPr sz="1200" b="0">
                 <a:solidFill>
-                  <a:srgbClr val="CD2D37"/>
+                  <a:srgbClr val="465461"/>
                 </a:solidFill>
                 <a:latin typeface="Arial"/>
               </a:rPr>
-              <a:t>SECCIÓN 1</a:t>
-            </a:r>
-          </a:p>
-          <a:p>
-            <a:pPr algn="ctr"/>
-            <a:r>
-              <a:t>Gestión de dependencias con uv</a:t>
-            </a:r>
-          </a:p>
-          <a:p>
-            <a:pPr algn="ctr"/>
-            <a:r>
-              <a:rPr sz="1600">
-                <a:solidFill>
-                  <a:srgbClr val="D6DAE2"/>
-                </a:solidFill>
-                <a:latin typeface="Arial"/>
-              </a:rPr>
-              <a:t>Sin magia, sin Docker</a:t>
+              <a:t>Izquierda: un texto se convierte en vector. Derecha: textos similares quedan cerca entre sí.</a:t>
             </a:r>
           </a:p>
         </p:txBody>
@@ -6131,7 +6872,7 @@
 </p:sld>
 </file>
 
-<file path=ppt/slides/slide3.xml><?xml version="1.0" encoding="utf-8"?>
+<file path=ppt/slides/slide15.xml><?xml version="1.0" encoding="utf-8"?>
 <p:sld xmlns:a="http://schemas.openxmlformats.org/drawingml/2006/main" xmlns:p="http://schemas.openxmlformats.org/presentationml/2006/main" xmlns:r="http://schemas.openxmlformats.org/officeDocument/2006/relationships">
   <p:cSld>
     <p:spTree>
@@ -6157,7 +6898,7 @@
           <a:lstStyle/>
           <a:p>
             <a:r>
-              <a:t>¿Por qué uv?</a:t>
+              <a:t>¿Qué es un modelo generativo?</a:t>
             </a:r>
           </a:p>
         </p:txBody>
@@ -6174,8 +6915,8 @@
         </p:nvSpPr>
         <p:spPr>
           <a:xfrm>
-            <a:off x="1073427" y="1711816"/>
-            <a:ext cx="10084904" cy="3873058"/>
+            <a:off x="1073427" y="2214736"/>
+            <a:ext cx="10084904" cy="3370138"/>
           </a:xfrm>
         </p:spPr>
         <p:txBody>
@@ -6183,32 +6924,17 @@
           <a:lstStyle/>
           <a:p>
             <a:r>
-              <a:t>Reemplaza pip, venv y poetry en un solo comando</a:t>
-            </a:r>
-          </a:p>
-          <a:p>
-            <a:r>
-              <a:t>uv sync instala todas las dependencias del pyproject.toml</a:t>
-            </a:r>
-          </a:p>
-          <a:p>
-            <a:r>
-              <a:t>uv run jupyter notebook arranca Jupyter sin activar manualmente el entorno</a:t>
-            </a:r>
-          </a:p>
-          <a:p>
-            <a:r>
-              <a:t>Reproducible en cualquier máquina con Python 3.12+ sin configuración extra</a:t>
-            </a:r>
-          </a:p>
-          <a:p>
-            <a:r>
-              <a:t>Sin Conda, sin Docker, sin variables de entorno globales que conflicten</a:t>
-            </a:r>
-          </a:p>
-          <a:p>
-            <a:r>
-              <a:t>Objetivo: cualquier asistente puede replicar el entorno en 10 minutos</a:t>
+              <a:t>Predice el siguiente fragmento de texto, uno detrás de otro</a:t>
+            </a:r>
+          </a:p>
+          <a:p>
+            <a:r>
+              <a:t>Genera texto nuevo — no solo lo representa como el embedding</a:t>
+            </a:r>
+          </a:p>
+          <a:p>
+            <a:r>
+              <a:t>Es lo que usamos para NER, clasificación y resúmenes</a:t>
             </a:r>
           </a:p>
         </p:txBody>
@@ -6221,7 +6947,7 @@
 </p:sld>
 </file>
 
-<file path=ppt/slides/slide4.xml><?xml version="1.0" encoding="utf-8"?>
+<file path=ppt/slides/slide16.xml><?xml version="1.0" encoding="utf-8"?>
 <p:sld xmlns:a="http://schemas.openxmlformats.org/drawingml/2006/main" xmlns:p="http://schemas.openxmlformats.org/presentationml/2006/main" xmlns:r="http://schemas.openxmlformats.org/officeDocument/2006/relationships">
   <p:cSld>
     <p:spTree>
@@ -6247,7 +6973,7 @@
           <a:lstStyle/>
           <a:p>
             <a:r>
-              <a:t>Instalación paso a paso</a:t>
+              <a:t>Cuantización: el mismo modelo, más ligero</a:t>
             </a:r>
           </a:p>
         </p:txBody>
@@ -6269,6 +6995,311 @@
           <a:p/>
         </p:txBody>
       </p:sp>
+      <p:pic>
+        <p:nvPicPr>
+          <p:cNvPr id="4" name="Picture 3" descr="quantization_bars.png"/>
+          <p:cNvPicPr>
+            <a:picLocks noChangeAspect="1"/>
+          </p:cNvPicPr>
+          <p:nvPr/>
+        </p:nvPicPr>
+        <p:blipFill>
+          <a:blip r:embed="rId2"/>
+          <a:stretch>
+            <a:fillRect/>
+          </a:stretch>
+        </p:blipFill>
+        <p:spPr>
+          <a:xfrm>
+            <a:off x="2357847" y="2240280"/>
+            <a:ext cx="7445826" cy="3291839"/>
+          </a:xfrm>
+          <a:prstGeom prst="rect">
+            <a:avLst/>
+          </a:prstGeom>
+        </p:spPr>
+      </p:pic>
+      <p:sp>
+        <p:nvSpPr>
+          <p:cNvPr id="5" name="TextBox 4"/>
+          <p:cNvSpPr txBox="1"/>
+          <p:nvPr/>
+        </p:nvSpPr>
+        <p:spPr>
+          <a:xfrm>
+            <a:off x="1051560" y="5623559"/>
+            <a:ext cx="10058400" cy="365760"/>
+          </a:xfrm>
+          <a:prstGeom prst="rect">
+            <a:avLst/>
+          </a:prstGeom>
+          <a:noFill/>
+        </p:spPr>
+        <p:txBody>
+          <a:bodyPr wrap="square">
+            <a:spAutoFit/>
+          </a:bodyPr>
+          <a:lstStyle/>
+          <a:p>
+            <a:pPr algn="ctr"/>
+            <a:r>
+              <a:rPr sz="1200" b="0">
+                <a:solidFill>
+                  <a:srgbClr val="465461"/>
+                </a:solidFill>
+                <a:latin typeface="Arial"/>
+              </a:rPr>
+              <a:t>Cuantizar reduce el tamaño en disco y RAM necesaria, con una pérdida de precisión pequeña.</a:t>
+            </a:r>
+          </a:p>
+        </p:txBody>
+      </p:sp>
+    </p:spTree>
+  </p:cSld>
+  <p:clrMapOvr>
+    <a:masterClrMapping/>
+  </p:clrMapOvr>
+</p:sld>
+</file>
+
+<file path=ppt/slides/slide17.xml><?xml version="1.0" encoding="utf-8"?>
+<p:sld xmlns:a="http://schemas.openxmlformats.org/drawingml/2006/main" xmlns:p="http://schemas.openxmlformats.org/presentationml/2006/main" xmlns:r="http://schemas.openxmlformats.org/officeDocument/2006/relationships">
+  <p:cSld>
+    <p:spTree>
+      <p:nvGrpSpPr>
+        <p:cNvPr id="1" name=""/>
+        <p:cNvGrpSpPr/>
+        <p:nvPr/>
+      </p:nvGrpSpPr>
+      <p:grpSpPr/>
+      <p:sp>
+        <p:nvSpPr>
+          <p:cNvPr id="2" name="Text Placeholder 1"/>
+          <p:cNvSpPr>
+            <a:spLocks noGrp="1"/>
+          </p:cNvSpPr>
+          <p:nvPr>
+            <p:ph type="body" idx="13" sz="quarter"/>
+          </p:nvPr>
+        </p:nvSpPr>
+        <p:spPr/>
+        <p:txBody>
+          <a:bodyPr wrap="square"/>
+          <a:lstStyle/>
+          <a:p>
+            <a:r>
+              <a:t>Qué elegir: potencia vs. cómputo</a:t>
+            </a:r>
+          </a:p>
+        </p:txBody>
+      </p:sp>
+      <p:sp>
+        <p:nvSpPr>
+          <p:cNvPr id="3" name="Text Placeholder 2"/>
+          <p:cNvSpPr>
+            <a:spLocks noGrp="1"/>
+          </p:cNvSpPr>
+          <p:nvPr>
+            <p:ph type="body" idx="16" sz="quarter"/>
+          </p:nvPr>
+        </p:nvSpPr>
+        <p:spPr>
+          <a:xfrm>
+            <a:off x="1073427" y="2214736"/>
+            <a:ext cx="10084904" cy="3370138"/>
+          </a:xfrm>
+        </p:spPr>
+        <p:txBody>
+          <a:bodyPr wrap="square"/>
+          <a:lstStyle/>
+          <a:p>
+            <a:r>
+              <a:t>Modelo más grande = más capacidad, pero más RAM/VRAM y más lento</a:t>
+            </a:r>
+          </a:p>
+          <a:p>
+            <a:r>
+              <a:t>Cuantizar reduce tamaño y velocidad de carga, con pérdida de precisión asumible</a:t>
+            </a:r>
+          </a:p>
+          <a:p>
+            <a:r>
+              <a:t>Para tus propios proyectos: empieza pequeño, sube solo si de verdad lo necesitas</a:t>
+            </a:r>
+          </a:p>
+        </p:txBody>
+      </p:sp>
+    </p:spTree>
+  </p:cSld>
+  <p:clrMapOvr>
+    <a:masterClrMapping/>
+  </p:clrMapOvr>
+</p:sld>
+</file>
+
+<file path=ppt/slides/slide18.xml><?xml version="1.0" encoding="utf-8"?>
+<p:sld xmlns:a="http://schemas.openxmlformats.org/drawingml/2006/main" xmlns:p="http://schemas.openxmlformats.org/presentationml/2006/main" xmlns:r="http://schemas.openxmlformats.org/officeDocument/2006/relationships">
+  <p:cSld>
+    <p:spTree>
+      <p:nvGrpSpPr>
+        <p:cNvPr id="1" name=""/>
+        <p:cNvGrpSpPr/>
+        <p:nvPr/>
+      </p:nvGrpSpPr>
+      <p:grpSpPr/>
+      <p:sp>
+        <p:nvSpPr>
+          <p:cNvPr id="2" name="Text Placeholder 1"/>
+          <p:cNvSpPr>
+            <a:spLocks noGrp="1"/>
+          </p:cNvSpPr>
+          <p:nvPr>
+            <p:ph type="body" idx="13" sz="quarter"/>
+          </p:nvPr>
+        </p:nvSpPr>
+        <p:spPr/>
+        <p:txBody>
+          <a:bodyPr wrap="square"/>
+          <a:lstStyle/>
+          <a:p>
+            <a:r>
+              <a:t>De Hugging Face a Ollama</a:t>
+            </a:r>
+          </a:p>
+        </p:txBody>
+      </p:sp>
+      <p:sp>
+        <p:nvSpPr>
+          <p:cNvPr id="3" name="Text Placeholder 2"/>
+          <p:cNvSpPr>
+            <a:spLocks noGrp="1"/>
+          </p:cNvSpPr>
+          <p:nvPr>
+            <p:ph type="body" idx="16" sz="quarter"/>
+          </p:nvPr>
+        </p:nvSpPr>
+        <p:spPr/>
+        <p:txBody>
+          <a:bodyPr/>
+          <a:lstStyle/>
+          <a:p/>
+        </p:txBody>
+      </p:sp>
+      <p:pic>
+        <p:nvPicPr>
+          <p:cNvPr id="4" name="Picture 3" descr="hf_ollama_flow.png"/>
+          <p:cNvPicPr>
+            <a:picLocks noChangeAspect="1"/>
+          </p:cNvPicPr>
+          <p:nvPr/>
+        </p:nvPicPr>
+        <p:blipFill>
+          <a:blip r:embed="rId2"/>
+          <a:stretch>
+            <a:fillRect/>
+          </a:stretch>
+        </p:blipFill>
+        <p:spPr>
+          <a:xfrm>
+            <a:off x="1702192" y="1737360"/>
+            <a:ext cx="8757136" cy="3794759"/>
+          </a:xfrm>
+          <a:prstGeom prst="rect">
+            <a:avLst/>
+          </a:prstGeom>
+        </p:spPr>
+      </p:pic>
+      <p:sp>
+        <p:nvSpPr>
+          <p:cNvPr id="5" name="TextBox 4"/>
+          <p:cNvSpPr txBox="1"/>
+          <p:nvPr/>
+        </p:nvSpPr>
+        <p:spPr>
+          <a:xfrm>
+            <a:off x="1051560" y="5623559"/>
+            <a:ext cx="10058400" cy="365760"/>
+          </a:xfrm>
+          <a:prstGeom prst="rect">
+            <a:avLst/>
+          </a:prstGeom>
+          <a:noFill/>
+        </p:spPr>
+        <p:txBody>
+          <a:bodyPr wrap="square">
+            <a:spAutoFit/>
+          </a:bodyPr>
+          <a:lstStyle/>
+          <a:p>
+            <a:pPr algn="ctr"/>
+            <a:r>
+              <a:rPr sz="1200" b="0">
+                <a:solidFill>
+                  <a:srgbClr val="465461"/>
+                </a:solidFill>
+                <a:latin typeface="Arial"/>
+              </a:rPr>
+              <a:t>Buscar un modelo GGUF en Hugging Face y correrlo en Ollama sin pasos intermedios.</a:t>
+            </a:r>
+          </a:p>
+        </p:txBody>
+      </p:sp>
+    </p:spTree>
+  </p:cSld>
+  <p:clrMapOvr>
+    <a:masterClrMapping/>
+  </p:clrMapOvr>
+</p:sld>
+</file>
+
+<file path=ppt/slides/slide19.xml><?xml version="1.0" encoding="utf-8"?>
+<p:sld xmlns:a="http://schemas.openxmlformats.org/drawingml/2006/main" xmlns:p="http://schemas.openxmlformats.org/presentationml/2006/main" xmlns:r="http://schemas.openxmlformats.org/officeDocument/2006/relationships">
+  <p:cSld>
+    <p:spTree>
+      <p:nvGrpSpPr>
+        <p:cNvPr id="1" name=""/>
+        <p:cNvGrpSpPr/>
+        <p:nvPr/>
+      </p:nvGrpSpPr>
+      <p:grpSpPr/>
+      <p:sp>
+        <p:nvSpPr>
+          <p:cNvPr id="2" name="Text Placeholder 1"/>
+          <p:cNvSpPr>
+            <a:spLocks noGrp="1"/>
+          </p:cNvSpPr>
+          <p:nvPr>
+            <p:ph type="body" idx="13" sz="quarter"/>
+          </p:nvPr>
+        </p:nvSpPr>
+        <p:spPr/>
+        <p:txBody>
+          <a:bodyPr wrap="square"/>
+          <a:lstStyle/>
+          <a:p>
+            <a:r>
+              <a:t>Modelos de Hugging Face en Ollama</a:t>
+            </a:r>
+          </a:p>
+        </p:txBody>
+      </p:sp>
+      <p:sp>
+        <p:nvSpPr>
+          <p:cNvPr id="3" name="Text Placeholder 2"/>
+          <p:cNvSpPr>
+            <a:spLocks noGrp="1"/>
+          </p:cNvSpPr>
+          <p:nvPr>
+            <p:ph type="body" idx="16" sz="quarter"/>
+          </p:nvPr>
+        </p:nvSpPr>
+        <p:spPr/>
+        <p:txBody>
+          <a:bodyPr/>
+          <a:lstStyle/>
+          <a:p/>
+        </p:txBody>
+      </p:sp>
       <p:sp>
         <p:nvSpPr>
           <p:cNvPr id="4" name="TextBox 3"/>
@@ -6277,7 +7308,7 @@
         </p:nvSpPr>
         <p:spPr>
           <a:xfrm>
-            <a:off x="1051560" y="1828800"/>
+            <a:off x="1051560" y="2331720"/>
             <a:ext cx="10058400" cy="502920"/>
           </a:xfrm>
           <a:prstGeom prst="rect">
@@ -6299,7 +7330,7 @@
                 </a:solidFill>
                 <a:latin typeface="Arial"/>
               </a:rPr>
-              <a:t>Desde cero hasta el notebook corriendo:</a:t>
+              <a:t>Cualquier modelo GGUF de Hugging Face, listo con dos comandos:</a:t>
             </a:r>
           </a:p>
         </p:txBody>
@@ -6312,8 +7343,8 @@
         </p:nvSpPr>
         <p:spPr>
           <a:xfrm>
-            <a:off x="1005840" y="2377440"/>
-            <a:ext cx="10149840" cy="3429000"/>
+            <a:off x="1005840" y="2880360"/>
+            <a:ext cx="10149840" cy="2926080"/>
           </a:xfrm>
           <a:prstGeom prst="rect">
             <a:avLst/>
@@ -6355,8 +7386,8 @@
         </p:nvSpPr>
         <p:spPr>
           <a:xfrm>
-            <a:off x="1188720" y="2514600"/>
-            <a:ext cx="9784080" cy="3154680"/>
+            <a:off x="1188720" y="3017520"/>
+            <a:ext cx="9784080" cy="2651760"/>
           </a:xfrm>
           <a:prstGeom prst="rect">
             <a:avLst/>
@@ -6376,12 +7407,10 @@
                 </a:solidFill>
                 <a:latin typeface="Consolas"/>
               </a:rPr>
-              <a:t># 1. Clonar el repositorio
-git clone &lt;repo-url&gt; &amp;&amp; cd csbc26
-# 2. Instalar dependencias Python
-uv sync
-# 3. Arrancar Jupyter dentro del entorno gestionado por uv
-uv run jupyter notebook</a:t>
+              <a:t># Buscar en huggingface.co, filtro: GGUF
+# Copiar el identificador, p.ej. usuario/modelo-GGUF
+ollama pull hf.co/usuario/modelo-GGUF
+ollama run hf.co/usuario/modelo-GGUF</a:t>
             </a:r>
           </a:p>
         </p:txBody>
@@ -6416,7 +7445,1779 @@
                 </a:solidFill>
                 <a:latin typeface="Arial"/>
               </a:rPr>
-              <a:t>ℹ  Sin git (aulas con solo navegador): descargar el repo como ZIP desde GitHub.</a:t>
+              <a:t>ℹ  Instructor: pausar aquí y buscar en vivo un modelo que pida el aula.</a:t>
+            </a:r>
+          </a:p>
+        </p:txBody>
+      </p:sp>
+    </p:spTree>
+  </p:cSld>
+  <p:clrMapOvr>
+    <a:masterClrMapping/>
+  </p:clrMapOvr>
+</p:sld>
+</file>
+
+<file path=ppt/slides/slide2.xml><?xml version="1.0" encoding="utf-8"?>
+<p:sld xmlns:a="http://schemas.openxmlformats.org/drawingml/2006/main" xmlns:p="http://schemas.openxmlformats.org/presentationml/2006/main" xmlns:r="http://schemas.openxmlformats.org/officeDocument/2006/relationships">
+  <p:cSld>
+    <p:spTree>
+      <p:nvGrpSpPr>
+        <p:cNvPr id="1" name=""/>
+        <p:cNvGrpSpPr/>
+        <p:nvPr/>
+      </p:nvGrpSpPr>
+      <p:grpSpPr/>
+      <p:sp>
+        <p:nvSpPr>
+          <p:cNvPr id="2" name="Text Placeholder 1"/>
+          <p:cNvSpPr>
+            <a:spLocks noGrp="1"/>
+          </p:cNvSpPr>
+          <p:nvPr>
+            <p:ph type="body" idx="10" sz="quarter"/>
+          </p:nvPr>
+        </p:nvSpPr>
+        <p:spPr/>
+        <p:txBody>
+          <a:bodyPr wrap="square"/>
+          <a:lstStyle/>
+          <a:p>
+            <a:pPr algn="ctr"/>
+            <a:r>
+              <a:rPr sz="1700" b="1">
+                <a:solidFill>
+                  <a:srgbClr val="CD2D37"/>
+                </a:solidFill>
+                <a:latin typeface="Arial"/>
+              </a:rPr>
+              <a:t>SECCIÓN 1</a:t>
+            </a:r>
+          </a:p>
+          <a:p>
+            <a:pPr algn="ctr"/>
+            <a:r>
+              <a:t>Gestión de dependencias con uv</a:t>
+            </a:r>
+          </a:p>
+          <a:p>
+            <a:pPr algn="ctr"/>
+            <a:r>
+              <a:rPr sz="1600">
+                <a:solidFill>
+                  <a:srgbClr val="D6DAE2"/>
+                </a:solidFill>
+                <a:latin typeface="Arial"/>
+              </a:rPr>
+              <a:t>Sin magia, simple</a:t>
+            </a:r>
+          </a:p>
+        </p:txBody>
+      </p:sp>
+    </p:spTree>
+  </p:cSld>
+  <p:clrMapOvr>
+    <a:masterClrMapping/>
+  </p:clrMapOvr>
+</p:sld>
+</file>
+
+<file path=ppt/slides/slide20.xml><?xml version="1.0" encoding="utf-8"?>
+<p:sld xmlns:a="http://schemas.openxmlformats.org/drawingml/2006/main" xmlns:p="http://schemas.openxmlformats.org/presentationml/2006/main" xmlns:r="http://schemas.openxmlformats.org/officeDocument/2006/relationships">
+  <p:cSld>
+    <p:spTree>
+      <p:nvGrpSpPr>
+        <p:cNvPr id="1" name=""/>
+        <p:cNvGrpSpPr/>
+        <p:nvPr/>
+      </p:nvGrpSpPr>
+      <p:grpSpPr/>
+      <p:sp>
+        <p:nvSpPr>
+          <p:cNvPr id="2" name="Text Placeholder 1"/>
+          <p:cNvSpPr>
+            <a:spLocks noGrp="1"/>
+          </p:cNvSpPr>
+          <p:nvPr>
+            <p:ph type="body" idx="10" sz="quarter"/>
+          </p:nvPr>
+        </p:nvSpPr>
+        <p:spPr/>
+        <p:txBody>
+          <a:bodyPr wrap="square"/>
+          <a:lstStyle/>
+          <a:p>
+            <a:pPr algn="ctr"/>
+            <a:r>
+              <a:rPr sz="1700" b="1">
+                <a:solidFill>
+                  <a:srgbClr val="CD2D37"/>
+                </a:solidFill>
+                <a:latin typeface="Arial"/>
+              </a:rPr>
+              <a:t>SECCIÓN 4</a:t>
+            </a:r>
+          </a:p>
+          <a:p>
+            <a:pPr algn="ctr"/>
+            <a:r>
+              <a:t>El stack de análisis</a:t>
+            </a:r>
+          </a:p>
+          <a:p>
+            <a:pPr algn="ctr"/>
+            <a:r>
+              <a:rPr sz="1600">
+                <a:solidFill>
+                  <a:srgbClr val="D6DAE2"/>
+                </a:solidFill>
+                <a:latin typeface="Arial"/>
+              </a:rPr>
+              <a:t>Qué instala uv sync y para qué sirve cada pieza</a:t>
+            </a:r>
+          </a:p>
+        </p:txBody>
+      </p:sp>
+    </p:spTree>
+  </p:cSld>
+  <p:clrMapOvr>
+    <a:masterClrMapping/>
+  </p:clrMapOvr>
+</p:sld>
+</file>
+
+<file path=ppt/slides/slide21.xml><?xml version="1.0" encoding="utf-8"?>
+<p:sld xmlns:a="http://schemas.openxmlformats.org/drawingml/2006/main" xmlns:p="http://schemas.openxmlformats.org/presentationml/2006/main" xmlns:r="http://schemas.openxmlformats.org/officeDocument/2006/relationships">
+  <p:cSld>
+    <p:spTree>
+      <p:nvGrpSpPr>
+        <p:cNvPr id="1" name=""/>
+        <p:cNvGrpSpPr/>
+        <p:nvPr/>
+      </p:nvGrpSpPr>
+      <p:grpSpPr/>
+      <p:sp>
+        <p:nvSpPr>
+          <p:cNvPr id="2" name="Text Placeholder 1"/>
+          <p:cNvSpPr>
+            <a:spLocks noGrp="1"/>
+          </p:cNvSpPr>
+          <p:nvPr>
+            <p:ph type="body" idx="13" sz="quarter"/>
+          </p:nvPr>
+        </p:nvSpPr>
+        <p:spPr/>
+        <p:txBody>
+          <a:bodyPr wrap="square"/>
+          <a:lstStyle/>
+          <a:p>
+            <a:r>
+              <a:t>Librerías clave del proyecto</a:t>
+            </a:r>
+          </a:p>
+        </p:txBody>
+      </p:sp>
+      <p:sp>
+        <p:nvSpPr>
+          <p:cNvPr id="3" name="Text Placeholder 2"/>
+          <p:cNvSpPr>
+            <a:spLocks noGrp="1"/>
+          </p:cNvSpPr>
+          <p:nvPr>
+            <p:ph type="body" idx="16" sz="quarter"/>
+          </p:nvPr>
+        </p:nvSpPr>
+        <p:spPr/>
+        <p:txBody>
+          <a:bodyPr/>
+          <a:lstStyle/>
+          <a:p/>
+        </p:txBody>
+      </p:sp>
+      <p:graphicFrame>
+        <p:nvGraphicFramePr>
+          <p:cNvPr id="4" name="Table 3"/>
+          <p:cNvGraphicFramePr>
+            <a:graphicFrameLocks noGrp="1"/>
+          </p:cNvGraphicFramePr>
+          <p:nvPr/>
+        </p:nvGraphicFramePr>
+        <p:xfrm>
+          <a:off x="1051560" y="2286000"/>
+          <a:ext cx="10058400" cy="2560320"/>
+        </p:xfrm>
+        <a:graphic>
+          <a:graphicData uri="http://schemas.openxmlformats.org/drawingml/2006/table">
+            <a:tbl>
+              <a:tblPr>
+                <a:tableStyleId>{5C22544A-7EE6-4342-B048-85BDC9FD1C3A}</a:tableStyleId>
+              </a:tblPr>
+              <a:tblGrid>
+                <a:gridCol w="5029200"/>
+                <a:gridCol w="5029200"/>
+              </a:tblGrid>
+              <a:tr h="365760">
+                <a:tc>
+                  <a:txBody>
+                    <a:bodyPr/>
+                    <a:lstStyle/>
+                    <a:p>
+                      <a:r>
+                        <a:rPr sz="1200" b="1">
+                          <a:solidFill>
+                            <a:srgbClr val="FFFFFF"/>
+                          </a:solidFill>
+                          <a:latin typeface="Arial"/>
+                        </a:rPr>
+                        <a:t>Librería</a:t>
+                      </a:r>
+                    </a:p>
+                  </a:txBody>
+                  <a:tcPr marL="45000" marR="45000" marT="25000" marB="25000" anchor="ctr">
+                    <a:solidFill>
+                      <a:srgbClr val="CD2D37"/>
+                    </a:solidFill>
+                  </a:tcPr>
+                </a:tc>
+                <a:tc>
+                  <a:txBody>
+                    <a:bodyPr/>
+                    <a:lstStyle/>
+                    <a:p>
+                      <a:r>
+                        <a:rPr sz="1200" b="1">
+                          <a:solidFill>
+                            <a:srgbClr val="FFFFFF"/>
+                          </a:solidFill>
+                          <a:latin typeface="Arial"/>
+                        </a:rPr>
+                        <a:t>Para qué sirve</a:t>
+                      </a:r>
+                    </a:p>
+                  </a:txBody>
+                  <a:tcPr marL="45000" marR="45000" marT="25000" marB="25000" anchor="ctr">
+                    <a:solidFill>
+                      <a:srgbClr val="CD2D37"/>
+                    </a:solidFill>
+                  </a:tcPr>
+                </a:tc>
+              </a:tr>
+              <a:tr h="365760">
+                <a:tc>
+                  <a:txBody>
+                    <a:bodyPr/>
+                    <a:lstStyle/>
+                    <a:p>
+                      <a:r>
+                        <a:rPr sz="1100" b="0">
+                          <a:solidFill>
+                            <a:srgbClr val="465461"/>
+                          </a:solidFill>
+                          <a:latin typeface="Arial"/>
+                        </a:rPr>
+                        <a:t>ollama</a:t>
+                      </a:r>
+                    </a:p>
+                  </a:txBody>
+                  <a:tcPr marL="45000" marR="45000" marT="25000" marB="25000" anchor="ctr">
+                    <a:solidFill>
+                      <a:srgbClr val="F1F2F6"/>
+                    </a:solidFill>
+                  </a:tcPr>
+                </a:tc>
+                <a:tc>
+                  <a:txBody>
+                    <a:bodyPr/>
+                    <a:lstStyle/>
+                    <a:p>
+                      <a:r>
+                        <a:rPr sz="1100" b="0">
+                          <a:solidFill>
+                            <a:srgbClr val="465461"/>
+                          </a:solidFill>
+                          <a:latin typeface="Arial"/>
+                        </a:rPr>
+                        <a:t>Cliente Python del servidor Ollama</a:t>
+                      </a:r>
+                    </a:p>
+                  </a:txBody>
+                  <a:tcPr marL="45000" marR="45000" marT="25000" marB="25000" anchor="ctr">
+                    <a:solidFill>
+                      <a:srgbClr val="F1F2F6"/>
+                    </a:solidFill>
+                  </a:tcPr>
+                </a:tc>
+              </a:tr>
+              <a:tr h="365760">
+                <a:tc>
+                  <a:txBody>
+                    <a:bodyPr/>
+                    <a:lstStyle/>
+                    <a:p>
+                      <a:r>
+                        <a:rPr sz="1100" b="0">
+                          <a:solidFill>
+                            <a:srgbClr val="465461"/>
+                          </a:solidFill>
+                          <a:latin typeface="Arial"/>
+                        </a:rPr>
+                        <a:t>umap-learn</a:t>
+                      </a:r>
+                    </a:p>
+                  </a:txBody>
+                  <a:tcPr marL="45000" marR="45000" marT="25000" marB="25000" anchor="ctr">
+                    <a:solidFill>
+                      <a:srgbClr val="FFFFFF"/>
+                    </a:solidFill>
+                  </a:tcPr>
+                </a:tc>
+                <a:tc>
+                  <a:txBody>
+                    <a:bodyPr/>
+                    <a:lstStyle/>
+                    <a:p>
+                      <a:r>
+                        <a:rPr sz="1100" b="0">
+                          <a:solidFill>
+                            <a:srgbClr val="465461"/>
+                          </a:solidFill>
+                          <a:latin typeface="Arial"/>
+                        </a:rPr>
+                        <a:t>Reduce embeddings de alta dimensión a 2D para visualizar</a:t>
+                      </a:r>
+                    </a:p>
+                  </a:txBody>
+                  <a:tcPr marL="45000" marR="45000" marT="25000" marB="25000" anchor="ctr">
+                    <a:solidFill>
+                      <a:srgbClr val="FFFFFF"/>
+                    </a:solidFill>
+                  </a:tcPr>
+                </a:tc>
+              </a:tr>
+              <a:tr h="365760">
+                <a:tc>
+                  <a:txBody>
+                    <a:bodyPr/>
+                    <a:lstStyle/>
+                    <a:p>
+                      <a:r>
+                        <a:rPr sz="1100" b="0">
+                          <a:solidFill>
+                            <a:srgbClr val="465461"/>
+                          </a:solidFill>
+                          <a:latin typeface="Arial"/>
+                        </a:rPr>
+                        <a:t>hdbscan</a:t>
+                      </a:r>
+                    </a:p>
+                  </a:txBody>
+                  <a:tcPr marL="45000" marR="45000" marT="25000" marB="25000" anchor="ctr">
+                    <a:solidFill>
+                      <a:srgbClr val="F1F2F6"/>
+                    </a:solidFill>
+                  </a:tcPr>
+                </a:tc>
+                <a:tc>
+                  <a:txBody>
+                    <a:bodyPr/>
+                    <a:lstStyle/>
+                    <a:p>
+                      <a:r>
+                        <a:rPr sz="1100" b="0">
+                          <a:solidFill>
+                            <a:srgbClr val="465461"/>
+                          </a:solidFill>
+                          <a:latin typeface="Arial"/>
+                        </a:rPr>
+                        <a:t>Clustering por densidad, sin fijar K de antemano</a:t>
+                      </a:r>
+                    </a:p>
+                  </a:txBody>
+                  <a:tcPr marL="45000" marR="45000" marT="25000" marB="25000" anchor="ctr">
+                    <a:solidFill>
+                      <a:srgbClr val="F1F2F6"/>
+                    </a:solidFill>
+                  </a:tcPr>
+                </a:tc>
+              </a:tr>
+              <a:tr h="365760">
+                <a:tc>
+                  <a:txBody>
+                    <a:bodyPr/>
+                    <a:lstStyle/>
+                    <a:p>
+                      <a:r>
+                        <a:rPr sz="1100" b="0">
+                          <a:solidFill>
+                            <a:srgbClr val="465461"/>
+                          </a:solidFill>
+                          <a:latin typeface="Arial"/>
+                        </a:rPr>
+                        <a:t>bertopic</a:t>
+                      </a:r>
+                    </a:p>
+                  </a:txBody>
+                  <a:tcPr marL="45000" marR="45000" marT="25000" marB="25000" anchor="ctr">
+                    <a:solidFill>
+                      <a:srgbClr val="FFFFFF"/>
+                    </a:solidFill>
+                  </a:tcPr>
+                </a:tc>
+                <a:tc>
+                  <a:txBody>
+                    <a:bodyPr/>
+                    <a:lstStyle/>
+                    <a:p>
+                      <a:r>
+                        <a:rPr sz="1100" b="0">
+                          <a:solidFill>
+                            <a:srgbClr val="465461"/>
+                          </a:solidFill>
+                          <a:latin typeface="Arial"/>
+                        </a:rPr>
+                        <a:t>Topic modeling sobre embeddings, alternativa a LDA</a:t>
+                      </a:r>
+                    </a:p>
+                  </a:txBody>
+                  <a:tcPr marL="45000" marR="45000" marT="25000" marB="25000" anchor="ctr">
+                    <a:solidFill>
+                      <a:srgbClr val="FFFFFF"/>
+                    </a:solidFill>
+                  </a:tcPr>
+                </a:tc>
+              </a:tr>
+              <a:tr h="365760">
+                <a:tc>
+                  <a:txBody>
+                    <a:bodyPr/>
+                    <a:lstStyle/>
+                    <a:p>
+                      <a:r>
+                        <a:rPr sz="1100" b="0">
+                          <a:solidFill>
+                            <a:srgbClr val="465461"/>
+                          </a:solidFill>
+                          <a:latin typeface="Arial"/>
+                        </a:rPr>
+                        <a:t>langdetect</a:t>
+                      </a:r>
+                    </a:p>
+                  </a:txBody>
+                  <a:tcPr marL="45000" marR="45000" marT="25000" marB="25000" anchor="ctr">
+                    <a:solidFill>
+                      <a:srgbClr val="F1F2F6"/>
+                    </a:solidFill>
+                  </a:tcPr>
+                </a:tc>
+                <a:tc>
+                  <a:txBody>
+                    <a:bodyPr/>
+                    <a:lstStyle/>
+                    <a:p>
+                      <a:r>
+                        <a:rPr sz="1100" b="0">
+                          <a:solidFill>
+                            <a:srgbClr val="465461"/>
+                          </a:solidFill>
+                          <a:latin typeface="Arial"/>
+                        </a:rPr>
+                        <a:t>Detección de idioma: original vs. traducción</a:t>
+                      </a:r>
+                    </a:p>
+                  </a:txBody>
+                  <a:tcPr marL="45000" marR="45000" marT="25000" marB="25000" anchor="ctr">
+                    <a:solidFill>
+                      <a:srgbClr val="F1F2F6"/>
+                    </a:solidFill>
+                  </a:tcPr>
+                </a:tc>
+              </a:tr>
+              <a:tr h="365760">
+                <a:tc>
+                  <a:txBody>
+                    <a:bodyPr/>
+                    <a:lstStyle/>
+                    <a:p>
+                      <a:r>
+                        <a:rPr sz="1100" b="0">
+                          <a:solidFill>
+                            <a:srgbClr val="465461"/>
+                          </a:solidFill>
+                          <a:latin typeface="Arial"/>
+                        </a:rPr>
+                        <a:t>crewai</a:t>
+                      </a:r>
+                    </a:p>
+                  </a:txBody>
+                  <a:tcPr marL="45000" marR="45000" marT="25000" marB="25000" anchor="ctr">
+                    <a:solidFill>
+                      <a:srgbClr val="FFFFFF"/>
+                    </a:solidFill>
+                  </a:tcPr>
+                </a:tc>
+                <a:tc>
+                  <a:txBody>
+                    <a:bodyPr/>
+                    <a:lstStyle/>
+                    <a:p>
+                      <a:r>
+                        <a:rPr sz="1100" b="0">
+                          <a:solidFill>
+                            <a:srgbClr val="465461"/>
+                          </a:solidFill>
+                          <a:latin typeface="Arial"/>
+                        </a:rPr>
+                        <a:t>Orquestación de agentes de IA sobre Ollama (Bloque 4)</a:t>
+                      </a:r>
+                    </a:p>
+                  </a:txBody>
+                  <a:tcPr marL="45000" marR="45000" marT="25000" marB="25000" anchor="ctr">
+                    <a:solidFill>
+                      <a:srgbClr val="FFFFFF"/>
+                    </a:solidFill>
+                  </a:tcPr>
+                </a:tc>
+              </a:tr>
+            </a:tbl>
+          </a:graphicData>
+        </a:graphic>
+      </p:graphicFrame>
+      <p:sp>
+        <p:nvSpPr>
+          <p:cNvPr id="5" name="TextBox 4"/>
+          <p:cNvSpPr txBox="1"/>
+          <p:nvPr/>
+        </p:nvSpPr>
+        <p:spPr>
+          <a:xfrm>
+            <a:off x="1051560" y="5760720"/>
+            <a:ext cx="10058400" cy="320040"/>
+          </a:xfrm>
+          <a:prstGeom prst="rect">
+            <a:avLst/>
+          </a:prstGeom>
+          <a:noFill/>
+        </p:spPr>
+        <p:txBody>
+          <a:bodyPr wrap="square">
+            <a:spAutoFit/>
+          </a:bodyPr>
+          <a:lstStyle/>
+          <a:p>
+            <a:pPr algn="l"/>
+            <a:r>
+              <a:rPr sz="1000" b="0">
+                <a:solidFill>
+                  <a:srgbClr val="707888"/>
+                </a:solidFill>
+                <a:latin typeface="Arial"/>
+              </a:rPr>
+              <a:t>ℹ  18 dependencias en total — esto es solo el grupo específico del curso.</a:t>
+            </a:r>
+          </a:p>
+        </p:txBody>
+      </p:sp>
+    </p:spTree>
+  </p:cSld>
+  <p:clrMapOvr>
+    <a:masterClrMapping/>
+  </p:clrMapOvr>
+</p:sld>
+</file>
+
+<file path=ppt/slides/slide22.xml><?xml version="1.0" encoding="utf-8"?>
+<p:sld xmlns:a="http://schemas.openxmlformats.org/drawingml/2006/main" xmlns:p="http://schemas.openxmlformats.org/presentationml/2006/main" xmlns:r="http://schemas.openxmlformats.org/officeDocument/2006/relationships">
+  <p:cSld>
+    <p:spTree>
+      <p:nvGrpSpPr>
+        <p:cNvPr id="1" name=""/>
+        <p:cNvGrpSpPr/>
+        <p:nvPr/>
+      </p:nvGrpSpPr>
+      <p:grpSpPr/>
+      <p:sp>
+        <p:nvSpPr>
+          <p:cNvPr id="2" name="Text Placeholder 1"/>
+          <p:cNvSpPr>
+            <a:spLocks noGrp="1"/>
+          </p:cNvSpPr>
+          <p:nvPr>
+            <p:ph type="body" idx="13" sz="quarter"/>
+          </p:nvPr>
+        </p:nvSpPr>
+        <p:spPr/>
+        <p:txBody>
+          <a:bodyPr wrap="square"/>
+          <a:lstStyle/>
+          <a:p>
+            <a:r>
+              <a:t>Requisitos de hardware — no hace falta potencia</a:t>
+            </a:r>
+          </a:p>
+        </p:txBody>
+      </p:sp>
+      <p:sp>
+        <p:nvSpPr>
+          <p:cNvPr id="3" name="Text Placeholder 2"/>
+          <p:cNvSpPr>
+            <a:spLocks noGrp="1"/>
+          </p:cNvSpPr>
+          <p:nvPr>
+            <p:ph type="body" idx="16" sz="quarter"/>
+          </p:nvPr>
+        </p:nvSpPr>
+        <p:spPr/>
+        <p:txBody>
+          <a:bodyPr/>
+          <a:lstStyle/>
+          <a:p/>
+        </p:txBody>
+      </p:sp>
+      <p:sp>
+        <p:nvSpPr>
+          <p:cNvPr id="4" name="TextBox 3"/>
+          <p:cNvSpPr txBox="1"/>
+          <p:nvPr/>
+        </p:nvSpPr>
+        <p:spPr>
+          <a:xfrm>
+            <a:off x="1051560" y="2331720"/>
+            <a:ext cx="4846320" cy="411480"/>
+          </a:xfrm>
+          <a:prstGeom prst="rect">
+            <a:avLst/>
+          </a:prstGeom>
+          <a:noFill/>
+        </p:spPr>
+        <p:txBody>
+          <a:bodyPr wrap="square">
+            <a:spAutoFit/>
+          </a:bodyPr>
+          <a:lstStyle/>
+          <a:p>
+            <a:pPr algn="l"/>
+            <a:r>
+              <a:rPr sz="1600" b="1">
+                <a:solidFill>
+                  <a:srgbClr val="CD2D37"/>
+                </a:solidFill>
+                <a:latin typeface="Arial"/>
+              </a:rPr>
+              <a:t>Mínimo (pandas/networkx)</a:t>
+            </a:r>
+          </a:p>
+        </p:txBody>
+      </p:sp>
+      <p:sp>
+        <p:nvSpPr>
+          <p:cNvPr id="5" name="TextBox 4"/>
+          <p:cNvSpPr txBox="1"/>
+          <p:nvPr/>
+        </p:nvSpPr>
+        <p:spPr>
+          <a:xfrm>
+            <a:off x="1051560" y="2788920"/>
+            <a:ext cx="4846320" cy="3200400"/>
+          </a:xfrm>
+          <a:prstGeom prst="rect">
+            <a:avLst/>
+          </a:prstGeom>
+          <a:noFill/>
+        </p:spPr>
+        <p:txBody>
+          <a:bodyPr wrap="square">
+            <a:spAutoFit/>
+          </a:bodyPr>
+          <a:lstStyle/>
+          <a:p>
+            <a:r>
+              <a:rPr sz="1600">
+                <a:solidFill>
+                  <a:srgbClr val="CD2D37"/>
+                </a:solidFill>
+                <a:latin typeface="Arial"/>
+              </a:rPr>
+              <a:t>▸  </a:t>
+            </a:r>
+            <a:r>
+              <a:rPr sz="1600">
+                <a:solidFill>
+                  <a:srgbClr val="465461"/>
+                </a:solidFill>
+                <a:latin typeface="Arial"/>
+              </a:rPr>
+              <a:t>8GB RAM, cualquier CPU moderna</a:t>
+            </a:r>
+          </a:p>
+          <a:p>
+            <a:r>
+              <a:rPr sz="1600">
+                <a:solidFill>
+                  <a:srgbClr val="CD2D37"/>
+                </a:solidFill>
+                <a:latin typeface="Arial"/>
+              </a:rPr>
+              <a:t>▸  </a:t>
+            </a:r>
+            <a:r>
+              <a:rPr sz="1600">
+                <a:solidFill>
+                  <a:srgbClr val="465461"/>
+                </a:solidFill>
+                <a:latin typeface="Arial"/>
+              </a:rPr>
+              <a:t>10GB disco libre</a:t>
+            </a:r>
+          </a:p>
+          <a:p>
+            <a:r>
+              <a:rPr sz="1600">
+                <a:solidFill>
+                  <a:srgbClr val="CD2D37"/>
+                </a:solidFill>
+                <a:latin typeface="Arial"/>
+              </a:rPr>
+              <a:t>▸  </a:t>
+            </a:r>
+            <a:r>
+              <a:rPr sz="1600">
+                <a:solidFill>
+                  <a:srgbClr val="465461"/>
+                </a:solidFill>
+                <a:latin typeface="Arial"/>
+              </a:rPr>
+              <a:t>EDA, grafos, text mining: fluidos</a:t>
+            </a:r>
+          </a:p>
+        </p:txBody>
+      </p:sp>
+      <p:sp>
+        <p:nvSpPr>
+          <p:cNvPr id="6" name="TextBox 5"/>
+          <p:cNvSpPr txBox="1"/>
+          <p:nvPr/>
+        </p:nvSpPr>
+        <p:spPr>
+          <a:xfrm>
+            <a:off x="6217920" y="2331720"/>
+            <a:ext cx="4846320" cy="411480"/>
+          </a:xfrm>
+          <a:prstGeom prst="rect">
+            <a:avLst/>
+          </a:prstGeom>
+          <a:noFill/>
+        </p:spPr>
+        <p:txBody>
+          <a:bodyPr wrap="square">
+            <a:spAutoFit/>
+          </a:bodyPr>
+          <a:lstStyle/>
+          <a:p>
+            <a:pPr algn="l"/>
+            <a:r>
+              <a:rPr sz="1600" b="1">
+                <a:solidFill>
+                  <a:srgbClr val="CD2D37"/>
+                </a:solidFill>
+                <a:latin typeface="Arial"/>
+              </a:rPr>
+              <a:t>Recomendado (embeddings + LLM)</a:t>
+            </a:r>
+          </a:p>
+        </p:txBody>
+      </p:sp>
+      <p:sp>
+        <p:nvSpPr>
+          <p:cNvPr id="7" name="TextBox 6"/>
+          <p:cNvSpPr txBox="1"/>
+          <p:nvPr/>
+        </p:nvSpPr>
+        <p:spPr>
+          <a:xfrm>
+            <a:off x="6217920" y="2788920"/>
+            <a:ext cx="4846320" cy="3200400"/>
+          </a:xfrm>
+          <a:prstGeom prst="rect">
+            <a:avLst/>
+          </a:prstGeom>
+          <a:noFill/>
+        </p:spPr>
+        <p:txBody>
+          <a:bodyPr wrap="square">
+            <a:spAutoFit/>
+          </a:bodyPr>
+          <a:lstStyle/>
+          <a:p>
+            <a:r>
+              <a:rPr sz="1600">
+                <a:solidFill>
+                  <a:srgbClr val="CD2D37"/>
+                </a:solidFill>
+                <a:latin typeface="Arial"/>
+              </a:rPr>
+              <a:t>▸  </a:t>
+            </a:r>
+            <a:r>
+              <a:rPr sz="1600">
+                <a:solidFill>
+                  <a:srgbClr val="465461"/>
+                </a:solidFill>
+                <a:latin typeface="Arial"/>
+              </a:rPr>
+              <a:t>16GB RAM para qwen2.5:14b Q4</a:t>
+            </a:r>
+          </a:p>
+          <a:p>
+            <a:r>
+              <a:rPr sz="1600">
+                <a:solidFill>
+                  <a:srgbClr val="CD2D37"/>
+                </a:solidFill>
+                <a:latin typeface="Arial"/>
+              </a:rPr>
+              <a:t>▸  </a:t>
+            </a:r>
+            <a:r>
+              <a:rPr sz="1600">
+                <a:solidFill>
+                  <a:srgbClr val="465461"/>
+                </a:solidFill>
+                <a:latin typeface="Arial"/>
+              </a:rPr>
+              <a:t>GPU opcional (acelera embeddings ×10)</a:t>
+            </a:r>
+          </a:p>
+          <a:p>
+            <a:r>
+              <a:rPr sz="1600">
+                <a:solidFill>
+                  <a:srgbClr val="CD2D37"/>
+                </a:solidFill>
+                <a:latin typeface="Arial"/>
+              </a:rPr>
+              <a:t>▸  </a:t>
+            </a:r>
+            <a:r>
+              <a:rPr sz="1600">
+                <a:solidFill>
+                  <a:srgbClr val="465461"/>
+                </a:solidFill>
+                <a:latin typeface="Arial"/>
+              </a:rPr>
+              <a:t>Sin GPU: lento en corpus completo, instantáneo en muestra</a:t>
+            </a:r>
+          </a:p>
+        </p:txBody>
+      </p:sp>
+    </p:spTree>
+  </p:cSld>
+  <p:clrMapOvr>
+    <a:masterClrMapping/>
+  </p:clrMapOvr>
+</p:sld>
+</file>
+
+<file path=ppt/slides/slide23.xml><?xml version="1.0" encoding="utf-8"?>
+<p:sld xmlns:a="http://schemas.openxmlformats.org/drawingml/2006/main" xmlns:p="http://schemas.openxmlformats.org/presentationml/2006/main" xmlns:r="http://schemas.openxmlformats.org/officeDocument/2006/relationships">
+  <p:cSld>
+    <p:spTree>
+      <p:nvGrpSpPr>
+        <p:cNvPr id="1" name=""/>
+        <p:cNvGrpSpPr/>
+        <p:nvPr/>
+      </p:nvGrpSpPr>
+      <p:grpSpPr/>
+      <p:sp>
+        <p:nvSpPr>
+          <p:cNvPr id="2" name="Text Placeholder 1"/>
+          <p:cNvSpPr>
+            <a:spLocks noGrp="1"/>
+          </p:cNvSpPr>
+          <p:nvPr>
+            <p:ph type="body" idx="13" sz="quarter"/>
+          </p:nvPr>
+        </p:nvSpPr>
+        <p:spPr/>
+        <p:txBody>
+          <a:bodyPr wrap="square"/>
+          <a:lstStyle/>
+          <a:p>
+            <a:r>
+              <a:t>Preguntas frecuentes y respuestas honestas</a:t>
+            </a:r>
+          </a:p>
+        </p:txBody>
+      </p:sp>
+      <p:sp>
+        <p:nvSpPr>
+          <p:cNvPr id="3" name="Text Placeholder 2"/>
+          <p:cNvSpPr>
+            <a:spLocks noGrp="1"/>
+          </p:cNvSpPr>
+          <p:nvPr>
+            <p:ph type="body" idx="16" sz="quarter"/>
+          </p:nvPr>
+        </p:nvSpPr>
+        <p:spPr/>
+        <p:txBody>
+          <a:bodyPr/>
+          <a:lstStyle/>
+          <a:p/>
+        </p:txBody>
+      </p:sp>
+      <p:graphicFrame>
+        <p:nvGraphicFramePr>
+          <p:cNvPr id="4" name="Table 3"/>
+          <p:cNvGraphicFramePr>
+            <a:graphicFrameLocks noGrp="1"/>
+          </p:cNvGraphicFramePr>
+          <p:nvPr/>
+        </p:nvGraphicFramePr>
+        <p:xfrm>
+          <a:off x="1051560" y="2286000"/>
+          <a:ext cx="10058400" cy="1097280"/>
+        </p:xfrm>
+        <a:graphic>
+          <a:graphicData uri="http://schemas.openxmlformats.org/drawingml/2006/table">
+            <a:tbl>
+              <a:tblPr>
+                <a:tableStyleId>{5C22544A-7EE6-4342-B048-85BDC9FD1C3A}</a:tableStyleId>
+              </a:tblPr>
+              <a:tblGrid>
+                <a:gridCol w="5029200"/>
+                <a:gridCol w="5029200"/>
+              </a:tblGrid>
+              <a:tr h="365760">
+                <a:tc>
+                  <a:txBody>
+                    <a:bodyPr/>
+                    <a:lstStyle/>
+                    <a:p>
+                      <a:r>
+                        <a:rPr sz="1200" b="1">
+                          <a:solidFill>
+                            <a:srgbClr val="FFFFFF"/>
+                          </a:solidFill>
+                          <a:latin typeface="Arial"/>
+                        </a:rPr>
+                        <a:t>Pregunta</a:t>
+                      </a:r>
+                    </a:p>
+                  </a:txBody>
+                  <a:tcPr marL="45000" marR="45000" marT="25000" marB="25000" anchor="ctr">
+                    <a:solidFill>
+                      <a:srgbClr val="CD2D37"/>
+                    </a:solidFill>
+                  </a:tcPr>
+                </a:tc>
+                <a:tc>
+                  <a:txBody>
+                    <a:bodyPr/>
+                    <a:lstStyle/>
+                    <a:p>
+                      <a:r>
+                        <a:rPr sz="1200" b="1">
+                          <a:solidFill>
+                            <a:srgbClr val="FFFFFF"/>
+                          </a:solidFill>
+                          <a:latin typeface="Arial"/>
+                        </a:rPr>
+                        <a:t>Respuesta</a:t>
+                      </a:r>
+                    </a:p>
+                  </a:txBody>
+                  <a:tcPr marL="45000" marR="45000" marT="25000" marB="25000" anchor="ctr">
+                    <a:solidFill>
+                      <a:srgbClr val="CD2D37"/>
+                    </a:solidFill>
+                  </a:tcPr>
+                </a:tc>
+              </a:tr>
+              <a:tr h="365760">
+                <a:tc>
+                  <a:txBody>
+                    <a:bodyPr/>
+                    <a:lstStyle/>
+                    <a:p>
+                      <a:r>
+                        <a:rPr sz="1100" b="0">
+                          <a:solidFill>
+                            <a:srgbClr val="465461"/>
+                          </a:solidFill>
+                          <a:latin typeface="Arial"/>
+                        </a:rPr>
+                        <a:t>¿API de embeddings en la nube?</a:t>
+                      </a:r>
+                    </a:p>
+                  </a:txBody>
+                  <a:tcPr marL="45000" marR="45000" marT="25000" marB="25000" anchor="ctr">
+                    <a:solidFill>
+                      <a:srgbClr val="F1F2F6"/>
+                    </a:solidFill>
+                  </a:tcPr>
+                </a:tc>
+                <a:tc>
+                  <a:txBody>
+                    <a:bodyPr/>
+                    <a:lstStyle/>
+                    <a:p>
+                      <a:r>
+                        <a:rPr sz="1100" b="0">
+                          <a:solidFill>
+                            <a:srgbClr val="465461"/>
+                          </a:solidFill>
+                          <a:latin typeface="Arial"/>
+                        </a:rPr>
+                        <a:t>Datos de personas reales… tú mismo</a:t>
+                      </a:r>
+                    </a:p>
+                  </a:txBody>
+                  <a:tcPr marL="45000" marR="45000" marT="25000" marB="25000" anchor="ctr">
+                    <a:solidFill>
+                      <a:srgbClr val="F1F2F6"/>
+                    </a:solidFill>
+                  </a:tcPr>
+                </a:tc>
+              </a:tr>
+              <a:tr h="365760">
+                <a:tc>
+                  <a:txBody>
+                    <a:bodyPr/>
+                    <a:lstStyle/>
+                    <a:p>
+                      <a:r>
+                        <a:rPr sz="1100" b="0">
+                          <a:solidFill>
+                            <a:srgbClr val="465461"/>
+                          </a:solidFill>
+                          <a:latin typeface="Arial"/>
+                        </a:rPr>
+                        <a:t>¿Sin GPU?</a:t>
+                      </a:r>
+                    </a:p>
+                  </a:txBody>
+                  <a:tcPr marL="45000" marR="45000" marT="25000" marB="25000" anchor="ctr">
+                    <a:solidFill>
+                      <a:srgbClr val="FFFFFF"/>
+                    </a:solidFill>
+                  </a:tcPr>
+                </a:tc>
+                <a:tc>
+                  <a:txBody>
+                    <a:bodyPr/>
+                    <a:lstStyle/>
+                    <a:p>
+                      <a:r>
+                        <a:rPr sz="1100" b="0">
+                          <a:solidFill>
+                            <a:srgbClr val="465461"/>
+                          </a:solidFill>
+                          <a:latin typeface="Arial"/>
+                        </a:rPr>
+                        <a:t>CPU funciona para EDA y muestras pequeñas</a:t>
+                      </a:r>
+                    </a:p>
+                  </a:txBody>
+                  <a:tcPr marL="45000" marR="45000" marT="25000" marB="25000" anchor="ctr">
+                    <a:solidFill>
+                      <a:srgbClr val="FFFFFF"/>
+                    </a:solidFill>
+                  </a:tcPr>
+                </a:tc>
+              </a:tr>
+            </a:tbl>
+          </a:graphicData>
+        </a:graphic>
+      </p:graphicFrame>
+      <p:sp>
+        <p:nvSpPr>
+          <p:cNvPr id="5" name="TextBox 4"/>
+          <p:cNvSpPr txBox="1"/>
+          <p:nvPr/>
+        </p:nvSpPr>
+        <p:spPr>
+          <a:xfrm>
+            <a:off x="1051560" y="5760720"/>
+            <a:ext cx="10058400" cy="320040"/>
+          </a:xfrm>
+          <a:prstGeom prst="rect">
+            <a:avLst/>
+          </a:prstGeom>
+          <a:noFill/>
+        </p:spPr>
+        <p:txBody>
+          <a:bodyPr wrap="square">
+            <a:spAutoFit/>
+          </a:bodyPr>
+          <a:lstStyle/>
+          <a:p>
+            <a:pPr algn="l"/>
+            <a:r>
+              <a:rPr sz="1000" b="0">
+                <a:solidFill>
+                  <a:srgbClr val="707888"/>
+                </a:solidFill>
+                <a:latin typeface="Arial"/>
+              </a:rPr>
+              <a:t>ℹ  Entorno listo → Bloque 4 (agentes) y Bloque 5 (casos prácticos)</a:t>
+            </a:r>
+          </a:p>
+        </p:txBody>
+      </p:sp>
+    </p:spTree>
+  </p:cSld>
+  <p:clrMapOvr>
+    <a:masterClrMapping/>
+  </p:clrMapOvr>
+</p:sld>
+</file>
+
+<file path=ppt/slides/slide3.xml><?xml version="1.0" encoding="utf-8"?>
+<p:sld xmlns:a="http://schemas.openxmlformats.org/drawingml/2006/main" xmlns:p="http://schemas.openxmlformats.org/presentationml/2006/main" xmlns:r="http://schemas.openxmlformats.org/officeDocument/2006/relationships" xmlns:p14="http://schemas.microsoft.com/office/powerpoint/2010/main" xmlns:p15="http://schemas.microsoft.com/office/powerpoint/2012/main" xmlns:mc="http://schemas.openxmlformats.org/markup-compatibility/2006">
+  <p:cSld>
+    <p:spTree>
+      <p:nvGrpSpPr>
+        <p:cNvPr id="1" name=""/>
+        <p:cNvGrpSpPr/>
+        <p:nvPr/>
+      </p:nvGrpSpPr>
+      <p:grpSpPr>
+        <a:xfrm>
+          <a:off x="0" y="0"/>
+          <a:ext cx="0" cy="0"/>
+          <a:chOff x="0" y="0"/>
+          <a:chExt cx="0" cy="0"/>
+        </a:xfrm>
+      </p:grpSpPr>
+      <p:sp>
+        <p:nvSpPr>
+          <p:cNvPr id="64" name="PlaceHolder 1"/>
+          <p:cNvSpPr>
+            <a:spLocks noGrp="1"/>
+          </p:cNvSpPr>
+          <p:nvPr>
+            <p:ph hasCustomPrompt="1"/>
+          </p:nvPr>
+        </p:nvSpPr>
+        <p:spPr>
+          <a:xfrm>
+            <a:off x="1073520" y="742680"/>
+            <a:ext cx="6818400" cy="522000"/>
+          </a:xfrm>
+          <a:prstGeom prst="rect">
+            <a:avLst/>
+          </a:prstGeom>
+          <a:noFill/>
+          <a:ln w="0">
+            <a:noFill/>
+          </a:ln>
+        </p:spPr>
+        <p:txBody>
+          <a:bodyPr lIns="36000" tIns="0" rIns="0" bIns="0" anchor="t">
+            <a:noAutofit/>
+          </a:bodyPr>
+          <a:p>
+            <a:pPr indent="0" algn="l" defTabSz="914400">
+              <a:lnSpc>
+                <a:spcPct val="100000"/>
+              </a:lnSpc>
+              <a:spcBef>
+                <a:spcPts val="1001"/>
+              </a:spcBef>
+              <a:buNone/>
+              <a:tabLst>
+                <a:tab pos="0" algn="l"/>
+              </a:tabLst>
+            </a:pPr>
+            <a:r>
+              <a:rPr lang="es-ES" sz="4000" b="1" u="none" strike="noStrike">
+                <a:solidFill>
+                  <a:srgbClr val="CD2D37"/>
+                </a:solidFill>
+                <a:effectLst/>
+                <a:uFillTx/>
+                <a:latin typeface="Arial"/>
+              </a:rPr>
+              <a:t>¿Por qué uv?</a:t>
+            </a:r>
+            <a:endParaRPr lang="es-ES" sz="4000" b="0" u="none" strike="noStrike">
+              <a:solidFill>
+                <a:schemeClr val="dk1"/>
+              </a:solidFill>
+              <a:effectLst/>
+              <a:uFillTx/>
+              <a:latin typeface="Calibri"/>
+            </a:endParaRPr>
+          </a:p>
+        </p:txBody>
+      </p:sp>
+      <p:sp>
+        <p:nvSpPr>
+          <p:cNvPr id="65" name="PlaceHolder 2"/>
+          <p:cNvSpPr>
+            <a:spLocks noGrp="1"/>
+          </p:cNvSpPr>
+          <p:nvPr>
+            <p:ph hasCustomPrompt="1"/>
+          </p:nvPr>
+        </p:nvSpPr>
+        <p:spPr>
+          <a:xfrm>
+            <a:off x="1073520" y="1711800"/>
+            <a:ext cx="10084320" cy="3872160"/>
+          </a:xfrm>
+          <a:prstGeom prst="rect">
+            <a:avLst/>
+          </a:prstGeom>
+          <a:noFill/>
+          <a:ln w="0">
+            <a:noFill/>
+          </a:ln>
+        </p:spPr>
+        <p:txBody>
+          <a:bodyPr lIns="0" tIns="0" rIns="0" bIns="0" anchor="t">
+            <a:noAutofit/>
+          </a:bodyPr>
+          <a:p>
+            <a:pPr marL="228600" indent="-228600" algn="l" defTabSz="914400">
+              <a:lnSpc>
+                <a:spcPct val="90000"/>
+              </a:lnSpc>
+              <a:spcBef>
+                <a:spcPts val="1001"/>
+              </a:spcBef>
+              <a:buSzPct val="100112"/>
+              <a:buBlip>
+                <a:blip r:embed="rId1"/>
+              </a:buBlip>
+              <a:tabLst>
+                <a:tab pos="0" algn="l"/>
+              </a:tabLst>
+            </a:pPr>
+            <a:r>
+              <a:rPr lang="es-ES" sz="1800" b="0" u="none" strike="noStrike">
+                <a:solidFill>
+                  <a:srgbClr val="465461"/>
+                </a:solidFill>
+                <a:effectLst/>
+                <a:uFillTx/>
+                <a:latin typeface="Arial"/>
+              </a:rPr>
+              <a:t>Reemplaza pip, venv y poetry en un solo comando</a:t>
+            </a:r>
+            <a:endParaRPr lang="es-ES" sz="1800" b="0" u="none" strike="noStrike">
+              <a:solidFill>
+                <a:schemeClr val="dk1"/>
+              </a:solidFill>
+              <a:effectLst/>
+              <a:uFillTx/>
+              <a:latin typeface="Calibri"/>
+            </a:endParaRPr>
+          </a:p>
+          <a:p>
+            <a:pPr marL="228600" indent="-228600" algn="l" defTabSz="914400">
+              <a:lnSpc>
+                <a:spcPct val="90000"/>
+              </a:lnSpc>
+              <a:spcBef>
+                <a:spcPts val="1001"/>
+              </a:spcBef>
+              <a:buSzPct val="100112"/>
+              <a:buBlip>
+                <a:blip r:embed="rId2"/>
+              </a:buBlip>
+              <a:tabLst>
+                <a:tab pos="0" algn="l"/>
+              </a:tabLst>
+            </a:pPr>
+            <a:r>
+              <a:rPr lang="es-ES" sz="1800" b="0" u="none" strike="noStrike">
+                <a:solidFill>
+                  <a:srgbClr val="465461"/>
+                </a:solidFill>
+                <a:effectLst/>
+                <a:uFillTx/>
+                <a:latin typeface="Arial"/>
+              </a:rPr>
+              <a:t>Reproducible en cualquier máquina con Python 3.12+, sin configuración extra</a:t>
+            </a:r>
+            <a:endParaRPr lang="es-ES" sz="1800" b="0" u="none" strike="noStrike">
+              <a:solidFill>
+                <a:schemeClr val="dk1"/>
+              </a:solidFill>
+              <a:effectLst/>
+              <a:uFillTx/>
+              <a:latin typeface="Calibri"/>
+            </a:endParaRPr>
+          </a:p>
+          <a:p>
+            <a:pPr marL="228600" indent="-228600" algn="l" defTabSz="914400">
+              <a:lnSpc>
+                <a:spcPct val="90000"/>
+              </a:lnSpc>
+              <a:spcBef>
+                <a:spcPts val="1001"/>
+              </a:spcBef>
+              <a:buSzPct val="100112"/>
+              <a:buBlip>
+                <a:blip r:embed="rId3"/>
+              </a:buBlip>
+              <a:tabLst>
+                <a:tab pos="0" algn="l"/>
+              </a:tabLst>
+            </a:pPr>
+            <a:r>
+              <a:rPr lang="es-ES" sz="1800" b="0" u="none" strike="noStrike">
+                <a:solidFill>
+                  <a:srgbClr val="465461"/>
+                </a:solidFill>
+                <a:effectLst/>
+                <a:uFillTx/>
+                <a:latin typeface="Arial"/>
+              </a:rPr>
+              <a:t>Objetivo: cualquier alumno replica el entorno en 10 minutos</a:t>
+            </a:r>
+            <a:endParaRPr lang="es-ES" sz="1800" b="0" u="none" strike="noStrike">
+              <a:solidFill>
+                <a:schemeClr val="dk1"/>
+              </a:solidFill>
+              <a:effectLst/>
+              <a:uFillTx/>
+              <a:latin typeface="Calibri"/>
+            </a:endParaRPr>
+          </a:p>
+          <a:p>
+            <a:pPr marL="228600" indent="-228600" algn="l" defTabSz="914400">
+              <a:lnSpc>
+                <a:spcPct val="90000"/>
+              </a:lnSpc>
+              <a:spcBef>
+                <a:spcPts val="1001"/>
+              </a:spcBef>
+              <a:buSzPct val="100112"/>
+              <a:buBlip>
+                <a:blip r:embed="rId4"/>
+              </a:buBlip>
+              <a:tabLst>
+                <a:tab pos="0" algn="l"/>
+              </a:tabLst>
+            </a:pPr>
+            <a:r>
+              <a:rPr lang="es-ES" sz="1800" b="0" u="none" strike="noStrike">
+                <a:solidFill>
+                  <a:srgbClr val="465461"/>
+                </a:solidFill>
+                <a:effectLst/>
+                <a:uFillTx/>
+                <a:latin typeface="Arial"/>
+              </a:rPr>
+              <a:t>Es lo que se está acogiendo como estándar en la comunidad de desarrollo IA.</a:t>
+            </a:r>
+            <a:endParaRPr lang="es-ES" sz="1800" b="0" u="none" strike="noStrike">
+              <a:solidFill>
+                <a:schemeClr val="dk1"/>
+              </a:solidFill>
+              <a:effectLst/>
+              <a:uFillTx/>
+              <a:latin typeface="Calibri"/>
+            </a:endParaRPr>
+          </a:p>
+        </p:txBody>
+      </p:sp>
+    </p:spTree>
+  </p:cSld>
+  <mc:AlternateContent>
+    <mc:Choice Requires="p14">
+      <p:transition spd="slow" p14:dur="2000"/>
+    </mc:Choice>
+    <mc:Fallback>
+      <p:transition spd="slow"/>
+    </mc:Fallback>
+  </mc:AlternateContent>
+</p:sld>
+</file>
+
+<file path=ppt/slides/slide4.xml><?xml version="1.0" encoding="utf-8"?>
+<p:sld xmlns:a="http://schemas.openxmlformats.org/drawingml/2006/main" xmlns:p="http://schemas.openxmlformats.org/presentationml/2006/main" xmlns:r="http://schemas.openxmlformats.org/officeDocument/2006/relationships">
+  <p:cSld>
+    <p:spTree>
+      <p:nvGrpSpPr>
+        <p:cNvPr id="1" name=""/>
+        <p:cNvGrpSpPr/>
+        <p:nvPr/>
+      </p:nvGrpSpPr>
+      <p:grpSpPr/>
+      <p:sp>
+        <p:nvSpPr>
+          <p:cNvPr id="2" name="Text Placeholder 1"/>
+          <p:cNvSpPr>
+            <a:spLocks noGrp="1"/>
+          </p:cNvSpPr>
+          <p:nvPr>
+            <p:ph type="body" idx="13" sz="quarter"/>
+          </p:nvPr>
+        </p:nvSpPr>
+        <p:spPr/>
+        <p:txBody>
+          <a:bodyPr wrap="square"/>
+          <a:lstStyle/>
+          <a:p>
+            <a:r>
+              <a:t>Comandos básicos de uv</a:t>
+            </a:r>
+          </a:p>
+        </p:txBody>
+      </p:sp>
+      <p:sp>
+        <p:nvSpPr>
+          <p:cNvPr id="3" name="Text Placeholder 2"/>
+          <p:cNvSpPr>
+            <a:spLocks noGrp="1"/>
+          </p:cNvSpPr>
+          <p:nvPr>
+            <p:ph type="body" idx="16" sz="quarter"/>
+          </p:nvPr>
+        </p:nvSpPr>
+        <p:spPr/>
+        <p:txBody>
+          <a:bodyPr/>
+          <a:lstStyle/>
+          <a:p/>
+        </p:txBody>
+      </p:sp>
+      <p:graphicFrame>
+        <p:nvGraphicFramePr>
+          <p:cNvPr id="4" name="Table 3"/>
+          <p:cNvGraphicFramePr>
+            <a:graphicFrameLocks noGrp="1"/>
+          </p:cNvGraphicFramePr>
+          <p:nvPr/>
+        </p:nvGraphicFramePr>
+        <p:xfrm>
+          <a:off x="1051560" y="1783080"/>
+          <a:ext cx="10058400" cy="2194560"/>
+        </p:xfrm>
+        <a:graphic>
+          <a:graphicData uri="http://schemas.openxmlformats.org/drawingml/2006/table">
+            <a:tbl>
+              <a:tblPr>
+                <a:tableStyleId>{5C22544A-7EE6-4342-B048-85BDC9FD1C3A}</a:tableStyleId>
+              </a:tblPr>
+              <a:tblGrid>
+                <a:gridCol w="5029200"/>
+                <a:gridCol w="5029200"/>
+              </a:tblGrid>
+              <a:tr h="365760">
+                <a:tc>
+                  <a:txBody>
+                    <a:bodyPr/>
+                    <a:lstStyle/>
+                    <a:p>
+                      <a:r>
+                        <a:rPr sz="1200" b="1">
+                          <a:solidFill>
+                            <a:srgbClr val="FFFFFF"/>
+                          </a:solidFill>
+                          <a:latin typeface="Arial"/>
+                        </a:rPr>
+                        <a:t>Comando</a:t>
+                      </a:r>
+                    </a:p>
+                  </a:txBody>
+                  <a:tcPr marL="45000" marR="45000" marT="25000" marB="25000" anchor="ctr">
+                    <a:solidFill>
+                      <a:srgbClr val="CD2D37"/>
+                    </a:solidFill>
+                  </a:tcPr>
+                </a:tc>
+                <a:tc>
+                  <a:txBody>
+                    <a:bodyPr/>
+                    <a:lstStyle/>
+                    <a:p>
+                      <a:r>
+                        <a:rPr sz="1200" b="1">
+                          <a:solidFill>
+                            <a:srgbClr val="FFFFFF"/>
+                          </a:solidFill>
+                          <a:latin typeface="Arial"/>
+                        </a:rPr>
+                        <a:t>Qué hace</a:t>
+                      </a:r>
+                    </a:p>
+                  </a:txBody>
+                  <a:tcPr marL="45000" marR="45000" marT="25000" marB="25000" anchor="ctr">
+                    <a:solidFill>
+                      <a:srgbClr val="CD2D37"/>
+                    </a:solidFill>
+                  </a:tcPr>
+                </a:tc>
+              </a:tr>
+              <a:tr h="365760">
+                <a:tc>
+                  <a:txBody>
+                    <a:bodyPr/>
+                    <a:lstStyle/>
+                    <a:p>
+                      <a:r>
+                        <a:rPr sz="1100" b="0">
+                          <a:solidFill>
+                            <a:srgbClr val="465461"/>
+                          </a:solidFill>
+                          <a:latin typeface="Arial"/>
+                        </a:rPr>
+                        <a:t>uv sync</a:t>
+                      </a:r>
+                    </a:p>
+                  </a:txBody>
+                  <a:tcPr marL="45000" marR="45000" marT="25000" marB="25000" anchor="ctr">
+                    <a:solidFill>
+                      <a:srgbClr val="F1F2F6"/>
+                    </a:solidFill>
+                  </a:tcPr>
+                </a:tc>
+                <a:tc>
+                  <a:txBody>
+                    <a:bodyPr/>
+                    <a:lstStyle/>
+                    <a:p>
+                      <a:r>
+                        <a:rPr sz="1100" b="0">
+                          <a:solidFill>
+                            <a:srgbClr val="465461"/>
+                          </a:solidFill>
+                          <a:latin typeface="Arial"/>
+                        </a:rPr>
+                        <a:t>Instala/actualiza todas las dependencias del pyproject.toml</a:t>
+                      </a:r>
+                    </a:p>
+                  </a:txBody>
+                  <a:tcPr marL="45000" marR="45000" marT="25000" marB="25000" anchor="ctr">
+                    <a:solidFill>
+                      <a:srgbClr val="F1F2F6"/>
+                    </a:solidFill>
+                  </a:tcPr>
+                </a:tc>
+              </a:tr>
+              <a:tr h="365760">
+                <a:tc>
+                  <a:txBody>
+                    <a:bodyPr/>
+                    <a:lstStyle/>
+                    <a:p>
+                      <a:r>
+                        <a:rPr sz="1100" b="0">
+                          <a:solidFill>
+                            <a:srgbClr val="465461"/>
+                          </a:solidFill>
+                          <a:latin typeface="Arial"/>
+                        </a:rPr>
+                        <a:t>uv run &lt;comando&gt;</a:t>
+                      </a:r>
+                    </a:p>
+                  </a:txBody>
+                  <a:tcPr marL="45000" marR="45000" marT="25000" marB="25000" anchor="ctr">
+                    <a:solidFill>
+                      <a:srgbClr val="FFFFFF"/>
+                    </a:solidFill>
+                  </a:tcPr>
+                </a:tc>
+                <a:tc>
+                  <a:txBody>
+                    <a:bodyPr/>
+                    <a:lstStyle/>
+                    <a:p>
+                      <a:r>
+                        <a:rPr sz="1100" b="0">
+                          <a:solidFill>
+                            <a:srgbClr val="465461"/>
+                          </a:solidFill>
+                          <a:latin typeface="Arial"/>
+                        </a:rPr>
+                        <a:t>Ejecuta algo dentro del entorno gestionado, sin activar nada a mano</a:t>
+                      </a:r>
+                    </a:p>
+                  </a:txBody>
+                  <a:tcPr marL="45000" marR="45000" marT="25000" marB="25000" anchor="ctr">
+                    <a:solidFill>
+                      <a:srgbClr val="FFFFFF"/>
+                    </a:solidFill>
+                  </a:tcPr>
+                </a:tc>
+              </a:tr>
+              <a:tr h="365760">
+                <a:tc>
+                  <a:txBody>
+                    <a:bodyPr/>
+                    <a:lstStyle/>
+                    <a:p>
+                      <a:r>
+                        <a:rPr sz="1100" b="0">
+                          <a:solidFill>
+                            <a:srgbClr val="465461"/>
+                          </a:solidFill>
+                          <a:latin typeface="Arial"/>
+                        </a:rPr>
+                        <a:t>uv add &lt;paquete&gt;</a:t>
+                      </a:r>
+                    </a:p>
+                  </a:txBody>
+                  <a:tcPr marL="45000" marR="45000" marT="25000" marB="25000" anchor="ctr">
+                    <a:solidFill>
+                      <a:srgbClr val="F1F2F6"/>
+                    </a:solidFill>
+                  </a:tcPr>
+                </a:tc>
+                <a:tc>
+                  <a:txBody>
+                    <a:bodyPr/>
+                    <a:lstStyle/>
+                    <a:p>
+                      <a:r>
+                        <a:rPr sz="1100" b="0">
+                          <a:solidFill>
+                            <a:srgbClr val="465461"/>
+                          </a:solidFill>
+                          <a:latin typeface="Arial"/>
+                        </a:rPr>
+                        <a:t>Añade una dependencia nueva y actualiza el pyproject.toml</a:t>
+                      </a:r>
+                    </a:p>
+                  </a:txBody>
+                  <a:tcPr marL="45000" marR="45000" marT="25000" marB="25000" anchor="ctr">
+                    <a:solidFill>
+                      <a:srgbClr val="F1F2F6"/>
+                    </a:solidFill>
+                  </a:tcPr>
+                </a:tc>
+              </a:tr>
+              <a:tr h="365760">
+                <a:tc>
+                  <a:txBody>
+                    <a:bodyPr/>
+                    <a:lstStyle/>
+                    <a:p>
+                      <a:r>
+                        <a:rPr sz="1100" b="0">
+                          <a:solidFill>
+                            <a:srgbClr val="465461"/>
+                          </a:solidFill>
+                          <a:latin typeface="Arial"/>
+                        </a:rPr>
+                        <a:t>uv python pin 3.12</a:t>
+                      </a:r>
+                    </a:p>
+                  </a:txBody>
+                  <a:tcPr marL="45000" marR="45000" marT="25000" marB="25000" anchor="ctr">
+                    <a:solidFill>
+                      <a:srgbClr val="FFFFFF"/>
+                    </a:solidFill>
+                  </a:tcPr>
+                </a:tc>
+                <a:tc>
+                  <a:txBody>
+                    <a:bodyPr/>
+                    <a:lstStyle/>
+                    <a:p>
+                      <a:r>
+                        <a:rPr sz="1100" b="0">
+                          <a:solidFill>
+                            <a:srgbClr val="465461"/>
+                          </a:solidFill>
+                          <a:latin typeface="Arial"/>
+                        </a:rPr>
+                        <a:t>Fija la versión de Python del proyecto</a:t>
+                      </a:r>
+                    </a:p>
+                  </a:txBody>
+                  <a:tcPr marL="45000" marR="45000" marT="25000" marB="25000" anchor="ctr">
+                    <a:solidFill>
+                      <a:srgbClr val="FFFFFF"/>
+                    </a:solidFill>
+                  </a:tcPr>
+                </a:tc>
+              </a:tr>
+              <a:tr h="365760">
+                <a:tc>
+                  <a:txBody>
+                    <a:bodyPr/>
+                    <a:lstStyle/>
+                    <a:p>
+                      <a:r>
+                        <a:rPr sz="1100" b="0">
+                          <a:solidFill>
+                            <a:srgbClr val="465461"/>
+                          </a:solidFill>
+                          <a:latin typeface="Arial"/>
+                        </a:rPr>
+                        <a:t>uv pip list</a:t>
+                      </a:r>
+                    </a:p>
+                  </a:txBody>
+                  <a:tcPr marL="45000" marR="45000" marT="25000" marB="25000" anchor="ctr">
+                    <a:solidFill>
+                      <a:srgbClr val="F1F2F6"/>
+                    </a:solidFill>
+                  </a:tcPr>
+                </a:tc>
+                <a:tc>
+                  <a:txBody>
+                    <a:bodyPr/>
+                    <a:lstStyle/>
+                    <a:p>
+                      <a:r>
+                        <a:rPr sz="1100" b="0">
+                          <a:solidFill>
+                            <a:srgbClr val="465461"/>
+                          </a:solidFill>
+                          <a:latin typeface="Arial"/>
+                        </a:rPr>
+                        <a:t>Lista los paquetes instalados en el entorno actual</a:t>
+                      </a:r>
+                    </a:p>
+                  </a:txBody>
+                  <a:tcPr marL="45000" marR="45000" marT="25000" marB="25000" anchor="ctr">
+                    <a:solidFill>
+                      <a:srgbClr val="F1F2F6"/>
+                    </a:solidFill>
+                  </a:tcPr>
+                </a:tc>
+              </a:tr>
+            </a:tbl>
+          </a:graphicData>
+        </a:graphic>
+      </p:graphicFrame>
+      <p:sp>
+        <p:nvSpPr>
+          <p:cNvPr id="5" name="TextBox 4"/>
+          <p:cNvSpPr txBox="1"/>
+          <p:nvPr/>
+        </p:nvSpPr>
+        <p:spPr>
+          <a:xfrm>
+            <a:off x="1051560" y="5760720"/>
+            <a:ext cx="10058400" cy="320040"/>
+          </a:xfrm>
+          <a:prstGeom prst="rect">
+            <a:avLst/>
+          </a:prstGeom>
+          <a:noFill/>
+        </p:spPr>
+        <p:txBody>
+          <a:bodyPr wrap="square">
+            <a:spAutoFit/>
+          </a:bodyPr>
+          <a:lstStyle/>
+          <a:p>
+            <a:pPr algn="l"/>
+            <a:r>
+              <a:rPr sz="1000" b="0">
+                <a:solidFill>
+                  <a:srgbClr val="707888"/>
+                </a:solidFill>
+                <a:latin typeface="Arial"/>
+              </a:rPr>
+              <a:t>ℹ  Estos 5 son el 95% de lo que se usa a lo largo del curso.</a:t>
             </a:r>
           </a:p>
         </p:txBody>
@@ -6430,7 +9231,7 @@
 </file>
 
 <file path=ppt/slides/slide5.xml><?xml version="1.0" encoding="utf-8"?>
-<p:sld xmlns:a="http://schemas.openxmlformats.org/drawingml/2006/main" xmlns:p="http://schemas.openxmlformats.org/presentationml/2006/main" xmlns:r="http://schemas.openxmlformats.org/officeDocument/2006/relationships">
+<p:sld xmlns:a="http://schemas.openxmlformats.org/drawingml/2006/main" xmlns:p="http://schemas.openxmlformats.org/presentationml/2006/main" xmlns:r="http://schemas.openxmlformats.org/officeDocument/2006/relationships" xmlns:p14="http://schemas.microsoft.com/office/powerpoint/2010/main" xmlns:p15="http://schemas.microsoft.com/office/powerpoint/2012/main" xmlns:mc="http://schemas.openxmlformats.org/markup-compatibility/2006">
   <p:cSld>
     <p:spTree>
       <p:nvGrpSpPr>
@@ -6438,58 +9239,566 @@
         <p:cNvGrpSpPr/>
         <p:nvPr/>
       </p:nvGrpSpPr>
-      <p:grpSpPr/>
-      <p:sp>
-        <p:nvSpPr>
-          <p:cNvPr id="2" name="Text Placeholder 1"/>
-          <p:cNvSpPr>
-            <a:spLocks noGrp="1"/>
-          </p:cNvSpPr>
-          <p:nvPr>
-            <p:ph type="body" idx="10" sz="quarter"/>
-          </p:nvPr>
-        </p:nvSpPr>
-        <p:spPr/>
-        <p:txBody>
-          <a:bodyPr wrap="square"/>
-          <a:lstStyle/>
-          <a:p>
-            <a:pPr algn="ctr"/>
-            <a:r>
-              <a:rPr sz="1700" b="1">
+      <p:grpSpPr>
+        <a:xfrm>
+          <a:off x="0" y="0"/>
+          <a:ext cx="0" cy="0"/>
+          <a:chOff x="0" y="0"/>
+          <a:chExt cx="0" cy="0"/>
+        </a:xfrm>
+      </p:grpSpPr>
+      <p:sp>
+        <p:nvSpPr>
+          <p:cNvPr id="70" name="PlaceHolder 1"/>
+          <p:cNvSpPr>
+            <a:spLocks noGrp="1"/>
+          </p:cNvSpPr>
+          <p:nvPr>
+            <p:ph hasCustomPrompt="1"/>
+          </p:nvPr>
+        </p:nvSpPr>
+        <p:spPr>
+          <a:xfrm>
+            <a:off x="1073520" y="742680"/>
+            <a:ext cx="6818400" cy="522000"/>
+          </a:xfrm>
+          <a:prstGeom prst="rect">
+            <a:avLst/>
+          </a:prstGeom>
+          <a:noFill/>
+          <a:ln w="0">
+            <a:noFill/>
+          </a:ln>
+        </p:spPr>
+        <p:txBody>
+          <a:bodyPr lIns="36000" tIns="0" rIns="0" bIns="0" anchor="t">
+            <a:noAutofit/>
+          </a:bodyPr>
+          <a:p>
+            <a:pPr indent="0" algn="l" defTabSz="914400">
+              <a:lnSpc>
+                <a:spcPct val="100000"/>
+              </a:lnSpc>
+              <a:spcBef>
+                <a:spcPts val="1001"/>
+              </a:spcBef>
+              <a:buNone/>
+              <a:tabLst>
+                <a:tab pos="0" algn="l"/>
+              </a:tabLst>
+            </a:pPr>
+            <a:r>
+              <a:rPr lang="es-ES" sz="4000" b="1" u="none" strike="noStrike">
                 <a:solidFill>
                   <a:srgbClr val="CD2D37"/>
                 </a:solidFill>
+                <a:effectLst/>
+                <a:uFillTx/>
                 <a:latin typeface="Arial"/>
               </a:rPr>
-              <a:t>SECCIÓN 2</a:t>
-            </a:r>
-          </a:p>
-          <a:p>
-            <a:pPr algn="ctr"/>
-            <a:r>
-              <a:t>Ollama</a:t>
-            </a:r>
-          </a:p>
-          <a:p>
-            <a:pPr algn="ctr"/>
-            <a:r>
-              <a:rPr sz="1600">
+              <a:t>Instalación paso a paso</a:t>
+            </a:r>
+            <a:endParaRPr lang="es-ES" sz="4000" b="0" u="none" strike="noStrike">
+              <a:solidFill>
+                <a:schemeClr val="dk1"/>
+              </a:solidFill>
+              <a:effectLst/>
+              <a:uFillTx/>
+              <a:latin typeface="Calibri"/>
+            </a:endParaRPr>
+          </a:p>
+        </p:txBody>
+      </p:sp>
+      <p:sp>
+        <p:nvSpPr>
+          <p:cNvPr id="71" name="PlaceHolder 2"/>
+          <p:cNvSpPr>
+            <a:spLocks noGrp="1"/>
+          </p:cNvSpPr>
+          <p:nvPr>
+            <p:ph hasCustomPrompt="1"/>
+          </p:nvPr>
+        </p:nvSpPr>
+        <p:spPr>
+          <a:xfrm>
+            <a:off x="1073520" y="1574640"/>
+            <a:ext cx="10084320" cy="4009320"/>
+          </a:xfrm>
+          <a:prstGeom prst="rect">
+            <a:avLst/>
+          </a:prstGeom>
+          <a:noFill/>
+          <a:ln w="0">
+            <a:noFill/>
+          </a:ln>
+        </p:spPr>
+        <p:txBody>
+          <a:bodyPr lIns="0" tIns="0" rIns="0" bIns="0" anchor="t">
+            <a:noAutofit/>
+          </a:bodyPr>
+          <a:p>
+            <a:pPr indent="0" algn="l" defTabSz="914400">
+              <a:buNone/>
+              <a:tabLst>
+                <a:tab pos="0" algn="l"/>
+              </a:tabLst>
+            </a:pPr>
+            <a:endParaRPr lang="es-ES" sz="2400" b="1" u="none" strike="noStrike">
+              <a:solidFill>
+                <a:srgbClr val="465461"/>
+              </a:solidFill>
+              <a:effectLst/>
+              <a:uFillTx/>
+              <a:latin typeface="Arial"/>
+            </a:endParaRPr>
+          </a:p>
+        </p:txBody>
+      </p:sp>
+      <p:sp>
+        <p:nvSpPr>
+          <p:cNvPr id="72" name="TextBox 3"/>
+          <p:cNvSpPr/>
+          <p:nvPr/>
+        </p:nvSpPr>
+        <p:spPr>
+          <a:xfrm>
+            <a:off x="1051560" y="1828800"/>
+            <a:ext cx="10057680" cy="502200"/>
+          </a:xfrm>
+          <a:prstGeom prst="rect">
+            <a:avLst/>
+          </a:prstGeom>
+          <a:noFill/>
+          <a:ln w="0">
+            <a:noFill/>
+          </a:ln>
+        </p:spPr>
+        <p:style>
+          <a:lnRef idx="0"/>
+          <a:fillRef idx="0"/>
+          <a:effectRef idx="0"/>
+          <a:fontRef idx="minor"/>
+        </p:style>
+        <p:txBody>
+          <a:bodyPr lIns="90000" tIns="45000" rIns="90000" bIns="45000" anchor="t">
+            <a:spAutoFit/>
+          </a:bodyPr>
+          <a:p>
+            <a:pPr defTabSz="914400">
+              <a:lnSpc>
+                <a:spcPct val="100000"/>
+              </a:lnSpc>
+            </a:pPr>
+            <a:r>
+              <a:rPr lang="es-ES" sz="1600" b="0" u="none" strike="noStrike">
                 <a:solidFill>
-                  <a:srgbClr val="D6DAE2"/>
+                  <a:srgbClr val="465461"/>
                 </a:solidFill>
+                <a:effectLst/>
+                <a:uFillTx/>
                 <a:latin typeface="Arial"/>
               </a:rPr>
-              <a:t>El LLM que corre en tu máquina</a:t>
-            </a:r>
+              <a:t>Desde cero hasta el notebook </a:t>
+            </a:r>
+            <a:r>
+              <a:rPr lang="es-ES" sz="1600" b="0" u="none" strike="noStrike">
+                <a:solidFill>
+                  <a:srgbClr val="465461"/>
+                </a:solidFill>
+                <a:effectLst/>
+                <a:uFillTx/>
+                <a:latin typeface="Arial"/>
+              </a:rPr>
+              <a:t>corriendo:</a:t>
+            </a:r>
+            <a:endParaRPr lang="en-US" sz="1600" b="0" u="none" strike="noStrike">
+              <a:solidFill>
+                <a:srgbClr val="000000"/>
+              </a:solidFill>
+              <a:effectLst/>
+              <a:uFillTx/>
+              <a:latin typeface="Arial"/>
+            </a:endParaRPr>
+          </a:p>
+        </p:txBody>
+      </p:sp>
+      <p:sp>
+        <p:nvSpPr>
+          <p:cNvPr id="73" name="Rectangle 4"/>
+          <p:cNvSpPr/>
+          <p:nvPr/>
+        </p:nvSpPr>
+        <p:spPr>
+          <a:xfrm>
+            <a:off x="1005840" y="2377440"/>
+            <a:ext cx="10149120" cy="3428280"/>
+          </a:xfrm>
+          <a:prstGeom prst="rect">
+            <a:avLst/>
+          </a:prstGeom>
+          <a:solidFill>
+            <a:srgbClr val="0D1B2A"/>
+          </a:solidFill>
+          <a:ln>
+            <a:noFill/>
+          </a:ln>
+        </p:spPr>
+        <p:style>
+          <a:lnRef idx="1">
+            <a:schemeClr val="accent1"/>
+          </a:lnRef>
+          <a:fillRef idx="3">
+            <a:schemeClr val="accent1"/>
+          </a:fillRef>
+          <a:effectRef idx="2">
+            <a:schemeClr val="accent1"/>
+          </a:effectRef>
+          <a:fontRef idx="minor"/>
+        </p:style>
+        <p:txBody>
+          <a:bodyPr lIns="90000" tIns="45000" rIns="90000" bIns="45000" anchor="ctr">
+            <a:noAutofit/>
+          </a:bodyPr>
+          <a:p>
+            <a:endParaRPr lang="es-ES" sz="1800" b="0" u="none" strike="noStrike">
+              <a:solidFill>
+                <a:schemeClr val="lt1"/>
+              </a:solidFill>
+              <a:effectLst/>
+              <a:uFillTx/>
+              <a:latin typeface="Calibri"/>
+            </a:endParaRPr>
+          </a:p>
+        </p:txBody>
+      </p:sp>
+      <p:sp>
+        <p:nvSpPr>
+          <p:cNvPr id="74" name="TextBox 5"/>
+          <p:cNvSpPr/>
+          <p:nvPr/>
+        </p:nvSpPr>
+        <p:spPr>
+          <a:xfrm>
+            <a:off x="1188720" y="2514600"/>
+            <a:ext cx="6406560" cy="1797480"/>
+          </a:xfrm>
+          <a:prstGeom prst="rect">
+            <a:avLst/>
+          </a:prstGeom>
+          <a:noFill/>
+          <a:ln w="0">
+            <a:noFill/>
+          </a:ln>
+        </p:spPr>
+        <p:style>
+          <a:lnRef idx="0"/>
+          <a:fillRef idx="0"/>
+          <a:effectRef idx="0"/>
+          <a:fontRef idx="minor"/>
+        </p:style>
+        <p:txBody>
+          <a:bodyPr wrap="none" lIns="90000" tIns="45000" rIns="90000" bIns="45000" anchor="t">
+            <a:spAutoFit/>
+          </a:bodyPr>
+          <a:p>
+            <a:pPr defTabSz="914400">
+              <a:lnSpc>
+                <a:spcPct val="100000"/>
+              </a:lnSpc>
+            </a:pPr>
+            <a:r>
+              <a:rPr lang="es-ES" sz="1400" b="0" u="none" strike="noStrike">
+                <a:solidFill>
+                  <a:srgbClr val="A8FF78"/>
+                </a:solidFill>
+                <a:effectLst/>
+                <a:uFillTx/>
+                <a:latin typeface="Consolas"/>
+              </a:rPr>
+              <a:t># 1. Clonar el repositorio</a:t>
+            </a:r>
+            <a:endParaRPr lang="en-US" sz="1400" b="0" u="none" strike="noStrike">
+              <a:solidFill>
+                <a:srgbClr val="000000"/>
+              </a:solidFill>
+              <a:effectLst/>
+              <a:uFillTx/>
+              <a:latin typeface="Arial"/>
+            </a:endParaRPr>
+          </a:p>
+          <a:p>
+            <a:pPr defTabSz="914400">
+              <a:lnSpc>
+                <a:spcPct val="100000"/>
+              </a:lnSpc>
+            </a:pPr>
+            <a:r>
+              <a:rPr lang="es-ES" sz="1400" b="0" u="none" strike="noStrike">
+                <a:solidFill>
+                  <a:srgbClr val="A8FF78"/>
+                </a:solidFill>
+                <a:effectLst/>
+                <a:uFillTx/>
+                <a:latin typeface="Consolas"/>
+              </a:rPr>
+              <a:t>git clone &lt;repo-url&gt; &amp;&amp; cd </a:t>
+            </a:r>
+            <a:r>
+              <a:rPr lang="es-ES" sz="1400" b="0" u="none" strike="noStrike">
+                <a:solidFill>
+                  <a:srgbClr val="A8FF78"/>
+                </a:solidFill>
+                <a:effectLst/>
+                <a:uFillTx/>
+                <a:latin typeface="Consolas"/>
+              </a:rPr>
+              <a:t>&lt;carpeta&gt;</a:t>
+            </a:r>
+            <a:endParaRPr lang="en-US" sz="1400" b="0" u="none" strike="noStrike">
+              <a:solidFill>
+                <a:srgbClr val="000000"/>
+              </a:solidFill>
+              <a:effectLst/>
+              <a:uFillTx/>
+              <a:latin typeface="Arial"/>
+            </a:endParaRPr>
+          </a:p>
+          <a:p>
+            <a:pPr defTabSz="914400">
+              <a:lnSpc>
+                <a:spcPct val="100000"/>
+              </a:lnSpc>
+            </a:pPr>
+            <a:endParaRPr lang="en-US" sz="1400" b="0" u="none" strike="noStrike">
+              <a:solidFill>
+                <a:srgbClr val="000000"/>
+              </a:solidFill>
+              <a:effectLst/>
+              <a:uFillTx/>
+              <a:latin typeface="Arial"/>
+            </a:endParaRPr>
+          </a:p>
+          <a:p>
+            <a:pPr defTabSz="914400">
+              <a:lnSpc>
+                <a:spcPct val="100000"/>
+              </a:lnSpc>
+            </a:pPr>
+            <a:r>
+              <a:rPr lang="es-ES" sz="1400" b="0" u="none" strike="noStrike">
+                <a:solidFill>
+                  <a:srgbClr val="A8FF78"/>
+                </a:solidFill>
+                <a:effectLst/>
+                <a:uFillTx/>
+                <a:latin typeface="Consolas"/>
+              </a:rPr>
+              <a:t># 2. Instalar dependencias </a:t>
+            </a:r>
+            <a:r>
+              <a:rPr lang="es-ES" sz="1400" b="0" u="none" strike="noStrike">
+                <a:solidFill>
+                  <a:srgbClr val="A8FF78"/>
+                </a:solidFill>
+                <a:effectLst/>
+                <a:uFillTx/>
+                <a:latin typeface="Consolas"/>
+              </a:rPr>
+              <a:t>Python</a:t>
+            </a:r>
+            <a:endParaRPr lang="en-US" sz="1400" b="0" u="none" strike="noStrike">
+              <a:solidFill>
+                <a:srgbClr val="000000"/>
+              </a:solidFill>
+              <a:effectLst/>
+              <a:uFillTx/>
+              <a:latin typeface="Arial"/>
+            </a:endParaRPr>
+          </a:p>
+          <a:p>
+            <a:pPr defTabSz="914400">
+              <a:lnSpc>
+                <a:spcPct val="100000"/>
+              </a:lnSpc>
+            </a:pPr>
+            <a:r>
+              <a:rPr lang="es-ES" sz="1400" b="0" u="none" strike="noStrike">
+                <a:solidFill>
+                  <a:srgbClr val="A8FF78"/>
+                </a:solidFill>
+                <a:effectLst/>
+                <a:uFillTx/>
+                <a:latin typeface="Consolas"/>
+              </a:rPr>
+              <a:t>uv sync</a:t>
+            </a:r>
+            <a:endParaRPr lang="en-US" sz="1400" b="0" u="none" strike="noStrike">
+              <a:solidFill>
+                <a:srgbClr val="000000"/>
+              </a:solidFill>
+              <a:effectLst/>
+              <a:uFillTx/>
+              <a:latin typeface="Arial"/>
+            </a:endParaRPr>
+          </a:p>
+          <a:p>
+            <a:pPr defTabSz="914400">
+              <a:lnSpc>
+                <a:spcPct val="100000"/>
+              </a:lnSpc>
+            </a:pPr>
+            <a:endParaRPr lang="en-US" sz="1400" b="0" u="none" strike="noStrike">
+              <a:solidFill>
+                <a:srgbClr val="000000"/>
+              </a:solidFill>
+              <a:effectLst/>
+              <a:uFillTx/>
+              <a:latin typeface="Arial"/>
+            </a:endParaRPr>
+          </a:p>
+          <a:p>
+            <a:pPr defTabSz="914400">
+              <a:lnSpc>
+                <a:spcPct val="100000"/>
+              </a:lnSpc>
+            </a:pPr>
+            <a:r>
+              <a:rPr lang="es-ES" sz="1400" b="0" u="none" strike="noStrike">
+                <a:solidFill>
+                  <a:srgbClr val="A8FF78"/>
+                </a:solidFill>
+                <a:effectLst/>
+                <a:uFillTx/>
+                <a:latin typeface="Consolas"/>
+              </a:rPr>
+              <a:t># 3. Arrancar Jupyter dentro </a:t>
+            </a:r>
+            <a:r>
+              <a:rPr lang="es-ES" sz="1400" b="0" u="none" strike="noStrike">
+                <a:solidFill>
+                  <a:srgbClr val="A8FF78"/>
+                </a:solidFill>
+                <a:effectLst/>
+                <a:uFillTx/>
+                <a:latin typeface="Consolas"/>
+              </a:rPr>
+              <a:t>del entorno gestionado por uv</a:t>
+            </a:r>
+            <a:endParaRPr lang="en-US" sz="1400" b="0" u="none" strike="noStrike">
+              <a:solidFill>
+                <a:srgbClr val="000000"/>
+              </a:solidFill>
+              <a:effectLst/>
+              <a:uFillTx/>
+              <a:latin typeface="Arial"/>
+            </a:endParaRPr>
+          </a:p>
+          <a:p>
+            <a:pPr defTabSz="914400">
+              <a:lnSpc>
+                <a:spcPct val="100000"/>
+              </a:lnSpc>
+            </a:pPr>
+            <a:r>
+              <a:rPr lang="es-ES" sz="1400" b="0" u="none" strike="noStrike">
+                <a:solidFill>
+                  <a:srgbClr val="A8FF78"/>
+                </a:solidFill>
+                <a:effectLst/>
+                <a:uFillTx/>
+                <a:latin typeface="Consolas"/>
+              </a:rPr>
+              <a:t>uv run jupyter notebook</a:t>
+            </a:r>
+            <a:endParaRPr lang="en-US" sz="1400" b="0" u="none" strike="noStrike">
+              <a:solidFill>
+                <a:srgbClr val="000000"/>
+              </a:solidFill>
+              <a:effectLst/>
+              <a:uFillTx/>
+              <a:latin typeface="Arial"/>
+            </a:endParaRPr>
+          </a:p>
+        </p:txBody>
+      </p:sp>
+      <p:sp>
+        <p:nvSpPr>
+          <p:cNvPr id="75" name="TextBox 6"/>
+          <p:cNvSpPr/>
+          <p:nvPr/>
+        </p:nvSpPr>
+        <p:spPr>
+          <a:xfrm>
+            <a:off x="1051560" y="5760720"/>
+            <a:ext cx="10057680" cy="365040"/>
+          </a:xfrm>
+          <a:prstGeom prst="rect">
+            <a:avLst/>
+          </a:prstGeom>
+          <a:noFill/>
+          <a:ln w="0">
+            <a:noFill/>
+          </a:ln>
+        </p:spPr>
+        <p:style>
+          <a:lnRef idx="0"/>
+          <a:fillRef idx="0"/>
+          <a:effectRef idx="0"/>
+          <a:fontRef idx="minor"/>
+        </p:style>
+        <p:txBody>
+          <a:bodyPr lIns="90000" tIns="45000" rIns="90000" bIns="45000" anchor="t">
+            <a:spAutoFit/>
+          </a:bodyPr>
+          <a:p>
+            <a:pPr defTabSz="914400">
+              <a:lnSpc>
+                <a:spcPct val="100000"/>
+              </a:lnSpc>
+            </a:pPr>
+            <a:r>
+              <a:rPr lang="es-ES" sz="1100" b="0" u="none" strike="noStrike">
+                <a:solidFill>
+                  <a:srgbClr val="707888"/>
+                </a:solidFill>
+                <a:effectLst/>
+                <a:uFillTx/>
+                <a:latin typeface="Arial"/>
+              </a:rPr>
+              <a:t>ℹ  Sin git (aulas con solo navegador): descargar </a:t>
+            </a:r>
+            <a:r>
+              <a:rPr lang="es-ES" sz="1100" b="0" u="none" strike="noStrike">
+                <a:solidFill>
+                  <a:srgbClr val="707888"/>
+                </a:solidFill>
+                <a:effectLst/>
+                <a:uFillTx/>
+                <a:latin typeface="Arial"/>
+              </a:rPr>
+              <a:t>el repo como ZIP desde GitHub.</a:t>
+            </a:r>
+            <a:endParaRPr lang="en-US" sz="1100" b="0" u="none" strike="noStrike">
+              <a:solidFill>
+                <a:srgbClr val="000000"/>
+              </a:solidFill>
+              <a:effectLst/>
+              <a:uFillTx/>
+              <a:latin typeface="Arial"/>
+            </a:endParaRPr>
           </a:p>
         </p:txBody>
       </p:sp>
     </p:spTree>
   </p:cSld>
-  <p:clrMapOvr>
-    <a:masterClrMapping/>
-  </p:clrMapOvr>
+  <mc:AlternateContent>
+    <mc:Choice Requires="p14">
+      <p:transition spd="slow" p14:dur="2000"/>
+    </mc:Choice>
+    <mc:Fallback>
+      <p:transition spd="slow"/>
+    </mc:Fallback>
+  </mc:AlternateContent>
 </p:sld>
 </file>
 
@@ -6510,7 +9819,7 @@
             <a:spLocks noGrp="1"/>
           </p:cNvSpPr>
           <p:nvPr>
-            <p:ph type="body" idx="13" sz="quarter"/>
+            <p:ph type="body" idx="10" sz="quarter"/>
           </p:nvPr>
         </p:nvSpPr>
         <p:spPr/>
@@ -6518,54 +9827,33 @@
           <a:bodyPr wrap="square"/>
           <a:lstStyle/>
           <a:p>
-            <a:r>
-              <a:t>¿Qué es Ollama?</a:t>
-            </a:r>
-          </a:p>
-        </p:txBody>
-      </p:sp>
-      <p:sp>
-        <p:nvSpPr>
-          <p:cNvPr id="3" name="Text Placeholder 2"/>
-          <p:cNvSpPr>
-            <a:spLocks noGrp="1"/>
-          </p:cNvSpPr>
-          <p:nvPr>
-            <p:ph type="body" idx="16" sz="quarter"/>
-          </p:nvPr>
-        </p:nvSpPr>
-        <p:spPr>
-          <a:xfrm>
-            <a:off x="1073427" y="1711816"/>
-            <a:ext cx="10084904" cy="3873058"/>
-          </a:xfrm>
-        </p:spPr>
-        <p:txBody>
-          <a:bodyPr wrap="square"/>
-          <a:lstStyle/>
-          <a:p>
-            <a:r>
-              <a:t>Runtime que corre LLMs directamente en tu máquina, sin API externa</a:t>
-            </a:r>
-          </a:p>
-          <a:p>
-            <a:r>
-              <a:t>Descarga el modelo cuantizado una vez, lo carga en memoria</a:t>
-            </a:r>
-          </a:p>
-          <a:p>
-            <a:r>
-              <a:t>Expone un servidor local en http://localhost:11434</a:t>
-            </a:r>
-          </a:p>
-          <a:p>
-            <a:r>
-              <a:t>Cualquier programa Python le hace peticiones, igual que a una API en la nube</a:t>
-            </a:r>
-          </a:p>
-          <a:p>
-            <a:r>
-              <a:t>Razón de ser del curso: un leak sensible no puede pasar por infraestructura de terceros</a:t>
+            <a:pPr algn="ctr"/>
+            <a:r>
+              <a:rPr sz="1700" b="1">
+                <a:solidFill>
+                  <a:srgbClr val="CD2D37"/>
+                </a:solidFill>
+                <a:latin typeface="Arial"/>
+              </a:rPr>
+              <a:t>SECCIÓN 2</a:t>
+            </a:r>
+          </a:p>
+          <a:p>
+            <a:pPr algn="ctr"/>
+            <a:r>
+              <a:t>Ollama</a:t>
+            </a:r>
+          </a:p>
+          <a:p>
+            <a:pPr algn="ctr"/>
+            <a:r>
+              <a:rPr sz="1600">
+                <a:solidFill>
+                  <a:srgbClr val="D6DAE2"/>
+                </a:solidFill>
+                <a:latin typeface="Arial"/>
+              </a:rPr>
+              <a:t>El LLM que corre en tu máquina</a:t>
             </a:r>
           </a:p>
         </p:txBody>
@@ -6579,7 +9867,7 @@
 </file>
 
 <file path=ppt/slides/slide7.xml><?xml version="1.0" encoding="utf-8"?>
-<p:sld xmlns:a="http://schemas.openxmlformats.org/drawingml/2006/main" xmlns:p="http://schemas.openxmlformats.org/presentationml/2006/main" xmlns:r="http://schemas.openxmlformats.org/officeDocument/2006/relationships">
+<p:sld xmlns:a="http://schemas.openxmlformats.org/drawingml/2006/main" xmlns:p="http://schemas.openxmlformats.org/presentationml/2006/main" xmlns:r="http://schemas.openxmlformats.org/officeDocument/2006/relationships" xmlns:p14="http://schemas.microsoft.com/office/powerpoint/2010/main" xmlns:p15="http://schemas.microsoft.com/office/powerpoint/2012/main" xmlns:mc="http://schemas.openxmlformats.org/markup-compatibility/2006">
   <p:cSld>
     <p:spTree>
       <p:nvGrpSpPr>
@@ -6587,326 +9875,223 @@
         <p:cNvGrpSpPr/>
         <p:nvPr/>
       </p:nvGrpSpPr>
-      <p:grpSpPr/>
-      <p:sp>
-        <p:nvSpPr>
-          <p:cNvPr id="2" name="Text Placeholder 1"/>
-          <p:cNvSpPr>
-            <a:spLocks noGrp="1"/>
-          </p:cNvSpPr>
-          <p:nvPr>
-            <p:ph type="body" idx="13" sz="quarter"/>
-          </p:nvPr>
-        </p:nvSpPr>
-        <p:spPr/>
-        <p:txBody>
-          <a:bodyPr wrap="square"/>
-          <a:lstStyle/>
-          <a:p>
-            <a:r>
-              <a:t>Los dos modelos que usamos</a:t>
-            </a:r>
-          </a:p>
-        </p:txBody>
-      </p:sp>
-      <p:sp>
-        <p:nvSpPr>
-          <p:cNvPr id="3" name="Text Placeholder 2"/>
-          <p:cNvSpPr>
-            <a:spLocks noGrp="1"/>
-          </p:cNvSpPr>
-          <p:nvPr>
-            <p:ph type="body" idx="16" sz="quarter"/>
-          </p:nvPr>
-        </p:nvSpPr>
-        <p:spPr/>
-        <p:txBody>
-          <a:bodyPr/>
-          <a:lstStyle/>
-          <a:p/>
-        </p:txBody>
-      </p:sp>
-      <p:sp>
-        <p:nvSpPr>
-          <p:cNvPr id="4" name="TextBox 3"/>
-          <p:cNvSpPr txBox="1"/>
-          <p:nvPr/>
+      <p:grpSpPr>
+        <a:xfrm>
+          <a:off x="0" y="0"/>
+          <a:ext cx="0" cy="0"/>
+          <a:chOff x="0" y="0"/>
+          <a:chExt cx="0" cy="0"/>
+        </a:xfrm>
+      </p:grpSpPr>
+      <p:sp>
+        <p:nvSpPr>
+          <p:cNvPr id="77" name="PlaceHolder 1"/>
+          <p:cNvSpPr>
+            <a:spLocks noGrp="1"/>
+          </p:cNvSpPr>
+          <p:nvPr>
+            <p:ph hasCustomPrompt="1"/>
+          </p:nvPr>
         </p:nvSpPr>
         <p:spPr>
           <a:xfrm>
-            <a:off x="1051560" y="1828800"/>
-            <a:ext cx="4846320" cy="411480"/>
+            <a:off x="1073520" y="742680"/>
+            <a:ext cx="6818400" cy="522000"/>
           </a:xfrm>
           <a:prstGeom prst="rect">
             <a:avLst/>
           </a:prstGeom>
           <a:noFill/>
+          <a:ln w="0">
+            <a:noFill/>
+          </a:ln>
         </p:spPr>
         <p:txBody>
-          <a:bodyPr wrap="square">
-            <a:spAutoFit/>
+          <a:bodyPr lIns="36000" tIns="0" rIns="0" bIns="0" anchor="t">
+            <a:noAutofit/>
           </a:bodyPr>
-          <a:lstStyle/>
-          <a:p>
-            <a:pPr algn="l"/>
-            <a:r>
-              <a:rPr sz="1600" b="1">
+          <a:p>
+            <a:pPr indent="0" algn="l" defTabSz="914400">
+              <a:lnSpc>
+                <a:spcPct val="100000"/>
+              </a:lnSpc>
+              <a:spcBef>
+                <a:spcPts val="1001"/>
+              </a:spcBef>
+              <a:buNone/>
+              <a:tabLst>
+                <a:tab pos="0" algn="l"/>
+              </a:tabLst>
+            </a:pPr>
+            <a:r>
+              <a:rPr lang="es-ES" sz="4000" b="1" u="none" strike="noStrike">
                 <a:solidFill>
                   <a:srgbClr val="CD2D37"/>
                 </a:solidFill>
+                <a:effectLst/>
+                <a:uFillTx/>
                 <a:latin typeface="Arial"/>
               </a:rPr>
-              <a:t>qwen3-embedding</a:t>
-            </a:r>
-          </a:p>
-        </p:txBody>
-      </p:sp>
-      <p:sp>
-        <p:nvSpPr>
-          <p:cNvPr id="5" name="TextBox 4"/>
-          <p:cNvSpPr txBox="1"/>
-          <p:nvPr/>
+              <a:t>¿Qué es Ollama?</a:t>
+            </a:r>
+            <a:endParaRPr lang="es-ES" sz="4000" b="0" u="none" strike="noStrike">
+              <a:solidFill>
+                <a:schemeClr val="dk1"/>
+              </a:solidFill>
+              <a:effectLst/>
+              <a:uFillTx/>
+              <a:latin typeface="Calibri"/>
+            </a:endParaRPr>
+          </a:p>
+        </p:txBody>
+      </p:sp>
+      <p:sp>
+        <p:nvSpPr>
+          <p:cNvPr id="78" name="PlaceHolder 2"/>
+          <p:cNvSpPr>
+            <a:spLocks noGrp="1"/>
+          </p:cNvSpPr>
+          <p:nvPr>
+            <p:ph hasCustomPrompt="1"/>
+          </p:nvPr>
         </p:nvSpPr>
         <p:spPr>
           <a:xfrm>
-            <a:off x="1051560" y="2286000"/>
-            <a:ext cx="4846320" cy="3703320"/>
+            <a:off x="1073520" y="1711800"/>
+            <a:ext cx="10084320" cy="3872160"/>
           </a:xfrm>
           <a:prstGeom prst="rect">
             <a:avLst/>
           </a:prstGeom>
           <a:noFill/>
+          <a:ln w="0">
+            <a:noFill/>
+          </a:ln>
         </p:spPr>
         <p:txBody>
-          <a:bodyPr wrap="square">
-            <a:spAutoFit/>
+          <a:bodyPr lIns="0" tIns="0" rIns="0" bIns="0" anchor="t">
+            <a:noAutofit/>
           </a:bodyPr>
-          <a:lstStyle/>
-          <a:p>
-            <a:r>
-              <a:rPr sz="1600">
-                <a:solidFill>
-                  <a:srgbClr val="CD2D37"/>
-                </a:solidFill>
-                <a:latin typeface="Arial"/>
-              </a:rPr>
-              <a:t>▸  </a:t>
-            </a:r>
-            <a:r>
-              <a:rPr sz="1600">
+          <a:p>
+            <a:pPr marL="228600" indent="-228600" algn="l" defTabSz="914400">
+              <a:lnSpc>
+                <a:spcPct val="90000"/>
+              </a:lnSpc>
+              <a:spcBef>
+                <a:spcPts val="1001"/>
+              </a:spcBef>
+              <a:buSzPct val="100112"/>
+              <a:buBlip>
+                <a:blip r:embed="rId1"/>
+              </a:buBlip>
+              <a:tabLst>
+                <a:tab pos="0" algn="l"/>
+              </a:tabLst>
+            </a:pPr>
+            <a:r>
+              <a:rPr lang="es-ES" sz="1800" b="0" u="none" strike="noStrike">
                 <a:solidFill>
                   <a:srgbClr val="465461"/>
                 </a:solidFill>
+                <a:effectLst/>
+                <a:uFillTx/>
                 <a:latin typeface="Arial"/>
               </a:rPr>
-              <a:t>Genera embeddings: texto → vector numérico</a:t>
-            </a:r>
-          </a:p>
-          <a:p>
-            <a:r>
-              <a:rPr sz="1600">
-                <a:solidFill>
-                  <a:srgbClr val="CD2D37"/>
-                </a:solidFill>
-                <a:latin typeface="Arial"/>
-              </a:rPr>
-              <a:t>▸  </a:t>
-            </a:r>
-            <a:r>
-              <a:rPr sz="1600">
+              <a:t>Runtime que corre LLMs directamente en tu máquina, sin API externa</a:t>
+            </a:r>
+            <a:endParaRPr lang="es-ES" sz="1800" b="0" u="none" strike="noStrike">
+              <a:solidFill>
+                <a:schemeClr val="dk1"/>
+              </a:solidFill>
+              <a:effectLst/>
+              <a:uFillTx/>
+              <a:latin typeface="Calibri"/>
+            </a:endParaRPr>
+          </a:p>
+          <a:p>
+            <a:pPr marL="228600" indent="-228600" algn="l" defTabSz="914400">
+              <a:lnSpc>
+                <a:spcPct val="90000"/>
+              </a:lnSpc>
+              <a:spcBef>
+                <a:spcPts val="1001"/>
+              </a:spcBef>
+              <a:buSzPct val="100112"/>
+              <a:buBlip>
+                <a:blip r:embed="rId2"/>
+              </a:buBlip>
+              <a:tabLst>
+                <a:tab pos="0" algn="l"/>
+              </a:tabLst>
+            </a:pPr>
+            <a:r>
+              <a:rPr lang="es-ES" sz="1800" b="0" u="none" strike="noStrike">
                 <a:solidFill>
                   <a:srgbClr val="465461"/>
                 </a:solidFill>
+                <a:effectLst/>
+                <a:uFillTx/>
                 <a:latin typeface="Arial"/>
               </a:rPr>
-              <a:t>Clustering de usuarios por comportamiento</a:t>
-            </a:r>
-          </a:p>
-          <a:p>
-            <a:r>
-              <a:rPr sz="1600">
-                <a:solidFill>
-                  <a:srgbClr val="CD2D37"/>
-                </a:solidFill>
-                <a:latin typeface="Arial"/>
-              </a:rPr>
-              <a:t>▸  </a:t>
-            </a:r>
-            <a:r>
-              <a:rPr sz="1600">
+              <a:t>Expone un servidor local en http://localhost:11434</a:t>
+            </a:r>
+            <a:endParaRPr lang="es-ES" sz="1800" b="0" u="none" strike="noStrike">
+              <a:solidFill>
+                <a:schemeClr val="dk1"/>
+              </a:solidFill>
+              <a:effectLst/>
+              <a:uFillTx/>
+              <a:latin typeface="Calibri"/>
+            </a:endParaRPr>
+          </a:p>
+          <a:p>
+            <a:pPr marL="228600" indent="-228600" algn="l" defTabSz="914400">
+              <a:lnSpc>
+                <a:spcPct val="90000"/>
+              </a:lnSpc>
+              <a:spcBef>
+                <a:spcPts val="1001"/>
+              </a:spcBef>
+              <a:buSzPct val="100112"/>
+              <a:buBlip>
+                <a:blip r:embed="rId3"/>
+              </a:buBlip>
+              <a:tabLst>
+                <a:tab pos="0" algn="l"/>
+              </a:tabLst>
+            </a:pPr>
+            <a:r>
+              <a:rPr lang="es-ES" sz="1800" b="0" u="none" strike="noStrike">
                 <a:solidFill>
                   <a:srgbClr val="465461"/>
                 </a:solidFill>
+                <a:effectLst/>
+                <a:uFillTx/>
                 <a:latin typeface="Arial"/>
               </a:rPr>
-              <a:t>Estilometría computacional</a:t>
-            </a:r>
-          </a:p>
-          <a:p>
-            <a:r>
-              <a:rPr sz="1600">
-                <a:solidFill>
-                  <a:srgbClr val="CD2D37"/>
-                </a:solidFill>
-                <a:latin typeface="Arial"/>
-              </a:rPr>
-              <a:t>▸  </a:t>
-            </a:r>
-            <a:r>
-              <a:rPr sz="1600">
-                <a:solidFill>
-                  <a:srgbClr val="465461"/>
-                </a:solidFill>
-                <a:latin typeface="Arial"/>
-              </a:rPr>
-              <a:t>Correlación cross-foro semántica (Bloque 2)</a:t>
-            </a:r>
-          </a:p>
-        </p:txBody>
-      </p:sp>
-      <p:sp>
-        <p:nvSpPr>
-          <p:cNvPr id="6" name="TextBox 5"/>
-          <p:cNvSpPr txBox="1"/>
-          <p:nvPr/>
-        </p:nvSpPr>
-        <p:spPr>
-          <a:xfrm>
-            <a:off x="6217920" y="1828800"/>
-            <a:ext cx="4846320" cy="411480"/>
-          </a:xfrm>
-          <a:prstGeom prst="rect">
-            <a:avLst/>
-          </a:prstGeom>
-          <a:noFill/>
-        </p:spPr>
-        <p:txBody>
-          <a:bodyPr wrap="square">
-            <a:spAutoFit/>
-          </a:bodyPr>
-          <a:lstStyle/>
-          <a:p>
-            <a:pPr algn="l"/>
-            <a:r>
-              <a:rPr sz="1600" b="1">
-                <a:solidFill>
-                  <a:srgbClr val="CD2D37"/>
-                </a:solidFill>
-                <a:latin typeface="Arial"/>
-              </a:rPr>
-              <a:t>qwen2.5:14b</a:t>
-            </a:r>
-          </a:p>
-        </p:txBody>
-      </p:sp>
-      <p:sp>
-        <p:nvSpPr>
-          <p:cNvPr id="7" name="TextBox 6"/>
-          <p:cNvSpPr txBox="1"/>
-          <p:nvPr/>
-        </p:nvSpPr>
-        <p:spPr>
-          <a:xfrm>
-            <a:off x="6217920" y="2286000"/>
-            <a:ext cx="4846320" cy="3703320"/>
-          </a:xfrm>
-          <a:prstGeom prst="rect">
-            <a:avLst/>
-          </a:prstGeom>
-          <a:noFill/>
-        </p:spPr>
-        <p:txBody>
-          <a:bodyPr wrap="square">
-            <a:spAutoFit/>
-          </a:bodyPr>
-          <a:lstStyle/>
-          <a:p>
-            <a:r>
-              <a:rPr sz="1600">
-                <a:solidFill>
-                  <a:srgbClr val="CD2D37"/>
-                </a:solidFill>
-                <a:latin typeface="Arial"/>
-              </a:rPr>
-              <a:t>▸  </a:t>
-            </a:r>
-            <a:r>
-              <a:rPr sz="1600">
-                <a:solidFill>
-                  <a:srgbClr val="465461"/>
-                </a:solidFill>
-                <a:latin typeface="Arial"/>
-              </a:rPr>
-              <a:t>LLM generativo, no embeddings</a:t>
-            </a:r>
-          </a:p>
-          <a:p>
-            <a:r>
-              <a:rPr sz="1600">
-                <a:solidFill>
-                  <a:srgbClr val="CD2D37"/>
-                </a:solidFill>
-                <a:latin typeface="Arial"/>
-              </a:rPr>
-              <a:t>▸  </a:t>
-            </a:r>
-            <a:r>
-              <a:rPr sz="1600">
-                <a:solidFill>
-                  <a:srgbClr val="465461"/>
-                </a:solidFill>
-                <a:latin typeface="Arial"/>
-              </a:rPr>
-              <a:t>NER en dominio específico</a:t>
-            </a:r>
-          </a:p>
-          <a:p>
-            <a:r>
-              <a:rPr sz="1600">
-                <a:solidFill>
-                  <a:srgbClr val="CD2D37"/>
-                </a:solidFill>
-                <a:latin typeface="Arial"/>
-              </a:rPr>
-              <a:t>▸  </a:t>
-            </a:r>
-            <a:r>
-              <a:rPr sz="1600">
-                <a:solidFill>
-                  <a:srgbClr val="465461"/>
-                </a:solidFill>
-                <a:latin typeface="Arial"/>
-              </a:rPr>
-              <a:t>Clasificación de posts</a:t>
-            </a:r>
-          </a:p>
-          <a:p>
-            <a:r>
-              <a:rPr sz="1600">
-                <a:solidFill>
-                  <a:srgbClr val="CD2D37"/>
-                </a:solidFill>
-                <a:latin typeface="Arial"/>
-              </a:rPr>
-              <a:t>▸  </a:t>
-            </a:r>
-            <a:r>
-              <a:rPr sz="1600">
-                <a:solidFill>
-                  <a:srgbClr val="465461"/>
-                </a:solidFill>
-                <a:latin typeface="Arial"/>
-              </a:rPr>
-              <a:t>Perfilado de roles (Bloque 2 y casos prácticos)</a:t>
-            </a:r>
+              <a:t>Razón de ser del curso: un leak sensible no debe pasar por infraestructura de terceros</a:t>
+            </a:r>
+            <a:endParaRPr lang="es-ES" sz="1800" b="0" u="none" strike="noStrike">
+              <a:solidFill>
+                <a:schemeClr val="dk1"/>
+              </a:solidFill>
+              <a:effectLst/>
+              <a:uFillTx/>
+              <a:latin typeface="Calibri"/>
+            </a:endParaRPr>
           </a:p>
         </p:txBody>
       </p:sp>
     </p:spTree>
   </p:cSld>
-  <p:clrMapOvr>
-    <a:masterClrMapping/>
-  </p:clrMapOvr>
+  <mc:AlternateContent>
+    <mc:Choice Requires="p14">
+      <p:transition spd="slow" p14:dur="2000"/>
+    </mc:Choice>
+    <mc:Fallback>
+      <p:transition spd="slow"/>
+    </mc:Fallback>
+  </mc:AlternateContent>
 </p:sld>
 </file>
 
@@ -6936,7 +10121,7 @@
           <a:lstStyle/>
           <a:p>
             <a:r>
-              <a:t>Cómo se usa desde Python y desde terminal</a:t>
+              <a:t>Ollama no es la única opción</a:t>
             </a:r>
           </a:p>
         </p:txBody>
@@ -6962,22 +10147,17 @@
           <a:lstStyle/>
           <a:p>
             <a:r>
-              <a:t>Librería ollama (instalada por uv sync): cliente delgado sobre el servidor local</a:t>
-            </a:r>
-          </a:p>
-          <a:p>
-            <a:r>
-              <a:t>ollama.chat(model=..., messages=...) y ollama.embed(model=..., input=...)</a:t>
-            </a:r>
-          </a:p>
-          <a:p>
-            <a:r>
-              <a:t>Usado en src/embeddings.py y src/utils.py a lo largo de todo el curso</a:t>
-            </a:r>
-          </a:p>
-          <a:p>
-            <a:r>
-              <a:t>Para limpieza puntual sin código: CLI llm + plugin de Ollama, pipeable desde terminal</a:t>
+              <a:t>llama.cpp: el motor de inferencia sobre el que se apoya buena parte del ecosistema</a:t>
+            </a:r>
+          </a:p>
+          <a:p>
+            <a:r>
+              <a:t>Más control de bajo nivel, pero también más configuración manual</a:t>
+            </a:r>
+          </a:p>
+          <a:p>
+            <a:r>
+              <a:t>Vale la pena conocerlo — cada uno elige según lo que necesite</a:t>
             </a:r>
           </a:p>
         </p:txBody>
@@ -7007,7 +10187,7 @@
             <a:spLocks noGrp="1"/>
           </p:cNvSpPr>
           <p:nvPr>
-            <p:ph type="body" idx="10" sz="quarter"/>
+            <p:ph type="body" idx="13" sz="quarter"/>
           </p:nvPr>
         </p:nvSpPr>
         <p:spPr/>
@@ -7015,33 +10195,563 @@
           <a:bodyPr wrap="square"/>
           <a:lstStyle/>
           <a:p>
-            <a:pPr algn="ctr"/>
-            <a:r>
-              <a:rPr sz="1700" b="1">
+            <a:r>
+              <a:t>Ollama vs. llama.cpp</a:t>
+            </a:r>
+          </a:p>
+        </p:txBody>
+      </p:sp>
+      <p:sp>
+        <p:nvSpPr>
+          <p:cNvPr id="3" name="Text Placeholder 2"/>
+          <p:cNvSpPr>
+            <a:spLocks noGrp="1"/>
+          </p:cNvSpPr>
+          <p:nvPr>
+            <p:ph type="body" idx="16" sz="quarter"/>
+          </p:nvPr>
+        </p:nvSpPr>
+        <p:spPr/>
+        <p:txBody>
+          <a:bodyPr/>
+          <a:lstStyle/>
+          <a:p/>
+        </p:txBody>
+      </p:sp>
+      <p:graphicFrame>
+        <p:nvGraphicFramePr>
+          <p:cNvPr id="4" name="Table 3"/>
+          <p:cNvGraphicFramePr>
+            <a:graphicFrameLocks noGrp="1"/>
+          </p:cNvGraphicFramePr>
+          <p:nvPr/>
+        </p:nvGraphicFramePr>
+        <p:xfrm>
+          <a:off x="1051560" y="1783080"/>
+          <a:ext cx="10058400" cy="2560320"/>
+        </p:xfrm>
+        <a:graphic>
+          <a:graphicData uri="http://schemas.openxmlformats.org/drawingml/2006/table">
+            <a:tbl>
+              <a:tblPr>
+                <a:tableStyleId>{5C22544A-7EE6-4342-B048-85BDC9FD1C3A}</a:tableStyleId>
+              </a:tblPr>
+              <a:tblGrid>
+                <a:gridCol w="3352800"/>
+                <a:gridCol w="3352800"/>
+                <a:gridCol w="3352800"/>
+              </a:tblGrid>
+              <a:tr h="365760">
+                <a:tc>
+                  <a:txBody>
+                    <a:bodyPr/>
+                    <a:lstStyle/>
+                    <a:p>
+                      <a:r>
+                        <a:rPr sz="1200" b="1">
+                          <a:solidFill>
+                            <a:srgbClr val="FFFFFF"/>
+                          </a:solidFill>
+                          <a:latin typeface="Arial"/>
+                        </a:rPr>
+                        <a:t>Aspecto</a:t>
+                      </a:r>
+                    </a:p>
+                  </a:txBody>
+                  <a:tcPr marL="45000" marR="45000" marT="25000" marB="25000" anchor="ctr">
+                    <a:solidFill>
+                      <a:srgbClr val="CD2D37"/>
+                    </a:solidFill>
+                  </a:tcPr>
+                </a:tc>
+                <a:tc>
+                  <a:txBody>
+                    <a:bodyPr/>
+                    <a:lstStyle/>
+                    <a:p>
+                      <a:r>
+                        <a:rPr sz="1200" b="1">
+                          <a:solidFill>
+                            <a:srgbClr val="FFFFFF"/>
+                          </a:solidFill>
+                          <a:latin typeface="Arial"/>
+                        </a:rPr>
+                        <a:t>Ollama</a:t>
+                      </a:r>
+                    </a:p>
+                  </a:txBody>
+                  <a:tcPr marL="45000" marR="45000" marT="25000" marB="25000" anchor="ctr">
+                    <a:solidFill>
+                      <a:srgbClr val="CD2D37"/>
+                    </a:solidFill>
+                  </a:tcPr>
+                </a:tc>
+                <a:tc>
+                  <a:txBody>
+                    <a:bodyPr/>
+                    <a:lstStyle/>
+                    <a:p>
+                      <a:r>
+                        <a:rPr sz="1200" b="1">
+                          <a:solidFill>
+                            <a:srgbClr val="FFFFFF"/>
+                          </a:solidFill>
+                          <a:latin typeface="Arial"/>
+                        </a:rPr>
+                        <a:t>llama.cpp</a:t>
+                      </a:r>
+                    </a:p>
+                  </a:txBody>
+                  <a:tcPr marL="45000" marR="45000" marT="25000" marB="25000" anchor="ctr">
+                    <a:solidFill>
+                      <a:srgbClr val="CD2D37"/>
+                    </a:solidFill>
+                  </a:tcPr>
+                </a:tc>
+              </a:tr>
+              <a:tr h="365760">
+                <a:tc>
+                  <a:txBody>
+                    <a:bodyPr/>
+                    <a:lstStyle/>
+                    <a:p>
+                      <a:r>
+                        <a:rPr sz="1100" b="0">
+                          <a:solidFill>
+                            <a:srgbClr val="465461"/>
+                          </a:solidFill>
+                          <a:latin typeface="Arial"/>
+                        </a:rPr>
+                        <a:t>Instalación</a:t>
+                      </a:r>
+                    </a:p>
+                  </a:txBody>
+                  <a:tcPr marL="45000" marR="45000" marT="25000" marB="25000" anchor="ctr">
+                    <a:solidFill>
+                      <a:srgbClr val="F1F2F6"/>
+                    </a:solidFill>
+                  </a:tcPr>
+                </a:tc>
+                <a:tc>
+                  <a:txBody>
+                    <a:bodyPr/>
+                    <a:lstStyle/>
+                    <a:p>
+                      <a:r>
+                        <a:rPr sz="1100" b="0">
+                          <a:solidFill>
+                            <a:srgbClr val="465461"/>
+                          </a:solidFill>
+                          <a:latin typeface="Arial"/>
+                        </a:rPr>
+                        <a:t>Un instalador, listo en un comando</a:t>
+                      </a:r>
+                    </a:p>
+                  </a:txBody>
+                  <a:tcPr marL="45000" marR="45000" marT="25000" marB="25000" anchor="ctr">
+                    <a:solidFill>
+                      <a:srgbClr val="F1F2F6"/>
+                    </a:solidFill>
+                  </a:tcPr>
+                </a:tc>
+                <a:tc>
+                  <a:txBody>
+                    <a:bodyPr/>
+                    <a:lstStyle/>
+                    <a:p>
+                      <a:r>
+                        <a:rPr sz="1100" b="0">
+                          <a:solidFill>
+                            <a:srgbClr val="465461"/>
+                          </a:solidFill>
+                          <a:latin typeface="Arial"/>
+                        </a:rPr>
+                        <a:t>Compilar desde fuente o binarios sueltos</a:t>
+                      </a:r>
+                    </a:p>
+                  </a:txBody>
+                  <a:tcPr marL="45000" marR="45000" marT="25000" marB="25000" anchor="ctr">
+                    <a:solidFill>
+                      <a:srgbClr val="F1F2F6"/>
+                    </a:solidFill>
+                  </a:tcPr>
+                </a:tc>
+              </a:tr>
+              <a:tr h="365760">
+                <a:tc>
+                  <a:txBody>
+                    <a:bodyPr/>
+                    <a:lstStyle/>
+                    <a:p>
+                      <a:r>
+                        <a:rPr sz="1100" b="0">
+                          <a:solidFill>
+                            <a:srgbClr val="465461"/>
+                          </a:solidFill>
+                          <a:latin typeface="Arial"/>
+                        </a:rPr>
+                        <a:t>Gestión de modelos</a:t>
+                      </a:r>
+                    </a:p>
+                  </a:txBody>
+                  <a:tcPr marL="45000" marR="45000" marT="25000" marB="25000" anchor="ctr">
+                    <a:solidFill>
+                      <a:srgbClr val="FFFFFF"/>
+                    </a:solidFill>
+                  </a:tcPr>
+                </a:tc>
+                <a:tc>
+                  <a:txBody>
+                    <a:bodyPr/>
+                    <a:lstStyle/>
+                    <a:p>
+                      <a:r>
+                        <a:rPr sz="1100" b="0">
+                          <a:solidFill>
+                            <a:srgbClr val="465461"/>
+                          </a:solidFill>
+                          <a:latin typeface="Arial"/>
+                        </a:rPr>
+                        <a:t>Automática (ollama pull)</a:t>
+                      </a:r>
+                    </a:p>
+                  </a:txBody>
+                  <a:tcPr marL="45000" marR="45000" marT="25000" marB="25000" anchor="ctr">
+                    <a:solidFill>
+                      <a:srgbClr val="FFFFFF"/>
+                    </a:solidFill>
+                  </a:tcPr>
+                </a:tc>
+                <a:tc>
+                  <a:txBody>
+                    <a:bodyPr/>
+                    <a:lstStyle/>
+                    <a:p>
+                      <a:r>
+                        <a:rPr sz="1100" b="0">
+                          <a:solidFill>
+                            <a:srgbClr val="465461"/>
+                          </a:solidFill>
+                          <a:latin typeface="Arial"/>
+                        </a:rPr>
+                        <a:t>Manual: tú descargas y colocas los .gguf</a:t>
+                      </a:r>
+                    </a:p>
+                  </a:txBody>
+                  <a:tcPr marL="45000" marR="45000" marT="25000" marB="25000" anchor="ctr">
+                    <a:solidFill>
+                      <a:srgbClr val="FFFFFF"/>
+                    </a:solidFill>
+                  </a:tcPr>
+                </a:tc>
+              </a:tr>
+              <a:tr h="365760">
+                <a:tc>
+                  <a:txBody>
+                    <a:bodyPr/>
+                    <a:lstStyle/>
+                    <a:p>
+                      <a:r>
+                        <a:rPr sz="1100" b="0">
+                          <a:solidFill>
+                            <a:srgbClr val="465461"/>
+                          </a:solidFill>
+                          <a:latin typeface="Arial"/>
+                        </a:rPr>
+                        <a:t>Interfaz</a:t>
+                      </a:r>
+                    </a:p>
+                  </a:txBody>
+                  <a:tcPr marL="45000" marR="45000" marT="25000" marB="25000" anchor="ctr">
+                    <a:solidFill>
+                      <a:srgbClr val="F1F2F6"/>
+                    </a:solidFill>
+                  </a:tcPr>
+                </a:tc>
+                <a:tc>
+                  <a:txBody>
+                    <a:bodyPr/>
+                    <a:lstStyle/>
+                    <a:p>
+                      <a:r>
+                        <a:rPr sz="1100" b="0">
+                          <a:solidFill>
+                            <a:srgbClr val="465461"/>
+                          </a:solidFill>
+                          <a:latin typeface="Arial"/>
+                        </a:rPr>
+                        <a:t>Servidor REST + CLI simple</a:t>
+                      </a:r>
+                    </a:p>
+                  </a:txBody>
+                  <a:tcPr marL="45000" marR="45000" marT="25000" marB="25000" anchor="ctr">
+                    <a:solidFill>
+                      <a:srgbClr val="F1F2F6"/>
+                    </a:solidFill>
+                  </a:tcPr>
+                </a:tc>
+                <a:tc>
+                  <a:txBody>
+                    <a:bodyPr/>
+                    <a:lstStyle/>
+                    <a:p>
+                      <a:r>
+                        <a:rPr sz="1100" b="0">
+                          <a:solidFill>
+                            <a:srgbClr val="465461"/>
+                          </a:solidFill>
+                          <a:latin typeface="Arial"/>
+                        </a:rPr>
+                        <a:t>CLI de bajo nivel, más flags a mano</a:t>
+                      </a:r>
+                    </a:p>
+                  </a:txBody>
+                  <a:tcPr marL="45000" marR="45000" marT="25000" marB="25000" anchor="ctr">
+                    <a:solidFill>
+                      <a:srgbClr val="F1F2F6"/>
+                    </a:solidFill>
+                  </a:tcPr>
+                </a:tc>
+              </a:tr>
+              <a:tr h="365760">
+                <a:tc>
+                  <a:txBody>
+                    <a:bodyPr/>
+                    <a:lstStyle/>
+                    <a:p>
+                      <a:r>
+                        <a:rPr sz="1100" b="0">
+                          <a:solidFill>
+                            <a:srgbClr val="465461"/>
+                          </a:solidFill>
+                          <a:latin typeface="Arial"/>
+                        </a:rPr>
+                        <a:t>Rendimiento</a:t>
+                      </a:r>
+                    </a:p>
+                  </a:txBody>
+                  <a:tcPr marL="45000" marR="45000" marT="25000" marB="25000" anchor="ctr">
+                    <a:solidFill>
+                      <a:srgbClr val="FFFFFF"/>
+                    </a:solidFill>
+                  </a:tcPr>
+                </a:tc>
+                <a:tc>
+                  <a:txBody>
+                    <a:bodyPr/>
+                    <a:lstStyle/>
+                    <a:p>
+                      <a:r>
+                        <a:rPr sz="1100" b="0">
+                          <a:solidFill>
+                            <a:srgbClr val="465461"/>
+                          </a:solidFill>
+                          <a:latin typeface="Arial"/>
+                        </a:rPr>
+                        <a:t>Muy cercano al máximo</a:t>
+                      </a:r>
+                    </a:p>
+                  </a:txBody>
+                  <a:tcPr marL="45000" marR="45000" marT="25000" marB="25000" anchor="ctr">
+                    <a:solidFill>
+                      <a:srgbClr val="FFFFFF"/>
+                    </a:solidFill>
+                  </a:tcPr>
+                </a:tc>
+                <a:tc>
+                  <a:txBody>
+                    <a:bodyPr/>
+                    <a:lstStyle/>
+                    <a:p>
+                      <a:r>
+                        <a:rPr sz="1100" b="0">
+                          <a:solidFill>
+                            <a:srgbClr val="465461"/>
+                          </a:solidFill>
+                          <a:latin typeface="Arial"/>
+                        </a:rPr>
+                        <a:t>Ligeramente superior, afinado a mano</a:t>
+                      </a:r>
+                    </a:p>
+                  </a:txBody>
+                  <a:tcPr marL="45000" marR="45000" marT="25000" marB="25000" anchor="ctr">
+                    <a:solidFill>
+                      <a:srgbClr val="FFFFFF"/>
+                    </a:solidFill>
+                  </a:tcPr>
+                </a:tc>
+              </a:tr>
+              <a:tr h="365760">
+                <a:tc>
+                  <a:txBody>
+                    <a:bodyPr/>
+                    <a:lstStyle/>
+                    <a:p>
+                      <a:r>
+                        <a:rPr sz="1100" b="0">
+                          <a:solidFill>
+                            <a:srgbClr val="465461"/>
+                          </a:solidFill>
+                          <a:latin typeface="Arial"/>
+                        </a:rPr>
+                        <a:t>Curva de aprendizaje</a:t>
+                      </a:r>
+                    </a:p>
+                  </a:txBody>
+                  <a:tcPr marL="45000" marR="45000" marT="25000" marB="25000" anchor="ctr">
+                    <a:solidFill>
+                      <a:srgbClr val="F1F2F6"/>
+                    </a:solidFill>
+                  </a:tcPr>
+                </a:tc>
+                <a:tc>
+                  <a:txBody>
+                    <a:bodyPr/>
+                    <a:lstStyle/>
+                    <a:p>
+                      <a:r>
+                        <a:rPr sz="1100" b="0">
+                          <a:solidFill>
+                            <a:srgbClr val="465461"/>
+                          </a:solidFill>
+                          <a:latin typeface="Arial"/>
+                        </a:rPr>
+                        <a:t>Baja — apto para todo el aula</a:t>
+                      </a:r>
+                    </a:p>
+                  </a:txBody>
+                  <a:tcPr marL="45000" marR="45000" marT="25000" marB="25000" anchor="ctr">
+                    <a:solidFill>
+                      <a:srgbClr val="F1F2F6"/>
+                    </a:solidFill>
+                  </a:tcPr>
+                </a:tc>
+                <a:tc>
+                  <a:txBody>
+                    <a:bodyPr/>
+                    <a:lstStyle/>
+                    <a:p>
+                      <a:r>
+                        <a:rPr sz="1100" b="0">
+                          <a:solidFill>
+                            <a:srgbClr val="465461"/>
+                          </a:solidFill>
+                          <a:latin typeface="Arial"/>
+                        </a:rPr>
+                        <a:t>Alta — requiere más experiencia</a:t>
+                      </a:r>
+                    </a:p>
+                  </a:txBody>
+                  <a:tcPr marL="45000" marR="45000" marT="25000" marB="25000" anchor="ctr">
+                    <a:solidFill>
+                      <a:srgbClr val="F1F2F6"/>
+                    </a:solidFill>
+                  </a:tcPr>
+                </a:tc>
+              </a:tr>
+              <a:tr h="365760">
+                <a:tc>
+                  <a:txBody>
+                    <a:bodyPr/>
+                    <a:lstStyle/>
+                    <a:p>
+                      <a:r>
+                        <a:rPr sz="1100" b="0">
+                          <a:solidFill>
+                            <a:srgbClr val="465461"/>
+                          </a:solidFill>
+                          <a:latin typeface="Arial"/>
+                        </a:rPr>
+                        <a:t>Uso desde Python</a:t>
+                      </a:r>
+                    </a:p>
+                  </a:txBody>
+                  <a:tcPr marL="45000" marR="45000" marT="25000" marB="25000" anchor="ctr">
+                    <a:solidFill>
+                      <a:srgbClr val="FFFFFF"/>
+                    </a:solidFill>
+                  </a:tcPr>
+                </a:tc>
+                <a:tc>
+                  <a:txBody>
+                    <a:bodyPr/>
+                    <a:lstStyle/>
+                    <a:p>
+                      <a:r>
+                        <a:rPr sz="1100" b="0">
+                          <a:solidFill>
+                            <a:srgbClr val="465461"/>
+                          </a:solidFill>
+                          <a:latin typeface="Arial"/>
+                        </a:rPr>
+                        <a:t>Librería oficial ollama</a:t>
+                      </a:r>
+                    </a:p>
+                  </a:txBody>
+                  <a:tcPr marL="45000" marR="45000" marT="25000" marB="25000" anchor="ctr">
+                    <a:solidFill>
+                      <a:srgbClr val="FFFFFF"/>
+                    </a:solidFill>
+                  </a:tcPr>
+                </a:tc>
+                <a:tc>
+                  <a:txBody>
+                    <a:bodyPr/>
+                    <a:lstStyle/>
+                    <a:p>
+                      <a:r>
+                        <a:rPr sz="1100" b="0">
+                          <a:solidFill>
+                            <a:srgbClr val="465461"/>
+                          </a:solidFill>
+                          <a:latin typeface="Arial"/>
+                        </a:rPr>
+                        <a:t>Bindings menos maduros</a:t>
+                      </a:r>
+                    </a:p>
+                  </a:txBody>
+                  <a:tcPr marL="45000" marR="45000" marT="25000" marB="25000" anchor="ctr">
+                    <a:solidFill>
+                      <a:srgbClr val="FFFFFF"/>
+                    </a:solidFill>
+                  </a:tcPr>
+                </a:tc>
+              </a:tr>
+            </a:tbl>
+          </a:graphicData>
+        </a:graphic>
+      </p:graphicFrame>
+      <p:sp>
+        <p:nvSpPr>
+          <p:cNvPr id="5" name="TextBox 4"/>
+          <p:cNvSpPr txBox="1"/>
+          <p:nvPr/>
+        </p:nvSpPr>
+        <p:spPr>
+          <a:xfrm>
+            <a:off x="1051560" y="5760720"/>
+            <a:ext cx="10058400" cy="320040"/>
+          </a:xfrm>
+          <a:prstGeom prst="rect">
+            <a:avLst/>
+          </a:prstGeom>
+          <a:noFill/>
+        </p:spPr>
+        <p:txBody>
+          <a:bodyPr wrap="square">
+            <a:spAutoFit/>
+          </a:bodyPr>
+          <a:lstStyle/>
+          <a:p>
+            <a:pPr algn="l"/>
+            <a:r>
+              <a:rPr sz="1000" b="0">
                 <a:solidFill>
-                  <a:srgbClr val="CD2D37"/>
+                  <a:srgbClr val="707888"/>
                 </a:solidFill>
                 <a:latin typeface="Arial"/>
               </a:rPr>
-              <a:t>SECCIÓN 3</a:t>
-            </a:r>
-          </a:p>
-          <a:p>
-            <a:pPr algn="ctr"/>
-            <a:r>
-              <a:t>El stack de análisis</a:t>
-            </a:r>
-          </a:p>
-          <a:p>
-            <a:pPr algn="ctr"/>
-            <a:r>
-              <a:rPr sz="1600">
-                <a:solidFill>
-                  <a:srgbClr val="D6DAE2"/>
-                </a:solidFill>
-                <a:latin typeface="Arial"/>
-              </a:rPr>
-              <a:t>Qué instala uv sync y para qué sirve cada pieza</a:t>
+              <a:t>ℹ  Recomendación del instructor: Ollama — la comodidad casi no cuesta eficiencia.</a:t>
             </a:r>
           </a:p>
         </p:txBody>

--- a/bloque3_setup/csbc26_b3_setup.pptx
+++ b/bloque3_setup/csbc26_b3_setup.pptx
@@ -31,6 +31,12 @@
     <p:sldId id="276" r:id="rId31"/>
     <p:sldId id="277" r:id="rId32"/>
     <p:sldId id="278" r:id="rId33"/>
+    <p:sldId id="279" r:id="rId34"/>
+    <p:sldId id="280" r:id="rId35"/>
+    <p:sldId id="281" r:id="rId36"/>
+    <p:sldId id="282" r:id="rId37"/>
+    <p:sldId id="283" r:id="rId38"/>
+    <p:sldId id="284" r:id="rId39"/>
   </p:sldIdLst>
   <p:sldSz cx="12192000" cy="6858000"/>
   <p:notesSz cx="6858000" cy="9144000"/>
@@ -979,12 +985,22 @@
           <a:lstStyle/>
           <a:p>
             <a:r>
-              <a:t>Tercera pieza, la más conceptual: qué es cada tipo de modelo</a:t>
-            </a:r>
-          </a:p>
-          <a:p>
-            <a:r>
-              <a:t>Esto les sirve para elegir modelos por su cuenta, no solo usar los del curso</a:t>
+              <a:t>Además de qué modelo usar, se puede ajustar CÓMO genera cada llamada</a:t>
+            </a:r>
+          </a:p>
+          <a:p>
+            <a:r>
+              <a:t>options es un diccionario que va en la misma llamada a chat/generate</a:t>
+            </a:r>
+          </a:p>
+          <a:p>
+            <a:r>
+              <a:t>No toca el modelo en disco, es por request</a:t>
+            </a:r>
+          </a:p>
+          <a:p>
+            <a:r>
+              <a:t>→ el que más importa si van a encadenar mensajes largos o RAG: num_ctx</a:t>
             </a:r>
           </a:p>
         </p:txBody>
@@ -1054,17 +1070,22 @@
           <a:lstStyle/>
           <a:p>
             <a:r>
-              <a:t>Embedding = huella numérica del significado, no el texto en sí</a:t>
-            </a:r>
-          </a:p>
-          <a:p>
-            <a:r>
-              <a:t>No entienden todavía cómo se calcula, y no hace falta</a:t>
-            </a:r>
-          </a:p>
-          <a:p>
-            <a:r>
-              <a:t>→ lo único importante: sirve para MEDIR parecido, no para escribir</a:t>
+              <a:t>Tabla de referencia, la que más van a usar es num_ctx y temperature</a:t>
+            </a:r>
+          </a:p>
+          <a:p>
+            <a:r>
+              <a:t>num_ctx: cuánto "recuerda" de la conversación o del documento que le pasás</a:t>
+            </a:r>
+          </a:p>
+          <a:p>
+            <a:r>
+              <a:t>temperature: cuánto se la juega el modelo al elegir la siguiente palabra</a:t>
+            </a:r>
+          </a:p>
+          <a:p>
+            <a:r>
+              <a:t>→ el resto se toca poco y casi siempre junto con estas dos</a:t>
             </a:r>
           </a:p>
         </p:txBody>
@@ -1134,17 +1155,22 @@
           <a:lstStyle/>
           <a:p>
             <a:r>
-              <a:t>Panel izquierdo: un ejemplo concreto, texto entra, vector sale</a:t>
-            </a:r>
-          </a:p>
-          <a:p>
-            <a:r>
-              <a:t>Panel derecho: por eso sirve para clustering — lo parecido queda junto</a:t>
-            </a:r>
-          </a:p>
-          <a:p>
-            <a:r>
-              <a:t>→ el post 'random' queda lejos de ambos grupos, ejemplo de outlier</a:t>
+              <a:t>El default de qwen2.5:14b es 4096 tokens — se ve con 'ollama ps' mientras corre</a:t>
+            </a:r>
+          </a:p>
+          <a:p>
+            <a:r>
+              <a:t>Si tu agente arrastra un historial largo o metés varios documentos de contexto (RAG), 4096 se queda corto y el modelo empieza a "olvidar" el principio de la conversación sin ningún error visible</a:t>
+            </a:r>
+          </a:p>
+          <a:p>
+            <a:r>
+              <a:t>Subirlo a 8192 o más soluciona eso, pero pide más VRAM — se ve reflejado en 'ollama ps' (SIZE sube junto con CONTEXT)</a:t>
+            </a:r>
+          </a:p>
+          <a:p>
+            <a:r>
+              <a:t>→ mi compañero que va a trabajar con LLM generativo (agentes, Bloque 4): este es el parámetro que más les va a importar</a:t>
             </a:r>
           </a:p>
         </p:txBody>
@@ -1214,17 +1240,12 @@
           <a:lstStyle/>
           <a:p>
             <a:r>
-              <a:t>Generativo = escribe. Embedding = mide. No son lo mismo ni intercambiables</a:t>
-            </a:r>
-          </a:p>
-          <a:p>
-            <a:r>
-              <a:t>qwen2.5:14b es generativo, qwen3-embedding no lo es</a:t>
-            </a:r>
-          </a:p>
-          <a:p>
-            <a:r>
-              <a:t>→ por eso el curso usa los dos, para tareas distintas</a:t>
+              <a:t>Tercera pieza, la más conceptual: qué es cada tipo de modelo</a:t>
+            </a:r>
+          </a:p>
+          <a:p>
+            <a:r>
+              <a:t>Esto les sirve para elegir modelos por su cuenta, no solo usar los del curso</a:t>
             </a:r>
           </a:p>
         </p:txBody>
@@ -1294,22 +1315,22 @@
           <a:lstStyle/>
           <a:p>
             <a:r>
-              <a:t>Mismo modelo, tres precisiones distintas, mira el tamaño</a:t>
-            </a:r>
-          </a:p>
-          <a:p>
-            <a:r>
-              <a:t>FP16: máxima precisión, 30GB. Q4: el que usamos, menos de 9GB</a:t>
-            </a:r>
-          </a:p>
-          <a:p>
-            <a:r>
-              <a:t>→ la pérdida de calidad es pequeña para lo que hacemos aquí</a:t>
-            </a:r>
-          </a:p>
-          <a:p>
-            <a:r>
-              <a:t>Por eso qwen2.5:14b Q4 cabe en un portátil normal</a:t>
+              <a:t>Embedding = huella numérica del significado, no el texto en sí</a:t>
+            </a:r>
+          </a:p>
+          <a:p>
+            <a:r>
+              <a:t>No entienden todavía cómo se calcula, y no hace falta</a:t>
+            </a:r>
+          </a:p>
+          <a:p>
+            <a:r>
+              <a:t>→ lo único importante: sirve para MEDIR parecido, no para escribir</a:t>
+            </a:r>
+          </a:p>
+          <a:p>
+            <a:r>
+              <a:t>Siempre el mismo tamaño de vector (4096), un post de una línea o de un párrafo entero</a:t>
             </a:r>
           </a:p>
         </p:txBody>
@@ -1379,22 +1400,17 @@
           <a:lstStyle/>
           <a:p>
             <a:r>
-              <a:t>La decisión no es "el modelo más grande posible"</a:t>
-            </a:r>
-          </a:p>
-          <a:p>
-            <a:r>
-              <a:t>Es equilibrio: ¿tu hardware aguanta? ¿de verdad necesitas ese tamaño?</a:t>
-            </a:r>
-          </a:p>
-          <a:p>
-            <a:r>
-              <a:t>→ en el curso ya elegimos ese equilibrio por ustedes (qwen2.5:14b Q4)</a:t>
-            </a:r>
-          </a:p>
-          <a:p>
-            <a:r>
-              <a:t>Para sus propios proyectos, el criterio es el mismo</a:t>
+              <a:t>Panel izquierdo: un ejemplo concreto, texto entra, vector sale</a:t>
+            </a:r>
+          </a:p>
+          <a:p>
+            <a:r>
+              <a:t>Panel derecho: por eso sirve para clustering — lo parecido queda junto</a:t>
+            </a:r>
+          </a:p>
+          <a:p>
+            <a:r>
+              <a:t>→ el post 'random' queda lejos de ambos grupos, ejemplo de outlier</a:t>
             </a:r>
           </a:p>
         </p:txBody>
@@ -1464,22 +1480,22 @@
           <a:lstStyle/>
           <a:p>
             <a:r>
-              <a:t>Hugging Face es el catálogo — miles de modelos, filtrar por formato GGUF</a:t>
-            </a:r>
-          </a:p>
-          <a:p>
-            <a:r>
-              <a:t>ollama pull hf.co/usuario/modelo trae el modelo directo, sin descargarlo a mano</a:t>
-            </a:r>
-          </a:p>
-          <a:p>
-            <a:r>
-              <a:t>→ AQUÍ puedo parar la presentación y navegar Hugging Face en vivo</a:t>
-            </a:r>
-          </a:p>
-          <a:p>
-            <a:r>
-              <a:t>Buscar un modelo que pida el aula y traerlo con este mismo comando</a:t>
+              <a:t>Generativo = escribe. Embedding = mide. No son lo mismo ni intercambiables</a:t>
+            </a:r>
+          </a:p>
+          <a:p>
+            <a:r>
+              <a:t>qwen2.5:14b es generativo, qwen3-embedding no lo es</a:t>
+            </a:r>
+          </a:p>
+          <a:p>
+            <a:r>
+              <a:t>→ por eso el curso usa los dos, para tareas distintas</a:t>
+            </a:r>
+          </a:p>
+          <a:p>
+            <a:r>
+              <a:t>Ojo con la idea de que genera 'de una', va palabra por palabra — siguiente slide lo muestra</a:t>
             </a:r>
           </a:p>
         </p:txBody>
@@ -1549,17 +1565,27 @@
           <a:lstStyle/>
           <a:p>
             <a:r>
-              <a:t>hf.co/&lt;repo&gt; funciona igual que el nombre de un modelo de la librería oficial</a:t>
-            </a:r>
-          </a:p>
-          <a:p>
-            <a:r>
-              <a:t>No hace falta descargar el .gguf a mano ni convertir nada</a:t>
-            </a:r>
-          </a:p>
-          <a:p>
-            <a:r>
-              <a:t>→ momento para parar y navegar Hugging Face en vivo si el aula lo pide</a:t>
+              <a:t>Esto ES lo que la gente suele imaginar como 'los pasos' del modelo</a:t>
+            </a:r>
+          </a:p>
+          <a:p>
+            <a:r>
+              <a:t>Pasada 1: 'El mar es' entra completo → sale 'vasto'</a:t>
+            </a:r>
+          </a:p>
+          <a:p>
+            <a:r>
+              <a:t>Pasada 2: 'El mar es vasto' entra completo (con la palabra nueva ya puesta) → sale 'y'</a:t>
+            </a:r>
+          </a:p>
+          <a:p>
+            <a:r>
+              <a:t>→ tantas pasadas completas como palabras genera, no una por parámetro</a:t>
+            </a:r>
+          </a:p>
+          <a:p>
+            <a:r>
+              <a:t>Esto es autorregresivo: la salida de un paso es parte de la entrada del siguiente</a:t>
             </a:r>
           </a:p>
         </p:txBody>
@@ -1714,12 +1740,27 @@
           <a:lstStyle/>
           <a:p>
             <a:r>
-              <a:t>Cuarta pieza: las librerías</a:t>
-            </a:r>
-          </a:p>
-          <a:p>
-            <a:r>
-              <a:t>No todas — solo las que no son de uso general</a:t>
+              <a:t>Confusión MUY habitual, vale la pena pararse acá</a:t>
+            </a:r>
+          </a:p>
+          <a:p>
+            <a:r>
+              <a:t>'14B parámetros' no significa '14 mil millones de pasos' — son 14 mil millones de números fijos, aprendidos una vez en el entrenamiento</a:t>
+            </a:r>
+          </a:p>
+          <a:p>
+            <a:r>
+              <a:t>→ pensarlo como el tamaño del cerebro (cuánto sabe, cuánta capacidad), no como cuánto tarda o cuántas veces itera</a:t>
+            </a:r>
+          </a:p>
+          <a:p>
+            <a:r>
+              <a:t>Lo iterativo de verdad es la diapositiva anterior: una pasada completa por TODO el modelo, por cada palabra generada</a:t>
+            </a:r>
+          </a:p>
+          <a:p>
+            <a:r>
+              <a:t>Más parámetros = más capacidad para representar matices, pero no más 'pasos' por generación</a:t>
             </a:r>
           </a:p>
         </p:txBody>
@@ -1789,17 +1830,22 @@
           <a:lstStyle/>
           <a:p>
             <a:r>
-              <a:t>pandas/matplotlib/sklearn ya los conocen, no están aquí</a:t>
-            </a:r>
-          </a:p>
-          <a:p>
-            <a:r>
-              <a:t>→ cada una resuelve un problema puntual del pipeline</a:t>
-            </a:r>
-          </a:p>
-          <a:p>
-            <a:r>
-              <a:t>umap-learn es la menos obvia, detenerse ahí</a:t>
+              <a:t>Mismo modelo, tres precisiones distintas, mira el tamaño</a:t>
+            </a:r>
+          </a:p>
+          <a:p>
+            <a:r>
+              <a:t>FP16: máxima precisión, 30GB. Q4: el que usamos, menos de 9GB</a:t>
+            </a:r>
+          </a:p>
+          <a:p>
+            <a:r>
+              <a:t>→ la pérdida de calidad es pequeña para lo que hacemos aquí</a:t>
+            </a:r>
+          </a:p>
+          <a:p>
+            <a:r>
+              <a:t>Por eso qwen2.5:14b Q4 cabe en un portátil normal</a:t>
             </a:r>
           </a:p>
         </p:txBody>
@@ -1869,22 +1915,22 @@
           <a:lstStyle/>
           <a:p>
             <a:r>
-              <a:t>Tranquilizar: no hace falta gama alta</a:t>
-            </a:r>
-          </a:p>
-          <a:p>
-            <a:r>
-              <a:t>8GB RAM + CPU moderna = suficiente para pandas/networkx</a:t>
-            </a:r>
-          </a:p>
-          <a:p>
-            <a:r>
-              <a:t>Derecha: solo si embeddings + LLM local</a:t>
-            </a:r>
-          </a:p>
-          <a:p>
-            <a:r>
-              <a:t>→ sin GPU funciona, más lento, sobre muestra es instantáneo</a:t>
+              <a:t>Ahora que ya vimos qué es un parámetro, cuantizar es más concreto: no se tocan CUÁNTOS parámetros hay, se toca CUÁNTA precisión tiene cada uno</a:t>
+            </a:r>
+          </a:p>
+          <a:p>
+            <a:r>
+              <a:t>FP16 = 16 bits por parámetro, Q4 = ~4 bits por parámetro → por eso el tamaño baja a una fracción</a:t>
+            </a:r>
+          </a:p>
+          <a:p>
+            <a:r>
+              <a:t>→ Q4_K_M: Q4 = 4 bits, K = agrupa en bloques y reparte bits de forma más inteligente, M = variante 'medium' del reparto (hay S y L también)</a:t>
+            </a:r>
+          </a:p>
+          <a:p>
+            <a:r>
+              <a:t>Esto se ve en detalle con datos reales en el notebook, sección de cuantización</a:t>
             </a:r>
           </a:p>
         </p:txBody>
@@ -1910,6 +1956,496 @@
 </file>
 
 <file path=ppt/notesSlides/notesSlide23.xml><?xml version="1.0" encoding="utf-8"?>
+<p:notes xmlns:a="http://schemas.openxmlformats.org/drawingml/2006/main" xmlns:p="http://schemas.openxmlformats.org/presentationml/2006/main" xmlns:r="http://schemas.openxmlformats.org/officeDocument/2006/relationships">
+  <p:cSld>
+    <p:spTree>
+      <p:nvGrpSpPr>
+        <p:cNvPr id="1" name=""/>
+        <p:cNvGrpSpPr/>
+        <p:nvPr/>
+      </p:nvGrpSpPr>
+      <p:grpSpPr>
+        <a:xfrm>
+          <a:off x="0" y="0"/>
+          <a:ext cx="0" cy="0"/>
+          <a:chOff x="0" y="0"/>
+          <a:chExt cx="0" cy="0"/>
+        </a:xfrm>
+      </p:grpSpPr>
+      <p:sp>
+        <p:nvSpPr>
+          <p:cNvPr id="2" name="Slide Image Placeholder 1"/>
+          <p:cNvSpPr>
+            <a:spLocks noGrp="1"/>
+          </p:cNvSpPr>
+          <p:nvPr>
+            <p:ph type="sldImg" idx="2"/>
+          </p:nvPr>
+        </p:nvSpPr>
+        <p:spPr/>
+      </p:sp>
+      <p:sp>
+        <p:nvSpPr>
+          <p:cNvPr id="3" name="Notes Placeholder 2"/>
+          <p:cNvSpPr>
+            <a:spLocks noGrp="1"/>
+          </p:cNvSpPr>
+          <p:nvPr>
+            <p:ph type="body" idx="3" sz="quarter"/>
+          </p:nvPr>
+        </p:nvSpPr>
+        <p:spPr/>
+        <p:txBody>
+          <a:bodyPr/>
+          <a:lstStyle/>
+          <a:p>
+            <a:r>
+              <a:t>La decisión no es "el modelo más grande posible"</a:t>
+            </a:r>
+          </a:p>
+          <a:p>
+            <a:r>
+              <a:t>Es equilibrio: ¿tu hardware aguanta? ¿de verdad necesitas ese tamaño?</a:t>
+            </a:r>
+          </a:p>
+          <a:p>
+            <a:r>
+              <a:t>→ en el curso ya elegimos ese equilibrio por ustedes (qwen2.5:14b Q4)</a:t>
+            </a:r>
+          </a:p>
+          <a:p>
+            <a:r>
+              <a:t>Para sus propios proyectos, el criterio es el mismo</a:t>
+            </a:r>
+          </a:p>
+        </p:txBody>
+      </p:sp>
+      <p:sp>
+        <p:nvSpPr>
+          <p:cNvPr id="4" name="Slide Number Placeholder 3"/>
+          <p:cNvSpPr>
+            <a:spLocks noGrp="1"/>
+          </p:cNvSpPr>
+          <p:nvPr>
+            <p:ph type="sldNum" idx="5" sz="quarter"/>
+          </p:nvPr>
+        </p:nvSpPr>
+        <p:spPr/>
+      </p:sp>
+    </p:spTree>
+  </p:cSld>
+  <p:clrMapOvr>
+    <a:masterClrMapping/>
+  </p:clrMapOvr>
+</p:notes>
+</file>
+
+<file path=ppt/notesSlides/notesSlide24.xml><?xml version="1.0" encoding="utf-8"?>
+<p:notes xmlns:a="http://schemas.openxmlformats.org/drawingml/2006/main" xmlns:p="http://schemas.openxmlformats.org/presentationml/2006/main" xmlns:r="http://schemas.openxmlformats.org/officeDocument/2006/relationships">
+  <p:cSld>
+    <p:spTree>
+      <p:nvGrpSpPr>
+        <p:cNvPr id="1" name=""/>
+        <p:cNvGrpSpPr/>
+        <p:nvPr/>
+      </p:nvGrpSpPr>
+      <p:grpSpPr>
+        <a:xfrm>
+          <a:off x="0" y="0"/>
+          <a:ext cx="0" cy="0"/>
+          <a:chOff x="0" y="0"/>
+          <a:chExt cx="0" cy="0"/>
+        </a:xfrm>
+      </p:grpSpPr>
+      <p:sp>
+        <p:nvSpPr>
+          <p:cNvPr id="2" name="Slide Image Placeholder 1"/>
+          <p:cNvSpPr>
+            <a:spLocks noGrp="1"/>
+          </p:cNvSpPr>
+          <p:nvPr>
+            <p:ph type="sldImg" idx="2"/>
+          </p:nvPr>
+        </p:nvSpPr>
+        <p:spPr/>
+      </p:sp>
+      <p:sp>
+        <p:nvSpPr>
+          <p:cNvPr id="3" name="Notes Placeholder 2"/>
+          <p:cNvSpPr>
+            <a:spLocks noGrp="1"/>
+          </p:cNvSpPr>
+          <p:nvPr>
+            <p:ph type="body" idx="3" sz="quarter"/>
+          </p:nvPr>
+        </p:nvSpPr>
+        <p:spPr/>
+        <p:txBody>
+          <a:bodyPr/>
+          <a:lstStyle/>
+          <a:p>
+            <a:r>
+              <a:t>Hugging Face es el catálogo — miles de modelos, filtrar por formato GGUF</a:t>
+            </a:r>
+          </a:p>
+          <a:p>
+            <a:r>
+              <a:t>ollama pull hf.co/usuario/modelo trae el modelo directo, sin descargarlo a mano</a:t>
+            </a:r>
+          </a:p>
+          <a:p>
+            <a:r>
+              <a:t>→ AQUÍ puedo parar la presentación y navegar Hugging Face en vivo</a:t>
+            </a:r>
+          </a:p>
+          <a:p>
+            <a:r>
+              <a:t>Buscar un modelo que pida el aula y traerlo con este mismo comando</a:t>
+            </a:r>
+          </a:p>
+        </p:txBody>
+      </p:sp>
+      <p:sp>
+        <p:nvSpPr>
+          <p:cNvPr id="4" name="Slide Number Placeholder 3"/>
+          <p:cNvSpPr>
+            <a:spLocks noGrp="1"/>
+          </p:cNvSpPr>
+          <p:nvPr>
+            <p:ph type="sldNum" idx="5" sz="quarter"/>
+          </p:nvPr>
+        </p:nvSpPr>
+        <p:spPr/>
+      </p:sp>
+    </p:spTree>
+  </p:cSld>
+  <p:clrMapOvr>
+    <a:masterClrMapping/>
+  </p:clrMapOvr>
+</p:notes>
+</file>
+
+<file path=ppt/notesSlides/notesSlide25.xml><?xml version="1.0" encoding="utf-8"?>
+<p:notes xmlns:a="http://schemas.openxmlformats.org/drawingml/2006/main" xmlns:p="http://schemas.openxmlformats.org/presentationml/2006/main" xmlns:r="http://schemas.openxmlformats.org/officeDocument/2006/relationships">
+  <p:cSld>
+    <p:spTree>
+      <p:nvGrpSpPr>
+        <p:cNvPr id="1" name=""/>
+        <p:cNvGrpSpPr/>
+        <p:nvPr/>
+      </p:nvGrpSpPr>
+      <p:grpSpPr>
+        <a:xfrm>
+          <a:off x="0" y="0"/>
+          <a:ext cx="0" cy="0"/>
+          <a:chOff x="0" y="0"/>
+          <a:chExt cx="0" cy="0"/>
+        </a:xfrm>
+      </p:grpSpPr>
+      <p:sp>
+        <p:nvSpPr>
+          <p:cNvPr id="2" name="Slide Image Placeholder 1"/>
+          <p:cNvSpPr>
+            <a:spLocks noGrp="1"/>
+          </p:cNvSpPr>
+          <p:nvPr>
+            <p:ph type="sldImg" idx="2"/>
+          </p:nvPr>
+        </p:nvSpPr>
+        <p:spPr/>
+      </p:sp>
+      <p:sp>
+        <p:nvSpPr>
+          <p:cNvPr id="3" name="Notes Placeholder 2"/>
+          <p:cNvSpPr>
+            <a:spLocks noGrp="1"/>
+          </p:cNvSpPr>
+          <p:nvPr>
+            <p:ph type="body" idx="3" sz="quarter"/>
+          </p:nvPr>
+        </p:nvSpPr>
+        <p:spPr/>
+        <p:txBody>
+          <a:bodyPr/>
+          <a:lstStyle/>
+          <a:p>
+            <a:r>
+              <a:t>hf.co/&lt;repo&gt; funciona igual que el nombre de un modelo de la librería oficial</a:t>
+            </a:r>
+          </a:p>
+          <a:p>
+            <a:r>
+              <a:t>No hace falta descargar el .gguf a mano ni convertir nada</a:t>
+            </a:r>
+          </a:p>
+          <a:p>
+            <a:r>
+              <a:t>→ momento para parar y navegar Hugging Face en vivo si el aula lo pide</a:t>
+            </a:r>
+          </a:p>
+        </p:txBody>
+      </p:sp>
+      <p:sp>
+        <p:nvSpPr>
+          <p:cNvPr id="4" name="Slide Number Placeholder 3"/>
+          <p:cNvSpPr>
+            <a:spLocks noGrp="1"/>
+          </p:cNvSpPr>
+          <p:nvPr>
+            <p:ph type="sldNum" idx="5" sz="quarter"/>
+          </p:nvPr>
+        </p:nvSpPr>
+        <p:spPr/>
+      </p:sp>
+    </p:spTree>
+  </p:cSld>
+  <p:clrMapOvr>
+    <a:masterClrMapping/>
+  </p:clrMapOvr>
+</p:notes>
+</file>
+
+<file path=ppt/notesSlides/notesSlide26.xml><?xml version="1.0" encoding="utf-8"?>
+<p:notes xmlns:a="http://schemas.openxmlformats.org/drawingml/2006/main" xmlns:p="http://schemas.openxmlformats.org/presentationml/2006/main" xmlns:r="http://schemas.openxmlformats.org/officeDocument/2006/relationships">
+  <p:cSld>
+    <p:spTree>
+      <p:nvGrpSpPr>
+        <p:cNvPr id="1" name=""/>
+        <p:cNvGrpSpPr/>
+        <p:nvPr/>
+      </p:nvGrpSpPr>
+      <p:grpSpPr>
+        <a:xfrm>
+          <a:off x="0" y="0"/>
+          <a:ext cx="0" cy="0"/>
+          <a:chOff x="0" y="0"/>
+          <a:chExt cx="0" cy="0"/>
+        </a:xfrm>
+      </p:grpSpPr>
+      <p:sp>
+        <p:nvSpPr>
+          <p:cNvPr id="2" name="Slide Image Placeholder 1"/>
+          <p:cNvSpPr>
+            <a:spLocks noGrp="1"/>
+          </p:cNvSpPr>
+          <p:nvPr>
+            <p:ph type="sldImg" idx="2"/>
+          </p:nvPr>
+        </p:nvSpPr>
+        <p:spPr/>
+      </p:sp>
+      <p:sp>
+        <p:nvSpPr>
+          <p:cNvPr id="3" name="Notes Placeholder 2"/>
+          <p:cNvSpPr>
+            <a:spLocks noGrp="1"/>
+          </p:cNvSpPr>
+          <p:nvPr>
+            <p:ph type="body" idx="3" sz="quarter"/>
+          </p:nvPr>
+        </p:nvSpPr>
+        <p:spPr/>
+        <p:txBody>
+          <a:bodyPr/>
+          <a:lstStyle/>
+          <a:p>
+            <a:r>
+              <a:t>Cuarta pieza: las librerías</a:t>
+            </a:r>
+          </a:p>
+          <a:p>
+            <a:r>
+              <a:t>No todas — solo las que no son de uso general</a:t>
+            </a:r>
+          </a:p>
+        </p:txBody>
+      </p:sp>
+      <p:sp>
+        <p:nvSpPr>
+          <p:cNvPr id="4" name="Slide Number Placeholder 3"/>
+          <p:cNvSpPr>
+            <a:spLocks noGrp="1"/>
+          </p:cNvSpPr>
+          <p:nvPr>
+            <p:ph type="sldNum" idx="5" sz="quarter"/>
+          </p:nvPr>
+        </p:nvSpPr>
+        <p:spPr/>
+      </p:sp>
+    </p:spTree>
+  </p:cSld>
+  <p:clrMapOvr>
+    <a:masterClrMapping/>
+  </p:clrMapOvr>
+</p:notes>
+</file>
+
+<file path=ppt/notesSlides/notesSlide27.xml><?xml version="1.0" encoding="utf-8"?>
+<p:notes xmlns:a="http://schemas.openxmlformats.org/drawingml/2006/main" xmlns:p="http://schemas.openxmlformats.org/presentationml/2006/main" xmlns:r="http://schemas.openxmlformats.org/officeDocument/2006/relationships">
+  <p:cSld>
+    <p:spTree>
+      <p:nvGrpSpPr>
+        <p:cNvPr id="1" name=""/>
+        <p:cNvGrpSpPr/>
+        <p:nvPr/>
+      </p:nvGrpSpPr>
+      <p:grpSpPr>
+        <a:xfrm>
+          <a:off x="0" y="0"/>
+          <a:ext cx="0" cy="0"/>
+          <a:chOff x="0" y="0"/>
+          <a:chExt cx="0" cy="0"/>
+        </a:xfrm>
+      </p:grpSpPr>
+      <p:sp>
+        <p:nvSpPr>
+          <p:cNvPr id="2" name="Slide Image Placeholder 1"/>
+          <p:cNvSpPr>
+            <a:spLocks noGrp="1"/>
+          </p:cNvSpPr>
+          <p:nvPr>
+            <p:ph type="sldImg" idx="2"/>
+          </p:nvPr>
+        </p:nvSpPr>
+        <p:spPr/>
+      </p:sp>
+      <p:sp>
+        <p:nvSpPr>
+          <p:cNvPr id="3" name="Notes Placeholder 2"/>
+          <p:cNvSpPr>
+            <a:spLocks noGrp="1"/>
+          </p:cNvSpPr>
+          <p:nvPr>
+            <p:ph type="body" idx="3" sz="quarter"/>
+          </p:nvPr>
+        </p:nvSpPr>
+        <p:spPr/>
+        <p:txBody>
+          <a:bodyPr/>
+          <a:lstStyle/>
+          <a:p>
+            <a:r>
+              <a:t>pandas/matplotlib/sklearn ya los conocen, no están aquí</a:t>
+            </a:r>
+          </a:p>
+          <a:p>
+            <a:r>
+              <a:t>→ cada una resuelve un problema puntual del pipeline</a:t>
+            </a:r>
+          </a:p>
+          <a:p>
+            <a:r>
+              <a:t>umap-learn es la menos obvia, detenerse ahí</a:t>
+            </a:r>
+          </a:p>
+        </p:txBody>
+      </p:sp>
+      <p:sp>
+        <p:nvSpPr>
+          <p:cNvPr id="4" name="Slide Number Placeholder 3"/>
+          <p:cNvSpPr>
+            <a:spLocks noGrp="1"/>
+          </p:cNvSpPr>
+          <p:nvPr>
+            <p:ph type="sldNum" idx="5" sz="quarter"/>
+          </p:nvPr>
+        </p:nvSpPr>
+        <p:spPr/>
+      </p:sp>
+    </p:spTree>
+  </p:cSld>
+  <p:clrMapOvr>
+    <a:masterClrMapping/>
+  </p:clrMapOvr>
+</p:notes>
+</file>
+
+<file path=ppt/notesSlides/notesSlide28.xml><?xml version="1.0" encoding="utf-8"?>
+<p:notes xmlns:a="http://schemas.openxmlformats.org/drawingml/2006/main" xmlns:p="http://schemas.openxmlformats.org/presentationml/2006/main" xmlns:r="http://schemas.openxmlformats.org/officeDocument/2006/relationships">
+  <p:cSld>
+    <p:spTree>
+      <p:nvGrpSpPr>
+        <p:cNvPr id="1" name=""/>
+        <p:cNvGrpSpPr/>
+        <p:nvPr/>
+      </p:nvGrpSpPr>
+      <p:grpSpPr>
+        <a:xfrm>
+          <a:off x="0" y="0"/>
+          <a:ext cx="0" cy="0"/>
+          <a:chOff x="0" y="0"/>
+          <a:chExt cx="0" cy="0"/>
+        </a:xfrm>
+      </p:grpSpPr>
+      <p:sp>
+        <p:nvSpPr>
+          <p:cNvPr id="2" name="Slide Image Placeholder 1"/>
+          <p:cNvSpPr>
+            <a:spLocks noGrp="1"/>
+          </p:cNvSpPr>
+          <p:nvPr>
+            <p:ph type="sldImg" idx="2"/>
+          </p:nvPr>
+        </p:nvSpPr>
+        <p:spPr/>
+      </p:sp>
+      <p:sp>
+        <p:nvSpPr>
+          <p:cNvPr id="3" name="Notes Placeholder 2"/>
+          <p:cNvSpPr>
+            <a:spLocks noGrp="1"/>
+          </p:cNvSpPr>
+          <p:nvPr>
+            <p:ph type="body" idx="3" sz="quarter"/>
+          </p:nvPr>
+        </p:nvSpPr>
+        <p:spPr/>
+        <p:txBody>
+          <a:bodyPr/>
+          <a:lstStyle/>
+          <a:p>
+            <a:r>
+              <a:t>Tranquilizar: no hace falta gama alta</a:t>
+            </a:r>
+          </a:p>
+          <a:p>
+            <a:r>
+              <a:t>8GB RAM + CPU moderna = suficiente para pandas/networkx</a:t>
+            </a:r>
+          </a:p>
+          <a:p>
+            <a:r>
+              <a:t>Derecha: solo si embeddings + LLM local</a:t>
+            </a:r>
+          </a:p>
+          <a:p>
+            <a:r>
+              <a:t>→ sin GPU funciona, más lento, sobre muestra es instantáneo</a:t>
+            </a:r>
+          </a:p>
+        </p:txBody>
+      </p:sp>
+      <p:sp>
+        <p:nvSpPr>
+          <p:cNvPr id="4" name="Slide Number Placeholder 3"/>
+          <p:cNvSpPr>
+            <a:spLocks noGrp="1"/>
+          </p:cNvSpPr>
+          <p:nvPr>
+            <p:ph type="sldNum" idx="5" sz="quarter"/>
+          </p:nvPr>
+        </p:nvSpPr>
+        <p:spPr/>
+      </p:sp>
+    </p:spTree>
+  </p:cSld>
+  <p:clrMapOvr>
+    <a:masterClrMapping/>
+  </p:clrMapOvr>
+</p:notes>
+</file>
+
+<file path=ppt/notesSlides/notesSlide29.xml><?xml version="1.0" encoding="utf-8"?>
 <p:notes xmlns:a="http://schemas.openxmlformats.org/drawingml/2006/main" xmlns:p="http://schemas.openxmlformats.org/presentationml/2006/main" xmlns:r="http://schemas.openxmlformats.org/officeDocument/2006/relationships">
   <p:cSld>
     <p:spTree>
@@ -6635,7 +7171,7 @@
             <a:spLocks noGrp="1"/>
           </p:cNvSpPr>
           <p:nvPr>
-            <p:ph type="body" idx="10" sz="quarter"/>
+            <p:ph type="body" idx="13" sz="quarter"/>
           </p:nvPr>
         </p:nvSpPr>
         <p:spPr/>
@@ -6643,33 +7179,44 @@
           <a:bodyPr wrap="square"/>
           <a:lstStyle/>
           <a:p>
-            <a:pPr algn="ctr"/>
-            <a:r>
-              <a:rPr sz="1700" b="1">
-                <a:solidFill>
-                  <a:srgbClr val="CD2D37"/>
-                </a:solidFill>
-                <a:latin typeface="Arial"/>
-              </a:rPr>
-              <a:t>SECCIÓN 3</a:t>
-            </a:r>
-          </a:p>
-          <a:p>
-            <a:pPr algn="ctr"/>
-            <a:r>
-              <a:t>Entendiendo los modelos</a:t>
-            </a:r>
-          </a:p>
-          <a:p>
-            <a:pPr algn="ctr"/>
-            <a:r>
-              <a:rPr sz="1600">
-                <a:solidFill>
-                  <a:srgbClr val="D6DAE2"/>
-                </a:solidFill>
-                <a:latin typeface="Arial"/>
-              </a:rPr>
-              <a:t>Embeddings, generativos y cuantización</a:t>
+            <a:r>
+              <a:t>Ajustar el modelo: el diccionario options</a:t>
+            </a:r>
+          </a:p>
+        </p:txBody>
+      </p:sp>
+      <p:sp>
+        <p:nvSpPr>
+          <p:cNvPr id="3" name="Text Placeholder 2"/>
+          <p:cNvSpPr>
+            <a:spLocks noGrp="1"/>
+          </p:cNvSpPr>
+          <p:nvPr>
+            <p:ph type="body" idx="16" sz="quarter"/>
+          </p:nvPr>
+        </p:nvSpPr>
+        <p:spPr>
+          <a:xfrm>
+            <a:off x="1073427" y="2214736"/>
+            <a:ext cx="10084904" cy="3370138"/>
+          </a:xfrm>
+        </p:spPr>
+        <p:txBody>
+          <a:bodyPr wrap="square"/>
+          <a:lstStyle/>
+          <a:p>
+            <a:r>
+              <a:t>ollama.chat(...) y ollama.generate(...) aceptan options={...} — hiperparámetros de inferencia</a:t>
+            </a:r>
+          </a:p>
+          <a:p>
+            <a:r>
+              <a:t>Se aplican por llamada: no cambian el modelo descargado, no hay que rebajarlo ni recargarlo</a:t>
+            </a:r>
+          </a:p>
+          <a:p>
+            <a:r>
+              <a:t>El más importante para quien va a montar agentes o RAG (Bloque 4): num_ctx, el contexto</a:t>
             </a:r>
           </a:p>
         </p:txBody>
@@ -6708,7 +7255,7 @@
           <a:lstStyle/>
           <a:p>
             <a:r>
-              <a:t>¿Qué es un embedding?</a:t>
+              <a:t>Parámetros más usados</a:t>
             </a:r>
           </a:p>
         </p:txBody>
@@ -6722,29 +7269,703 @@
           <p:nvPr>
             <p:ph type="body" idx="16" sz="quarter"/>
           </p:nvPr>
+        </p:nvSpPr>
+        <p:spPr/>
+        <p:txBody>
+          <a:bodyPr/>
+          <a:lstStyle/>
+          <a:p/>
+        </p:txBody>
+      </p:sp>
+      <p:graphicFrame>
+        <p:nvGraphicFramePr>
+          <p:cNvPr id="4" name="Table 3"/>
+          <p:cNvGraphicFramePr>
+            <a:graphicFrameLocks noGrp="1"/>
+          </p:cNvGraphicFramePr>
+          <p:nvPr/>
+        </p:nvGraphicFramePr>
+        <p:xfrm>
+          <a:off x="1051560" y="1783080"/>
+          <a:ext cx="10058400" cy="2560320"/>
+        </p:xfrm>
+        <a:graphic>
+          <a:graphicData uri="http://schemas.openxmlformats.org/drawingml/2006/table">
+            <a:tbl>
+              <a:tblPr>
+                <a:tableStyleId>{5C22544A-7EE6-4342-B048-85BDC9FD1C3A}</a:tableStyleId>
+              </a:tblPr>
+              <a:tblGrid>
+                <a:gridCol w="2514600"/>
+                <a:gridCol w="2514600"/>
+                <a:gridCol w="2514600"/>
+                <a:gridCol w="2514600"/>
+              </a:tblGrid>
+              <a:tr h="365760">
+                <a:tc>
+                  <a:txBody>
+                    <a:bodyPr/>
+                    <a:lstStyle/>
+                    <a:p>
+                      <a:r>
+                        <a:rPr sz="1200" b="1">
+                          <a:solidFill>
+                            <a:srgbClr val="FFFFFF"/>
+                          </a:solidFill>
+                          <a:latin typeface="Arial"/>
+                        </a:rPr>
+                        <a:t>Parámetro</a:t>
+                      </a:r>
+                    </a:p>
+                  </a:txBody>
+                  <a:tcPr marL="45000" marR="45000" marT="25000" marB="25000" anchor="ctr">
+                    <a:solidFill>
+                      <a:srgbClr val="CD2D37"/>
+                    </a:solidFill>
+                  </a:tcPr>
+                </a:tc>
+                <a:tc>
+                  <a:txBody>
+                    <a:bodyPr/>
+                    <a:lstStyle/>
+                    <a:p>
+                      <a:r>
+                        <a:rPr sz="1200" b="1">
+                          <a:solidFill>
+                            <a:srgbClr val="FFFFFF"/>
+                          </a:solidFill>
+                          <a:latin typeface="Arial"/>
+                        </a:rPr>
+                        <a:t>Qué controla</a:t>
+                      </a:r>
+                    </a:p>
+                  </a:txBody>
+                  <a:tcPr marL="45000" marR="45000" marT="25000" marB="25000" anchor="ctr">
+                    <a:solidFill>
+                      <a:srgbClr val="CD2D37"/>
+                    </a:solidFill>
+                  </a:tcPr>
+                </a:tc>
+                <a:tc>
+                  <a:txBody>
+                    <a:bodyPr/>
+                    <a:lstStyle/>
+                    <a:p>
+                      <a:r>
+                        <a:rPr sz="1200" b="1">
+                          <a:solidFill>
+                            <a:srgbClr val="FFFFFF"/>
+                          </a:solidFill>
+                          <a:latin typeface="Arial"/>
+                        </a:rPr>
+                        <a:t>Por defecto</a:t>
+                      </a:r>
+                    </a:p>
+                  </a:txBody>
+                  <a:tcPr marL="45000" marR="45000" marT="25000" marB="25000" anchor="ctr">
+                    <a:solidFill>
+                      <a:srgbClr val="CD2D37"/>
+                    </a:solidFill>
+                  </a:tcPr>
+                </a:tc>
+                <a:tc>
+                  <a:txBody>
+                    <a:bodyPr/>
+                    <a:lstStyle/>
+                    <a:p>
+                      <a:r>
+                        <a:rPr sz="1200" b="1">
+                          <a:solidFill>
+                            <a:srgbClr val="FFFFFF"/>
+                          </a:solidFill>
+                          <a:latin typeface="Arial"/>
+                        </a:rPr>
+                        <a:t>Cuándo tocarlo</a:t>
+                      </a:r>
+                    </a:p>
+                  </a:txBody>
+                  <a:tcPr marL="45000" marR="45000" marT="25000" marB="25000" anchor="ctr">
+                    <a:solidFill>
+                      <a:srgbClr val="CD2D37"/>
+                    </a:solidFill>
+                  </a:tcPr>
+                </a:tc>
+              </a:tr>
+              <a:tr h="365760">
+                <a:tc>
+                  <a:txBody>
+                    <a:bodyPr/>
+                    <a:lstStyle/>
+                    <a:p>
+                      <a:r>
+                        <a:rPr sz="1100" b="0">
+                          <a:solidFill>
+                            <a:srgbClr val="465461"/>
+                          </a:solidFill>
+                          <a:latin typeface="Arial"/>
+                        </a:rPr>
+                        <a:t>num_ctx</a:t>
+                      </a:r>
+                    </a:p>
+                  </a:txBody>
+                  <a:tcPr marL="45000" marR="45000" marT="25000" marB="25000" anchor="ctr">
+                    <a:solidFill>
+                      <a:srgbClr val="F1F2F6"/>
+                    </a:solidFill>
+                  </a:tcPr>
+                </a:tc>
+                <a:tc>
+                  <a:txBody>
+                    <a:bodyPr/>
+                    <a:lstStyle/>
+                    <a:p>
+                      <a:r>
+                        <a:rPr sz="1100" b="0">
+                          <a:solidFill>
+                            <a:srgbClr val="465461"/>
+                          </a:solidFill>
+                          <a:latin typeface="Arial"/>
+                        </a:rPr>
+                        <a:t>Ventana de contexto: tokens que el modelo "ve" a la vez (prompt + historial + salida)</a:t>
+                      </a:r>
+                    </a:p>
+                  </a:txBody>
+                  <a:tcPr marL="45000" marR="45000" marT="25000" marB="25000" anchor="ctr">
+                    <a:solidFill>
+                      <a:srgbClr val="F1F2F6"/>
+                    </a:solidFill>
+                  </a:tcPr>
+                </a:tc>
+                <a:tc>
+                  <a:txBody>
+                    <a:bodyPr/>
+                    <a:lstStyle/>
+                    <a:p>
+                      <a:r>
+                        <a:rPr sz="1100" b="0">
+                          <a:solidFill>
+                            <a:srgbClr val="465461"/>
+                          </a:solidFill>
+                          <a:latin typeface="Arial"/>
+                        </a:rPr>
+                        <a:t>4096</a:t>
+                      </a:r>
+                    </a:p>
+                  </a:txBody>
+                  <a:tcPr marL="45000" marR="45000" marT="25000" marB="25000" anchor="ctr">
+                    <a:solidFill>
+                      <a:srgbClr val="F1F2F6"/>
+                    </a:solidFill>
+                  </a:tcPr>
+                </a:tc>
+                <a:tc>
+                  <a:txBody>
+                    <a:bodyPr/>
+                    <a:lstStyle/>
+                    <a:p>
+                      <a:r>
+                        <a:rPr sz="1100" b="0">
+                          <a:solidFill>
+                            <a:srgbClr val="465461"/>
+                          </a:solidFill>
+                          <a:latin typeface="Arial"/>
+                        </a:rPr>
+                        <a:t>Conversaciones largas, RAG con varios documentos, agentes con historial extenso</a:t>
+                      </a:r>
+                    </a:p>
+                  </a:txBody>
+                  <a:tcPr marL="45000" marR="45000" marT="25000" marB="25000" anchor="ctr">
+                    <a:solidFill>
+                      <a:srgbClr val="F1F2F6"/>
+                    </a:solidFill>
+                  </a:tcPr>
+                </a:tc>
+              </a:tr>
+              <a:tr h="365760">
+                <a:tc>
+                  <a:txBody>
+                    <a:bodyPr/>
+                    <a:lstStyle/>
+                    <a:p>
+                      <a:r>
+                        <a:rPr sz="1100" b="0">
+                          <a:solidFill>
+                            <a:srgbClr val="465461"/>
+                          </a:solidFill>
+                          <a:latin typeface="Arial"/>
+                        </a:rPr>
+                        <a:t>temperature</a:t>
+                      </a:r>
+                    </a:p>
+                  </a:txBody>
+                  <a:tcPr marL="45000" marR="45000" marT="25000" marB="25000" anchor="ctr">
+                    <a:solidFill>
+                      <a:srgbClr val="FFFFFF"/>
+                    </a:solidFill>
+                  </a:tcPr>
+                </a:tc>
+                <a:tc>
+                  <a:txBody>
+                    <a:bodyPr/>
+                    <a:lstStyle/>
+                    <a:p>
+                      <a:r>
+                        <a:rPr sz="1100" b="0">
+                          <a:solidFill>
+                            <a:srgbClr val="465461"/>
+                          </a:solidFill>
+                          <a:latin typeface="Arial"/>
+                        </a:rPr>
+                        <a:t>Aleatoriedad de la generación (0 = determinista, 1+ = creativo)</a:t>
+                      </a:r>
+                    </a:p>
+                  </a:txBody>
+                  <a:tcPr marL="45000" marR="45000" marT="25000" marB="25000" anchor="ctr">
+                    <a:solidFill>
+                      <a:srgbClr val="FFFFFF"/>
+                    </a:solidFill>
+                  </a:tcPr>
+                </a:tc>
+                <a:tc>
+                  <a:txBody>
+                    <a:bodyPr/>
+                    <a:lstStyle/>
+                    <a:p>
+                      <a:r>
+                        <a:rPr sz="1100" b="0">
+                          <a:solidFill>
+                            <a:srgbClr val="465461"/>
+                          </a:solidFill>
+                          <a:latin typeface="Arial"/>
+                        </a:rPr>
+                        <a:t>0.8</a:t>
+                      </a:r>
+                    </a:p>
+                  </a:txBody>
+                  <a:tcPr marL="45000" marR="45000" marT="25000" marB="25000" anchor="ctr">
+                    <a:solidFill>
+                      <a:srgbClr val="FFFFFF"/>
+                    </a:solidFill>
+                  </a:tcPr>
+                </a:tc>
+                <a:tc>
+                  <a:txBody>
+                    <a:bodyPr/>
+                    <a:lstStyle/>
+                    <a:p>
+                      <a:r>
+                        <a:rPr sz="1100" b="0">
+                          <a:solidFill>
+                            <a:srgbClr val="465461"/>
+                          </a:solidFill>
+                          <a:latin typeface="Arial"/>
+                        </a:rPr>
+                        <a:t>Bajar para extracción/clasificación consistente; subir para texto creativo</a:t>
+                      </a:r>
+                    </a:p>
+                  </a:txBody>
+                  <a:tcPr marL="45000" marR="45000" marT="25000" marB="25000" anchor="ctr">
+                    <a:solidFill>
+                      <a:srgbClr val="FFFFFF"/>
+                    </a:solidFill>
+                  </a:tcPr>
+                </a:tc>
+              </a:tr>
+              <a:tr h="365760">
+                <a:tc>
+                  <a:txBody>
+                    <a:bodyPr/>
+                    <a:lstStyle/>
+                    <a:p>
+                      <a:r>
+                        <a:rPr sz="1100" b="0">
+                          <a:solidFill>
+                            <a:srgbClr val="465461"/>
+                          </a:solidFill>
+                          <a:latin typeface="Arial"/>
+                        </a:rPr>
+                        <a:t>top_p / top_k</a:t>
+                      </a:r>
+                    </a:p>
+                  </a:txBody>
+                  <a:tcPr marL="45000" marR="45000" marT="25000" marB="25000" anchor="ctr">
+                    <a:solidFill>
+                      <a:srgbClr val="F1F2F6"/>
+                    </a:solidFill>
+                  </a:tcPr>
+                </a:tc>
+                <a:tc>
+                  <a:txBody>
+                    <a:bodyPr/>
+                    <a:lstStyle/>
+                    <a:p>
+                      <a:r>
+                        <a:rPr sz="1100" b="0">
+                          <a:solidFill>
+                            <a:srgbClr val="465461"/>
+                          </a:solidFill>
+                          <a:latin typeface="Arial"/>
+                        </a:rPr>
+                        <a:t>Recortan el conjunto de tokens candidatos antes de muestrear</a:t>
+                      </a:r>
+                    </a:p>
+                  </a:txBody>
+                  <a:tcPr marL="45000" marR="45000" marT="25000" marB="25000" anchor="ctr">
+                    <a:solidFill>
+                      <a:srgbClr val="F1F2F6"/>
+                    </a:solidFill>
+                  </a:tcPr>
+                </a:tc>
+                <a:tc>
+                  <a:txBody>
+                    <a:bodyPr/>
+                    <a:lstStyle/>
+                    <a:p>
+                      <a:r>
+                        <a:rPr sz="1100" b="0">
+                          <a:solidFill>
+                            <a:srgbClr val="465461"/>
+                          </a:solidFill>
+                          <a:latin typeface="Arial"/>
+                        </a:rPr>
+                        <a:t>0.9 / 40</a:t>
+                      </a:r>
+                    </a:p>
+                  </a:txBody>
+                  <a:tcPr marL="45000" marR="45000" marT="25000" marB="25000" anchor="ctr">
+                    <a:solidFill>
+                      <a:srgbClr val="F1F2F6"/>
+                    </a:solidFill>
+                  </a:tcPr>
+                </a:tc>
+                <a:tc>
+                  <a:txBody>
+                    <a:bodyPr/>
+                    <a:lstStyle/>
+                    <a:p>
+                      <a:r>
+                        <a:rPr sz="1100" b="0">
+                          <a:solidFill>
+                            <a:srgbClr val="465461"/>
+                          </a:solidFill>
+                          <a:latin typeface="Arial"/>
+                        </a:rPr>
+                        <a:t>Ajuste fino junto con temperature, casi nunca solos</a:t>
+                      </a:r>
+                    </a:p>
+                  </a:txBody>
+                  <a:tcPr marL="45000" marR="45000" marT="25000" marB="25000" anchor="ctr">
+                    <a:solidFill>
+                      <a:srgbClr val="F1F2F6"/>
+                    </a:solidFill>
+                  </a:tcPr>
+                </a:tc>
+              </a:tr>
+              <a:tr h="365760">
+                <a:tc>
+                  <a:txBody>
+                    <a:bodyPr/>
+                    <a:lstStyle/>
+                    <a:p>
+                      <a:r>
+                        <a:rPr sz="1100" b="0">
+                          <a:solidFill>
+                            <a:srgbClr val="465461"/>
+                          </a:solidFill>
+                          <a:latin typeface="Arial"/>
+                        </a:rPr>
+                        <a:t>num_predict</a:t>
+                      </a:r>
+                    </a:p>
+                  </a:txBody>
+                  <a:tcPr marL="45000" marR="45000" marT="25000" marB="25000" anchor="ctr">
+                    <a:solidFill>
+                      <a:srgbClr val="FFFFFF"/>
+                    </a:solidFill>
+                  </a:tcPr>
+                </a:tc>
+                <a:tc>
+                  <a:txBody>
+                    <a:bodyPr/>
+                    <a:lstStyle/>
+                    <a:p>
+                      <a:r>
+                        <a:rPr sz="1100" b="0">
+                          <a:solidFill>
+                            <a:srgbClr val="465461"/>
+                          </a:solidFill>
+                          <a:latin typeface="Arial"/>
+                        </a:rPr>
+                        <a:t>Máximo de tokens a generar en la respuesta</a:t>
+                      </a:r>
+                    </a:p>
+                  </a:txBody>
+                  <a:tcPr marL="45000" marR="45000" marT="25000" marB="25000" anchor="ctr">
+                    <a:solidFill>
+                      <a:srgbClr val="FFFFFF"/>
+                    </a:solidFill>
+                  </a:tcPr>
+                </a:tc>
+                <a:tc>
+                  <a:txBody>
+                    <a:bodyPr/>
+                    <a:lstStyle/>
+                    <a:p>
+                      <a:r>
+                        <a:rPr sz="1100" b="0">
+                          <a:solidFill>
+                            <a:srgbClr val="465461"/>
+                          </a:solidFill>
+                          <a:latin typeface="Arial"/>
+                        </a:rPr>
+                        <a:t>-1 (sin límite)</a:t>
+                      </a:r>
+                    </a:p>
+                  </a:txBody>
+                  <a:tcPr marL="45000" marR="45000" marT="25000" marB="25000" anchor="ctr">
+                    <a:solidFill>
+                      <a:srgbClr val="FFFFFF"/>
+                    </a:solidFill>
+                  </a:tcPr>
+                </a:tc>
+                <a:tc>
+                  <a:txBody>
+                    <a:bodyPr/>
+                    <a:lstStyle/>
+                    <a:p>
+                      <a:r>
+                        <a:rPr sz="1100" b="0">
+                          <a:solidFill>
+                            <a:srgbClr val="465461"/>
+                          </a:solidFill>
+                          <a:latin typeface="Arial"/>
+                        </a:rPr>
+                        <a:t>Acotar respuestas largas o limitar tiempo de cómputo</a:t>
+                      </a:r>
+                    </a:p>
+                  </a:txBody>
+                  <a:tcPr marL="45000" marR="45000" marT="25000" marB="25000" anchor="ctr">
+                    <a:solidFill>
+                      <a:srgbClr val="FFFFFF"/>
+                    </a:solidFill>
+                  </a:tcPr>
+                </a:tc>
+              </a:tr>
+              <a:tr h="365760">
+                <a:tc>
+                  <a:txBody>
+                    <a:bodyPr/>
+                    <a:lstStyle/>
+                    <a:p>
+                      <a:r>
+                        <a:rPr sz="1100" b="0">
+                          <a:solidFill>
+                            <a:srgbClr val="465461"/>
+                          </a:solidFill>
+                          <a:latin typeface="Arial"/>
+                        </a:rPr>
+                        <a:t>repeat_penalty</a:t>
+                      </a:r>
+                    </a:p>
+                  </a:txBody>
+                  <a:tcPr marL="45000" marR="45000" marT="25000" marB="25000" anchor="ctr">
+                    <a:solidFill>
+                      <a:srgbClr val="F1F2F6"/>
+                    </a:solidFill>
+                  </a:tcPr>
+                </a:tc>
+                <a:tc>
+                  <a:txBody>
+                    <a:bodyPr/>
+                    <a:lstStyle/>
+                    <a:p>
+                      <a:r>
+                        <a:rPr sz="1100" b="0">
+                          <a:solidFill>
+                            <a:srgbClr val="465461"/>
+                          </a:solidFill>
+                          <a:latin typeface="Arial"/>
+                        </a:rPr>
+                        <a:t>Penaliza repetir las mismas palabras o frases</a:t>
+                      </a:r>
+                    </a:p>
+                  </a:txBody>
+                  <a:tcPr marL="45000" marR="45000" marT="25000" marB="25000" anchor="ctr">
+                    <a:solidFill>
+                      <a:srgbClr val="F1F2F6"/>
+                    </a:solidFill>
+                  </a:tcPr>
+                </a:tc>
+                <a:tc>
+                  <a:txBody>
+                    <a:bodyPr/>
+                    <a:lstStyle/>
+                    <a:p>
+                      <a:r>
+                        <a:rPr sz="1100" b="0">
+                          <a:solidFill>
+                            <a:srgbClr val="465461"/>
+                          </a:solidFill>
+                          <a:latin typeface="Arial"/>
+                        </a:rPr>
+                        <a:t>1.1</a:t>
+                      </a:r>
+                    </a:p>
+                  </a:txBody>
+                  <a:tcPr marL="45000" marR="45000" marT="25000" marB="25000" anchor="ctr">
+                    <a:solidFill>
+                      <a:srgbClr val="F1F2F6"/>
+                    </a:solidFill>
+                  </a:tcPr>
+                </a:tc>
+                <a:tc>
+                  <a:txBody>
+                    <a:bodyPr/>
+                    <a:lstStyle/>
+                    <a:p>
+                      <a:r>
+                        <a:rPr sz="1100" b="0">
+                          <a:solidFill>
+                            <a:srgbClr val="465461"/>
+                          </a:solidFill>
+                          <a:latin typeface="Arial"/>
+                        </a:rPr>
+                        <a:t>Si el modelo entra en bucle repitiendo texto</a:t>
+                      </a:r>
+                    </a:p>
+                  </a:txBody>
+                  <a:tcPr marL="45000" marR="45000" marT="25000" marB="25000" anchor="ctr">
+                    <a:solidFill>
+                      <a:srgbClr val="F1F2F6"/>
+                    </a:solidFill>
+                  </a:tcPr>
+                </a:tc>
+              </a:tr>
+              <a:tr h="365760">
+                <a:tc>
+                  <a:txBody>
+                    <a:bodyPr/>
+                    <a:lstStyle/>
+                    <a:p>
+                      <a:r>
+                        <a:rPr sz="1100" b="0">
+                          <a:solidFill>
+                            <a:srgbClr val="465461"/>
+                          </a:solidFill>
+                          <a:latin typeface="Arial"/>
+                        </a:rPr>
+                        <a:t>seed</a:t>
+                      </a:r>
+                    </a:p>
+                  </a:txBody>
+                  <a:tcPr marL="45000" marR="45000" marT="25000" marB="25000" anchor="ctr">
+                    <a:solidFill>
+                      <a:srgbClr val="FFFFFF"/>
+                    </a:solidFill>
+                  </a:tcPr>
+                </a:tc>
+                <a:tc>
+                  <a:txBody>
+                    <a:bodyPr/>
+                    <a:lstStyle/>
+                    <a:p>
+                      <a:r>
+                        <a:rPr sz="1100" b="0">
+                          <a:solidFill>
+                            <a:srgbClr val="465461"/>
+                          </a:solidFill>
+                          <a:latin typeface="Arial"/>
+                        </a:rPr>
+                        <a:t>Fija la semilla aleatoria de muestreo</a:t>
+                      </a:r>
+                    </a:p>
+                  </a:txBody>
+                  <a:tcPr marL="45000" marR="45000" marT="25000" marB="25000" anchor="ctr">
+                    <a:solidFill>
+                      <a:srgbClr val="FFFFFF"/>
+                    </a:solidFill>
+                  </a:tcPr>
+                </a:tc>
+                <a:tc>
+                  <a:txBody>
+                    <a:bodyPr/>
+                    <a:lstStyle/>
+                    <a:p>
+                      <a:r>
+                        <a:rPr sz="1100" b="0">
+                          <a:solidFill>
+                            <a:srgbClr val="465461"/>
+                          </a:solidFill>
+                          <a:latin typeface="Arial"/>
+                        </a:rPr>
+                        <a:t>aleatoria</a:t>
+                      </a:r>
+                    </a:p>
+                  </a:txBody>
+                  <a:tcPr marL="45000" marR="45000" marT="25000" marB="25000" anchor="ctr">
+                    <a:solidFill>
+                      <a:srgbClr val="FFFFFF"/>
+                    </a:solidFill>
+                  </a:tcPr>
+                </a:tc>
+                <a:tc>
+                  <a:txBody>
+                    <a:bodyPr/>
+                    <a:lstStyle/>
+                    <a:p>
+                      <a:r>
+                        <a:rPr sz="1100" b="0">
+                          <a:solidFill>
+                            <a:srgbClr val="465461"/>
+                          </a:solidFill>
+                          <a:latin typeface="Arial"/>
+                        </a:rPr>
+                        <a:t>Reproducibilidad en tests o demos</a:t>
+                      </a:r>
+                    </a:p>
+                  </a:txBody>
+                  <a:tcPr marL="45000" marR="45000" marT="25000" marB="25000" anchor="ctr">
+                    <a:solidFill>
+                      <a:srgbClr val="FFFFFF"/>
+                    </a:solidFill>
+                  </a:tcPr>
+                </a:tc>
+              </a:tr>
+            </a:tbl>
+          </a:graphicData>
+        </a:graphic>
+      </p:graphicFrame>
+      <p:sp>
+        <p:nvSpPr>
+          <p:cNvPr id="5" name="TextBox 4"/>
+          <p:cNvSpPr txBox="1"/>
+          <p:nvPr/>
         </p:nvSpPr>
         <p:spPr>
           <a:xfrm>
-            <a:off x="1073427" y="1711816"/>
-            <a:ext cx="10084904" cy="3873058"/>
+            <a:off x="1051560" y="5760720"/>
+            <a:ext cx="10058400" cy="320040"/>
           </a:xfrm>
+          <a:prstGeom prst="rect">
+            <a:avLst/>
+          </a:prstGeom>
+          <a:noFill/>
         </p:spPr>
         <p:txBody>
-          <a:bodyPr wrap="square"/>
+          <a:bodyPr wrap="square">
+            <a:spAutoFit/>
+          </a:bodyPr>
           <a:lstStyle/>
           <a:p>
-            <a:r>
-              <a:t>Convierte un texto en un vector de números que captura su significado</a:t>
-            </a:r>
-          </a:p>
-          <a:p>
-            <a:r>
-              <a:t>Textos parecidos → vectores cercanos en el espacio</a:t>
-            </a:r>
-          </a:p>
-          <a:p>
-            <a:r>
-              <a:t>No genera texto: solo lo representa para poder compararlo</a:t>
+            <a:pPr algn="l"/>
+            <a:r>
+              <a:rPr sz="1000" b="0">
+                <a:solidFill>
+                  <a:srgbClr val="707888"/>
+                </a:solidFill>
+                <a:latin typeface="Arial"/>
+              </a:rPr>
+              <a:t>ℹ  Referencia — no hace falta memorizarla, se busca cuando hace falta.</a:t>
             </a:r>
           </a:p>
         </p:txBody>
@@ -6758,6 +7979,357 @@
 </file>
 
 <file path=ppt/slides/slide14.xml><?xml version="1.0" encoding="utf-8"?>
+<p:sld xmlns:a="http://schemas.openxmlformats.org/drawingml/2006/main" xmlns:p="http://schemas.openxmlformats.org/presentationml/2006/main" xmlns:r="http://schemas.openxmlformats.org/officeDocument/2006/relationships">
+  <p:cSld>
+    <p:spTree>
+      <p:nvGrpSpPr>
+        <p:cNvPr id="1" name=""/>
+        <p:cNvGrpSpPr/>
+        <p:nvPr/>
+      </p:nvGrpSpPr>
+      <p:grpSpPr/>
+      <p:sp>
+        <p:nvSpPr>
+          <p:cNvPr id="2" name="Text Placeholder 1"/>
+          <p:cNvSpPr>
+            <a:spLocks noGrp="1"/>
+          </p:cNvSpPr>
+          <p:nvPr>
+            <p:ph type="body" idx="13" sz="quarter"/>
+          </p:nvPr>
+        </p:nvSpPr>
+        <p:spPr/>
+        <p:txBody>
+          <a:bodyPr wrap="square"/>
+          <a:lstStyle/>
+          <a:p>
+            <a:r>
+              <a:t>num_ctx en la práctica</a:t>
+            </a:r>
+          </a:p>
+        </p:txBody>
+      </p:sp>
+      <p:sp>
+        <p:nvSpPr>
+          <p:cNvPr id="3" name="Text Placeholder 2"/>
+          <p:cNvSpPr>
+            <a:spLocks noGrp="1"/>
+          </p:cNvSpPr>
+          <p:nvPr>
+            <p:ph type="body" idx="16" sz="quarter"/>
+          </p:nvPr>
+        </p:nvSpPr>
+        <p:spPr/>
+        <p:txBody>
+          <a:bodyPr/>
+          <a:lstStyle/>
+          <a:p/>
+        </p:txBody>
+      </p:sp>
+      <p:sp>
+        <p:nvSpPr>
+          <p:cNvPr id="4" name="TextBox 3"/>
+          <p:cNvSpPr txBox="1"/>
+          <p:nvPr/>
+        </p:nvSpPr>
+        <p:spPr>
+          <a:xfrm>
+            <a:off x="1051560" y="1828800"/>
+            <a:ext cx="10058400" cy="502920"/>
+          </a:xfrm>
+          <a:prstGeom prst="rect">
+            <a:avLst/>
+          </a:prstGeom>
+          <a:noFill/>
+        </p:spPr>
+        <p:txBody>
+          <a:bodyPr wrap="square">
+            <a:spAutoFit/>
+          </a:bodyPr>
+          <a:lstStyle/>
+          <a:p>
+            <a:pPr algn="l"/>
+            <a:r>
+              <a:rPr sz="1600" b="0">
+                <a:solidFill>
+                  <a:srgbClr val="465461"/>
+                </a:solidFill>
+                <a:latin typeface="Arial"/>
+              </a:rPr>
+              <a:t>Si el historial (o los documentos en RAG) supera la ventana de contexto, Ollama descarta lo más viejo sin avisar:</a:t>
+            </a:r>
+          </a:p>
+        </p:txBody>
+      </p:sp>
+      <p:sp>
+        <p:nvSpPr>
+          <p:cNvPr id="5" name="Rectangle 4"/>
+          <p:cNvSpPr/>
+          <p:nvPr/>
+        </p:nvSpPr>
+        <p:spPr>
+          <a:xfrm>
+            <a:off x="1005840" y="2377440"/>
+            <a:ext cx="10149840" cy="3429000"/>
+          </a:xfrm>
+          <a:prstGeom prst="rect">
+            <a:avLst/>
+          </a:prstGeom>
+          <a:solidFill>
+            <a:srgbClr val="0D1B2A"/>
+          </a:solidFill>
+          <a:ln>
+            <a:noFill/>
+          </a:ln>
+        </p:spPr>
+        <p:style>
+          <a:lnRef idx="1">
+            <a:schemeClr val="accent1"/>
+          </a:lnRef>
+          <a:fillRef idx="3">
+            <a:schemeClr val="accent1"/>
+          </a:fillRef>
+          <a:effectRef idx="2">
+            <a:schemeClr val="accent1"/>
+          </a:effectRef>
+          <a:fontRef idx="minor">
+            <a:schemeClr val="lt1"/>
+          </a:fontRef>
+        </p:style>
+        <p:txBody>
+          <a:bodyPr rtlCol="0" anchor="ctr"/>
+          <a:lstStyle/>
+          <a:p>
+            <a:pPr algn="ctr"/>
+          </a:p>
+        </p:txBody>
+      </p:sp>
+      <p:sp>
+        <p:nvSpPr>
+          <p:cNvPr id="6" name="TextBox 5"/>
+          <p:cNvSpPr txBox="1"/>
+          <p:nvPr/>
+        </p:nvSpPr>
+        <p:spPr>
+          <a:xfrm>
+            <a:off x="1188720" y="2514600"/>
+            <a:ext cx="9784080" cy="3154680"/>
+          </a:xfrm>
+          <a:prstGeom prst="rect">
+            <a:avLst/>
+          </a:prstGeom>
+          <a:noFill/>
+        </p:spPr>
+        <p:txBody>
+          <a:bodyPr wrap="none">
+            <a:spAutoFit/>
+          </a:bodyPr>
+          <a:lstStyle/>
+          <a:p>
+            <a:r>
+              <a:rPr sz="1400">
+                <a:solidFill>
+                  <a:srgbClr val="A8FF78"/>
+                </a:solidFill>
+                <a:latin typeface="Consolas"/>
+              </a:rPr>
+              <a:t>respuesta = ollama.chat(
+    model="qwen2.5:14b",
+    messages=historial_largo,
+    options={"num_ctx": 8192},   # default: 4096
+)</a:t>
+            </a:r>
+          </a:p>
+        </p:txBody>
+      </p:sp>
+      <p:sp>
+        <p:nvSpPr>
+          <p:cNvPr id="7" name="TextBox 6"/>
+          <p:cNvSpPr txBox="1"/>
+          <p:nvPr/>
+        </p:nvSpPr>
+        <p:spPr>
+          <a:xfrm>
+            <a:off x="1051560" y="5760720"/>
+            <a:ext cx="10058400" cy="365760"/>
+          </a:xfrm>
+          <a:prstGeom prst="rect">
+            <a:avLst/>
+          </a:prstGeom>
+          <a:noFill/>
+        </p:spPr>
+        <p:txBody>
+          <a:bodyPr wrap="square">
+            <a:spAutoFit/>
+          </a:bodyPr>
+          <a:lstStyle/>
+          <a:p>
+            <a:pPr algn="l"/>
+            <a:r>
+              <a:rPr sz="1100" b="0">
+                <a:solidFill>
+                  <a:srgbClr val="707888"/>
+                </a:solidFill>
+                <a:latin typeface="Arial"/>
+              </a:rPr>
+              <a:t>ℹ  Subir num_ctx consume más RAM/VRAM — el modelo se recarga con la ventana nueva.</a:t>
+            </a:r>
+          </a:p>
+        </p:txBody>
+      </p:sp>
+    </p:spTree>
+  </p:cSld>
+  <p:clrMapOvr>
+    <a:masterClrMapping/>
+  </p:clrMapOvr>
+</p:sld>
+</file>
+
+<file path=ppt/slides/slide15.xml><?xml version="1.0" encoding="utf-8"?>
+<p:sld xmlns:a="http://schemas.openxmlformats.org/drawingml/2006/main" xmlns:p="http://schemas.openxmlformats.org/presentationml/2006/main" xmlns:r="http://schemas.openxmlformats.org/officeDocument/2006/relationships">
+  <p:cSld>
+    <p:spTree>
+      <p:nvGrpSpPr>
+        <p:cNvPr id="1" name=""/>
+        <p:cNvGrpSpPr/>
+        <p:nvPr/>
+      </p:nvGrpSpPr>
+      <p:grpSpPr/>
+      <p:sp>
+        <p:nvSpPr>
+          <p:cNvPr id="2" name="Text Placeholder 1"/>
+          <p:cNvSpPr>
+            <a:spLocks noGrp="1"/>
+          </p:cNvSpPr>
+          <p:nvPr>
+            <p:ph type="body" idx="10" sz="quarter"/>
+          </p:nvPr>
+        </p:nvSpPr>
+        <p:spPr/>
+        <p:txBody>
+          <a:bodyPr wrap="square"/>
+          <a:lstStyle/>
+          <a:p>
+            <a:pPr algn="ctr"/>
+            <a:r>
+              <a:rPr sz="1700" b="1">
+                <a:solidFill>
+                  <a:srgbClr val="CD2D37"/>
+                </a:solidFill>
+                <a:latin typeface="Arial"/>
+              </a:rPr>
+              <a:t>SECCIÓN 3</a:t>
+            </a:r>
+          </a:p>
+          <a:p>
+            <a:pPr algn="ctr"/>
+            <a:r>
+              <a:t>Entendiendo los modelos</a:t>
+            </a:r>
+          </a:p>
+          <a:p>
+            <a:pPr algn="ctr"/>
+            <a:r>
+              <a:rPr sz="1600">
+                <a:solidFill>
+                  <a:srgbClr val="D6DAE2"/>
+                </a:solidFill>
+                <a:latin typeface="Arial"/>
+              </a:rPr>
+              <a:t>Embeddings, generativos y cuantización</a:t>
+            </a:r>
+          </a:p>
+        </p:txBody>
+      </p:sp>
+    </p:spTree>
+  </p:cSld>
+  <p:clrMapOvr>
+    <a:masterClrMapping/>
+  </p:clrMapOvr>
+</p:sld>
+</file>
+
+<file path=ppt/slides/slide16.xml><?xml version="1.0" encoding="utf-8"?>
+<p:sld xmlns:a="http://schemas.openxmlformats.org/drawingml/2006/main" xmlns:p="http://schemas.openxmlformats.org/presentationml/2006/main" xmlns:r="http://schemas.openxmlformats.org/officeDocument/2006/relationships">
+  <p:cSld>
+    <p:spTree>
+      <p:nvGrpSpPr>
+        <p:cNvPr id="1" name=""/>
+        <p:cNvGrpSpPr/>
+        <p:nvPr/>
+      </p:nvGrpSpPr>
+      <p:grpSpPr/>
+      <p:sp>
+        <p:nvSpPr>
+          <p:cNvPr id="2" name="Text Placeholder 1"/>
+          <p:cNvSpPr>
+            <a:spLocks noGrp="1"/>
+          </p:cNvSpPr>
+          <p:nvPr>
+            <p:ph type="body" idx="13" sz="quarter"/>
+          </p:nvPr>
+        </p:nvSpPr>
+        <p:spPr/>
+        <p:txBody>
+          <a:bodyPr wrap="square"/>
+          <a:lstStyle/>
+          <a:p>
+            <a:r>
+              <a:t>¿Qué es un embedding?</a:t>
+            </a:r>
+          </a:p>
+        </p:txBody>
+      </p:sp>
+      <p:sp>
+        <p:nvSpPr>
+          <p:cNvPr id="3" name="Text Placeholder 2"/>
+          <p:cNvSpPr>
+            <a:spLocks noGrp="1"/>
+          </p:cNvSpPr>
+          <p:nvPr>
+            <p:ph type="body" idx="16" sz="quarter"/>
+          </p:nvPr>
+        </p:nvSpPr>
+        <p:spPr>
+          <a:xfrm>
+            <a:off x="1073427" y="1711816"/>
+            <a:ext cx="10084904" cy="3873058"/>
+          </a:xfrm>
+        </p:spPr>
+        <p:txBody>
+          <a:bodyPr wrap="square"/>
+          <a:lstStyle/>
+          <a:p>
+            <a:r>
+              <a:t>Convierte un texto en un vector de números que captura su significado</a:t>
+            </a:r>
+          </a:p>
+          <a:p>
+            <a:r>
+              <a:t>Textos parecidos → vectores cercanos en el espacio</a:t>
+            </a:r>
+          </a:p>
+          <a:p>
+            <a:r>
+              <a:t>No genera texto: solo lo representa para poder compararlo</a:t>
+            </a:r>
+          </a:p>
+          <a:p>
+            <a:r>
+              <a:t>qwen3-embedding: cada texto → un vector de 4096 números, sin importar su longitud</a:t>
+            </a:r>
+          </a:p>
+        </p:txBody>
+      </p:sp>
+    </p:spTree>
+  </p:cSld>
+  <p:clrMapOvr>
+    <a:masterClrMapping/>
+  </p:clrMapOvr>
+</p:sld>
+</file>
+
+<file path=ppt/slides/slide17.xml><?xml version="1.0" encoding="utf-8"?>
 <p:sld xmlns:a="http://schemas.openxmlformats.org/drawingml/2006/main" xmlns:p="http://schemas.openxmlformats.org/presentationml/2006/main" xmlns:r="http://schemas.openxmlformats.org/officeDocument/2006/relationships">
   <p:cSld>
     <p:spTree>
@@ -6872,7 +8444,7 @@
 </p:sld>
 </file>
 
-<file path=ppt/slides/slide15.xml><?xml version="1.0" encoding="utf-8"?>
+<file path=ppt/slides/slide18.xml><?xml version="1.0" encoding="utf-8"?>
 <p:sld xmlns:a="http://schemas.openxmlformats.org/drawingml/2006/main" xmlns:p="http://schemas.openxmlformats.org/presentationml/2006/main" xmlns:r="http://schemas.openxmlformats.org/officeDocument/2006/relationships">
   <p:cSld>
     <p:spTree>
@@ -6934,6 +8506,11 @@
           </a:p>
           <a:p>
             <a:r>
+              <a:t>Cada palabra nueva es una pasada COMPLETA por el modelo, no un paso parcial</a:t>
+            </a:r>
+          </a:p>
+          <a:p>
+            <a:r>
               <a:t>Es lo que usamos para NER, clasificación y resúmenes</a:t>
             </a:r>
           </a:p>
@@ -6947,7 +8524,266 @@
 </p:sld>
 </file>
 
-<file path=ppt/slides/slide16.xml><?xml version="1.0" encoding="utf-8"?>
+<file path=ppt/slides/slide19.xml><?xml version="1.0" encoding="utf-8"?>
+<p:sld xmlns:a="http://schemas.openxmlformats.org/drawingml/2006/main" xmlns:p="http://schemas.openxmlformats.org/presentationml/2006/main" xmlns:r="http://schemas.openxmlformats.org/officeDocument/2006/relationships">
+  <p:cSld>
+    <p:spTree>
+      <p:nvGrpSpPr>
+        <p:cNvPr id="1" name=""/>
+        <p:cNvGrpSpPr/>
+        <p:nvPr/>
+      </p:nvGrpSpPr>
+      <p:grpSpPr/>
+      <p:sp>
+        <p:nvSpPr>
+          <p:cNvPr id="2" name="Text Placeholder 1"/>
+          <p:cNvSpPr>
+            <a:spLocks noGrp="1"/>
+          </p:cNvSpPr>
+          <p:nvPr>
+            <p:ph type="body" idx="13" sz="quarter"/>
+          </p:nvPr>
+        </p:nvSpPr>
+        <p:spPr/>
+        <p:txBody>
+          <a:bodyPr wrap="square"/>
+          <a:lstStyle/>
+          <a:p>
+            <a:r>
+              <a:t>Cómo genera texto un modelo, paso a paso</a:t>
+            </a:r>
+          </a:p>
+        </p:txBody>
+      </p:sp>
+      <p:sp>
+        <p:nvSpPr>
+          <p:cNvPr id="3" name="Text Placeholder 2"/>
+          <p:cNvSpPr>
+            <a:spLocks noGrp="1"/>
+          </p:cNvSpPr>
+          <p:nvPr>
+            <p:ph type="body" idx="16" sz="quarter"/>
+          </p:nvPr>
+        </p:nvSpPr>
+        <p:spPr/>
+        <p:txBody>
+          <a:bodyPr/>
+          <a:lstStyle/>
+          <a:p/>
+        </p:txBody>
+      </p:sp>
+      <p:pic>
+        <p:nvPicPr>
+          <p:cNvPr id="4" name="Picture 3" descr="generation_loop_diagram.png"/>
+          <p:cNvPicPr>
+            <a:picLocks noChangeAspect="1"/>
+          </p:cNvPicPr>
+          <p:nvPr/>
+        </p:nvPicPr>
+        <p:blipFill>
+          <a:blip r:embed="rId2"/>
+          <a:stretch>
+            <a:fillRect/>
+          </a:stretch>
+        </p:blipFill>
+        <p:spPr>
+          <a:xfrm>
+            <a:off x="3212870" y="2240280"/>
+            <a:ext cx="5735780" cy="3291839"/>
+          </a:xfrm>
+          <a:prstGeom prst="rect">
+            <a:avLst/>
+          </a:prstGeom>
+        </p:spPr>
+      </p:pic>
+      <p:sp>
+        <p:nvSpPr>
+          <p:cNvPr id="5" name="TextBox 4"/>
+          <p:cNvSpPr txBox="1"/>
+          <p:nvPr/>
+        </p:nvSpPr>
+        <p:spPr>
+          <a:xfrm>
+            <a:off x="1051560" y="5623559"/>
+            <a:ext cx="10058400" cy="365760"/>
+          </a:xfrm>
+          <a:prstGeom prst="rect">
+            <a:avLst/>
+          </a:prstGeom>
+          <a:noFill/>
+        </p:spPr>
+        <p:txBody>
+          <a:bodyPr wrap="square">
+            <a:spAutoFit/>
+          </a:bodyPr>
+          <a:lstStyle/>
+          <a:p>
+            <a:pPr algn="ctr"/>
+            <a:r>
+              <a:rPr sz="1200" b="0">
+                <a:solidFill>
+                  <a:srgbClr val="465461"/>
+                </a:solidFill>
+                <a:latin typeface="Arial"/>
+              </a:rPr>
+              <a:t>Cada palabra nueva sale de una pasada completa por las 48 capas del modelo — la palabra se agrega al texto y se vuelve a pasar todo por el modelo para la siguiente.</a:t>
+            </a:r>
+          </a:p>
+        </p:txBody>
+      </p:sp>
+    </p:spTree>
+  </p:cSld>
+  <p:clrMapOvr>
+    <a:masterClrMapping/>
+  </p:clrMapOvr>
+</p:sld>
+</file>
+
+<file path=ppt/slides/slide2.xml><?xml version="1.0" encoding="utf-8"?>
+<p:sld xmlns:a="http://schemas.openxmlformats.org/drawingml/2006/main" xmlns:p="http://schemas.openxmlformats.org/presentationml/2006/main" xmlns:r="http://schemas.openxmlformats.org/officeDocument/2006/relationships">
+  <p:cSld>
+    <p:spTree>
+      <p:nvGrpSpPr>
+        <p:cNvPr id="1" name=""/>
+        <p:cNvGrpSpPr/>
+        <p:nvPr/>
+      </p:nvGrpSpPr>
+      <p:grpSpPr/>
+      <p:sp>
+        <p:nvSpPr>
+          <p:cNvPr id="2" name="Text Placeholder 1"/>
+          <p:cNvSpPr>
+            <a:spLocks noGrp="1"/>
+          </p:cNvSpPr>
+          <p:nvPr>
+            <p:ph type="body" idx="10" sz="quarter"/>
+          </p:nvPr>
+        </p:nvSpPr>
+        <p:spPr/>
+        <p:txBody>
+          <a:bodyPr wrap="square"/>
+          <a:lstStyle/>
+          <a:p>
+            <a:pPr algn="ctr"/>
+            <a:r>
+              <a:rPr sz="1700" b="1">
+                <a:solidFill>
+                  <a:srgbClr val="CD2D37"/>
+                </a:solidFill>
+                <a:latin typeface="Arial"/>
+              </a:rPr>
+              <a:t>SECCIÓN 1</a:t>
+            </a:r>
+          </a:p>
+          <a:p>
+            <a:pPr algn="ctr"/>
+            <a:r>
+              <a:t>Gestión de dependencias con uv</a:t>
+            </a:r>
+          </a:p>
+          <a:p>
+            <a:pPr algn="ctr"/>
+            <a:r>
+              <a:rPr sz="1600">
+                <a:solidFill>
+                  <a:srgbClr val="D6DAE2"/>
+                </a:solidFill>
+                <a:latin typeface="Arial"/>
+              </a:rPr>
+              <a:t>Sin magia, simple</a:t>
+            </a:r>
+          </a:p>
+        </p:txBody>
+      </p:sp>
+    </p:spTree>
+  </p:cSld>
+  <p:clrMapOvr>
+    <a:masterClrMapping/>
+  </p:clrMapOvr>
+</p:sld>
+</file>
+
+<file path=ppt/slides/slide20.xml><?xml version="1.0" encoding="utf-8"?>
+<p:sld xmlns:a="http://schemas.openxmlformats.org/drawingml/2006/main" xmlns:p="http://schemas.openxmlformats.org/presentationml/2006/main" xmlns:r="http://schemas.openxmlformats.org/officeDocument/2006/relationships">
+  <p:cSld>
+    <p:spTree>
+      <p:nvGrpSpPr>
+        <p:cNvPr id="1" name=""/>
+        <p:cNvGrpSpPr/>
+        <p:nvPr/>
+      </p:nvGrpSpPr>
+      <p:grpSpPr/>
+      <p:sp>
+        <p:nvSpPr>
+          <p:cNvPr id="2" name="Text Placeholder 1"/>
+          <p:cNvSpPr>
+            <a:spLocks noGrp="1"/>
+          </p:cNvSpPr>
+          <p:nvPr>
+            <p:ph type="body" idx="13" sz="quarter"/>
+          </p:nvPr>
+        </p:nvSpPr>
+        <p:spPr/>
+        <p:txBody>
+          <a:bodyPr wrap="square"/>
+          <a:lstStyle/>
+          <a:p>
+            <a:r>
+              <a:t>¿Qué son los "parámetros" de un modelo?</a:t>
+            </a:r>
+          </a:p>
+        </p:txBody>
+      </p:sp>
+      <p:sp>
+        <p:nvSpPr>
+          <p:cNvPr id="3" name="Text Placeholder 2"/>
+          <p:cNvSpPr>
+            <a:spLocks noGrp="1"/>
+          </p:cNvSpPr>
+          <p:nvPr>
+            <p:ph type="body" idx="16" sz="quarter"/>
+          </p:nvPr>
+        </p:nvSpPr>
+        <p:spPr>
+          <a:xfrm>
+            <a:off x="1073427" y="2214736"/>
+            <a:ext cx="10084904" cy="3370138"/>
+          </a:xfrm>
+        </p:spPr>
+        <p:txBody>
+          <a:bodyPr wrap="square"/>
+          <a:lstStyle/>
+          <a:p>
+            <a:r>
+              <a:t>Los parámetros son los pesos numéricos que el modelo aprendió entrenando — NO son pasos ni iteraciones</a:t>
+            </a:r>
+          </a:p>
+          <a:p>
+            <a:r>
+              <a:t>qwen2.5:14b: 14.770.033.664 parámetros, repartidos en 48 capas fijas</a:t>
+            </a:r>
+          </a:p>
+          <a:p>
+            <a:r>
+              <a:t>En cada pasada (diapositiva anterior), TODOS los parámetros participan a la vez — en paralelo, no uno por uno</a:t>
+            </a:r>
+          </a:p>
+          <a:p>
+            <a:r>
+              <a:t>Lo que sí avanza paso a paso es la generación: una pasada por las 48 capas, por cada palabra nueva</a:t>
+            </a:r>
+          </a:p>
+        </p:txBody>
+      </p:sp>
+    </p:spTree>
+  </p:cSld>
+  <p:clrMapOvr>
+    <a:masterClrMapping/>
+  </p:clrMapOvr>
+</p:sld>
+</file>
+
+<file path=ppt/slides/slide21.xml><?xml version="1.0" encoding="utf-8"?>
 <p:sld xmlns:a="http://schemas.openxmlformats.org/drawingml/2006/main" xmlns:p="http://schemas.openxmlformats.org/presentationml/2006/main" xmlns:r="http://schemas.openxmlformats.org/officeDocument/2006/relationships">
   <p:cSld>
     <p:spTree>
@@ -7062,7 +8898,7 @@
 </p:sld>
 </file>
 
-<file path=ppt/slides/slide17.xml><?xml version="1.0" encoding="utf-8"?>
+<file path=ppt/slides/slide22.xml><?xml version="1.0" encoding="utf-8"?>
 <p:sld xmlns:a="http://schemas.openxmlformats.org/drawingml/2006/main" xmlns:p="http://schemas.openxmlformats.org/presentationml/2006/main" xmlns:r="http://schemas.openxmlformats.org/officeDocument/2006/relationships">
   <p:cSld>
     <p:spTree>
@@ -7088,7 +8924,7 @@
           <a:lstStyle/>
           <a:p>
             <a:r>
-              <a:t>Qué elegir: potencia vs. cómputo</a:t>
+              <a:t>Cuantización: qué le pasa a cada parámetro</a:t>
             </a:r>
           </a:p>
         </p:txBody>
@@ -7114,17 +8950,22 @@
           <a:lstStyle/>
           <a:p>
             <a:r>
-              <a:t>Modelo más grande = más capacidad, pero más RAM/VRAM y más lento</a:t>
-            </a:r>
-          </a:p>
-          <a:p>
-            <a:r>
-              <a:t>Cuantizar reduce tamaño y velocidad de carga, con pérdida de precisión asumible</a:t>
-            </a:r>
-          </a:p>
-          <a:p>
-            <a:r>
-              <a:t>Para tus propios proyectos: empieza pequeño, sube solo si de verdad lo necesitas</a:t>
+              <a:t>Cada uno de esos 14.770 millones de parámetros normalmente se guarda en FP16: 16 bits (2 bytes) por número</a:t>
+            </a:r>
+          </a:p>
+          <a:p>
+            <a:r>
+              <a:t>Cuantizar a Q4 = guardar cada parámetro con ~4 bits en vez de 16 — una versión "redondeada" del mismo número</a:t>
+            </a:r>
+          </a:p>
+          <a:p>
+            <a:r>
+              <a:t>Menos precisión por número × mismos 14.770 millones de números = mismo modelo, mucho menos peso</a:t>
+            </a:r>
+          </a:p>
+          <a:p>
+            <a:r>
+              <a:t>El nombre "Q4_K_M" que vimos en el notebook describe exactamente ESTA técnica de redondeo por bloques</a:t>
             </a:r>
           </a:p>
         </p:txBody>
@@ -7137,7 +8978,82 @@
 </p:sld>
 </file>
 
-<file path=ppt/slides/slide18.xml><?xml version="1.0" encoding="utf-8"?>
+<file path=ppt/slides/slide23.xml><?xml version="1.0" encoding="utf-8"?>
+<p:sld xmlns:a="http://schemas.openxmlformats.org/drawingml/2006/main" xmlns:p="http://schemas.openxmlformats.org/presentationml/2006/main" xmlns:r="http://schemas.openxmlformats.org/officeDocument/2006/relationships">
+  <p:cSld>
+    <p:spTree>
+      <p:nvGrpSpPr>
+        <p:cNvPr id="1" name=""/>
+        <p:cNvGrpSpPr/>
+        <p:nvPr/>
+      </p:nvGrpSpPr>
+      <p:grpSpPr/>
+      <p:sp>
+        <p:nvSpPr>
+          <p:cNvPr id="2" name="Text Placeholder 1"/>
+          <p:cNvSpPr>
+            <a:spLocks noGrp="1"/>
+          </p:cNvSpPr>
+          <p:nvPr>
+            <p:ph type="body" idx="13" sz="quarter"/>
+          </p:nvPr>
+        </p:nvSpPr>
+        <p:spPr/>
+        <p:txBody>
+          <a:bodyPr wrap="square"/>
+          <a:lstStyle/>
+          <a:p>
+            <a:r>
+              <a:t>Qué elegir: potencia vs. cómputo</a:t>
+            </a:r>
+          </a:p>
+        </p:txBody>
+      </p:sp>
+      <p:sp>
+        <p:nvSpPr>
+          <p:cNvPr id="3" name="Text Placeholder 2"/>
+          <p:cNvSpPr>
+            <a:spLocks noGrp="1"/>
+          </p:cNvSpPr>
+          <p:nvPr>
+            <p:ph type="body" idx="16" sz="quarter"/>
+          </p:nvPr>
+        </p:nvSpPr>
+        <p:spPr>
+          <a:xfrm>
+            <a:off x="1073427" y="2214736"/>
+            <a:ext cx="10084904" cy="3370138"/>
+          </a:xfrm>
+        </p:spPr>
+        <p:txBody>
+          <a:bodyPr wrap="square"/>
+          <a:lstStyle/>
+          <a:p>
+            <a:r>
+              <a:t>Modelo más grande = más capacidad, pero más RAM/VRAM y más lento</a:t>
+            </a:r>
+          </a:p>
+          <a:p>
+            <a:r>
+              <a:t>Cuantizar reduce tamaño y velocidad de carga, con pérdida de precisión asumible</a:t>
+            </a:r>
+          </a:p>
+          <a:p>
+            <a:r>
+              <a:t>Para tus propios proyectos: empieza pequeño, sube solo si de verdad lo necesitas</a:t>
+            </a:r>
+          </a:p>
+        </p:txBody>
+      </p:sp>
+    </p:spTree>
+  </p:cSld>
+  <p:clrMapOvr>
+    <a:masterClrMapping/>
+  </p:clrMapOvr>
+</p:sld>
+</file>
+
+<file path=ppt/slides/slide24.xml><?xml version="1.0" encoding="utf-8"?>
 <p:sld xmlns:a="http://schemas.openxmlformats.org/drawingml/2006/main" xmlns:p="http://schemas.openxmlformats.org/presentationml/2006/main" xmlns:r="http://schemas.openxmlformats.org/officeDocument/2006/relationships">
   <p:cSld>
     <p:spTree>
@@ -7252,7 +9168,7 @@
 </p:sld>
 </file>
 
-<file path=ppt/slides/slide19.xml><?xml version="1.0" encoding="utf-8"?>
+<file path=ppt/slides/slide25.xml><?xml version="1.0" encoding="utf-8"?>
 <p:sld xmlns:a="http://schemas.openxmlformats.org/drawingml/2006/main" xmlns:p="http://schemas.openxmlformats.org/presentationml/2006/main" xmlns:r="http://schemas.openxmlformats.org/officeDocument/2006/relationships">
   <p:cSld>
     <p:spTree>
@@ -7458,7 +9374,7 @@
 </p:sld>
 </file>
 
-<file path=ppt/slides/slide2.xml><?xml version="1.0" encoding="utf-8"?>
+<file path=ppt/slides/slide26.xml><?xml version="1.0" encoding="utf-8"?>
 <p:sld xmlns:a="http://schemas.openxmlformats.org/drawingml/2006/main" xmlns:p="http://schemas.openxmlformats.org/presentationml/2006/main" xmlns:r="http://schemas.openxmlformats.org/officeDocument/2006/relationships">
   <p:cSld>
     <p:spTree>
@@ -7491,13 +9407,13 @@
                 </a:solidFill>
                 <a:latin typeface="Arial"/>
               </a:rPr>
-              <a:t>SECCIÓN 1</a:t>
+              <a:t>SECCIÓN 4</a:t>
             </a:r>
           </a:p>
           <a:p>
             <a:pPr algn="ctr"/>
             <a:r>
-              <a:t>Gestión de dependencias con uv</a:t>
+              <a:t>El stack de análisis</a:t>
             </a:r>
           </a:p>
           <a:p>
@@ -7509,7 +9425,7 @@
                 </a:solidFill>
                 <a:latin typeface="Arial"/>
               </a:rPr>
-              <a:t>Sin magia, simple</a:t>
+              <a:t>Qué instala uv sync y para qué sirve cada pieza</a:t>
             </a:r>
           </a:p>
         </p:txBody>
@@ -7522,71 +9438,7 @@
 </p:sld>
 </file>
 
-<file path=ppt/slides/slide20.xml><?xml version="1.0" encoding="utf-8"?>
-<p:sld xmlns:a="http://schemas.openxmlformats.org/drawingml/2006/main" xmlns:p="http://schemas.openxmlformats.org/presentationml/2006/main" xmlns:r="http://schemas.openxmlformats.org/officeDocument/2006/relationships">
-  <p:cSld>
-    <p:spTree>
-      <p:nvGrpSpPr>
-        <p:cNvPr id="1" name=""/>
-        <p:cNvGrpSpPr/>
-        <p:nvPr/>
-      </p:nvGrpSpPr>
-      <p:grpSpPr/>
-      <p:sp>
-        <p:nvSpPr>
-          <p:cNvPr id="2" name="Text Placeholder 1"/>
-          <p:cNvSpPr>
-            <a:spLocks noGrp="1"/>
-          </p:cNvSpPr>
-          <p:nvPr>
-            <p:ph type="body" idx="10" sz="quarter"/>
-          </p:nvPr>
-        </p:nvSpPr>
-        <p:spPr/>
-        <p:txBody>
-          <a:bodyPr wrap="square"/>
-          <a:lstStyle/>
-          <a:p>
-            <a:pPr algn="ctr"/>
-            <a:r>
-              <a:rPr sz="1700" b="1">
-                <a:solidFill>
-                  <a:srgbClr val="CD2D37"/>
-                </a:solidFill>
-                <a:latin typeface="Arial"/>
-              </a:rPr>
-              <a:t>SECCIÓN 4</a:t>
-            </a:r>
-          </a:p>
-          <a:p>
-            <a:pPr algn="ctr"/>
-            <a:r>
-              <a:t>El stack de análisis</a:t>
-            </a:r>
-          </a:p>
-          <a:p>
-            <a:pPr algn="ctr"/>
-            <a:r>
-              <a:rPr sz="1600">
-                <a:solidFill>
-                  <a:srgbClr val="D6DAE2"/>
-                </a:solidFill>
-                <a:latin typeface="Arial"/>
-              </a:rPr>
-              <a:t>Qué instala uv sync y para qué sirve cada pieza</a:t>
-            </a:r>
-          </a:p>
-        </p:txBody>
-      </p:sp>
-    </p:spTree>
-  </p:cSld>
-  <p:clrMapOvr>
-    <a:masterClrMapping/>
-  </p:clrMapOvr>
-</p:sld>
-</file>
-
-<file path=ppt/slides/slide21.xml><?xml version="1.0" encoding="utf-8"?>
+<file path=ppt/slides/slide27.xml><?xml version="1.0" encoding="utf-8"?>
 <p:sld xmlns:a="http://schemas.openxmlformats.org/drawingml/2006/main" xmlns:p="http://schemas.openxmlformats.org/presentationml/2006/main" xmlns:r="http://schemas.openxmlformats.org/officeDocument/2006/relationships">
   <p:cSld>
     <p:spTree>
@@ -8025,7 +9877,7 @@
 </p:sld>
 </file>
 
-<file path=ppt/slides/slide22.xml><?xml version="1.0" encoding="utf-8"?>
+<file path=ppt/slides/slide28.xml><?xml version="1.0" encoding="utf-8"?>
 <p:sld xmlns:a="http://schemas.openxmlformats.org/drawingml/2006/main" xmlns:p="http://schemas.openxmlformats.org/presentationml/2006/main" xmlns:r="http://schemas.openxmlformats.org/officeDocument/2006/relationships">
   <p:cSld>
     <p:spTree>
@@ -8317,7 +10169,7 @@
 </p:sld>
 </file>
 
-<file path=ppt/slides/slide23.xml><?xml version="1.0" encoding="utf-8"?>
+<file path=ppt/slides/slide29.xml><?xml version="1.0" encoding="utf-8"?>
 <p:sld xmlns:a="http://schemas.openxmlformats.org/drawingml/2006/main" xmlns:p="http://schemas.openxmlformats.org/presentationml/2006/main" xmlns:r="http://schemas.openxmlformats.org/officeDocument/2006/relationships">
   <p:cSld>
     <p:spTree>

--- a/bloque3_setup/csbc26_b3_setup.pptx
+++ b/bloque3_setup/csbc26_b3_setup.pptx
@@ -9331,41 +9331,6 @@
           </a:p>
         </p:txBody>
       </p:sp>
-      <p:sp>
-        <p:nvSpPr>
-          <p:cNvPr id="7" name="TextBox 6"/>
-          <p:cNvSpPr txBox="1"/>
-          <p:nvPr/>
-        </p:nvSpPr>
-        <p:spPr>
-          <a:xfrm>
-            <a:off x="1051560" y="5760720"/>
-            <a:ext cx="10058400" cy="365760"/>
-          </a:xfrm>
-          <a:prstGeom prst="rect">
-            <a:avLst/>
-          </a:prstGeom>
-          <a:noFill/>
-        </p:spPr>
-        <p:txBody>
-          <a:bodyPr wrap="square">
-            <a:spAutoFit/>
-          </a:bodyPr>
-          <a:lstStyle/>
-          <a:p>
-            <a:pPr algn="l"/>
-            <a:r>
-              <a:rPr sz="1100" b="0">
-                <a:solidFill>
-                  <a:srgbClr val="707888"/>
-                </a:solidFill>
-                <a:latin typeface="Arial"/>
-              </a:rPr>
-              <a:t>ℹ  Instructor: pausar aquí y buscar en vivo un modelo que pida el aula.</a:t>
-            </a:r>
-          </a:p>
-        </p:txBody>
-      </p:sp>
     </p:spTree>
   </p:cSld>
   <p:clrMapOvr>
@@ -12603,7 +12568,7 @@
                 </a:solidFill>
                 <a:latin typeface="Arial"/>
               </a:rPr>
-              <a:t>ℹ  Recomendación del instructor: Ollama — la comodidad casi no cuesta eficiencia.</a:t>
+              <a:t>ℹ  Recomendación: Ollama — la comodidad casi no cuesta eficiencia.</a:t>
             </a:r>
           </a:p>
         </p:txBody>
